--- a/research/component_4/docs/slides/PP1_Component4.pptx
+++ b/research/component_4/docs/slides/PP1_Component4.pptx
@@ -30,6 +30,7 @@
     <p:sldId id="278" r:id="rId30"/>
     <p:sldId id="279" r:id="rId31"/>
     <p:sldId id="280" r:id="rId32"/>
+    <p:sldId id="281" r:id="rId33"/>
   </p:sldIdLst>
   <p:sldSz cx="12191695" cy="6858000" type="screen4x3"/>
   <p:notesSz cx="6858000" cy="9144000"/>
@@ -1086,7 +1087,7 @@
           <a:lstStyle/>
           <a:p>
             <a:r>
-              <a:t>Screens rendered from the real API output. Trip planner: any number of destinations, read from config. Overview: week ahead and the quietest days. Calendar: 90-day crowd outlook. Day: expected crowd with a range and suggestions (other trail, later start, other day). Show the live demo if time allows – RUN_APP.md. (~45 s)</a:t>
+              <a:t>This is the core of the proposal on one screen. Left: every trail section coloured by how full the ST-GNN expects it to be at the chosen hour - forecast people divided by what the section holds at Cifuentes spacing - computed on the phone, so it also works in airplane mode. Drag the hour slider: at 08:00 World's End and Baker's Falls are over capacity. Right: the safe number per trail and for the park, set by the most limiting section, instead of one fixed quota. Officers get the same view as their first tab. (~60 s)</a:t>
             </a:r>
           </a:p>
         </p:txBody>
@@ -1156,7 +1157,7 @@
           <a:lstStyle/>
           <a:p>
             <a:r>
-              <a:t>Start times per route with the expected wait. Ranger at a halfway rest stop enters counts; the app turns red (HOLD) and gives the release rate. The officer sees which nights may need checks (here: Christmas, stand by) and a night plan with hold windows. (~45 s)</a:t>
+              <a:t>Screens rendered from the real API output. Trip planner: any number of destinations, read from config. Overview: week ahead and the quietest days. Calendar: 90-day crowd outlook. Day: expected crowd with a range and suggestions (other trail, later start, other day). Show the live demo if time allows – RUN_APP.md. (~45 s)</a:t>
             </a:r>
           </a:p>
         </p:txBody>
@@ -1226,7 +1227,7 @@
           <a:lstStyle/>
           <a:p>
             <a:r>
-              <a:t>Numbered exactly as in the proposal (section 5). Two are partial and say why: FR4 needs the data contract agreed with Module 3, NFR1 is measured on a laptop and in the Dart engine but not yet on a real phone. Extensions beyond the proposal are listed separately. Requirements are still provisional until the surveys come back - say this before you are asked. (~45 s)</a:t>
+              <a:t>Start times per route with the expected wait. Ranger at a halfway rest stop enters counts; the app turns red (HOLD) and gives the release rate. The officer sees which nights may need checks (here: Christmas, stand by) and a night plan with hold windows. (~45 s)</a:t>
             </a:r>
           </a:p>
         </p:txBody>
@@ -1366,7 +1367,7 @@
           <a:lstStyle/>
           <a:p>
             <a:r>
-              <a:t>Lead with R1 – it is the question examiners will ask. The mitigation is already in motion: every assumption is listed and parameterised, sensitivity analysis shows which ones matter, and field counts are planned. (~45 s)</a:t>
+              <a:t>Numbered exactly as in the proposal (section 5). Two are partial and say why: FR4 needs the data contract agreed with Module 3, NFR1 is measured on a laptop and in the Dart engine but not yet on a real phone. Extensions beyond the proposal are listed separately. Requirements are still provisional until the surveys come back - say this before you are asked. (~45 s)</a:t>
             </a:r>
           </a:p>
         </p:txBody>
@@ -1436,7 +1437,7 @@
           <a:lstStyle/>
           <a:p>
             <a:r>
-              <a:t>Benefits are concrete: fewer dangerous queues, fairer access, revenue protected by booking instead of turning people away at the gate, data for planning staff. Business model: a per-site licence to the authority, small booking fee, and the same engine for other sites (Ella Rock, Knuckles, Sigiriya, Sinharaja) by adding a config. (~45 s)</a:t>
+              <a:t>Lead with R1 – it is the question examiners will ask. The mitigation is already in motion: every assumption is listed and parameterised, sensitivity analysis shows which ones matter, and field counts are planned. (~45 s)</a:t>
             </a:r>
           </a:p>
         </p:txBody>
@@ -1506,7 +1507,7 @@
           <a:lstStyle/>
           <a:p>
             <a:r>
-              <a:t>The twelve WBS tasks from the proposal (section 8). Nine are done or nearly done; field validation and team integration were always planned for later months in the Gantt chart (months 8-11). Build is ahead of plan; validation is on plan. About 65 % of the component overall. (~45 s)</a:t>
+              <a:t>Benefits are concrete: fewer dangerous queues, fairer access, revenue protected by booking instead of turning people away at the gate, data for planning staff. Business model: a per-site licence to the authority, small booking fee, and the same engine for other sites (Ella Rock, Knuckles, Sigiriya, Sinharaja) by adding a config. (~45 s)</a:t>
             </a:r>
           </a:p>
         </p:txBody>
@@ -1576,7 +1577,7 @@
           <a:lstStyle/>
           <a:p>
             <a:r>
-              <a:t>Each open item has an owner (me), a date and a 'done when'. The two that depend on other people - the surveys and the Module 3 schema - are started first because they take elapsed time. (~45 s)</a:t>
+              <a:t>The twelve WBS tasks from the proposal (section 8). Nine are done or nearly done; field validation and team integration were always planned for later months in the Gantt chart (months 8-11). Build is ahead of plan; validation is on plan. About 65 % of the component overall. (~45 s)</a:t>
             </a:r>
           </a:p>
         </p:txBody>
@@ -1646,7 +1647,7 @@
           <a:lstStyle/>
           <a:p>
             <a:r>
-              <a:t>Backup slides follow: limitations, planning model.</a:t>
+              <a:t>Each open item has an owner (me), a date and a 'done when'. The two that depend on other people - the surveys and the Module 3 schema - are started first because they take elapsed time. (~45 s)</a:t>
             </a:r>
           </a:p>
         </p:txBody>
@@ -1672,6 +1673,76 @@
 </file>
 
 <file path=ppt/notesSlides/notesSlide25.xml><?xml version="1.0" encoding="utf-8"?>
+<p:notes xmlns:a="http://schemas.openxmlformats.org/drawingml/2006/main" xmlns:p="http://schemas.openxmlformats.org/presentationml/2006/main" xmlns:r="http://schemas.openxmlformats.org/officeDocument/2006/relationships">
+  <p:cSld>
+    <p:spTree>
+      <p:nvGrpSpPr>
+        <p:cNvPr id="1" name=""/>
+        <p:cNvGrpSpPr/>
+        <p:nvPr/>
+      </p:nvGrpSpPr>
+      <p:grpSpPr>
+        <a:xfrm>
+          <a:off x="0" y="0"/>
+          <a:ext cx="0" cy="0"/>
+          <a:chOff x="0" y="0"/>
+          <a:chExt cx="0" cy="0"/>
+        </a:xfrm>
+      </p:grpSpPr>
+      <p:sp>
+        <p:nvSpPr>
+          <p:cNvPr id="2" name="Slide Image Placeholder 1"/>
+          <p:cNvSpPr>
+            <a:spLocks noGrp="1"/>
+          </p:cNvSpPr>
+          <p:nvPr>
+            <p:ph type="sldImg" idx="2"/>
+          </p:nvPr>
+        </p:nvSpPr>
+        <p:spPr/>
+      </p:sp>
+      <p:sp>
+        <p:nvSpPr>
+          <p:cNvPr id="3" name="Notes Placeholder 2"/>
+          <p:cNvSpPr>
+            <a:spLocks noGrp="1"/>
+          </p:cNvSpPr>
+          <p:nvPr>
+            <p:ph type="body" idx="3" sz="quarter"/>
+          </p:nvPr>
+        </p:nvSpPr>
+        <p:spPr/>
+        <p:txBody>
+          <a:bodyPr/>
+          <a:lstStyle/>
+          <a:p>
+            <a:r>
+              <a:t>Backup slides follow: limitations, planning model.</a:t>
+            </a:r>
+          </a:p>
+        </p:txBody>
+      </p:sp>
+      <p:sp>
+        <p:nvSpPr>
+          <p:cNvPr id="4" name="Slide Number Placeholder 3"/>
+          <p:cNvSpPr>
+            <a:spLocks noGrp="1"/>
+          </p:cNvSpPr>
+          <p:nvPr>
+            <p:ph type="sldNum" idx="5" sz="quarter"/>
+          </p:nvPr>
+        </p:nvSpPr>
+        <p:spPr/>
+      </p:sp>
+    </p:spTree>
+  </p:cSld>
+  <p:clrMapOvr>
+    <a:masterClrMapping/>
+  </p:clrMapOvr>
+</p:notes>
+</file>
+
+<file path=ppt/notesSlides/notesSlide26.xml><?xml version="1.0" encoding="utf-8"?>
 <p:notes xmlns:a="http://schemas.openxmlformats.org/drawingml/2006/main" xmlns:p="http://schemas.openxmlformats.org/presentationml/2006/main" xmlns:r="http://schemas.openxmlformats.org/officeDocument/2006/relationships">
   <p:cSld>
     <p:spTree>
@@ -8789,7 +8860,7 @@
                   <a:srgbClr val="2F6B4F"/>
                 </a:solidFill>
               </a:rPr>
-              <a:t>COMPLETION OF PROTOTYPE</a:t>
+              <a:t>PROOF OF CONCEPT – FR2, FR3, NFR4</a:t>
             </a:r>
           </a:p>
         </p:txBody>
@@ -8823,7 +8894,7 @@
                   <a:srgbClr val="1F2A24"/>
                 </a:solidFill>
               </a:rPr>
-              <a:t>Working prototype – visitors plan a trip</a:t>
+              <a:t>The proposal's output: bottlenecks and safe numbers per section</a:t>
             </a:r>
           </a:p>
         </p:txBody>
@@ -8864,7 +8935,7 @@
       </p:sp>
       <p:pic>
         <p:nvPicPr>
-          <p:cNvPr id="6" name="Picture 5" descr="01_destinations.png"/>
+          <p:cNvPr id="6" name="Picture 5" descr="11_bottleneck_map.png"/>
           <p:cNvPicPr>
             <a:picLocks noChangeAspect="1"/>
           </p:cNvPicPr>
@@ -8920,7 +8991,7 @@
                   <a:srgbClr val="1F2A24"/>
                 </a:solidFill>
               </a:rPr>
-              <a:t>Where to? – every destination,</a:t>
+              <a:t>Tomorrow, hour by hour:</a:t>
             </a:r>
           </a:p>
           <a:p>
@@ -8931,14 +9002,14 @@
                   <a:srgbClr val="1F2A24"/>
                 </a:solidFill>
               </a:rPr>
-              <a:t>its next 7 days</a:t>
+              <a:t>every section coloured</a:t>
             </a:r>
           </a:p>
         </p:txBody>
       </p:sp>
       <p:pic>
         <p:nvPicPr>
-          <p:cNvPr id="8" name="Picture 7" descr="02_overview_adams_peak.png"/>
+          <p:cNvPr id="8" name="Picture 7" descr="12_safe_numbers.png"/>
           <p:cNvPicPr>
             <a:picLocks noChangeAspect="1"/>
           </p:cNvPicPr>
@@ -8994,7 +9065,7 @@
                   <a:srgbClr val="1F2A24"/>
                 </a:solidFill>
               </a:rPr>
-              <a:t>Destination overview,</a:t>
+              <a:t>Safe number per trail,</a:t>
             </a:r>
           </a:p>
           <a:p>
@@ -9005,50 +9076,21 @@
                   <a:srgbClr val="1F2A24"/>
                 </a:solidFill>
               </a:rPr>
-              <a:t>quietest days, how to get there</a:t>
-            </a:r>
-          </a:p>
-        </p:txBody>
-      </p:sp>
-      <p:pic>
-        <p:nvPicPr>
-          <p:cNvPr id="10" name="Picture 9" descr="03_calendar_horton.png"/>
-          <p:cNvPicPr>
-            <a:picLocks noChangeAspect="1"/>
-          </p:cNvPicPr>
-          <p:nvPr/>
-        </p:nvPicPr>
-        <p:blipFill>
-          <a:blip r:embed="rId5"/>
-          <a:stretch>
-            <a:fillRect/>
-          </a:stretch>
-        </p:blipFill>
-        <p:spPr>
-          <a:xfrm>
-            <a:off x="4709160" y="1325880"/>
-            <a:ext cx="1919113" cy="4160520"/>
-          </a:xfrm>
-          <a:prstGeom prst="rect">
-            <a:avLst/>
-          </a:prstGeom>
-          <a:ln w="12700">
-            <a:solidFill>
-              <a:srgbClr val="C9D3CD"/>
-            </a:solidFill>
-          </a:ln>
-        </p:spPr>
-      </p:pic>
-      <p:sp>
-        <p:nvSpPr>
-          <p:cNvPr id="11" name="TextBox 10"/>
+              <a:t>set by its limiting section</a:t>
+            </a:r>
+          </a:p>
+        </p:txBody>
+      </p:sp>
+      <p:sp>
+        <p:nvSpPr>
+          <p:cNvPr id="10" name="TextBox 9"/>
           <p:cNvSpPr txBox="1"/>
           <p:nvPr/>
         </p:nvSpPr>
         <p:spPr>
           <a:xfrm>
-            <a:off x="4663440" y="5532120"/>
-            <a:ext cx="2057400" cy="822960"/>
+            <a:off x="4846320" y="1463040"/>
+            <a:ext cx="7132320" cy="4754880"/>
           </a:xfrm>
           <a:prstGeom prst="rect">
             <a:avLst/>
@@ -9056,114 +9098,6 @@
           <a:noFill/>
         </p:spPr>
         <p:txBody>
-          <a:bodyPr wrap="square" anchor="t">
-            <a:spAutoFit/>
-          </a:bodyPr>
-          <a:lstStyle/>
-          <a:p>
-            <a:pPr algn="ctr"/>
-            <a:r>
-              <a:rPr sz="1100" b="0">
-                <a:solidFill>
-                  <a:srgbClr val="1F2A24"/>
-                </a:solidFill>
-              </a:rPr>
-              <a:t>90-day crowd calendar</a:t>
-            </a:r>
-          </a:p>
-        </p:txBody>
-      </p:sp>
-      <p:pic>
-        <p:nvPicPr>
-          <p:cNvPr id="12" name="Picture 11" descr="04_day_horton.png"/>
-          <p:cNvPicPr>
-            <a:picLocks noChangeAspect="1"/>
-          </p:cNvPicPr>
-          <p:nvPr/>
-        </p:nvPicPr>
-        <p:blipFill>
-          <a:blip r:embed="rId6"/>
-          <a:stretch>
-            <a:fillRect/>
-          </a:stretch>
-        </p:blipFill>
-        <p:spPr>
-          <a:xfrm>
-            <a:off x="6812280" y="1325880"/>
-            <a:ext cx="1919113" cy="4160520"/>
-          </a:xfrm>
-          <a:prstGeom prst="rect">
-            <a:avLst/>
-          </a:prstGeom>
-          <a:ln w="12700">
-            <a:solidFill>
-              <a:srgbClr val="C9D3CD"/>
-            </a:solidFill>
-          </a:ln>
-        </p:spPr>
-      </p:pic>
-      <p:sp>
-        <p:nvSpPr>
-          <p:cNvPr id="13" name="TextBox 12"/>
-          <p:cNvSpPr txBox="1"/>
-          <p:nvPr/>
-        </p:nvSpPr>
-        <p:spPr>
-          <a:xfrm>
-            <a:off x="6766560" y="5532120"/>
-            <a:ext cx="2057400" cy="822960"/>
-          </a:xfrm>
-          <a:prstGeom prst="rect">
-            <a:avLst/>
-          </a:prstGeom>
-          <a:noFill/>
-        </p:spPr>
-        <p:txBody>
-          <a:bodyPr wrap="square" anchor="t">
-            <a:spAutoFit/>
-          </a:bodyPr>
-          <a:lstStyle/>
-          <a:p>
-            <a:pPr algn="ctr"/>
-            <a:r>
-              <a:rPr sz="1100" b="0">
-                <a:solidFill>
-                  <a:srgbClr val="1F2A24"/>
-                </a:solidFill>
-              </a:rPr>
-              <a:t>One day: expected crowd</a:t>
-            </a:r>
-          </a:p>
-          <a:p>
-            <a:pPr algn="ctr"/>
-            <a:r>
-              <a:rPr sz="1100" b="0">
-                <a:solidFill>
-                  <a:srgbClr val="1F2A24"/>
-                </a:solidFill>
-              </a:rPr>
-              <a:t>+ how to avoid it</a:t>
-            </a:r>
-          </a:p>
-        </p:txBody>
-      </p:sp>
-      <p:sp>
-        <p:nvSpPr>
-          <p:cNvPr id="14" name="TextBox 13"/>
-          <p:cNvSpPr txBox="1"/>
-          <p:nvPr/>
-        </p:nvSpPr>
-        <p:spPr>
-          <a:xfrm>
-            <a:off x="8961120" y="1463040"/>
-            <a:ext cx="3017520" cy="4572000"/>
-          </a:xfrm>
-          <a:prstGeom prst="rect">
-            <a:avLst/>
-          </a:prstGeom>
-          <a:noFill/>
-        </p:spPr>
-        <p:txBody>
           <a:bodyPr wrap="square">
             <a:spAutoFit/>
           </a:bodyPr>
@@ -9171,116 +9105,116 @@
           <a:p>
             <a:pPr>
               <a:spcAft>
-                <a:spcPts val="1000"/>
+                <a:spcPts val="1200"/>
               </a:spcAft>
             </a:pPr>
             <a:r>
-              <a:rPr sz="1300" b="1">
-                <a:solidFill>
-                  <a:srgbClr val="1F2A24"/>
-                </a:solidFill>
-              </a:rPr>
-              <a:t>•  Offline:</a:t>
-            </a:r>
-            <a:r>
-              <a:rPr sz="1300">
-                <a:solidFill>
-                  <a:srgbClr val="1F2A24"/>
-                </a:solidFill>
-              </a:rPr>
-              <a:t>  outlook and tickets cached; tomorrow's forecast computed on the phone</a:t>
+              <a:rPr sz="1500" b="1">
+                <a:solidFill>
+                  <a:srgbClr val="1F2A24"/>
+                </a:solidFill>
+              </a:rPr>
+              <a:t>•  Per section:</a:t>
+            </a:r>
+            <a:r>
+              <a:rPr sz="1500">
+                <a:solidFill>
+                  <a:srgbClr val="1F2A24"/>
+                </a:solidFill>
+              </a:rPr>
+              <a:t>  ST-GNN forecast ÷ people it holds at once (groups of 10, 50 m apart)</a:t>
             </a:r>
           </a:p>
           <a:p>
             <a:pPr>
               <a:spcAft>
-                <a:spcPts val="1000"/>
+                <a:spcPts val="1200"/>
               </a:spcAft>
             </a:pPr>
             <a:r>
-              <a:rPr sz="1300" b="1">
-                <a:solidFill>
-                  <a:srgbClr val="1F2A24"/>
-                </a:solidFill>
-              </a:rPr>
-              <a:t>•  Safe limit:</a:t>
-            </a:r>
-            <a:r>
-              <a:rPr sz="1300">
-                <a:solidFill>
-                  <a:srgbClr val="1F2A24"/>
-                </a:solidFill>
-              </a:rPr>
-              <a:t>  expected / safe number per trail for the day, with “Why this limit?”</a:t>
+              <a:rPr sz="1500" b="1">
+                <a:solidFill>
+                  <a:srgbClr val="1F2A24"/>
+                </a:solidFill>
+              </a:rPr>
+              <a:t>•  Per trail:</a:t>
+            </a:r>
+            <a:r>
+              <a:rPr sz="1500">
+                <a:solidFill>
+                  <a:srgbClr val="1F2A24"/>
+                </a:solidFill>
+              </a:rPr>
+              <a:t>  Cifuentes PCC → RCC → ECC; the most limiting section sets the safe number</a:t>
             </a:r>
           </a:p>
           <a:p>
             <a:pPr>
               <a:spcAft>
-                <a:spcPts val="1000"/>
+                <a:spcPts val="1200"/>
               </a:spcAft>
             </a:pPr>
             <a:r>
-              <a:rPr sz="1300" b="1">
-                <a:solidFill>
-                  <a:srgbClr val="1F2A24"/>
-                </a:solidFill>
-              </a:rPr>
-              <a:t>•  Booking:</a:t>
-            </a:r>
-            <a:r>
-              <a:rPr sz="1300">
-                <a:solidFill>
-                  <a:srgbClr val="1F2A24"/>
-                </a:solidFill>
-              </a:rPr>
-              <a:t>  slot ticket with QR code; full slot → later slot, other trail, other day</a:t>
+              <a:rPr sz="1500" b="1">
+                <a:solidFill>
+                  <a:srgbClr val="1F2A24"/>
+                </a:solidFill>
+              </a:rPr>
+              <a:t>•  Instead of a fixed quota:</a:t>
+            </a:r>
+            <a:r>
+              <a:rPr sz="1500">
+                <a:solidFill>
+                  <a:srgbClr val="1F2A24"/>
+                </a:solidFill>
+              </a:rPr>
+              <a:t>  690 tomorrow (weather, wet ground, crowding) vs 719 fixed</a:t>
             </a:r>
           </a:p>
           <a:p>
             <a:pPr>
               <a:spcAft>
-                <a:spcPts val="1000"/>
+                <a:spcPts val="1200"/>
               </a:spcAft>
             </a:pPr>
             <a:r>
-              <a:rPr sz="1300" b="1">
-                <a:solidFill>
-                  <a:srgbClr val="1F2A24"/>
-                </a:solidFill>
-              </a:rPr>
-              <a:t>•  Languages:</a:t>
-            </a:r>
-            <a:r>
-              <a:rPr sz="1300">
-                <a:solidFill>
-                  <a:srgbClr val="1F2A24"/>
-                </a:solidFill>
-              </a:rPr>
-              <a:t>  English · සිංහල · தமிழ் (drafts under native review)</a:t>
+              <a:rPr sz="1500" b="1">
+                <a:solidFill>
+                  <a:srgbClr val="1F2A24"/>
+                </a:solidFill>
+              </a:rPr>
+              <a:t>•  Offline:</a:t>
+            </a:r>
+            <a:r>
+              <a:rPr sz="1500">
+                <a:solidFill>
+                  <a:srgbClr val="1F2A24"/>
+                </a:solidFill>
+              </a:rPr>
+              <a:t>  drawn from the forecast the phone computes itself (RQ6)</a:t>
             </a:r>
           </a:p>
           <a:p>
             <a:pPr>
               <a:spcAft>
-                <a:spcPts val="1000"/>
+                <a:spcPts val="1200"/>
               </a:spcAft>
             </a:pPr>
             <a:r>
-              <a:rPr sz="1300" b="1">
-                <a:solidFill>
-                  <a:srgbClr val="1F2A24"/>
-                </a:solidFill>
-              </a:rPr>
-              <a:t>•  Map:</a:t>
-            </a:r>
-            <a:r>
-              <a:rPr sz="1300">
-                <a:solidFill>
-                  <a:srgbClr val="1F2A24"/>
-                </a:solidFill>
-              </a:rPr>
-              <a:t>  OpenStreetMap trails, starts, checkpoints</a:t>
+              <a:rPr sz="1500" b="1">
+                <a:solidFill>
+                  <a:srgbClr val="1F2A24"/>
+                </a:solidFill>
+              </a:rPr>
+              <a:t>•  Users:</a:t>
+            </a:r>
+            <a:r>
+              <a:rPr sz="1500">
+                <a:solidFill>
+                  <a:srgbClr val="1F2A24"/>
+                </a:solidFill>
+              </a:rPr>
+              <a:t>  officers (first tab), rangers, visitors (map → “Tomorrow's crowding”)</a:t>
             </a:r>
           </a:p>
         </p:txBody>
@@ -9409,7 +9343,7 @@
                   <a:srgbClr val="1F2A24"/>
                 </a:solidFill>
               </a:rPr>
-              <a:t>Working prototype – pilgrims and staff at Adam's Peak</a:t>
+              <a:t>Working prototype – visitors plan a trip</a:t>
             </a:r>
           </a:p>
         </p:txBody>
@@ -9450,7 +9384,7 @@
       </p:sp>
       <p:pic>
         <p:nvPicPr>
-          <p:cNvPr id="6" name="Picture 5" descr="05_start_times.png"/>
+          <p:cNvPr id="6" name="Picture 5" descr="01_destinations.png"/>
           <p:cNvPicPr>
             <a:picLocks noChangeAspect="1"/>
           </p:cNvPicPr>
@@ -9506,7 +9440,7 @@
                   <a:srgbClr val="1F2A24"/>
                 </a:solidFill>
               </a:rPr>
-              <a:t>Pilgrim: best start times</a:t>
+              <a:t>Where to? – every destination,</a:t>
             </a:r>
           </a:p>
           <a:p>
@@ -9517,14 +9451,14 @@
                   <a:srgbClr val="1F2A24"/>
                 </a:solidFill>
               </a:rPr>
-              <a:t>and wait near the top</a:t>
+              <a:t>its next 7 days</a:t>
             </a:r>
           </a:p>
         </p:txBody>
       </p:sp>
       <p:pic>
         <p:nvPicPr>
-          <p:cNvPr id="8" name="Picture 7" descr="06_halfway_hold.png"/>
+          <p:cNvPr id="8" name="Picture 7" descr="02_overview_adams_peak.png"/>
           <p:cNvPicPr>
             <a:picLocks noChangeAspect="1"/>
           </p:cNvPicPr>
@@ -9580,7 +9514,7 @@
                   <a:srgbClr val="1F2A24"/>
                 </a:solidFill>
               </a:rPr>
-              <a:t>Ranger: halfway count →</a:t>
+              <a:t>Destination overview,</a:t>
             </a:r>
           </a:p>
           <a:p>
@@ -9591,14 +9525,14 @@
                   <a:srgbClr val="1F2A24"/>
                 </a:solidFill>
               </a:rPr>
-              <a:t>HOLD + release rate</a:t>
+              <a:t>quietest days, how to get there</a:t>
             </a:r>
           </a:p>
         </p:txBody>
       </p:sp>
       <p:pic>
         <p:nvPicPr>
-          <p:cNvPr id="10" name="Picture 9" descr="08_officer_season.png"/>
+          <p:cNvPr id="10" name="Picture 9" descr="03_calendar_horton.png"/>
           <p:cNvPicPr>
             <a:picLocks noChangeAspect="1"/>
           </p:cNvPicPr>
@@ -9654,25 +9588,14 @@
                   <a:srgbClr val="1F2A24"/>
                 </a:solidFill>
               </a:rPr>
-              <a:t>Officer: nights that may</a:t>
-            </a:r>
-          </a:p>
-          <a:p>
-            <a:pPr algn="ctr"/>
-            <a:r>
-              <a:rPr sz="1100" b="0">
-                <a:solidFill>
-                  <a:srgbClr val="1F2A24"/>
-                </a:solidFill>
-              </a:rPr>
-              <a:t>need halfway checks</a:t>
+              <a:t>90-day crowd calendar</a:t>
             </a:r>
           </a:p>
         </p:txBody>
       </p:sp>
       <p:pic>
         <p:nvPicPr>
-          <p:cNvPr id="12" name="Picture 11" descr="09_night_plan.png"/>
+          <p:cNvPr id="12" name="Picture 11" descr="04_day_horton.png"/>
           <p:cNvPicPr>
             <a:picLocks noChangeAspect="1"/>
           </p:cNvPicPr>
@@ -9728,7 +9651,7 @@
                   <a:srgbClr val="1F2A24"/>
                 </a:solidFill>
               </a:rPr>
-              <a:t>Officer: night plan,</a:t>
+              <a:t>One day: expected crowd</a:t>
             </a:r>
           </a:p>
           <a:p>
@@ -9739,7 +9662,7 @@
                   <a:srgbClr val="1F2A24"/>
                 </a:solidFill>
               </a:rPr>
-              <a:t>hold windows per checkpoint</a:t>
+              <a:t>+ how to avoid it</a:t>
             </a:r>
           </a:p>
         </p:txBody>
@@ -9777,7 +9700,7 @@
                   <a:srgbClr val="1F2A24"/>
                 </a:solidFill>
               </a:rPr>
-              <a:t>•  Backend:</a:t>
+              <a:t>•  Offline:</a:t>
             </a:r>
             <a:r>
               <a:rPr sz="1300">
@@ -9785,7 +9708,7 @@
                   <a:srgbClr val="1F2A24"/>
                 </a:solidFill>
               </a:rPr>
-              <a:t>  FastAPI per park + gateway, 25+ endpoints</a:t>
+              <a:t>  outlook and tickets cached; tomorrow's forecast computed on the phone</a:t>
             </a:r>
           </a:p>
           <a:p>
@@ -9800,7 +9723,7 @@
                   <a:srgbClr val="1F2A24"/>
                 </a:solidFill>
               </a:rPr>
-              <a:t>•  Security:</a:t>
+              <a:t>•  Safe limit:</a:t>
             </a:r>
             <a:r>
               <a:rPr sz="1300">
@@ -9808,7 +9731,7 @@
                   <a:srgbClr val="1F2A24"/>
                 </a:solidFill>
               </a:rPr>
-              <a:t>  roles ranger &lt; officer &lt; admin checked on the server; hashed passwords, lockout, audit log</a:t>
+              <a:t>  expected / safe number per trail for the day, with “Why this limit?”</a:t>
             </a:r>
           </a:p>
           <a:p>
@@ -9823,7 +9746,7 @@
                   <a:srgbClr val="1F2A24"/>
                 </a:solidFill>
               </a:rPr>
-              <a:t>•  Quality:</a:t>
+              <a:t>•  Booking:</a:t>
             </a:r>
             <a:r>
               <a:rPr sz="1300">
@@ -9831,7 +9754,53 @@
                   <a:srgbClr val="1F2A24"/>
                 </a:solidFill>
               </a:rPr>
-              <a:t>  65 Python tests · 24 Flutter tests · analyzer clean</a:t>
+              <a:t>  slot ticket with QR code; full slot → later slot, other trail, other day</a:t>
+            </a:r>
+          </a:p>
+          <a:p>
+            <a:pPr>
+              <a:spcAft>
+                <a:spcPts val="1000"/>
+              </a:spcAft>
+            </a:pPr>
+            <a:r>
+              <a:rPr sz="1300" b="1">
+                <a:solidFill>
+                  <a:srgbClr val="1F2A24"/>
+                </a:solidFill>
+              </a:rPr>
+              <a:t>•  Languages:</a:t>
+            </a:r>
+            <a:r>
+              <a:rPr sz="1300">
+                <a:solidFill>
+                  <a:srgbClr val="1F2A24"/>
+                </a:solidFill>
+              </a:rPr>
+              <a:t>  English · සිංහල · தமிழ் (drafts under native review)</a:t>
+            </a:r>
+          </a:p>
+          <a:p>
+            <a:pPr>
+              <a:spcAft>
+                <a:spcPts val="1000"/>
+              </a:spcAft>
+            </a:pPr>
+            <a:r>
+              <a:rPr sz="1300" b="1">
+                <a:solidFill>
+                  <a:srgbClr val="1F2A24"/>
+                </a:solidFill>
+              </a:rPr>
+              <a:t>•  Map:</a:t>
+            </a:r>
+            <a:r>
+              <a:rPr sz="1300">
+                <a:solidFill>
+                  <a:srgbClr val="1F2A24"/>
+                </a:solidFill>
+              </a:rPr>
+              <a:t>  OpenStreetMap trails, starts, checkpoints</a:t>
             </a:r>
           </a:p>
         </p:txBody>
@@ -9926,7 +9895,7 @@
                   <a:srgbClr val="2F6B4F"/>
                 </a:solidFill>
               </a:rPr>
-              <a:t>USER &amp; FUNCTIONAL REQUIREMENTS</a:t>
+              <a:t>COMPLETION OF PROTOTYPE</a:t>
             </a:r>
           </a:p>
         </p:txBody>
@@ -9960,7 +9929,7 @@
                   <a:srgbClr val="1F2A24"/>
                 </a:solidFill>
               </a:rPr>
-              <a:t>Requirements and their status</a:t>
+              <a:t>Working prototype – pilgrims and staff at Adam's Peak</a:t>
             </a:r>
           </a:p>
         </p:txBody>
@@ -9995,6 +9964,910 @@
                 </a:solidFill>
               </a:rPr>
               <a:t>Component 4 · IT23343948 · 19</a:t>
+            </a:r>
+          </a:p>
+        </p:txBody>
+      </p:sp>
+      <p:pic>
+        <p:nvPicPr>
+          <p:cNvPr id="6" name="Picture 5" descr="05_start_times.png"/>
+          <p:cNvPicPr>
+            <a:picLocks noChangeAspect="1"/>
+          </p:cNvPicPr>
+          <p:nvPr/>
+        </p:nvPicPr>
+        <p:blipFill>
+          <a:blip r:embed="rId3"/>
+          <a:stretch>
+            <a:fillRect/>
+          </a:stretch>
+        </p:blipFill>
+        <p:spPr>
+          <a:xfrm>
+            <a:off x="502920" y="1325880"/>
+            <a:ext cx="1919113" cy="4160520"/>
+          </a:xfrm>
+          <a:prstGeom prst="rect">
+            <a:avLst/>
+          </a:prstGeom>
+          <a:ln w="12700">
+            <a:solidFill>
+              <a:srgbClr val="C9D3CD"/>
+            </a:solidFill>
+          </a:ln>
+        </p:spPr>
+      </p:pic>
+      <p:sp>
+        <p:nvSpPr>
+          <p:cNvPr id="7" name="TextBox 6"/>
+          <p:cNvSpPr txBox="1"/>
+          <p:nvPr/>
+        </p:nvSpPr>
+        <p:spPr>
+          <a:xfrm>
+            <a:off x="457200" y="5532120"/>
+            <a:ext cx="2057400" cy="822960"/>
+          </a:xfrm>
+          <a:prstGeom prst="rect">
+            <a:avLst/>
+          </a:prstGeom>
+          <a:noFill/>
+        </p:spPr>
+        <p:txBody>
+          <a:bodyPr wrap="square" anchor="t">
+            <a:spAutoFit/>
+          </a:bodyPr>
+          <a:lstStyle/>
+          <a:p>
+            <a:pPr algn="ctr"/>
+            <a:r>
+              <a:rPr sz="1100" b="0">
+                <a:solidFill>
+                  <a:srgbClr val="1F2A24"/>
+                </a:solidFill>
+              </a:rPr>
+              <a:t>Pilgrim: best start times</a:t>
+            </a:r>
+          </a:p>
+          <a:p>
+            <a:pPr algn="ctr"/>
+            <a:r>
+              <a:rPr sz="1100" b="0">
+                <a:solidFill>
+                  <a:srgbClr val="1F2A24"/>
+                </a:solidFill>
+              </a:rPr>
+              <a:t>and wait near the top</a:t>
+            </a:r>
+          </a:p>
+        </p:txBody>
+      </p:sp>
+      <p:pic>
+        <p:nvPicPr>
+          <p:cNvPr id="8" name="Picture 7" descr="06_halfway_hold.png"/>
+          <p:cNvPicPr>
+            <a:picLocks noChangeAspect="1"/>
+          </p:cNvPicPr>
+          <p:nvPr/>
+        </p:nvPicPr>
+        <p:blipFill>
+          <a:blip r:embed="rId4"/>
+          <a:stretch>
+            <a:fillRect/>
+          </a:stretch>
+        </p:blipFill>
+        <p:spPr>
+          <a:xfrm>
+            <a:off x="2606040" y="1325880"/>
+            <a:ext cx="1919113" cy="4160520"/>
+          </a:xfrm>
+          <a:prstGeom prst="rect">
+            <a:avLst/>
+          </a:prstGeom>
+          <a:ln w="12700">
+            <a:solidFill>
+              <a:srgbClr val="C9D3CD"/>
+            </a:solidFill>
+          </a:ln>
+        </p:spPr>
+      </p:pic>
+      <p:sp>
+        <p:nvSpPr>
+          <p:cNvPr id="9" name="TextBox 8"/>
+          <p:cNvSpPr txBox="1"/>
+          <p:nvPr/>
+        </p:nvSpPr>
+        <p:spPr>
+          <a:xfrm>
+            <a:off x="2560320" y="5532120"/>
+            <a:ext cx="2057400" cy="822960"/>
+          </a:xfrm>
+          <a:prstGeom prst="rect">
+            <a:avLst/>
+          </a:prstGeom>
+          <a:noFill/>
+        </p:spPr>
+        <p:txBody>
+          <a:bodyPr wrap="square" anchor="t">
+            <a:spAutoFit/>
+          </a:bodyPr>
+          <a:lstStyle/>
+          <a:p>
+            <a:pPr algn="ctr"/>
+            <a:r>
+              <a:rPr sz="1100" b="0">
+                <a:solidFill>
+                  <a:srgbClr val="1F2A24"/>
+                </a:solidFill>
+              </a:rPr>
+              <a:t>Ranger: halfway count →</a:t>
+            </a:r>
+          </a:p>
+          <a:p>
+            <a:pPr algn="ctr"/>
+            <a:r>
+              <a:rPr sz="1100" b="0">
+                <a:solidFill>
+                  <a:srgbClr val="1F2A24"/>
+                </a:solidFill>
+              </a:rPr>
+              <a:t>HOLD + release rate</a:t>
+            </a:r>
+          </a:p>
+        </p:txBody>
+      </p:sp>
+      <p:pic>
+        <p:nvPicPr>
+          <p:cNvPr id="10" name="Picture 9" descr="08_officer_season.png"/>
+          <p:cNvPicPr>
+            <a:picLocks noChangeAspect="1"/>
+          </p:cNvPicPr>
+          <p:nvPr/>
+        </p:nvPicPr>
+        <p:blipFill>
+          <a:blip r:embed="rId5"/>
+          <a:stretch>
+            <a:fillRect/>
+          </a:stretch>
+        </p:blipFill>
+        <p:spPr>
+          <a:xfrm>
+            <a:off x="4709160" y="1325880"/>
+            <a:ext cx="1919113" cy="4160520"/>
+          </a:xfrm>
+          <a:prstGeom prst="rect">
+            <a:avLst/>
+          </a:prstGeom>
+          <a:ln w="12700">
+            <a:solidFill>
+              <a:srgbClr val="C9D3CD"/>
+            </a:solidFill>
+          </a:ln>
+        </p:spPr>
+      </p:pic>
+      <p:sp>
+        <p:nvSpPr>
+          <p:cNvPr id="11" name="TextBox 10"/>
+          <p:cNvSpPr txBox="1"/>
+          <p:nvPr/>
+        </p:nvSpPr>
+        <p:spPr>
+          <a:xfrm>
+            <a:off x="4663440" y="5532120"/>
+            <a:ext cx="2057400" cy="822960"/>
+          </a:xfrm>
+          <a:prstGeom prst="rect">
+            <a:avLst/>
+          </a:prstGeom>
+          <a:noFill/>
+        </p:spPr>
+        <p:txBody>
+          <a:bodyPr wrap="square" anchor="t">
+            <a:spAutoFit/>
+          </a:bodyPr>
+          <a:lstStyle/>
+          <a:p>
+            <a:pPr algn="ctr"/>
+            <a:r>
+              <a:rPr sz="1100" b="0">
+                <a:solidFill>
+                  <a:srgbClr val="1F2A24"/>
+                </a:solidFill>
+              </a:rPr>
+              <a:t>Officer: nights that may</a:t>
+            </a:r>
+          </a:p>
+          <a:p>
+            <a:pPr algn="ctr"/>
+            <a:r>
+              <a:rPr sz="1100" b="0">
+                <a:solidFill>
+                  <a:srgbClr val="1F2A24"/>
+                </a:solidFill>
+              </a:rPr>
+              <a:t>need halfway checks</a:t>
+            </a:r>
+          </a:p>
+        </p:txBody>
+      </p:sp>
+      <p:pic>
+        <p:nvPicPr>
+          <p:cNvPr id="12" name="Picture 11" descr="09_night_plan.png"/>
+          <p:cNvPicPr>
+            <a:picLocks noChangeAspect="1"/>
+          </p:cNvPicPr>
+          <p:nvPr/>
+        </p:nvPicPr>
+        <p:blipFill>
+          <a:blip r:embed="rId6"/>
+          <a:stretch>
+            <a:fillRect/>
+          </a:stretch>
+        </p:blipFill>
+        <p:spPr>
+          <a:xfrm>
+            <a:off x="6812280" y="1325880"/>
+            <a:ext cx="1919113" cy="4160520"/>
+          </a:xfrm>
+          <a:prstGeom prst="rect">
+            <a:avLst/>
+          </a:prstGeom>
+          <a:ln w="12700">
+            <a:solidFill>
+              <a:srgbClr val="C9D3CD"/>
+            </a:solidFill>
+          </a:ln>
+        </p:spPr>
+      </p:pic>
+      <p:sp>
+        <p:nvSpPr>
+          <p:cNvPr id="13" name="TextBox 12"/>
+          <p:cNvSpPr txBox="1"/>
+          <p:nvPr/>
+        </p:nvSpPr>
+        <p:spPr>
+          <a:xfrm>
+            <a:off x="6766560" y="5532120"/>
+            <a:ext cx="2057400" cy="822960"/>
+          </a:xfrm>
+          <a:prstGeom prst="rect">
+            <a:avLst/>
+          </a:prstGeom>
+          <a:noFill/>
+        </p:spPr>
+        <p:txBody>
+          <a:bodyPr wrap="square" anchor="t">
+            <a:spAutoFit/>
+          </a:bodyPr>
+          <a:lstStyle/>
+          <a:p>
+            <a:pPr algn="ctr"/>
+            <a:r>
+              <a:rPr sz="1100" b="0">
+                <a:solidFill>
+                  <a:srgbClr val="1F2A24"/>
+                </a:solidFill>
+              </a:rPr>
+              <a:t>Officer: night plan,</a:t>
+            </a:r>
+          </a:p>
+          <a:p>
+            <a:pPr algn="ctr"/>
+            <a:r>
+              <a:rPr sz="1100" b="0">
+                <a:solidFill>
+                  <a:srgbClr val="1F2A24"/>
+                </a:solidFill>
+              </a:rPr>
+              <a:t>hold windows per checkpoint</a:t>
+            </a:r>
+          </a:p>
+        </p:txBody>
+      </p:sp>
+      <p:sp>
+        <p:nvSpPr>
+          <p:cNvPr id="14" name="TextBox 13"/>
+          <p:cNvSpPr txBox="1"/>
+          <p:nvPr/>
+        </p:nvSpPr>
+        <p:spPr>
+          <a:xfrm>
+            <a:off x="8961120" y="1463040"/>
+            <a:ext cx="3017520" cy="4572000"/>
+          </a:xfrm>
+          <a:prstGeom prst="rect">
+            <a:avLst/>
+          </a:prstGeom>
+          <a:noFill/>
+        </p:spPr>
+        <p:txBody>
+          <a:bodyPr wrap="square">
+            <a:spAutoFit/>
+          </a:bodyPr>
+          <a:lstStyle/>
+          <a:p>
+            <a:pPr>
+              <a:spcAft>
+                <a:spcPts val="1000"/>
+              </a:spcAft>
+            </a:pPr>
+            <a:r>
+              <a:rPr sz="1300" b="1">
+                <a:solidFill>
+                  <a:srgbClr val="1F2A24"/>
+                </a:solidFill>
+              </a:rPr>
+              <a:t>•  Backend:</a:t>
+            </a:r>
+            <a:r>
+              <a:rPr sz="1300">
+                <a:solidFill>
+                  <a:srgbClr val="1F2A24"/>
+                </a:solidFill>
+              </a:rPr>
+              <a:t>  FastAPI per park + gateway, 25+ endpoints</a:t>
+            </a:r>
+          </a:p>
+          <a:p>
+            <a:pPr>
+              <a:spcAft>
+                <a:spcPts val="1000"/>
+              </a:spcAft>
+            </a:pPr>
+            <a:r>
+              <a:rPr sz="1300" b="1">
+                <a:solidFill>
+                  <a:srgbClr val="1F2A24"/>
+                </a:solidFill>
+              </a:rPr>
+              <a:t>•  Security:</a:t>
+            </a:r>
+            <a:r>
+              <a:rPr sz="1300">
+                <a:solidFill>
+                  <a:srgbClr val="1F2A24"/>
+                </a:solidFill>
+              </a:rPr>
+              <a:t>  roles ranger &lt; officer &lt; admin checked on the server; hashed passwords, lockout, audit log</a:t>
+            </a:r>
+          </a:p>
+          <a:p>
+            <a:pPr>
+              <a:spcAft>
+                <a:spcPts val="1000"/>
+              </a:spcAft>
+            </a:pPr>
+            <a:r>
+              <a:rPr sz="1300" b="1">
+                <a:solidFill>
+                  <a:srgbClr val="1F2A24"/>
+                </a:solidFill>
+              </a:rPr>
+              <a:t>•  Quality:</a:t>
+            </a:r>
+            <a:r>
+              <a:rPr sz="1300">
+                <a:solidFill>
+                  <a:srgbClr val="1F2A24"/>
+                </a:solidFill>
+              </a:rPr>
+              <a:t>  65 Python tests · 24 Flutter tests · analyzer clean</a:t>
+            </a:r>
+          </a:p>
+        </p:txBody>
+      </p:sp>
+    </p:spTree>
+  </p:cSld>
+  <p:clrMapOvr>
+    <a:masterClrMapping/>
+  </p:clrMapOvr>
+</p:sld>
+</file>
+
+<file path=ppt/slides/slide2.xml><?xml version="1.0" encoding="utf-8"?>
+<p:sld xmlns:a="http://schemas.openxmlformats.org/drawingml/2006/main" xmlns:p="http://schemas.openxmlformats.org/presentationml/2006/main" xmlns:r="http://schemas.openxmlformats.org/officeDocument/2006/relationships">
+  <p:cSld>
+    <p:spTree>
+      <p:nvGrpSpPr>
+        <p:cNvPr id="1" name=""/>
+        <p:cNvGrpSpPr/>
+        <p:nvPr/>
+      </p:nvGrpSpPr>
+      <p:grpSpPr/>
+      <p:sp>
+        <p:nvSpPr>
+          <p:cNvPr id="2" name="Rectangle 1"/>
+          <p:cNvSpPr/>
+          <p:nvPr/>
+        </p:nvSpPr>
+        <p:spPr>
+          <a:xfrm>
+            <a:off x="0" y="0"/>
+            <a:ext cx="164592" cy="6858000"/>
+          </a:xfrm>
+          <a:prstGeom prst="rect">
+            <a:avLst/>
+          </a:prstGeom>
+          <a:solidFill>
+            <a:srgbClr val="2F6B4F"/>
+          </a:solidFill>
+          <a:ln>
+            <a:noFill/>
+          </a:ln>
+        </p:spPr>
+        <p:style>
+          <a:lnRef idx="1">
+            <a:schemeClr val="accent1"/>
+          </a:lnRef>
+          <a:fillRef idx="3">
+            <a:schemeClr val="accent1"/>
+          </a:fillRef>
+          <a:effectRef idx="2">
+            <a:schemeClr val="accent1"/>
+          </a:effectRef>
+          <a:fontRef idx="minor">
+            <a:schemeClr val="lt1"/>
+          </a:fontRef>
+        </p:style>
+        <p:txBody>
+          <a:bodyPr rtlCol="0" anchor="ctr"/>
+          <a:lstStyle/>
+          <a:p>
+            <a:pPr algn="ctr"/>
+          </a:p>
+        </p:txBody>
+      </p:sp>
+      <p:sp>
+        <p:nvSpPr>
+          <p:cNvPr id="3" name="TextBox 2"/>
+          <p:cNvSpPr txBox="1"/>
+          <p:nvPr/>
+        </p:nvSpPr>
+        <p:spPr>
+          <a:xfrm>
+            <a:off x="502920" y="292608"/>
+            <a:ext cx="8229600" cy="320040"/>
+          </a:xfrm>
+          <a:prstGeom prst="rect">
+            <a:avLst/>
+          </a:prstGeom>
+          <a:noFill/>
+        </p:spPr>
+        <p:txBody>
+          <a:bodyPr wrap="square" anchor="t">
+            <a:spAutoFit/>
+          </a:bodyPr>
+          <a:lstStyle/>
+          <a:p>
+            <a:pPr algn="l"/>
+            <a:r>
+              <a:rPr sz="1200" b="1">
+                <a:solidFill>
+                  <a:srgbClr val="2F6B4F"/>
+                </a:solidFill>
+              </a:rPr>
+              <a:t>PROBLEM DEFINITION</a:t>
+            </a:r>
+          </a:p>
+        </p:txBody>
+      </p:sp>
+      <p:sp>
+        <p:nvSpPr>
+          <p:cNvPr id="4" name="TextBox 3"/>
+          <p:cNvSpPr txBox="1"/>
+          <p:nvPr/>
+        </p:nvSpPr>
+        <p:spPr>
+          <a:xfrm>
+            <a:off x="502920" y="566928"/>
+            <a:ext cx="11247120" cy="731520"/>
+          </a:xfrm>
+          <a:prstGeom prst="rect">
+            <a:avLst/>
+          </a:prstGeom>
+          <a:noFill/>
+        </p:spPr>
+        <p:txBody>
+          <a:bodyPr wrap="square" anchor="t">
+            <a:spAutoFit/>
+          </a:bodyPr>
+          <a:lstStyle/>
+          <a:p>
+            <a:pPr algn="l"/>
+            <a:r>
+              <a:rPr sz="2800" b="1">
+                <a:solidFill>
+                  <a:srgbClr val="1F2A24"/>
+                </a:solidFill>
+              </a:rPr>
+              <a:t>Crowding is managed with a fixed daily number</a:t>
+            </a:r>
+          </a:p>
+        </p:txBody>
+      </p:sp>
+      <p:sp>
+        <p:nvSpPr>
+          <p:cNvPr id="5" name="TextBox 4"/>
+          <p:cNvSpPr txBox="1"/>
+          <p:nvPr/>
+        </p:nvSpPr>
+        <p:spPr>
+          <a:xfrm>
+            <a:off x="8961120" y="6446520"/>
+            <a:ext cx="3017520" cy="274320"/>
+          </a:xfrm>
+          <a:prstGeom prst="rect">
+            <a:avLst/>
+          </a:prstGeom>
+          <a:noFill/>
+        </p:spPr>
+        <p:txBody>
+          <a:bodyPr wrap="square" anchor="t">
+            <a:spAutoFit/>
+          </a:bodyPr>
+          <a:lstStyle/>
+          <a:p>
+            <a:pPr algn="r"/>
+            <a:r>
+              <a:rPr sz="900" b="0">
+                <a:solidFill>
+                  <a:srgbClr val="6B7280"/>
+                </a:solidFill>
+              </a:rPr>
+              <a:t>Component 4 · IT23343948 · 2</a:t>
+            </a:r>
+          </a:p>
+        </p:txBody>
+      </p:sp>
+      <p:sp>
+        <p:nvSpPr>
+          <p:cNvPr id="6" name="TextBox 5"/>
+          <p:cNvSpPr txBox="1"/>
+          <p:nvPr/>
+        </p:nvSpPr>
+        <p:spPr>
+          <a:xfrm>
+            <a:off x="548640" y="1463040"/>
+            <a:ext cx="6949440" cy="4572000"/>
+          </a:xfrm>
+          <a:prstGeom prst="rect">
+            <a:avLst/>
+          </a:prstGeom>
+          <a:noFill/>
+        </p:spPr>
+        <p:txBody>
+          <a:bodyPr wrap="square">
+            <a:spAutoFit/>
+          </a:bodyPr>
+          <a:lstStyle/>
+          <a:p>
+            <a:pPr>
+              <a:spcAft>
+                <a:spcPts val="1200"/>
+              </a:spcAft>
+            </a:pPr>
+            <a:r>
+              <a:rPr sz="1700" b="1">
+                <a:solidFill>
+                  <a:srgbClr val="1F2A24"/>
+                </a:solidFill>
+              </a:rPr>
+              <a:t>•  Horton Plains today:</a:t>
+            </a:r>
+            <a:r>
+              <a:rPr sz="1700">
+                <a:solidFill>
+                  <a:srgbClr val="1F2A24"/>
+                </a:solidFill>
+              </a:rPr>
+              <a:t>  a static daily permit quota (DWC). It cannot tell 300 people on a dry Poya morning from 50 in the rain, or where they bunch up – World's End fills up between 08:00 and 10:00.</a:t>
+            </a:r>
+          </a:p>
+          <a:p>
+            <a:pPr>
+              <a:spcAft>
+                <a:spcPts val="1200"/>
+              </a:spcAft>
+            </a:pPr>
+            <a:r>
+              <a:rPr sz="1700" b="1">
+                <a:solidFill>
+                  <a:srgbClr val="1F2A24"/>
+                </a:solidFill>
+              </a:rPr>
+              <a:t>•  Adam's Peak today:</a:t>
+            </a:r>
+            <a:r>
+              <a:rPr sz="1700">
+                <a:solidFill>
+                  <a:srgbClr val="1F2A24"/>
+                </a:solidFill>
+              </a:rPr>
+              <a:t>  no limit and no tickets. On Poya nights thousands queue for hours on the steep final steps below the summit – a safety risk.</a:t>
+            </a:r>
+          </a:p>
+          <a:p>
+            <a:pPr>
+              <a:spcAft>
+                <a:spcPts val="1200"/>
+              </a:spcAft>
+            </a:pPr>
+            <a:r>
+              <a:rPr sz="1700" b="1">
+                <a:solidFill>
+                  <a:srgbClr val="1F2A24"/>
+                </a:solidFill>
+              </a:rPr>
+              <a:t>•  Data gap:</a:t>
+            </a:r>
+            <a:r>
+              <a:rPr sz="1700">
+                <a:solidFill>
+                  <a:srgbClr val="1F2A24"/>
+                </a:solidFill>
+              </a:rPr>
+              <a:t>  authorities publish only park-level visitor totals. There are no counts per trail section, and no sensors on the trails.</a:t>
+            </a:r>
+          </a:p>
+          <a:p>
+            <a:pPr>
+              <a:spcAft>
+                <a:spcPts val="1200"/>
+              </a:spcAft>
+            </a:pPr>
+            <a:r>
+              <a:rPr sz="1700" b="1">
+                <a:solidFill>
+                  <a:srgbClr val="1F2A24"/>
+                </a:solidFill>
+              </a:rPr>
+              <a:t>•  Missing tool:</a:t>
+            </a:r>
+            <a:r>
+              <a:rPr sz="1700">
+                <a:solidFill>
+                  <a:srgbClr val="1F2A24"/>
+                </a:solidFill>
+              </a:rPr>
+              <a:t>  nothing forecasts where and when a bottleneck will form, or turns that into a decision (how many to let in, when to start, when to hold groups).</a:t>
+            </a:r>
+          </a:p>
+        </p:txBody>
+      </p:sp>
+      <p:sp>
+        <p:nvSpPr>
+          <p:cNvPr id="7" name="Rounded Rectangle 6"/>
+          <p:cNvSpPr/>
+          <p:nvPr/>
+        </p:nvSpPr>
+        <p:spPr>
+          <a:xfrm>
+            <a:off x="7863840" y="1645920"/>
+            <a:ext cx="3840480" cy="3291840"/>
+          </a:xfrm>
+          <a:prstGeom prst="roundRect">
+            <a:avLst>
+              <a:gd name="adj" fmla="val 12000"/>
+            </a:avLst>
+          </a:prstGeom>
+          <a:solidFill>
+            <a:srgbClr val="2F6B4F"/>
+          </a:solidFill>
+          <a:ln>
+            <a:noFill/>
+          </a:ln>
+        </p:spPr>
+        <p:style>
+          <a:lnRef idx="1">
+            <a:schemeClr val="accent1"/>
+          </a:lnRef>
+          <a:fillRef idx="3">
+            <a:schemeClr val="accent1"/>
+          </a:fillRef>
+          <a:effectRef idx="2">
+            <a:schemeClr val="accent1"/>
+          </a:effectRef>
+          <a:fontRef idx="minor">
+            <a:schemeClr val="lt1"/>
+          </a:fontRef>
+        </p:style>
+        <p:txBody>
+          <a:bodyPr rtlCol="0" anchor="ctr" wrap="square" lIns="73152" rIns="73152"/>
+          <a:lstStyle/>
+          <a:p>
+            <a:pPr algn="ctr"/>
+            <a:r>
+              <a:rPr sz="1500" b="1">
+                <a:solidFill>
+                  <a:srgbClr val="FFFFFF"/>
+                </a:solidFill>
+              </a:rPr>
+              <a:t>Research question</a:t>
+            </a:r>
+          </a:p>
+          <a:p>
+            <a:pPr algn="ctr"/>
+            <a:r>
+              <a:rPr sz="1300" b="0">
+                <a:solidFill>
+                  <a:srgbClr val="FFFFFF"/>
+                </a:solidFill>
+              </a:rPr>
+              <a:t/>
+            </a:r>
+          </a:p>
+          <a:p>
+            <a:pPr algn="ctr"/>
+            <a:r>
+              <a:rPr sz="1300" b="0">
+                <a:solidFill>
+                  <a:srgbClr val="FFFFFF"/>
+                </a:solidFill>
+              </a:rPr>
+              <a:t>Can a Spatio-Temporal GNN, using only the trail graph, terrain, weather and calendar, forecast segment-level crowding and drive crowd control that replaces a static quota?</a:t>
+            </a:r>
+          </a:p>
+        </p:txBody>
+      </p:sp>
+    </p:spTree>
+  </p:cSld>
+  <p:clrMapOvr>
+    <a:masterClrMapping/>
+  </p:clrMapOvr>
+</p:sld>
+</file>
+
+<file path=ppt/slides/slide20.xml><?xml version="1.0" encoding="utf-8"?>
+<p:sld xmlns:a="http://schemas.openxmlformats.org/drawingml/2006/main" xmlns:p="http://schemas.openxmlformats.org/presentationml/2006/main" xmlns:r="http://schemas.openxmlformats.org/officeDocument/2006/relationships">
+  <p:cSld>
+    <p:spTree>
+      <p:nvGrpSpPr>
+        <p:cNvPr id="1" name=""/>
+        <p:cNvGrpSpPr/>
+        <p:nvPr/>
+      </p:nvGrpSpPr>
+      <p:grpSpPr/>
+      <p:sp>
+        <p:nvSpPr>
+          <p:cNvPr id="2" name="Rectangle 1"/>
+          <p:cNvSpPr/>
+          <p:nvPr/>
+        </p:nvSpPr>
+        <p:spPr>
+          <a:xfrm>
+            <a:off x="0" y="0"/>
+            <a:ext cx="164592" cy="6858000"/>
+          </a:xfrm>
+          <a:prstGeom prst="rect">
+            <a:avLst/>
+          </a:prstGeom>
+          <a:solidFill>
+            <a:srgbClr val="2F6B4F"/>
+          </a:solidFill>
+          <a:ln>
+            <a:noFill/>
+          </a:ln>
+        </p:spPr>
+        <p:style>
+          <a:lnRef idx="1">
+            <a:schemeClr val="accent1"/>
+          </a:lnRef>
+          <a:fillRef idx="3">
+            <a:schemeClr val="accent1"/>
+          </a:fillRef>
+          <a:effectRef idx="2">
+            <a:schemeClr val="accent1"/>
+          </a:effectRef>
+          <a:fontRef idx="minor">
+            <a:schemeClr val="lt1"/>
+          </a:fontRef>
+        </p:style>
+        <p:txBody>
+          <a:bodyPr rtlCol="0" anchor="ctr"/>
+          <a:lstStyle/>
+          <a:p>
+            <a:pPr algn="ctr"/>
+          </a:p>
+        </p:txBody>
+      </p:sp>
+      <p:sp>
+        <p:nvSpPr>
+          <p:cNvPr id="3" name="TextBox 2"/>
+          <p:cNvSpPr txBox="1"/>
+          <p:nvPr/>
+        </p:nvSpPr>
+        <p:spPr>
+          <a:xfrm>
+            <a:off x="502920" y="292608"/>
+            <a:ext cx="8229600" cy="320040"/>
+          </a:xfrm>
+          <a:prstGeom prst="rect">
+            <a:avLst/>
+          </a:prstGeom>
+          <a:noFill/>
+        </p:spPr>
+        <p:txBody>
+          <a:bodyPr wrap="square" anchor="t">
+            <a:spAutoFit/>
+          </a:bodyPr>
+          <a:lstStyle/>
+          <a:p>
+            <a:pPr algn="l"/>
+            <a:r>
+              <a:rPr sz="1200" b="1">
+                <a:solidFill>
+                  <a:srgbClr val="2F6B4F"/>
+                </a:solidFill>
+              </a:rPr>
+              <a:t>USER &amp; FUNCTIONAL REQUIREMENTS</a:t>
+            </a:r>
+          </a:p>
+        </p:txBody>
+      </p:sp>
+      <p:sp>
+        <p:nvSpPr>
+          <p:cNvPr id="4" name="TextBox 3"/>
+          <p:cNvSpPr txBox="1"/>
+          <p:nvPr/>
+        </p:nvSpPr>
+        <p:spPr>
+          <a:xfrm>
+            <a:off x="502920" y="566928"/>
+            <a:ext cx="11247120" cy="731520"/>
+          </a:xfrm>
+          <a:prstGeom prst="rect">
+            <a:avLst/>
+          </a:prstGeom>
+          <a:noFill/>
+        </p:spPr>
+        <p:txBody>
+          <a:bodyPr wrap="square" anchor="t">
+            <a:spAutoFit/>
+          </a:bodyPr>
+          <a:lstStyle/>
+          <a:p>
+            <a:pPr algn="l"/>
+            <a:r>
+              <a:rPr sz="2800" b="1">
+                <a:solidFill>
+                  <a:srgbClr val="1F2A24"/>
+                </a:solidFill>
+              </a:rPr>
+              <a:t>Requirements and their status</a:t>
+            </a:r>
+          </a:p>
+        </p:txBody>
+      </p:sp>
+      <p:sp>
+        <p:nvSpPr>
+          <p:cNvPr id="5" name="TextBox 4"/>
+          <p:cNvSpPr txBox="1"/>
+          <p:nvPr/>
+        </p:nvSpPr>
+        <p:spPr>
+          <a:xfrm>
+            <a:off x="8961120" y="6446520"/>
+            <a:ext cx="3017520" cy="274320"/>
+          </a:xfrm>
+          <a:prstGeom prst="rect">
+            <a:avLst/>
+          </a:prstGeom>
+          <a:noFill/>
+        </p:spPr>
+        <p:txBody>
+          <a:bodyPr wrap="square" anchor="t">
+            <a:spAutoFit/>
+          </a:bodyPr>
+          <a:lstStyle/>
+          <a:p>
+            <a:pPr algn="r"/>
+            <a:r>
+              <a:rPr sz="900" b="0">
+                <a:solidFill>
+                  <a:srgbClr val="6B7280"/>
+                </a:solidFill>
+              </a:rPr>
+              <a:t>Component 4 · IT23343948 · 20</a:t>
             </a:r>
           </a:p>
         </p:txBody>
@@ -11187,7 +12060,7 @@
 </p:sld>
 </file>
 
-<file path=ppt/slides/slide2.xml><?xml version="1.0" encoding="utf-8"?>
+<file path=ppt/slides/slide21.xml><?xml version="1.0" encoding="utf-8"?>
 <p:sld xmlns:a="http://schemas.openxmlformats.org/drawingml/2006/main" xmlns:p="http://schemas.openxmlformats.org/presentationml/2006/main" xmlns:r="http://schemas.openxmlformats.org/officeDocument/2006/relationships">
   <p:cSld>
     <p:spTree>
@@ -11269,7 +12142,7 @@
                   <a:srgbClr val="2F6B4F"/>
                 </a:solidFill>
               </a:rPr>
-              <a:t>PROBLEM DEFINITION</a:t>
+              <a:t>RISK MITIGATION</a:t>
             </a:r>
           </a:p>
         </p:txBody>
@@ -11303,7 +12176,7 @@
                   <a:srgbClr val="1F2A24"/>
                 </a:solidFill>
               </a:rPr>
-              <a:t>Crowding is managed with a fixed daily number</a:t>
+              <a:t>Risks and mitigation</a:t>
             </a:r>
           </a:p>
         </p:txBody>
@@ -11337,360 +12210,7 @@
                   <a:srgbClr val="6B7280"/>
                 </a:solidFill>
               </a:rPr>
-              <a:t>Component 4 · IT23343948 · 2</a:t>
-            </a:r>
-          </a:p>
-        </p:txBody>
-      </p:sp>
-      <p:sp>
-        <p:nvSpPr>
-          <p:cNvPr id="6" name="TextBox 5"/>
-          <p:cNvSpPr txBox="1"/>
-          <p:nvPr/>
-        </p:nvSpPr>
-        <p:spPr>
-          <a:xfrm>
-            <a:off x="548640" y="1463040"/>
-            <a:ext cx="6949440" cy="4572000"/>
-          </a:xfrm>
-          <a:prstGeom prst="rect">
-            <a:avLst/>
-          </a:prstGeom>
-          <a:noFill/>
-        </p:spPr>
-        <p:txBody>
-          <a:bodyPr wrap="square">
-            <a:spAutoFit/>
-          </a:bodyPr>
-          <a:lstStyle/>
-          <a:p>
-            <a:pPr>
-              <a:spcAft>
-                <a:spcPts val="1200"/>
-              </a:spcAft>
-            </a:pPr>
-            <a:r>
-              <a:rPr sz="1700" b="1">
-                <a:solidFill>
-                  <a:srgbClr val="1F2A24"/>
-                </a:solidFill>
-              </a:rPr>
-              <a:t>•  Horton Plains today:</a:t>
-            </a:r>
-            <a:r>
-              <a:rPr sz="1700">
-                <a:solidFill>
-                  <a:srgbClr val="1F2A24"/>
-                </a:solidFill>
-              </a:rPr>
-              <a:t>  a static daily permit quota (DWC). It cannot tell 300 people on a dry Poya morning from 50 in the rain, or where they bunch up – World's End fills up between 08:00 and 10:00.</a:t>
-            </a:r>
-          </a:p>
-          <a:p>
-            <a:pPr>
-              <a:spcAft>
-                <a:spcPts val="1200"/>
-              </a:spcAft>
-            </a:pPr>
-            <a:r>
-              <a:rPr sz="1700" b="1">
-                <a:solidFill>
-                  <a:srgbClr val="1F2A24"/>
-                </a:solidFill>
-              </a:rPr>
-              <a:t>•  Adam's Peak today:</a:t>
-            </a:r>
-            <a:r>
-              <a:rPr sz="1700">
-                <a:solidFill>
-                  <a:srgbClr val="1F2A24"/>
-                </a:solidFill>
-              </a:rPr>
-              <a:t>  no limit and no tickets. On Poya nights thousands queue for hours on the steep final steps below the summit – a safety risk.</a:t>
-            </a:r>
-          </a:p>
-          <a:p>
-            <a:pPr>
-              <a:spcAft>
-                <a:spcPts val="1200"/>
-              </a:spcAft>
-            </a:pPr>
-            <a:r>
-              <a:rPr sz="1700" b="1">
-                <a:solidFill>
-                  <a:srgbClr val="1F2A24"/>
-                </a:solidFill>
-              </a:rPr>
-              <a:t>•  Data gap:</a:t>
-            </a:r>
-            <a:r>
-              <a:rPr sz="1700">
-                <a:solidFill>
-                  <a:srgbClr val="1F2A24"/>
-                </a:solidFill>
-              </a:rPr>
-              <a:t>  authorities publish only park-level visitor totals. There are no counts per trail section, and no sensors on the trails.</a:t>
-            </a:r>
-          </a:p>
-          <a:p>
-            <a:pPr>
-              <a:spcAft>
-                <a:spcPts val="1200"/>
-              </a:spcAft>
-            </a:pPr>
-            <a:r>
-              <a:rPr sz="1700" b="1">
-                <a:solidFill>
-                  <a:srgbClr val="1F2A24"/>
-                </a:solidFill>
-              </a:rPr>
-              <a:t>•  Missing tool:</a:t>
-            </a:r>
-            <a:r>
-              <a:rPr sz="1700">
-                <a:solidFill>
-                  <a:srgbClr val="1F2A24"/>
-                </a:solidFill>
-              </a:rPr>
-              <a:t>  nothing forecasts where and when a bottleneck will form, or turns that into a decision (how many to let in, when to start, when to hold groups).</a:t>
-            </a:r>
-          </a:p>
-        </p:txBody>
-      </p:sp>
-      <p:sp>
-        <p:nvSpPr>
-          <p:cNvPr id="7" name="Rounded Rectangle 6"/>
-          <p:cNvSpPr/>
-          <p:nvPr/>
-        </p:nvSpPr>
-        <p:spPr>
-          <a:xfrm>
-            <a:off x="7863840" y="1645920"/>
-            <a:ext cx="3840480" cy="3291840"/>
-          </a:xfrm>
-          <a:prstGeom prst="roundRect">
-            <a:avLst>
-              <a:gd name="adj" fmla="val 12000"/>
-            </a:avLst>
-          </a:prstGeom>
-          <a:solidFill>
-            <a:srgbClr val="2F6B4F"/>
-          </a:solidFill>
-          <a:ln>
-            <a:noFill/>
-          </a:ln>
-        </p:spPr>
-        <p:style>
-          <a:lnRef idx="1">
-            <a:schemeClr val="accent1"/>
-          </a:lnRef>
-          <a:fillRef idx="3">
-            <a:schemeClr val="accent1"/>
-          </a:fillRef>
-          <a:effectRef idx="2">
-            <a:schemeClr val="accent1"/>
-          </a:effectRef>
-          <a:fontRef idx="minor">
-            <a:schemeClr val="lt1"/>
-          </a:fontRef>
-        </p:style>
-        <p:txBody>
-          <a:bodyPr rtlCol="0" anchor="ctr" wrap="square" lIns="73152" rIns="73152"/>
-          <a:lstStyle/>
-          <a:p>
-            <a:pPr algn="ctr"/>
-            <a:r>
-              <a:rPr sz="1500" b="1">
-                <a:solidFill>
-                  <a:srgbClr val="FFFFFF"/>
-                </a:solidFill>
-              </a:rPr>
-              <a:t>Research question</a:t>
-            </a:r>
-          </a:p>
-          <a:p>
-            <a:pPr algn="ctr"/>
-            <a:r>
-              <a:rPr sz="1300" b="0">
-                <a:solidFill>
-                  <a:srgbClr val="FFFFFF"/>
-                </a:solidFill>
-              </a:rPr>
-              <a:t/>
-            </a:r>
-          </a:p>
-          <a:p>
-            <a:pPr algn="ctr"/>
-            <a:r>
-              <a:rPr sz="1300" b="0">
-                <a:solidFill>
-                  <a:srgbClr val="FFFFFF"/>
-                </a:solidFill>
-              </a:rPr>
-              <a:t>Can a Spatio-Temporal GNN, using only the trail graph, terrain, weather and calendar, forecast segment-level crowding and drive crowd control that replaces a static quota?</a:t>
-            </a:r>
-          </a:p>
-        </p:txBody>
-      </p:sp>
-    </p:spTree>
-  </p:cSld>
-  <p:clrMapOvr>
-    <a:masterClrMapping/>
-  </p:clrMapOvr>
-</p:sld>
-</file>
-
-<file path=ppt/slides/slide20.xml><?xml version="1.0" encoding="utf-8"?>
-<p:sld xmlns:a="http://schemas.openxmlformats.org/drawingml/2006/main" xmlns:p="http://schemas.openxmlformats.org/presentationml/2006/main" xmlns:r="http://schemas.openxmlformats.org/officeDocument/2006/relationships">
-  <p:cSld>
-    <p:spTree>
-      <p:nvGrpSpPr>
-        <p:cNvPr id="1" name=""/>
-        <p:cNvGrpSpPr/>
-        <p:nvPr/>
-      </p:nvGrpSpPr>
-      <p:grpSpPr/>
-      <p:sp>
-        <p:nvSpPr>
-          <p:cNvPr id="2" name="Rectangle 1"/>
-          <p:cNvSpPr/>
-          <p:nvPr/>
-        </p:nvSpPr>
-        <p:spPr>
-          <a:xfrm>
-            <a:off x="0" y="0"/>
-            <a:ext cx="164592" cy="6858000"/>
-          </a:xfrm>
-          <a:prstGeom prst="rect">
-            <a:avLst/>
-          </a:prstGeom>
-          <a:solidFill>
-            <a:srgbClr val="2F6B4F"/>
-          </a:solidFill>
-          <a:ln>
-            <a:noFill/>
-          </a:ln>
-        </p:spPr>
-        <p:style>
-          <a:lnRef idx="1">
-            <a:schemeClr val="accent1"/>
-          </a:lnRef>
-          <a:fillRef idx="3">
-            <a:schemeClr val="accent1"/>
-          </a:fillRef>
-          <a:effectRef idx="2">
-            <a:schemeClr val="accent1"/>
-          </a:effectRef>
-          <a:fontRef idx="minor">
-            <a:schemeClr val="lt1"/>
-          </a:fontRef>
-        </p:style>
-        <p:txBody>
-          <a:bodyPr rtlCol="0" anchor="ctr"/>
-          <a:lstStyle/>
-          <a:p>
-            <a:pPr algn="ctr"/>
-          </a:p>
-        </p:txBody>
-      </p:sp>
-      <p:sp>
-        <p:nvSpPr>
-          <p:cNvPr id="3" name="TextBox 2"/>
-          <p:cNvSpPr txBox="1"/>
-          <p:nvPr/>
-        </p:nvSpPr>
-        <p:spPr>
-          <a:xfrm>
-            <a:off x="502920" y="292608"/>
-            <a:ext cx="8229600" cy="320040"/>
-          </a:xfrm>
-          <a:prstGeom prst="rect">
-            <a:avLst/>
-          </a:prstGeom>
-          <a:noFill/>
-        </p:spPr>
-        <p:txBody>
-          <a:bodyPr wrap="square" anchor="t">
-            <a:spAutoFit/>
-          </a:bodyPr>
-          <a:lstStyle/>
-          <a:p>
-            <a:pPr algn="l"/>
-            <a:r>
-              <a:rPr sz="1200" b="1">
-                <a:solidFill>
-                  <a:srgbClr val="2F6B4F"/>
-                </a:solidFill>
-              </a:rPr>
-              <a:t>RISK MITIGATION</a:t>
-            </a:r>
-          </a:p>
-        </p:txBody>
-      </p:sp>
-      <p:sp>
-        <p:nvSpPr>
-          <p:cNvPr id="4" name="TextBox 3"/>
-          <p:cNvSpPr txBox="1"/>
-          <p:nvPr/>
-        </p:nvSpPr>
-        <p:spPr>
-          <a:xfrm>
-            <a:off x="502920" y="566928"/>
-            <a:ext cx="11247120" cy="731520"/>
-          </a:xfrm>
-          <a:prstGeom prst="rect">
-            <a:avLst/>
-          </a:prstGeom>
-          <a:noFill/>
-        </p:spPr>
-        <p:txBody>
-          <a:bodyPr wrap="square" anchor="t">
-            <a:spAutoFit/>
-          </a:bodyPr>
-          <a:lstStyle/>
-          <a:p>
-            <a:pPr algn="l"/>
-            <a:r>
-              <a:rPr sz="2800" b="1">
-                <a:solidFill>
-                  <a:srgbClr val="1F2A24"/>
-                </a:solidFill>
-              </a:rPr>
-              <a:t>Risks and mitigation</a:t>
-            </a:r>
-          </a:p>
-        </p:txBody>
-      </p:sp>
-      <p:sp>
-        <p:nvSpPr>
-          <p:cNvPr id="5" name="TextBox 4"/>
-          <p:cNvSpPr txBox="1"/>
-          <p:nvPr/>
-        </p:nvSpPr>
-        <p:spPr>
-          <a:xfrm>
-            <a:off x="8961120" y="6446520"/>
-            <a:ext cx="3017520" cy="274320"/>
-          </a:xfrm>
-          <a:prstGeom prst="rect">
-            <a:avLst/>
-          </a:prstGeom>
-          <a:noFill/>
-        </p:spPr>
-        <p:txBody>
-          <a:bodyPr wrap="square" anchor="t">
-            <a:spAutoFit/>
-          </a:bodyPr>
-          <a:lstStyle/>
-          <a:p>
-            <a:pPr algn="r"/>
-            <a:r>
-              <a:rPr sz="900" b="0">
-                <a:solidFill>
-                  <a:srgbClr val="6B7280"/>
-                </a:solidFill>
-              </a:rPr>
-              <a:t>Component 4 · IT23343948 · 20</a:t>
+              <a:t>Component 4 · IT23343948 · 21</a:t>
             </a:r>
           </a:p>
         </p:txBody>
@@ -12591,7 +13111,7 @@
 </p:sld>
 </file>
 
-<file path=ppt/slides/slide21.xml><?xml version="1.0" encoding="utf-8"?>
+<file path=ppt/slides/slide22.xml><?xml version="1.0" encoding="utf-8"?>
 <p:sld xmlns:a="http://schemas.openxmlformats.org/drawingml/2006/main" xmlns:p="http://schemas.openxmlformats.org/presentationml/2006/main" xmlns:r="http://schemas.openxmlformats.org/officeDocument/2006/relationships">
   <p:cSld>
     <p:spTree>
@@ -12741,7 +13261,7 @@
                   <a:srgbClr val="6B7280"/>
                 </a:solidFill>
               </a:rPr>
-              <a:t>Component 4 · IT23343948 · 21</a:t>
+              <a:t>Component 4 · IT23343948 · 22</a:t>
             </a:r>
           </a:p>
         </p:txBody>
@@ -13115,7 +13635,7 @@
 </p:sld>
 </file>
 
-<file path=ppt/slides/slide22.xml><?xml version="1.0" encoding="utf-8"?>
+<file path=ppt/slides/slide23.xml><?xml version="1.0" encoding="utf-8"?>
 <p:sld xmlns:a="http://schemas.openxmlformats.org/drawingml/2006/main" xmlns:p="http://schemas.openxmlformats.org/presentationml/2006/main" xmlns:r="http://schemas.openxmlformats.org/officeDocument/2006/relationships">
   <p:cSld>
     <p:spTree>
@@ -13265,7 +13785,7 @@
                   <a:srgbClr val="6B7280"/>
                 </a:solidFill>
               </a:rPr>
-              <a:t>Component 4 · IT23343948 · 22</a:t>
+              <a:t>Component 4 · IT23343948 · 23</a:t>
             </a:r>
           </a:p>
         </p:txBody>
@@ -14424,7 +14944,7 @@
 </p:sld>
 </file>
 
-<file path=ppt/slides/slide23.xml><?xml version="1.0" encoding="utf-8"?>
+<file path=ppt/slides/slide24.xml><?xml version="1.0" encoding="utf-8"?>
 <p:sld xmlns:a="http://schemas.openxmlformats.org/drawingml/2006/main" xmlns:p="http://schemas.openxmlformats.org/presentationml/2006/main" xmlns:r="http://schemas.openxmlformats.org/officeDocument/2006/relationships">
   <p:cSld>
     <p:spTree>
@@ -14574,7 +15094,7 @@
                   <a:srgbClr val="6B7280"/>
                 </a:solidFill>
               </a:rPr>
-              <a:t>Component 4 · IT23343948 · 23</a:t>
+              <a:t>Component 4 · IT23343948 · 24</a:t>
             </a:r>
           </a:p>
         </p:txBody>
@@ -15103,7 +15623,7 @@
 </p:sld>
 </file>
 
-<file path=ppt/slides/slide24.xml><?xml version="1.0" encoding="utf-8"?>
+<file path=ppt/slides/slide25.xml><?xml version="1.0" encoding="utf-8"?>
 <p:sld xmlns:a="http://schemas.openxmlformats.org/drawingml/2006/main" xmlns:p="http://schemas.openxmlformats.org/presentationml/2006/main" xmlns:r="http://schemas.openxmlformats.org/officeDocument/2006/relationships">
   <p:cSld>
     <p:spTree>
@@ -15266,7 +15786,7 @@
 </p:sld>
 </file>
 
-<file path=ppt/slides/slide25.xml><?xml version="1.0" encoding="utf-8"?>
+<file path=ppt/slides/slide26.xml><?xml version="1.0" encoding="utf-8"?>
 <p:sld xmlns:a="http://schemas.openxmlformats.org/drawingml/2006/main" xmlns:p="http://schemas.openxmlformats.org/presentationml/2006/main" xmlns:r="http://schemas.openxmlformats.org/officeDocument/2006/relationships">
   <p:cSld>
     <p:spTree>
@@ -15416,7 +15936,7 @@
                   <a:srgbClr val="6B7280"/>
                 </a:solidFill>
               </a:rPr>
-              <a:t>Component 4 · IT23343948 · 25</a:t>
+              <a:t>Component 4 · IT23343948 · 26</a:t>
             </a:r>
           </a:p>
         </p:txBody>

--- a/research/component_4/docs/slides/PP1_Component4.pptx
+++ b/research/component_4/docs/slides/PP1_Component4.pptx
@@ -31,6 +31,7 @@
     <p:sldId id="279" r:id="rId31"/>
     <p:sldId id="280" r:id="rId32"/>
     <p:sldId id="281" r:id="rId33"/>
+    <p:sldId id="282" r:id="rId34"/>
   </p:sldIdLst>
   <p:sldSz cx="12191695" cy="6858000" type="screen4x3"/>
   <p:notesSz cx="6858000" cy="9144000"/>
@@ -1157,7 +1158,7 @@
           <a:lstStyle/>
           <a:p>
             <a:r>
-              <a:t>Screens rendered from the real API output. Trip planner: any number of destinations, read from config. Overview: week ahead and the quietest days. Calendar: 90-day crowd outlook. Day: expected crowd with a range and suggestions (other trail, later start, other day). Show the live demo if time allows – RUN_APP.md. (~45 s)</a:t>
+              <a:t>Same 2025 visitors as the entry-control test. Every phone has tomorrow's ST-GNN forecast and works out, for each trail, direction and start hour, how full the sections will be when the hiker is on them. Hikers whose plan meets a busy section follow the advice with some probability. If every phone gives the SAME best option, the crowd moves together and at full compliance it is worse than no advice (-12 %). If each phone draws one of the good options, weighted by room left, overcrowding falls by up to 73 % - as much as the daily limit - without turning anyone away. Advice alone is not enough; limit plus spread advice removes 95 %. Answers 'can offline route suggestions solve overcrowding': they help a lot, if they are spread, and work best with the dynamic limit. (~75 s)</a:t>
             </a:r>
           </a:p>
         </p:txBody>
@@ -1227,7 +1228,7 @@
           <a:lstStyle/>
           <a:p>
             <a:r>
-              <a:t>Start times per route with the expected wait. Ranger at a halfway rest stop enters counts; the app turns red (HOLD) and gives the release rate. The officer sees which nights may need checks (here: Christmas, stand by) and a night plan with hold windows. (~45 s)</a:t>
+              <a:t>Screens rendered from the real API output. Trip planner: any number of destinations, read from config. Overview: week ahead and the quietest days. Calendar: 90-day crowd outlook. Day: expected crowd with a range and suggestions (other trail, later start, other day). Show the live demo if time allows – RUN_APP.md. (~45 s)</a:t>
             </a:r>
           </a:p>
         </p:txBody>
@@ -1367,7 +1368,7 @@
           <a:lstStyle/>
           <a:p>
             <a:r>
-              <a:t>Numbered exactly as in the proposal (section 5). Two are partial and say why: FR4 needs the data contract agreed with Module 3, NFR1 is measured on a laptop and in the Dart engine but not yet on a real phone. Extensions beyond the proposal are listed separately. Requirements are still provisional until the surveys come back - say this before you are asked. (~45 s)</a:t>
+              <a:t>Start times per route with the expected wait. Ranger at a halfway rest stop enters counts; the app turns red (HOLD) and gives the release rate. The officer sees which nights may need checks (here: Christmas, stand by) and a night plan with hold windows. (~45 s)</a:t>
             </a:r>
           </a:p>
         </p:txBody>
@@ -1437,7 +1438,7 @@
           <a:lstStyle/>
           <a:p>
             <a:r>
-              <a:t>Lead with R1 – it is the question examiners will ask. The mitigation is already in motion: every assumption is listed and parameterised, sensitivity analysis shows which ones matter, and field counts are planned. (~45 s)</a:t>
+              <a:t>Numbered exactly as in the proposal (section 5). Two are partial and say why: FR4 needs the data contract agreed with Module 3, NFR1 is measured on a laptop and in the Dart engine but not yet on a real phone. Extensions beyond the proposal are listed separately. Requirements are still provisional until the surveys come back - say this before you are asked. (~45 s)</a:t>
             </a:r>
           </a:p>
         </p:txBody>
@@ -1507,7 +1508,7 @@
           <a:lstStyle/>
           <a:p>
             <a:r>
-              <a:t>Benefits are concrete: fewer dangerous queues, fairer access, revenue protected by booking instead of turning people away at the gate, data for planning staff. Business model: a per-site licence to the authority, small booking fee, and the same engine for other sites (Ella Rock, Knuckles, Sigiriya, Sinharaja) by adding a config. (~45 s)</a:t>
+              <a:t>Lead with R1 – it is the question examiners will ask. The mitigation is already in motion: every assumption is listed and parameterised, sensitivity analysis shows which ones matter, and field counts are planned. (~45 s)</a:t>
             </a:r>
           </a:p>
         </p:txBody>
@@ -1577,7 +1578,7 @@
           <a:lstStyle/>
           <a:p>
             <a:r>
-              <a:t>The twelve WBS tasks from the proposal (section 8). Nine are done or nearly done; field validation and team integration were always planned for later months in the Gantt chart (months 8-11). Build is ahead of plan; validation is on plan. About 65 % of the component overall. (~45 s)</a:t>
+              <a:t>Benefits are concrete: fewer dangerous queues, fairer access, revenue protected by booking instead of turning people away at the gate, data for planning staff. Business model: a per-site licence to the authority, small booking fee, and the same engine for other sites (Ella Rock, Knuckles, Sigiriya, Sinharaja) by adding a config. (~45 s)</a:t>
             </a:r>
           </a:p>
         </p:txBody>
@@ -1647,7 +1648,7 @@
           <a:lstStyle/>
           <a:p>
             <a:r>
-              <a:t>Each open item has an owner (me), a date and a 'done when'. The two that depend on other people - the surveys and the Module 3 schema - are started first because they take elapsed time. (~45 s)</a:t>
+              <a:t>The twelve WBS tasks from the proposal (section 8). Nine are done or nearly done; field validation and team integration were always planned for later months in the Gantt chart (months 8-11). Build is ahead of plan; validation is on plan. About 65 % of the component overall. (~45 s)</a:t>
             </a:r>
           </a:p>
         </p:txBody>
@@ -1717,7 +1718,7 @@
           <a:lstStyle/>
           <a:p>
             <a:r>
-              <a:t>Backup slides follow: limitations, planning model.</a:t>
+              <a:t>Each open item has an owner (me), a date and a 'done when'. The two that depend on other people - the surveys and the Module 3 schema - are started first because they take elapsed time. (~45 s)</a:t>
             </a:r>
           </a:p>
         </p:txBody>
@@ -1743,6 +1744,76 @@
 </file>
 
 <file path=ppt/notesSlides/notesSlide26.xml><?xml version="1.0" encoding="utf-8"?>
+<p:notes xmlns:a="http://schemas.openxmlformats.org/drawingml/2006/main" xmlns:p="http://schemas.openxmlformats.org/presentationml/2006/main" xmlns:r="http://schemas.openxmlformats.org/officeDocument/2006/relationships">
+  <p:cSld>
+    <p:spTree>
+      <p:nvGrpSpPr>
+        <p:cNvPr id="1" name=""/>
+        <p:cNvGrpSpPr/>
+        <p:nvPr/>
+      </p:nvGrpSpPr>
+      <p:grpSpPr>
+        <a:xfrm>
+          <a:off x="0" y="0"/>
+          <a:ext cx="0" cy="0"/>
+          <a:chOff x="0" y="0"/>
+          <a:chExt cx="0" cy="0"/>
+        </a:xfrm>
+      </p:grpSpPr>
+      <p:sp>
+        <p:nvSpPr>
+          <p:cNvPr id="2" name="Slide Image Placeholder 1"/>
+          <p:cNvSpPr>
+            <a:spLocks noGrp="1"/>
+          </p:cNvSpPr>
+          <p:nvPr>
+            <p:ph type="sldImg" idx="2"/>
+          </p:nvPr>
+        </p:nvSpPr>
+        <p:spPr/>
+      </p:sp>
+      <p:sp>
+        <p:nvSpPr>
+          <p:cNvPr id="3" name="Notes Placeholder 2"/>
+          <p:cNvSpPr>
+            <a:spLocks noGrp="1"/>
+          </p:cNvSpPr>
+          <p:nvPr>
+            <p:ph type="body" idx="3" sz="quarter"/>
+          </p:nvPr>
+        </p:nvSpPr>
+        <p:spPr/>
+        <p:txBody>
+          <a:bodyPr/>
+          <a:lstStyle/>
+          <a:p>
+            <a:r>
+              <a:t>Backup slides follow: limitations, planning model.</a:t>
+            </a:r>
+          </a:p>
+        </p:txBody>
+      </p:sp>
+      <p:sp>
+        <p:nvSpPr>
+          <p:cNvPr id="4" name="Slide Number Placeholder 3"/>
+          <p:cNvSpPr>
+            <a:spLocks noGrp="1"/>
+          </p:cNvSpPr>
+          <p:nvPr>
+            <p:ph type="sldNum" idx="5" sz="quarter"/>
+          </p:nvPr>
+        </p:nvSpPr>
+        <p:spPr/>
+      </p:sp>
+    </p:spTree>
+  </p:cSld>
+  <p:clrMapOvr>
+    <a:masterClrMapping/>
+  </p:clrMapOvr>
+</p:notes>
+</file>
+
+<file path=ppt/notesSlides/notesSlide27.xml><?xml version="1.0" encoding="utf-8"?>
 <p:notes xmlns:a="http://schemas.openxmlformats.org/drawingml/2006/main" xmlns:p="http://schemas.openxmlformats.org/presentationml/2006/main" xmlns:r="http://schemas.openxmlformats.org/officeDocument/2006/relationships">
   <p:cSld>
     <p:spTree>
@@ -9214,7 +9285,7 @@
                   <a:srgbClr val="1F2A24"/>
                 </a:solidFill>
               </a:rPr>
-              <a:t>  officers (first tab), rangers, visitors (map → “Tomorrow's crowding”)</a:t>
+              <a:t>  officers (first tab), rangers, hikers (Crowding tab) · whole app works offline</a:t>
             </a:r>
           </a:p>
         </p:txBody>
@@ -9309,7 +9380,7 @@
                   <a:srgbClr val="2F6B4F"/>
                 </a:solidFill>
               </a:rPr>
-              <a:t>COMPLETION OF PROTOTYPE</a:t>
+              <a:t>HIKER GUIDANCE (FEEDS MODULE 3)</a:t>
             </a:r>
           </a:p>
         </p:txBody>
@@ -9343,7 +9414,7 @@
                   <a:srgbClr val="1F2A24"/>
                 </a:solidFill>
               </a:rPr>
-              <a:t>Working prototype – visitors plan a trip</a:t>
+              <a:t>RQ8 – Can offline advice to hikers prevent overcrowding?</a:t>
             </a:r>
           </a:p>
         </p:txBody>
@@ -9384,7 +9455,7 @@
       </p:sp>
       <p:pic>
         <p:nvPicPr>
-          <p:cNvPr id="6" name="Picture 5" descr="01_destinations.png"/>
+          <p:cNvPr id="6" name="Picture 5" descr="rq8.png"/>
           <p:cNvPicPr>
             <a:picLocks noChangeAspect="1"/>
           </p:cNvPicPr>
@@ -9398,67 +9469,17 @@
         </p:blipFill>
         <p:spPr>
           <a:xfrm>
-            <a:off x="502920" y="1325880"/>
-            <a:ext cx="1919113" cy="4160520"/>
+            <a:off x="411480" y="1371600"/>
+            <a:ext cx="6949440" cy="3895898"/>
           </a:xfrm>
           <a:prstGeom prst="rect">
             <a:avLst/>
           </a:prstGeom>
-          <a:ln w="12700">
-            <a:solidFill>
-              <a:srgbClr val="C9D3CD"/>
-            </a:solidFill>
-          </a:ln>
         </p:spPr>
       </p:pic>
-      <p:sp>
-        <p:nvSpPr>
-          <p:cNvPr id="7" name="TextBox 6"/>
-          <p:cNvSpPr txBox="1"/>
-          <p:nvPr/>
-        </p:nvSpPr>
-        <p:spPr>
-          <a:xfrm>
-            <a:off x="457200" y="5532120"/>
-            <a:ext cx="2057400" cy="822960"/>
-          </a:xfrm>
-          <a:prstGeom prst="rect">
-            <a:avLst/>
-          </a:prstGeom>
-          <a:noFill/>
-        </p:spPr>
-        <p:txBody>
-          <a:bodyPr wrap="square" anchor="t">
-            <a:spAutoFit/>
-          </a:bodyPr>
-          <a:lstStyle/>
-          <a:p>
-            <a:pPr algn="ctr"/>
-            <a:r>
-              <a:rPr sz="1100" b="0">
-                <a:solidFill>
-                  <a:srgbClr val="1F2A24"/>
-                </a:solidFill>
-              </a:rPr>
-              <a:t>Where to? – every destination,</a:t>
-            </a:r>
-          </a:p>
-          <a:p>
-            <a:pPr algn="ctr"/>
-            <a:r>
-              <a:rPr sz="1100" b="0">
-                <a:solidFill>
-                  <a:srgbClr val="1F2A24"/>
-                </a:solidFill>
-              </a:rPr>
-              <a:t>its next 7 days</a:t>
-            </a:r>
-          </a:p>
-        </p:txBody>
-      </p:sp>
       <p:pic>
         <p:nvPicPr>
-          <p:cNvPr id="8" name="Picture 7" descr="02_overview_adams_peak.png"/>
+          <p:cNvPr id="7" name="Picture 6" descr="13_your_walk.png"/>
           <p:cNvPicPr>
             <a:picLocks noChangeAspect="1"/>
           </p:cNvPicPr>
@@ -9472,13 +9493,13 @@
         </p:blipFill>
         <p:spPr>
           <a:xfrm>
-            <a:off x="2606040" y="1325880"/>
-            <a:ext cx="1919113" cy="4160520"/>
+            <a:off x="7680960" y="1325880"/>
+            <a:ext cx="1940202" cy="4206240"/>
           </a:xfrm>
           <a:prstGeom prst="rect">
             <a:avLst/>
           </a:prstGeom>
-          <a:ln w="12700">
+          <a:ln>
             <a:solidFill>
               <a:srgbClr val="C9D3CD"/>
             </a:solidFill>
@@ -9487,14 +9508,14 @@
       </p:pic>
       <p:sp>
         <p:nvSpPr>
-          <p:cNvPr id="9" name="TextBox 8"/>
+          <p:cNvPr id="8" name="TextBox 7"/>
           <p:cNvSpPr txBox="1"/>
           <p:nvPr/>
         </p:nvSpPr>
         <p:spPr>
           <a:xfrm>
-            <a:off x="2560320" y="5532120"/>
-            <a:ext cx="2057400" cy="822960"/>
+            <a:off x="7589520" y="5577840"/>
+            <a:ext cx="2194560" cy="640080"/>
           </a:xfrm>
           <a:prstGeom prst="rect">
             <a:avLst/>
@@ -9514,7 +9535,7 @@
                   <a:srgbClr val="1F2A24"/>
                 </a:solidFill>
               </a:rPr>
-              <a:t>Destination overview,</a:t>
+              <a:t>On the phone, offline:</a:t>
             </a:r>
           </a:p>
           <a:p>
@@ -9525,158 +9546,21 @@
                   <a:srgbClr val="1F2A24"/>
                 </a:solidFill>
               </a:rPr>
-              <a:t>quietest days, how to get there</a:t>
-            </a:r>
-          </a:p>
-        </p:txBody>
-      </p:sp>
-      <p:pic>
-        <p:nvPicPr>
-          <p:cNvPr id="10" name="Picture 9" descr="03_calendar_horton.png"/>
-          <p:cNvPicPr>
-            <a:picLocks noChangeAspect="1"/>
-          </p:cNvPicPr>
-          <p:nvPr/>
-        </p:nvPicPr>
-        <p:blipFill>
-          <a:blip r:embed="rId5"/>
-          <a:stretch>
-            <a:fillRect/>
-          </a:stretch>
-        </p:blipFill>
-        <p:spPr>
-          <a:xfrm>
-            <a:off x="4709160" y="1325880"/>
-            <a:ext cx="1919113" cy="4160520"/>
-          </a:xfrm>
-          <a:prstGeom prst="rect">
-            <a:avLst/>
-          </a:prstGeom>
-          <a:ln w="12700">
-            <a:solidFill>
-              <a:srgbClr val="C9D3CD"/>
-            </a:solidFill>
-          </a:ln>
-        </p:spPr>
-      </p:pic>
-      <p:sp>
-        <p:nvSpPr>
-          <p:cNvPr id="11" name="TextBox 10"/>
+              <a:t>suggested plan + other good options</a:t>
+            </a:r>
+          </a:p>
+        </p:txBody>
+      </p:sp>
+      <p:sp>
+        <p:nvSpPr>
+          <p:cNvPr id="9" name="TextBox 8"/>
           <p:cNvSpPr txBox="1"/>
           <p:nvPr/>
         </p:nvSpPr>
         <p:spPr>
           <a:xfrm>
-            <a:off x="4663440" y="5532120"/>
-            <a:ext cx="2057400" cy="822960"/>
-          </a:xfrm>
-          <a:prstGeom prst="rect">
-            <a:avLst/>
-          </a:prstGeom>
-          <a:noFill/>
-        </p:spPr>
-        <p:txBody>
-          <a:bodyPr wrap="square" anchor="t">
-            <a:spAutoFit/>
-          </a:bodyPr>
-          <a:lstStyle/>
-          <a:p>
-            <a:pPr algn="ctr"/>
-            <a:r>
-              <a:rPr sz="1100" b="0">
-                <a:solidFill>
-                  <a:srgbClr val="1F2A24"/>
-                </a:solidFill>
-              </a:rPr>
-              <a:t>90-day crowd calendar</a:t>
-            </a:r>
-          </a:p>
-        </p:txBody>
-      </p:sp>
-      <p:pic>
-        <p:nvPicPr>
-          <p:cNvPr id="12" name="Picture 11" descr="04_day_horton.png"/>
-          <p:cNvPicPr>
-            <a:picLocks noChangeAspect="1"/>
-          </p:cNvPicPr>
-          <p:nvPr/>
-        </p:nvPicPr>
-        <p:blipFill>
-          <a:blip r:embed="rId6"/>
-          <a:stretch>
-            <a:fillRect/>
-          </a:stretch>
-        </p:blipFill>
-        <p:spPr>
-          <a:xfrm>
-            <a:off x="6812280" y="1325880"/>
-            <a:ext cx="1919113" cy="4160520"/>
-          </a:xfrm>
-          <a:prstGeom prst="rect">
-            <a:avLst/>
-          </a:prstGeom>
-          <a:ln w="12700">
-            <a:solidFill>
-              <a:srgbClr val="C9D3CD"/>
-            </a:solidFill>
-          </a:ln>
-        </p:spPr>
-      </p:pic>
-      <p:sp>
-        <p:nvSpPr>
-          <p:cNvPr id="13" name="TextBox 12"/>
-          <p:cNvSpPr txBox="1"/>
-          <p:nvPr/>
-        </p:nvSpPr>
-        <p:spPr>
-          <a:xfrm>
-            <a:off x="6766560" y="5532120"/>
-            <a:ext cx="2057400" cy="822960"/>
-          </a:xfrm>
-          <a:prstGeom prst="rect">
-            <a:avLst/>
-          </a:prstGeom>
-          <a:noFill/>
-        </p:spPr>
-        <p:txBody>
-          <a:bodyPr wrap="square" anchor="t">
-            <a:spAutoFit/>
-          </a:bodyPr>
-          <a:lstStyle/>
-          <a:p>
-            <a:pPr algn="ctr"/>
-            <a:r>
-              <a:rPr sz="1100" b="0">
-                <a:solidFill>
-                  <a:srgbClr val="1F2A24"/>
-                </a:solidFill>
-              </a:rPr>
-              <a:t>One day: expected crowd</a:t>
-            </a:r>
-          </a:p>
-          <a:p>
-            <a:pPr algn="ctr"/>
-            <a:r>
-              <a:rPr sz="1100" b="0">
-                <a:solidFill>
-                  <a:srgbClr val="1F2A24"/>
-                </a:solidFill>
-              </a:rPr>
-              <a:t>+ how to avoid it</a:t>
-            </a:r>
-          </a:p>
-        </p:txBody>
-      </p:sp>
-      <p:sp>
-        <p:nvSpPr>
-          <p:cNvPr id="14" name="TextBox 13"/>
-          <p:cNvSpPr txBox="1"/>
-          <p:nvPr/>
-        </p:nvSpPr>
-        <p:spPr>
-          <a:xfrm>
-            <a:off x="8961120" y="1463040"/>
-            <a:ext cx="3017520" cy="4572000"/>
+            <a:off x="9966960" y="1463040"/>
+            <a:ext cx="2103120" cy="4389120"/>
           </a:xfrm>
           <a:prstGeom prst="rect">
             <a:avLst/>
@@ -9695,20 +9579,20 @@
               </a:spcAft>
             </a:pPr>
             <a:r>
-              <a:rPr sz="1300" b="1">
-                <a:solidFill>
-                  <a:srgbClr val="1F2A24"/>
-                </a:solidFill>
-              </a:rPr>
-              <a:t>•  Offline:</a:t>
-            </a:r>
-            <a:r>
-              <a:rPr sz="1300">
-                <a:solidFill>
-                  <a:srgbClr val="1F2A24"/>
-                </a:solidFill>
-              </a:rPr>
-              <a:t>  outlook and tickets cached; tomorrow's forecast computed on the phone</a:t>
+              <a:rPr sz="1200" b="1">
+                <a:solidFill>
+                  <a:srgbClr val="1F2A24"/>
+                </a:solidFill>
+              </a:rPr>
+              <a:t>•  Herd advice:</a:t>
+            </a:r>
+            <a:r>
+              <a:rPr sz="1200">
+                <a:solidFill>
+                  <a:srgbClr val="1F2A24"/>
+                </a:solidFill>
+              </a:rPr>
+              <a:t>  41 % at half compliance, -12 % at full</a:t>
             </a:r>
           </a:p>
           <a:p>
@@ -9718,20 +9602,20 @@
               </a:spcAft>
             </a:pPr>
             <a:r>
-              <a:rPr sz="1300" b="1">
-                <a:solidFill>
-                  <a:srgbClr val="1F2A24"/>
-                </a:solidFill>
-              </a:rPr>
-              <a:t>•  Safe limit:</a:t>
-            </a:r>
-            <a:r>
-              <a:rPr sz="1300">
-                <a:solidFill>
-                  <a:srgbClr val="1F2A24"/>
-                </a:solidFill>
-              </a:rPr>
-              <a:t>  expected / safe number per trail for the day, with “Why this limit?”</a:t>
+              <a:rPr sz="1200" b="1">
+                <a:solidFill>
+                  <a:srgbClr val="1F2A24"/>
+                </a:solidFill>
+              </a:rPr>
+              <a:t>•  Spread advice:</a:t>
+            </a:r>
+            <a:r>
+              <a:rPr sz="1200">
+                <a:solidFill>
+                  <a:srgbClr val="1F2A24"/>
+                </a:solidFill>
+              </a:rPr>
+              <a:t>  up to 73 %, nobody turned away</a:t>
             </a:r>
           </a:p>
           <a:p>
@@ -9741,66 +9625,54 @@
               </a:spcAft>
             </a:pPr>
             <a:r>
-              <a:rPr sz="1300" b="1">
-                <a:solidFill>
-                  <a:srgbClr val="1F2A24"/>
-                </a:solidFill>
-              </a:rPr>
-              <a:t>•  Booking:</a:t>
-            </a:r>
-            <a:r>
-              <a:rPr sz="1300">
-                <a:solidFill>
-                  <a:srgbClr val="1F2A24"/>
-                </a:solidFill>
-              </a:rPr>
-              <a:t>  slot ticket with QR code; full slot → later slot, other trail, other day</a:t>
-            </a:r>
-          </a:p>
-          <a:p>
-            <a:pPr>
-              <a:spcAft>
-                <a:spcPts val="1000"/>
-              </a:spcAft>
-            </a:pPr>
-            <a:r>
-              <a:rPr sz="1300" b="1">
-                <a:solidFill>
-                  <a:srgbClr val="1F2A24"/>
-                </a:solidFill>
-              </a:rPr>
-              <a:t>•  Languages:</a:t>
-            </a:r>
-            <a:r>
-              <a:rPr sz="1300">
-                <a:solidFill>
-                  <a:srgbClr val="1F2A24"/>
-                </a:solidFill>
-              </a:rPr>
-              <a:t>  English · සිංහල · தமிழ் (drafts under native review)</a:t>
-            </a:r>
-          </a:p>
-          <a:p>
-            <a:pPr>
-              <a:spcAft>
-                <a:spcPts val="1000"/>
-              </a:spcAft>
-            </a:pPr>
-            <a:r>
-              <a:rPr sz="1300" b="1">
-                <a:solidFill>
-                  <a:srgbClr val="1F2A24"/>
-                </a:solidFill>
-              </a:rPr>
-              <a:t>•  Map:</a:t>
-            </a:r>
-            <a:r>
-              <a:rPr sz="1300">
-                <a:solidFill>
-                  <a:srgbClr val="1F2A24"/>
-                </a:solidFill>
-              </a:rPr>
-              <a:t>  OpenStreetMap trails, starts, checkpoints</a:t>
+              <a:rPr sz="1200" b="1">
+                <a:solidFill>
+                  <a:srgbClr val="1F2A24"/>
+                </a:solidFill>
+              </a:rPr>
+              <a:t>•  Limit + spread:</a:t>
+            </a:r>
+            <a:r>
+              <a:rPr sz="1200">
+                <a:solidFill>
+                  <a:srgbClr val="1F2A24"/>
+                </a:solidFill>
+              </a:rPr>
+              <a:t>  95 % (limit alone 73 %)</a:t>
+            </a:r>
+          </a:p>
+        </p:txBody>
+      </p:sp>
+      <p:sp>
+        <p:nvSpPr>
+          <p:cNvPr id="10" name="TextBox 9"/>
+          <p:cNvSpPr txBox="1"/>
+          <p:nvPr/>
+        </p:nvSpPr>
+        <p:spPr>
+          <a:xfrm>
+            <a:off x="548640" y="5166360"/>
+            <a:ext cx="6949440" cy="365760"/>
+          </a:xfrm>
+          <a:prstGeom prst="rect">
+            <a:avLst/>
+          </a:prstGeom>
+          <a:noFill/>
+        </p:spPr>
+        <p:txBody>
+          <a:bodyPr wrap="square" anchor="t">
+            <a:spAutoFit/>
+          </a:bodyPr>
+          <a:lstStyle/>
+          <a:p>
+            <a:pPr algn="l"/>
+            <a:r>
+              <a:rPr sz="1100" b="0">
+                <a:solidFill>
+                  <a:srgbClr val="6B7280"/>
+                </a:solidFill>
+              </a:rPr>
+              <a:t>2025 test year, simulation · p &lt; 0.001 for every policy vs no control (Wilcoxon over days)</a:t>
             </a:r>
           </a:p>
         </p:txBody>
@@ -9929,7 +9801,7 @@
                   <a:srgbClr val="1F2A24"/>
                 </a:solidFill>
               </a:rPr>
-              <a:t>Working prototype – pilgrims and staff at Adam's Peak</a:t>
+              <a:t>Working prototype – visitors plan a trip</a:t>
             </a:r>
           </a:p>
         </p:txBody>
@@ -9970,7 +9842,7 @@
       </p:sp>
       <p:pic>
         <p:nvPicPr>
-          <p:cNvPr id="6" name="Picture 5" descr="05_start_times.png"/>
+          <p:cNvPr id="6" name="Picture 5" descr="01_destinations.png"/>
           <p:cNvPicPr>
             <a:picLocks noChangeAspect="1"/>
           </p:cNvPicPr>
@@ -10026,7 +9898,7 @@
                   <a:srgbClr val="1F2A24"/>
                 </a:solidFill>
               </a:rPr>
-              <a:t>Pilgrim: best start times</a:t>
+              <a:t>Where to? – every destination,</a:t>
             </a:r>
           </a:p>
           <a:p>
@@ -10037,14 +9909,14 @@
                   <a:srgbClr val="1F2A24"/>
                 </a:solidFill>
               </a:rPr>
-              <a:t>and wait near the top</a:t>
+              <a:t>its next 7 days</a:t>
             </a:r>
           </a:p>
         </p:txBody>
       </p:sp>
       <p:pic>
         <p:nvPicPr>
-          <p:cNvPr id="8" name="Picture 7" descr="06_halfway_hold.png"/>
+          <p:cNvPr id="8" name="Picture 7" descr="02_overview_adams_peak.png"/>
           <p:cNvPicPr>
             <a:picLocks noChangeAspect="1"/>
           </p:cNvPicPr>
@@ -10100,7 +9972,7 @@
                   <a:srgbClr val="1F2A24"/>
                 </a:solidFill>
               </a:rPr>
-              <a:t>Ranger: halfway count →</a:t>
+              <a:t>Destination overview,</a:t>
             </a:r>
           </a:p>
           <a:p>
@@ -10111,14 +9983,14 @@
                   <a:srgbClr val="1F2A24"/>
                 </a:solidFill>
               </a:rPr>
-              <a:t>HOLD + release rate</a:t>
+              <a:t>quietest days, how to get there</a:t>
             </a:r>
           </a:p>
         </p:txBody>
       </p:sp>
       <p:pic>
         <p:nvPicPr>
-          <p:cNvPr id="10" name="Picture 9" descr="08_officer_season.png"/>
+          <p:cNvPr id="10" name="Picture 9" descr="03_calendar_horton.png"/>
           <p:cNvPicPr>
             <a:picLocks noChangeAspect="1"/>
           </p:cNvPicPr>
@@ -10174,25 +10046,14 @@
                   <a:srgbClr val="1F2A24"/>
                 </a:solidFill>
               </a:rPr>
-              <a:t>Officer: nights that may</a:t>
-            </a:r>
-          </a:p>
-          <a:p>
-            <a:pPr algn="ctr"/>
-            <a:r>
-              <a:rPr sz="1100" b="0">
-                <a:solidFill>
-                  <a:srgbClr val="1F2A24"/>
-                </a:solidFill>
-              </a:rPr>
-              <a:t>need halfway checks</a:t>
+              <a:t>90-day crowd calendar</a:t>
             </a:r>
           </a:p>
         </p:txBody>
       </p:sp>
       <p:pic>
         <p:nvPicPr>
-          <p:cNvPr id="12" name="Picture 11" descr="09_night_plan.png"/>
+          <p:cNvPr id="12" name="Picture 11" descr="04_day_horton.png"/>
           <p:cNvPicPr>
             <a:picLocks noChangeAspect="1"/>
           </p:cNvPicPr>
@@ -10248,7 +10109,7 @@
                   <a:srgbClr val="1F2A24"/>
                 </a:solidFill>
               </a:rPr>
-              <a:t>Officer: night plan,</a:t>
+              <a:t>One day: expected crowd</a:t>
             </a:r>
           </a:p>
           <a:p>
@@ -10259,7 +10120,7 @@
                   <a:srgbClr val="1F2A24"/>
                 </a:solidFill>
               </a:rPr>
-              <a:t>hold windows per checkpoint</a:t>
+              <a:t>+ how to avoid it</a:t>
             </a:r>
           </a:p>
         </p:txBody>
@@ -10297,7 +10158,7 @@
                   <a:srgbClr val="1F2A24"/>
                 </a:solidFill>
               </a:rPr>
-              <a:t>•  Backend:</a:t>
+              <a:t>•  Offline:</a:t>
             </a:r>
             <a:r>
               <a:rPr sz="1300">
@@ -10305,7 +10166,7 @@
                   <a:srgbClr val="1F2A24"/>
                 </a:solidFill>
               </a:rPr>
-              <a:t>  FastAPI per park + gateway, 25+ endpoints</a:t>
+              <a:t>  outlook and tickets cached; tomorrow's forecast computed on the phone</a:t>
             </a:r>
           </a:p>
           <a:p>
@@ -10320,7 +10181,7 @@
                   <a:srgbClr val="1F2A24"/>
                 </a:solidFill>
               </a:rPr>
-              <a:t>•  Security:</a:t>
+              <a:t>•  Safe limit:</a:t>
             </a:r>
             <a:r>
               <a:rPr sz="1300">
@@ -10328,7 +10189,7 @@
                   <a:srgbClr val="1F2A24"/>
                 </a:solidFill>
               </a:rPr>
-              <a:t>  roles ranger &lt; officer &lt; admin checked on the server; hashed passwords, lockout, audit log</a:t>
+              <a:t>  expected / safe number per trail for the day, with “Why this limit?”</a:t>
             </a:r>
           </a:p>
           <a:p>
@@ -10343,7 +10204,7 @@
                   <a:srgbClr val="1F2A24"/>
                 </a:solidFill>
               </a:rPr>
-              <a:t>•  Quality:</a:t>
+              <a:t>•  Booking:</a:t>
             </a:r>
             <a:r>
               <a:rPr sz="1300">
@@ -10351,7 +10212,53 @@
                   <a:srgbClr val="1F2A24"/>
                 </a:solidFill>
               </a:rPr>
-              <a:t>  65 Python tests · 24 Flutter tests · analyzer clean</a:t>
+              <a:t>  slot ticket with QR code; full slot → later slot, other trail, other day</a:t>
+            </a:r>
+          </a:p>
+          <a:p>
+            <a:pPr>
+              <a:spcAft>
+                <a:spcPts val="1000"/>
+              </a:spcAft>
+            </a:pPr>
+            <a:r>
+              <a:rPr sz="1300" b="1">
+                <a:solidFill>
+                  <a:srgbClr val="1F2A24"/>
+                </a:solidFill>
+              </a:rPr>
+              <a:t>•  Languages:</a:t>
+            </a:r>
+            <a:r>
+              <a:rPr sz="1300">
+                <a:solidFill>
+                  <a:srgbClr val="1F2A24"/>
+                </a:solidFill>
+              </a:rPr>
+              <a:t>  English · සිංහල · தமிழ் (drafts under native review)</a:t>
+            </a:r>
+          </a:p>
+          <a:p>
+            <a:pPr>
+              <a:spcAft>
+                <a:spcPts val="1000"/>
+              </a:spcAft>
+            </a:pPr>
+            <a:r>
+              <a:rPr sz="1300" b="1">
+                <a:solidFill>
+                  <a:srgbClr val="1F2A24"/>
+                </a:solidFill>
+              </a:rPr>
+              <a:t>•  Map:</a:t>
+            </a:r>
+            <a:r>
+              <a:rPr sz="1300">
+                <a:solidFill>
+                  <a:srgbClr val="1F2A24"/>
+                </a:solidFill>
+              </a:rPr>
+              <a:t>  OpenStreetMap trails, starts, checkpoints</a:t>
             </a:r>
           </a:p>
         </p:txBody>
@@ -10799,7 +10706,7 @@
                   <a:srgbClr val="2F6B4F"/>
                 </a:solidFill>
               </a:rPr>
-              <a:t>USER &amp; FUNCTIONAL REQUIREMENTS</a:t>
+              <a:t>COMPLETION OF PROTOTYPE</a:t>
             </a:r>
           </a:p>
         </p:txBody>
@@ -10833,7 +10740,7 @@
                   <a:srgbClr val="1F2A24"/>
                 </a:solidFill>
               </a:rPr>
-              <a:t>Requirements and their status</a:t>
+              <a:t>Working prototype – pilgrims and staff at Adam's Peak</a:t>
             </a:r>
           </a:p>
         </p:txBody>
@@ -10868,6 +10775,557 @@
                 </a:solidFill>
               </a:rPr>
               <a:t>Component 4 · IT23343948 · 20</a:t>
+            </a:r>
+          </a:p>
+        </p:txBody>
+      </p:sp>
+      <p:pic>
+        <p:nvPicPr>
+          <p:cNvPr id="6" name="Picture 5" descr="05_start_times.png"/>
+          <p:cNvPicPr>
+            <a:picLocks noChangeAspect="1"/>
+          </p:cNvPicPr>
+          <p:nvPr/>
+        </p:nvPicPr>
+        <p:blipFill>
+          <a:blip r:embed="rId3"/>
+          <a:stretch>
+            <a:fillRect/>
+          </a:stretch>
+        </p:blipFill>
+        <p:spPr>
+          <a:xfrm>
+            <a:off x="502920" y="1325880"/>
+            <a:ext cx="1919113" cy="4160520"/>
+          </a:xfrm>
+          <a:prstGeom prst="rect">
+            <a:avLst/>
+          </a:prstGeom>
+          <a:ln w="12700">
+            <a:solidFill>
+              <a:srgbClr val="C9D3CD"/>
+            </a:solidFill>
+          </a:ln>
+        </p:spPr>
+      </p:pic>
+      <p:sp>
+        <p:nvSpPr>
+          <p:cNvPr id="7" name="TextBox 6"/>
+          <p:cNvSpPr txBox="1"/>
+          <p:nvPr/>
+        </p:nvSpPr>
+        <p:spPr>
+          <a:xfrm>
+            <a:off x="457200" y="5532120"/>
+            <a:ext cx="2057400" cy="822960"/>
+          </a:xfrm>
+          <a:prstGeom prst="rect">
+            <a:avLst/>
+          </a:prstGeom>
+          <a:noFill/>
+        </p:spPr>
+        <p:txBody>
+          <a:bodyPr wrap="square" anchor="t">
+            <a:spAutoFit/>
+          </a:bodyPr>
+          <a:lstStyle/>
+          <a:p>
+            <a:pPr algn="ctr"/>
+            <a:r>
+              <a:rPr sz="1100" b="0">
+                <a:solidFill>
+                  <a:srgbClr val="1F2A24"/>
+                </a:solidFill>
+              </a:rPr>
+              <a:t>Pilgrim: best start times</a:t>
+            </a:r>
+          </a:p>
+          <a:p>
+            <a:pPr algn="ctr"/>
+            <a:r>
+              <a:rPr sz="1100" b="0">
+                <a:solidFill>
+                  <a:srgbClr val="1F2A24"/>
+                </a:solidFill>
+              </a:rPr>
+              <a:t>and wait near the top</a:t>
+            </a:r>
+          </a:p>
+        </p:txBody>
+      </p:sp>
+      <p:pic>
+        <p:nvPicPr>
+          <p:cNvPr id="8" name="Picture 7" descr="06_halfway_hold.png"/>
+          <p:cNvPicPr>
+            <a:picLocks noChangeAspect="1"/>
+          </p:cNvPicPr>
+          <p:nvPr/>
+        </p:nvPicPr>
+        <p:blipFill>
+          <a:blip r:embed="rId4"/>
+          <a:stretch>
+            <a:fillRect/>
+          </a:stretch>
+        </p:blipFill>
+        <p:spPr>
+          <a:xfrm>
+            <a:off x="2606040" y="1325880"/>
+            <a:ext cx="1919113" cy="4160520"/>
+          </a:xfrm>
+          <a:prstGeom prst="rect">
+            <a:avLst/>
+          </a:prstGeom>
+          <a:ln w="12700">
+            <a:solidFill>
+              <a:srgbClr val="C9D3CD"/>
+            </a:solidFill>
+          </a:ln>
+        </p:spPr>
+      </p:pic>
+      <p:sp>
+        <p:nvSpPr>
+          <p:cNvPr id="9" name="TextBox 8"/>
+          <p:cNvSpPr txBox="1"/>
+          <p:nvPr/>
+        </p:nvSpPr>
+        <p:spPr>
+          <a:xfrm>
+            <a:off x="2560320" y="5532120"/>
+            <a:ext cx="2057400" cy="822960"/>
+          </a:xfrm>
+          <a:prstGeom prst="rect">
+            <a:avLst/>
+          </a:prstGeom>
+          <a:noFill/>
+        </p:spPr>
+        <p:txBody>
+          <a:bodyPr wrap="square" anchor="t">
+            <a:spAutoFit/>
+          </a:bodyPr>
+          <a:lstStyle/>
+          <a:p>
+            <a:pPr algn="ctr"/>
+            <a:r>
+              <a:rPr sz="1100" b="0">
+                <a:solidFill>
+                  <a:srgbClr val="1F2A24"/>
+                </a:solidFill>
+              </a:rPr>
+              <a:t>Ranger: halfway count →</a:t>
+            </a:r>
+          </a:p>
+          <a:p>
+            <a:pPr algn="ctr"/>
+            <a:r>
+              <a:rPr sz="1100" b="0">
+                <a:solidFill>
+                  <a:srgbClr val="1F2A24"/>
+                </a:solidFill>
+              </a:rPr>
+              <a:t>HOLD + release rate</a:t>
+            </a:r>
+          </a:p>
+        </p:txBody>
+      </p:sp>
+      <p:pic>
+        <p:nvPicPr>
+          <p:cNvPr id="10" name="Picture 9" descr="08_officer_season.png"/>
+          <p:cNvPicPr>
+            <a:picLocks noChangeAspect="1"/>
+          </p:cNvPicPr>
+          <p:nvPr/>
+        </p:nvPicPr>
+        <p:blipFill>
+          <a:blip r:embed="rId5"/>
+          <a:stretch>
+            <a:fillRect/>
+          </a:stretch>
+        </p:blipFill>
+        <p:spPr>
+          <a:xfrm>
+            <a:off x="4709160" y="1325880"/>
+            <a:ext cx="1919113" cy="4160520"/>
+          </a:xfrm>
+          <a:prstGeom prst="rect">
+            <a:avLst/>
+          </a:prstGeom>
+          <a:ln w="12700">
+            <a:solidFill>
+              <a:srgbClr val="C9D3CD"/>
+            </a:solidFill>
+          </a:ln>
+        </p:spPr>
+      </p:pic>
+      <p:sp>
+        <p:nvSpPr>
+          <p:cNvPr id="11" name="TextBox 10"/>
+          <p:cNvSpPr txBox="1"/>
+          <p:nvPr/>
+        </p:nvSpPr>
+        <p:spPr>
+          <a:xfrm>
+            <a:off x="4663440" y="5532120"/>
+            <a:ext cx="2057400" cy="822960"/>
+          </a:xfrm>
+          <a:prstGeom prst="rect">
+            <a:avLst/>
+          </a:prstGeom>
+          <a:noFill/>
+        </p:spPr>
+        <p:txBody>
+          <a:bodyPr wrap="square" anchor="t">
+            <a:spAutoFit/>
+          </a:bodyPr>
+          <a:lstStyle/>
+          <a:p>
+            <a:pPr algn="ctr"/>
+            <a:r>
+              <a:rPr sz="1100" b="0">
+                <a:solidFill>
+                  <a:srgbClr val="1F2A24"/>
+                </a:solidFill>
+              </a:rPr>
+              <a:t>Officer: nights that may</a:t>
+            </a:r>
+          </a:p>
+          <a:p>
+            <a:pPr algn="ctr"/>
+            <a:r>
+              <a:rPr sz="1100" b="0">
+                <a:solidFill>
+                  <a:srgbClr val="1F2A24"/>
+                </a:solidFill>
+              </a:rPr>
+              <a:t>need halfway checks</a:t>
+            </a:r>
+          </a:p>
+        </p:txBody>
+      </p:sp>
+      <p:pic>
+        <p:nvPicPr>
+          <p:cNvPr id="12" name="Picture 11" descr="09_night_plan.png"/>
+          <p:cNvPicPr>
+            <a:picLocks noChangeAspect="1"/>
+          </p:cNvPicPr>
+          <p:nvPr/>
+        </p:nvPicPr>
+        <p:blipFill>
+          <a:blip r:embed="rId6"/>
+          <a:stretch>
+            <a:fillRect/>
+          </a:stretch>
+        </p:blipFill>
+        <p:spPr>
+          <a:xfrm>
+            <a:off x="6812280" y="1325880"/>
+            <a:ext cx="1919113" cy="4160520"/>
+          </a:xfrm>
+          <a:prstGeom prst="rect">
+            <a:avLst/>
+          </a:prstGeom>
+          <a:ln w="12700">
+            <a:solidFill>
+              <a:srgbClr val="C9D3CD"/>
+            </a:solidFill>
+          </a:ln>
+        </p:spPr>
+      </p:pic>
+      <p:sp>
+        <p:nvSpPr>
+          <p:cNvPr id="13" name="TextBox 12"/>
+          <p:cNvSpPr txBox="1"/>
+          <p:nvPr/>
+        </p:nvSpPr>
+        <p:spPr>
+          <a:xfrm>
+            <a:off x="6766560" y="5532120"/>
+            <a:ext cx="2057400" cy="822960"/>
+          </a:xfrm>
+          <a:prstGeom prst="rect">
+            <a:avLst/>
+          </a:prstGeom>
+          <a:noFill/>
+        </p:spPr>
+        <p:txBody>
+          <a:bodyPr wrap="square" anchor="t">
+            <a:spAutoFit/>
+          </a:bodyPr>
+          <a:lstStyle/>
+          <a:p>
+            <a:pPr algn="ctr"/>
+            <a:r>
+              <a:rPr sz="1100" b="0">
+                <a:solidFill>
+                  <a:srgbClr val="1F2A24"/>
+                </a:solidFill>
+              </a:rPr>
+              <a:t>Officer: night plan,</a:t>
+            </a:r>
+          </a:p>
+          <a:p>
+            <a:pPr algn="ctr"/>
+            <a:r>
+              <a:rPr sz="1100" b="0">
+                <a:solidFill>
+                  <a:srgbClr val="1F2A24"/>
+                </a:solidFill>
+              </a:rPr>
+              <a:t>hold windows per checkpoint</a:t>
+            </a:r>
+          </a:p>
+        </p:txBody>
+      </p:sp>
+      <p:sp>
+        <p:nvSpPr>
+          <p:cNvPr id="14" name="TextBox 13"/>
+          <p:cNvSpPr txBox="1"/>
+          <p:nvPr/>
+        </p:nvSpPr>
+        <p:spPr>
+          <a:xfrm>
+            <a:off x="8961120" y="1463040"/>
+            <a:ext cx="3017520" cy="4572000"/>
+          </a:xfrm>
+          <a:prstGeom prst="rect">
+            <a:avLst/>
+          </a:prstGeom>
+          <a:noFill/>
+        </p:spPr>
+        <p:txBody>
+          <a:bodyPr wrap="square">
+            <a:spAutoFit/>
+          </a:bodyPr>
+          <a:lstStyle/>
+          <a:p>
+            <a:pPr>
+              <a:spcAft>
+                <a:spcPts val="1000"/>
+              </a:spcAft>
+            </a:pPr>
+            <a:r>
+              <a:rPr sz="1300" b="1">
+                <a:solidFill>
+                  <a:srgbClr val="1F2A24"/>
+                </a:solidFill>
+              </a:rPr>
+              <a:t>•  Backend:</a:t>
+            </a:r>
+            <a:r>
+              <a:rPr sz="1300">
+                <a:solidFill>
+                  <a:srgbClr val="1F2A24"/>
+                </a:solidFill>
+              </a:rPr>
+              <a:t>  FastAPI per park + gateway, 25+ endpoints</a:t>
+            </a:r>
+          </a:p>
+          <a:p>
+            <a:pPr>
+              <a:spcAft>
+                <a:spcPts val="1000"/>
+              </a:spcAft>
+            </a:pPr>
+            <a:r>
+              <a:rPr sz="1300" b="1">
+                <a:solidFill>
+                  <a:srgbClr val="1F2A24"/>
+                </a:solidFill>
+              </a:rPr>
+              <a:t>•  Security:</a:t>
+            </a:r>
+            <a:r>
+              <a:rPr sz="1300">
+                <a:solidFill>
+                  <a:srgbClr val="1F2A24"/>
+                </a:solidFill>
+              </a:rPr>
+              <a:t>  roles ranger &lt; officer &lt; admin checked on the server; hashed passwords, lockout, audit log</a:t>
+            </a:r>
+          </a:p>
+          <a:p>
+            <a:pPr>
+              <a:spcAft>
+                <a:spcPts val="1000"/>
+              </a:spcAft>
+            </a:pPr>
+            <a:r>
+              <a:rPr sz="1300" b="1">
+                <a:solidFill>
+                  <a:srgbClr val="1F2A24"/>
+                </a:solidFill>
+              </a:rPr>
+              <a:t>•  Quality:</a:t>
+            </a:r>
+            <a:r>
+              <a:rPr sz="1300">
+                <a:solidFill>
+                  <a:srgbClr val="1F2A24"/>
+                </a:solidFill>
+              </a:rPr>
+              <a:t>  65 Python tests · 24 Flutter tests · analyzer clean</a:t>
+            </a:r>
+          </a:p>
+        </p:txBody>
+      </p:sp>
+    </p:spTree>
+  </p:cSld>
+  <p:clrMapOvr>
+    <a:masterClrMapping/>
+  </p:clrMapOvr>
+</p:sld>
+</file>
+
+<file path=ppt/slides/slide21.xml><?xml version="1.0" encoding="utf-8"?>
+<p:sld xmlns:a="http://schemas.openxmlformats.org/drawingml/2006/main" xmlns:p="http://schemas.openxmlformats.org/presentationml/2006/main" xmlns:r="http://schemas.openxmlformats.org/officeDocument/2006/relationships">
+  <p:cSld>
+    <p:spTree>
+      <p:nvGrpSpPr>
+        <p:cNvPr id="1" name=""/>
+        <p:cNvGrpSpPr/>
+        <p:nvPr/>
+      </p:nvGrpSpPr>
+      <p:grpSpPr/>
+      <p:sp>
+        <p:nvSpPr>
+          <p:cNvPr id="2" name="Rectangle 1"/>
+          <p:cNvSpPr/>
+          <p:nvPr/>
+        </p:nvSpPr>
+        <p:spPr>
+          <a:xfrm>
+            <a:off x="0" y="0"/>
+            <a:ext cx="164592" cy="6858000"/>
+          </a:xfrm>
+          <a:prstGeom prst="rect">
+            <a:avLst/>
+          </a:prstGeom>
+          <a:solidFill>
+            <a:srgbClr val="2F6B4F"/>
+          </a:solidFill>
+          <a:ln>
+            <a:noFill/>
+          </a:ln>
+        </p:spPr>
+        <p:style>
+          <a:lnRef idx="1">
+            <a:schemeClr val="accent1"/>
+          </a:lnRef>
+          <a:fillRef idx="3">
+            <a:schemeClr val="accent1"/>
+          </a:fillRef>
+          <a:effectRef idx="2">
+            <a:schemeClr val="accent1"/>
+          </a:effectRef>
+          <a:fontRef idx="minor">
+            <a:schemeClr val="lt1"/>
+          </a:fontRef>
+        </p:style>
+        <p:txBody>
+          <a:bodyPr rtlCol="0" anchor="ctr"/>
+          <a:lstStyle/>
+          <a:p>
+            <a:pPr algn="ctr"/>
+          </a:p>
+        </p:txBody>
+      </p:sp>
+      <p:sp>
+        <p:nvSpPr>
+          <p:cNvPr id="3" name="TextBox 2"/>
+          <p:cNvSpPr txBox="1"/>
+          <p:nvPr/>
+        </p:nvSpPr>
+        <p:spPr>
+          <a:xfrm>
+            <a:off x="502920" y="292608"/>
+            <a:ext cx="8229600" cy="320040"/>
+          </a:xfrm>
+          <a:prstGeom prst="rect">
+            <a:avLst/>
+          </a:prstGeom>
+          <a:noFill/>
+        </p:spPr>
+        <p:txBody>
+          <a:bodyPr wrap="square" anchor="t">
+            <a:spAutoFit/>
+          </a:bodyPr>
+          <a:lstStyle/>
+          <a:p>
+            <a:pPr algn="l"/>
+            <a:r>
+              <a:rPr sz="1200" b="1">
+                <a:solidFill>
+                  <a:srgbClr val="2F6B4F"/>
+                </a:solidFill>
+              </a:rPr>
+              <a:t>USER &amp; FUNCTIONAL REQUIREMENTS</a:t>
+            </a:r>
+          </a:p>
+        </p:txBody>
+      </p:sp>
+      <p:sp>
+        <p:nvSpPr>
+          <p:cNvPr id="4" name="TextBox 3"/>
+          <p:cNvSpPr txBox="1"/>
+          <p:nvPr/>
+        </p:nvSpPr>
+        <p:spPr>
+          <a:xfrm>
+            <a:off x="502920" y="566928"/>
+            <a:ext cx="11247120" cy="731520"/>
+          </a:xfrm>
+          <a:prstGeom prst="rect">
+            <a:avLst/>
+          </a:prstGeom>
+          <a:noFill/>
+        </p:spPr>
+        <p:txBody>
+          <a:bodyPr wrap="square" anchor="t">
+            <a:spAutoFit/>
+          </a:bodyPr>
+          <a:lstStyle/>
+          <a:p>
+            <a:pPr algn="l"/>
+            <a:r>
+              <a:rPr sz="2800" b="1">
+                <a:solidFill>
+                  <a:srgbClr val="1F2A24"/>
+                </a:solidFill>
+              </a:rPr>
+              <a:t>Requirements and their status</a:t>
+            </a:r>
+          </a:p>
+        </p:txBody>
+      </p:sp>
+      <p:sp>
+        <p:nvSpPr>
+          <p:cNvPr id="5" name="TextBox 4"/>
+          <p:cNvSpPr txBox="1"/>
+          <p:nvPr/>
+        </p:nvSpPr>
+        <p:spPr>
+          <a:xfrm>
+            <a:off x="8961120" y="6446520"/>
+            <a:ext cx="3017520" cy="274320"/>
+          </a:xfrm>
+          <a:prstGeom prst="rect">
+            <a:avLst/>
+          </a:prstGeom>
+          <a:noFill/>
+        </p:spPr>
+        <p:txBody>
+          <a:bodyPr wrap="square" anchor="t">
+            <a:spAutoFit/>
+          </a:bodyPr>
+          <a:lstStyle/>
+          <a:p>
+            <a:pPr algn="r"/>
+            <a:r>
+              <a:rPr sz="900" b="0">
+                <a:solidFill>
+                  <a:srgbClr val="6B7280"/>
+                </a:solidFill>
+              </a:rPr>
+              <a:t>Component 4 · IT23343948 · 21</a:t>
             </a:r>
           </a:p>
         </p:txBody>
@@ -11294,7 +11752,7 @@
                             <a:srgbClr val="1F2A24"/>
                           </a:solidFill>
                         </a:rPr>
-                        <a:t>Partly</a:t>
+                        <a:t>Done</a:t>
                       </a:r>
                     </a:p>
                   </a:txBody>
@@ -11315,7 +11773,7 @@
                             <a:srgbClr val="1F2A24"/>
                           </a:solidFill>
                         </a:rPr>
-                        <a:t>versioned JSON + REST; schema with M3 next</a:t>
+                        <a:t>JSON Schema c4-module3-feed-1, /module3/feed</a:t>
                       </a:r>
                     </a:p>
                   </a:txBody>
@@ -12060,7 +12518,7 @@
 </p:sld>
 </file>
 
-<file path=ppt/slides/slide21.xml><?xml version="1.0" encoding="utf-8"?>
+<file path=ppt/slides/slide22.xml><?xml version="1.0" encoding="utf-8"?>
 <p:sld xmlns:a="http://schemas.openxmlformats.org/drawingml/2006/main" xmlns:p="http://schemas.openxmlformats.org/presentationml/2006/main" xmlns:r="http://schemas.openxmlformats.org/officeDocument/2006/relationships">
   <p:cSld>
     <p:spTree>
@@ -12210,7 +12668,7 @@
                   <a:srgbClr val="6B7280"/>
                 </a:solidFill>
               </a:rPr>
-              <a:t>Component 4 · IT23343948 · 21</a:t>
+              <a:t>Component 4 · IT23343948 · 22</a:t>
             </a:r>
           </a:p>
         </p:txBody>
@@ -13111,7 +13569,7 @@
 </p:sld>
 </file>
 
-<file path=ppt/slides/slide22.xml><?xml version="1.0" encoding="utf-8"?>
+<file path=ppt/slides/slide23.xml><?xml version="1.0" encoding="utf-8"?>
 <p:sld xmlns:a="http://schemas.openxmlformats.org/drawingml/2006/main" xmlns:p="http://schemas.openxmlformats.org/presentationml/2006/main" xmlns:r="http://schemas.openxmlformats.org/officeDocument/2006/relationships">
   <p:cSld>
     <p:spTree>
@@ -13261,7 +13719,7 @@
                   <a:srgbClr val="6B7280"/>
                 </a:solidFill>
               </a:rPr>
-              <a:t>Component 4 · IT23343948 · 22</a:t>
+              <a:t>Component 4 · IT23343948 · 23</a:t>
             </a:r>
           </a:p>
         </p:txBody>
@@ -13635,7 +14093,7 @@
 </p:sld>
 </file>
 
-<file path=ppt/slides/slide23.xml><?xml version="1.0" encoding="utf-8"?>
+<file path=ppt/slides/slide24.xml><?xml version="1.0" encoding="utf-8"?>
 <p:sld xmlns:a="http://schemas.openxmlformats.org/drawingml/2006/main" xmlns:p="http://schemas.openxmlformats.org/presentationml/2006/main" xmlns:r="http://schemas.openxmlformats.org/officeDocument/2006/relationships">
   <p:cSld>
     <p:spTree>
@@ -13785,7 +14243,7 @@
                   <a:srgbClr val="6B7280"/>
                 </a:solidFill>
               </a:rPr>
-              <a:t>Component 4 · IT23343948 · 23</a:t>
+              <a:t>Component 4 · IT23343948 · 24</a:t>
             </a:r>
           </a:p>
         </p:txBody>
@@ -14728,7 +15186,7 @@
                             <a:srgbClr val="1F2A24"/>
                           </a:solidFill>
                         </a:rPr>
-                        <a:t>Started</a:t>
+                        <a:t>Contract ready</a:t>
                       </a:r>
                     </a:p>
                   </a:txBody>
@@ -14749,7 +15207,7 @@
                             <a:srgbClr val="1F2A24"/>
                           </a:solidFill>
                         </a:rPr>
-                        <a:t>versioned JSON; schema with M3 in Nov</a:t>
+                        <a:t>JSON Schema + /module3/feed; M3 sign-off</a:t>
                       </a:r>
                     </a:p>
                   </a:txBody>
@@ -14944,7 +15402,7 @@
 </p:sld>
 </file>
 
-<file path=ppt/slides/slide24.xml><?xml version="1.0" encoding="utf-8"?>
+<file path=ppt/slides/slide25.xml><?xml version="1.0" encoding="utf-8"?>
 <p:sld xmlns:a="http://schemas.openxmlformats.org/drawingml/2006/main" xmlns:p="http://schemas.openxmlformats.org/presentationml/2006/main" xmlns:r="http://schemas.openxmlformats.org/officeDocument/2006/relationships">
   <p:cSld>
     <p:spTree>
@@ -15094,7 +15552,7 @@
                   <a:srgbClr val="6B7280"/>
                 </a:solidFill>
               </a:rPr>
-              <a:t>Component 4 · IT23343948 · 24</a:t>
+              <a:t>Component 4 · IT23343948 · 25</a:t>
             </a:r>
           </a:p>
         </p:txBody>
@@ -15415,7 +15873,7 @@
                             <a:srgbClr val="1F2A24"/>
                           </a:solidFill>
                         </a:rPr>
-                        <a:t>JSON Schema + contract tests with Module 3 (FR4); CHIRPS / NASA POWER (O1)</a:t>
+                        <a:t>Module 3 owner adopts the feed (schema ready, FR4); CHIRPS / NASA POWER (O1)</a:t>
                       </a:r>
                     </a:p>
                   </a:txBody>
@@ -15611,169 +16069,6 @@
                 </a:solidFill>
               </a:rPr>
               <a:t>Frozen until these are done: new screens, new parks, new booking features.</a:t>
-            </a:r>
-          </a:p>
-        </p:txBody>
-      </p:sp>
-    </p:spTree>
-  </p:cSld>
-  <p:clrMapOvr>
-    <a:masterClrMapping/>
-  </p:clrMapOvr>
-</p:sld>
-</file>
-
-<file path=ppt/slides/slide25.xml><?xml version="1.0" encoding="utf-8"?>
-<p:sld xmlns:a="http://schemas.openxmlformats.org/drawingml/2006/main" xmlns:p="http://schemas.openxmlformats.org/presentationml/2006/main" xmlns:r="http://schemas.openxmlformats.org/officeDocument/2006/relationships">
-  <p:cSld>
-    <p:spTree>
-      <p:nvGrpSpPr>
-        <p:cNvPr id="1" name=""/>
-        <p:cNvGrpSpPr/>
-        <p:nvPr/>
-      </p:nvGrpSpPr>
-      <p:grpSpPr/>
-      <p:sp>
-        <p:nvSpPr>
-          <p:cNvPr id="2" name="Rectangle 1"/>
-          <p:cNvSpPr/>
-          <p:nvPr/>
-        </p:nvSpPr>
-        <p:spPr>
-          <a:xfrm>
-            <a:off x="0" y="0"/>
-            <a:ext cx="12191695" cy="6858000"/>
-          </a:xfrm>
-          <a:prstGeom prst="rect">
-            <a:avLst/>
-          </a:prstGeom>
-          <a:solidFill>
-            <a:srgbClr val="1F2A24"/>
-          </a:solidFill>
-          <a:ln>
-            <a:noFill/>
-          </a:ln>
-        </p:spPr>
-        <p:style>
-          <a:lnRef idx="1">
-            <a:schemeClr val="accent1"/>
-          </a:lnRef>
-          <a:fillRef idx="3">
-            <a:schemeClr val="accent1"/>
-          </a:fillRef>
-          <a:effectRef idx="2">
-            <a:schemeClr val="accent1"/>
-          </a:effectRef>
-          <a:fontRef idx="minor">
-            <a:schemeClr val="lt1"/>
-          </a:fontRef>
-        </p:style>
-        <p:txBody>
-          <a:bodyPr rtlCol="0" anchor="ctr"/>
-          <a:lstStyle/>
-          <a:p>
-            <a:pPr algn="ctr"/>
-          </a:p>
-        </p:txBody>
-      </p:sp>
-      <p:sp>
-        <p:nvSpPr>
-          <p:cNvPr id="3" name="TextBox 2"/>
-          <p:cNvSpPr txBox="1"/>
-          <p:nvPr/>
-        </p:nvSpPr>
-        <p:spPr>
-          <a:xfrm>
-            <a:off x="731520" y="2194560"/>
-            <a:ext cx="10058400" cy="1097280"/>
-          </a:xfrm>
-          <a:prstGeom prst="rect">
-            <a:avLst/>
-          </a:prstGeom>
-          <a:noFill/>
-        </p:spPr>
-        <p:txBody>
-          <a:bodyPr wrap="square" anchor="t">
-            <a:spAutoFit/>
-          </a:bodyPr>
-          <a:lstStyle/>
-          <a:p>
-            <a:pPr algn="l"/>
-            <a:r>
-              <a:rPr sz="4800" b="1">
-                <a:solidFill>
-                  <a:srgbClr val="FFFFFF"/>
-                </a:solidFill>
-              </a:rPr>
-              <a:t>Thank you</a:t>
-            </a:r>
-          </a:p>
-        </p:txBody>
-      </p:sp>
-      <p:sp>
-        <p:nvSpPr>
-          <p:cNvPr id="4" name="TextBox 3"/>
-          <p:cNvSpPr txBox="1"/>
-          <p:nvPr/>
-        </p:nvSpPr>
-        <p:spPr>
-          <a:xfrm>
-            <a:off x="731520" y="3200400"/>
-            <a:ext cx="10058400" cy="731520"/>
-          </a:xfrm>
-          <a:prstGeom prst="rect">
-            <a:avLst/>
-          </a:prstGeom>
-          <a:noFill/>
-        </p:spPr>
-        <p:txBody>
-          <a:bodyPr wrap="square" anchor="t">
-            <a:spAutoFit/>
-          </a:bodyPr>
-          <a:lstStyle/>
-          <a:p>
-            <a:pPr algn="l"/>
-            <a:r>
-              <a:rPr sz="2600" b="0">
-                <a:solidFill>
-                  <a:srgbClr val="E0A100"/>
-                </a:solidFill>
-              </a:rPr>
-              <a:t>Questions?</a:t>
-            </a:r>
-          </a:p>
-        </p:txBody>
-      </p:sp>
-      <p:sp>
-        <p:nvSpPr>
-          <p:cNvPr id="5" name="TextBox 4"/>
-          <p:cNvSpPr txBox="1"/>
-          <p:nvPr/>
-        </p:nvSpPr>
-        <p:spPr>
-          <a:xfrm>
-            <a:off x="731520" y="5120640"/>
-            <a:ext cx="10058400" cy="457200"/>
-          </a:xfrm>
-          <a:prstGeom prst="rect">
-            <a:avLst/>
-          </a:prstGeom>
-          <a:noFill/>
-        </p:spPr>
-        <p:txBody>
-          <a:bodyPr wrap="square" anchor="t">
-            <a:spAutoFit/>
-          </a:bodyPr>
-          <a:lstStyle/>
-          <a:p>
-            <a:pPr algn="l"/>
-            <a:r>
-              <a:rPr sz="1600" b="0">
-                <a:solidFill>
-                  <a:srgbClr val="CFE3D7"/>
-                </a:solidFill>
-              </a:rPr>
-              <a:t>Weerasekera J.V. · IT23343948 · Component 4</a:t>
             </a:r>
           </a:p>
         </p:txBody>
@@ -15805,13 +16100,13 @@
         <p:spPr>
           <a:xfrm>
             <a:off x="0" y="0"/>
-            <a:ext cx="164592" cy="6858000"/>
+            <a:ext cx="12191695" cy="6858000"/>
           </a:xfrm>
           <a:prstGeom prst="rect">
             <a:avLst/>
           </a:prstGeom>
           <a:solidFill>
-            <a:srgbClr val="2F6B4F"/>
+            <a:srgbClr val="1F2A24"/>
           </a:solidFill>
           <a:ln>
             <a:noFill/>
@@ -15847,8 +16142,8 @@
         </p:nvSpPr>
         <p:spPr>
           <a:xfrm>
-            <a:off x="502920" y="292608"/>
-            <a:ext cx="8229600" cy="320040"/>
+            <a:off x="731520" y="2194560"/>
+            <a:ext cx="10058400" cy="1097280"/>
           </a:xfrm>
           <a:prstGeom prst="rect">
             <a:avLst/>
@@ -15863,12 +16158,12 @@
           <a:p>
             <a:pPr algn="l"/>
             <a:r>
-              <a:rPr sz="1200" b="1">
-                <a:solidFill>
-                  <a:srgbClr val="2F6B4F"/>
-                </a:solidFill>
-              </a:rPr>
-              <a:t>BACKUP</a:t>
+              <a:rPr sz="4800" b="1">
+                <a:solidFill>
+                  <a:srgbClr val="FFFFFF"/>
+                </a:solidFill>
+              </a:rPr>
+              <a:t>Thank you</a:t>
             </a:r>
           </a:p>
         </p:txBody>
@@ -15881,8 +16176,8 @@
         </p:nvSpPr>
         <p:spPr>
           <a:xfrm>
-            <a:off x="502920" y="566928"/>
-            <a:ext cx="11247120" cy="731520"/>
+            <a:off x="731520" y="3200400"/>
+            <a:ext cx="10058400" cy="731520"/>
           </a:xfrm>
           <a:prstGeom prst="rect">
             <a:avLst/>
@@ -15897,12 +16192,12 @@
           <a:p>
             <a:pPr algn="l"/>
             <a:r>
-              <a:rPr sz="2800" b="1">
-                <a:solidFill>
-                  <a:srgbClr val="1F2A24"/>
-                </a:solidFill>
-              </a:rPr>
-              <a:t>Backup – Limitations (stated before you are asked)</a:t>
+              <a:rPr sz="2600" b="0">
+                <a:solidFill>
+                  <a:srgbClr val="E0A100"/>
+                </a:solidFill>
+              </a:rPr>
+              <a:t>Questions?</a:t>
             </a:r>
           </a:p>
         </p:txBody>
@@ -15915,8 +16210,8 @@
         </p:nvSpPr>
         <p:spPr>
           <a:xfrm>
-            <a:off x="8961120" y="6446520"/>
-            <a:ext cx="3017520" cy="274320"/>
+            <a:off x="731520" y="5120640"/>
+            <a:ext cx="10058400" cy="457200"/>
           </a:xfrm>
           <a:prstGeom prst="rect">
             <a:avLst/>
@@ -15929,6 +16224,169 @@
           </a:bodyPr>
           <a:lstStyle/>
           <a:p>
+            <a:pPr algn="l"/>
+            <a:r>
+              <a:rPr sz="1600" b="0">
+                <a:solidFill>
+                  <a:srgbClr val="CFE3D7"/>
+                </a:solidFill>
+              </a:rPr>
+              <a:t>Weerasekera J.V. · IT23343948 · Component 4</a:t>
+            </a:r>
+          </a:p>
+        </p:txBody>
+      </p:sp>
+    </p:spTree>
+  </p:cSld>
+  <p:clrMapOvr>
+    <a:masterClrMapping/>
+  </p:clrMapOvr>
+</p:sld>
+</file>
+
+<file path=ppt/slides/slide27.xml><?xml version="1.0" encoding="utf-8"?>
+<p:sld xmlns:a="http://schemas.openxmlformats.org/drawingml/2006/main" xmlns:p="http://schemas.openxmlformats.org/presentationml/2006/main" xmlns:r="http://schemas.openxmlformats.org/officeDocument/2006/relationships">
+  <p:cSld>
+    <p:spTree>
+      <p:nvGrpSpPr>
+        <p:cNvPr id="1" name=""/>
+        <p:cNvGrpSpPr/>
+        <p:nvPr/>
+      </p:nvGrpSpPr>
+      <p:grpSpPr/>
+      <p:sp>
+        <p:nvSpPr>
+          <p:cNvPr id="2" name="Rectangle 1"/>
+          <p:cNvSpPr/>
+          <p:nvPr/>
+        </p:nvSpPr>
+        <p:spPr>
+          <a:xfrm>
+            <a:off x="0" y="0"/>
+            <a:ext cx="164592" cy="6858000"/>
+          </a:xfrm>
+          <a:prstGeom prst="rect">
+            <a:avLst/>
+          </a:prstGeom>
+          <a:solidFill>
+            <a:srgbClr val="2F6B4F"/>
+          </a:solidFill>
+          <a:ln>
+            <a:noFill/>
+          </a:ln>
+        </p:spPr>
+        <p:style>
+          <a:lnRef idx="1">
+            <a:schemeClr val="accent1"/>
+          </a:lnRef>
+          <a:fillRef idx="3">
+            <a:schemeClr val="accent1"/>
+          </a:fillRef>
+          <a:effectRef idx="2">
+            <a:schemeClr val="accent1"/>
+          </a:effectRef>
+          <a:fontRef idx="minor">
+            <a:schemeClr val="lt1"/>
+          </a:fontRef>
+        </p:style>
+        <p:txBody>
+          <a:bodyPr rtlCol="0" anchor="ctr"/>
+          <a:lstStyle/>
+          <a:p>
+            <a:pPr algn="ctr"/>
+          </a:p>
+        </p:txBody>
+      </p:sp>
+      <p:sp>
+        <p:nvSpPr>
+          <p:cNvPr id="3" name="TextBox 2"/>
+          <p:cNvSpPr txBox="1"/>
+          <p:nvPr/>
+        </p:nvSpPr>
+        <p:spPr>
+          <a:xfrm>
+            <a:off x="502920" y="292608"/>
+            <a:ext cx="8229600" cy="320040"/>
+          </a:xfrm>
+          <a:prstGeom prst="rect">
+            <a:avLst/>
+          </a:prstGeom>
+          <a:noFill/>
+        </p:spPr>
+        <p:txBody>
+          <a:bodyPr wrap="square" anchor="t">
+            <a:spAutoFit/>
+          </a:bodyPr>
+          <a:lstStyle/>
+          <a:p>
+            <a:pPr algn="l"/>
+            <a:r>
+              <a:rPr sz="1200" b="1">
+                <a:solidFill>
+                  <a:srgbClr val="2F6B4F"/>
+                </a:solidFill>
+              </a:rPr>
+              <a:t>BACKUP</a:t>
+            </a:r>
+          </a:p>
+        </p:txBody>
+      </p:sp>
+      <p:sp>
+        <p:nvSpPr>
+          <p:cNvPr id="4" name="TextBox 3"/>
+          <p:cNvSpPr txBox="1"/>
+          <p:nvPr/>
+        </p:nvSpPr>
+        <p:spPr>
+          <a:xfrm>
+            <a:off x="502920" y="566928"/>
+            <a:ext cx="11247120" cy="731520"/>
+          </a:xfrm>
+          <a:prstGeom prst="rect">
+            <a:avLst/>
+          </a:prstGeom>
+          <a:noFill/>
+        </p:spPr>
+        <p:txBody>
+          <a:bodyPr wrap="square" anchor="t">
+            <a:spAutoFit/>
+          </a:bodyPr>
+          <a:lstStyle/>
+          <a:p>
+            <a:pPr algn="l"/>
+            <a:r>
+              <a:rPr sz="2800" b="1">
+                <a:solidFill>
+                  <a:srgbClr val="1F2A24"/>
+                </a:solidFill>
+              </a:rPr>
+              <a:t>Backup – Limitations (stated before you are asked)</a:t>
+            </a:r>
+          </a:p>
+        </p:txBody>
+      </p:sp>
+      <p:sp>
+        <p:nvSpPr>
+          <p:cNvPr id="5" name="TextBox 4"/>
+          <p:cNvSpPr txBox="1"/>
+          <p:nvPr/>
+        </p:nvSpPr>
+        <p:spPr>
+          <a:xfrm>
+            <a:off x="8961120" y="6446520"/>
+            <a:ext cx="3017520" cy="274320"/>
+          </a:xfrm>
+          <a:prstGeom prst="rect">
+            <a:avLst/>
+          </a:prstGeom>
+          <a:noFill/>
+        </p:spPr>
+        <p:txBody>
+          <a:bodyPr wrap="square" anchor="t">
+            <a:spAutoFit/>
+          </a:bodyPr>
+          <a:lstStyle/>
+          <a:p>
             <a:pPr algn="r"/>
             <a:r>
               <a:rPr sz="900" b="0">
@@ -15936,7 +16394,7 @@
                   <a:srgbClr val="6B7280"/>
                 </a:solidFill>
               </a:rPr>
-              <a:t>Component 4 · IT23343948 · 26</a:t>
+              <a:t>Component 4 · IT23343948 · 27</a:t>
             </a:r>
           </a:p>
         </p:txBody>

--- a/research/component_4/docs/slides/PP1_Component4.pptx
+++ b/research/component_4/docs/slides/PP1_Component4.pptx
@@ -9062,7 +9062,7 @@
                   <a:srgbClr val="1F2A24"/>
                 </a:solidFill>
               </a:rPr>
-              <a:t>Tomorrow, hour by hour:</a:t>
+              <a:t>Today + 6 days, hour by hour:</a:t>
             </a:r>
           </a:p>
           <a:p>
@@ -9254,7 +9254,7 @@
                   <a:srgbClr val="1F2A24"/>
                 </a:solidFill>
               </a:rPr>
-              <a:t>•  Offline:</a:t>
+              <a:t>•  A week, offline:</a:t>
             </a:r>
             <a:r>
               <a:rPr sz="1500">
@@ -9262,7 +9262,7 @@
                   <a:srgbClr val="1F2A24"/>
                 </a:solidFill>
               </a:rPr>
-              <a:t>  drawn from the forecast the phone computes itself (RQ6)</a:t>
+              <a:t>  today and tomorrow forecast by the ST-GNN on the phone (RQ6); days 3-7 from the planning model, saved</a:t>
             </a:r>
           </a:p>
           <a:p>

--- a/research/component_4/docs/slides/PP1_Component4.pptx
+++ b/research/component_4/docs/slides/PP1_Component4.pptx
@@ -32,6 +32,7 @@
     <p:sldId id="280" r:id="rId32"/>
     <p:sldId id="281" r:id="rId33"/>
     <p:sldId id="282" r:id="rId34"/>
+    <p:sldId id="283" r:id="rId35"/>
   </p:sldIdLst>
   <p:sldSz cx="12191695" cy="6858000" type="screen4x3"/>
   <p:notesSz cx="6858000" cy="9144000"/>
@@ -1859,6 +1860,76 @@
           <a:p>
             <a:r>
               <a:t>Use if asked about the synthetic data or validity.</a:t>
+            </a:r>
+          </a:p>
+        </p:txBody>
+      </p:sp>
+      <p:sp>
+        <p:nvSpPr>
+          <p:cNvPr id="4" name="Slide Number Placeholder 3"/>
+          <p:cNvSpPr>
+            <a:spLocks noGrp="1"/>
+          </p:cNvSpPr>
+          <p:nvPr>
+            <p:ph type="sldNum" idx="5" sz="quarter"/>
+          </p:nvPr>
+        </p:nvSpPr>
+        <p:spPr/>
+      </p:sp>
+    </p:spTree>
+  </p:cSld>
+  <p:clrMapOvr>
+    <a:masterClrMapping/>
+  </p:clrMapOvr>
+</p:notes>
+</file>
+
+<file path=ppt/notesSlides/notesSlide28.xml><?xml version="1.0" encoding="utf-8"?>
+<p:notes xmlns:a="http://schemas.openxmlformats.org/drawingml/2006/main" xmlns:p="http://schemas.openxmlformats.org/presentationml/2006/main" xmlns:r="http://schemas.openxmlformats.org/officeDocument/2006/relationships">
+  <p:cSld>
+    <p:spTree>
+      <p:nvGrpSpPr>
+        <p:cNvPr id="1" name=""/>
+        <p:cNvGrpSpPr/>
+        <p:nvPr/>
+      </p:nvGrpSpPr>
+      <p:grpSpPr>
+        <a:xfrm>
+          <a:off x="0" y="0"/>
+          <a:ext cx="0" cy="0"/>
+          <a:chOff x="0" y="0"/>
+          <a:chExt cx="0" cy="0"/>
+        </a:xfrm>
+      </p:grpSpPr>
+      <p:sp>
+        <p:nvSpPr>
+          <p:cNvPr id="2" name="Slide Image Placeholder 1"/>
+          <p:cNvSpPr>
+            <a:spLocks noGrp="1"/>
+          </p:cNvSpPr>
+          <p:nvPr>
+            <p:ph type="sldImg" idx="2"/>
+          </p:nvPr>
+        </p:nvSpPr>
+        <p:spPr/>
+      </p:sp>
+      <p:sp>
+        <p:nvSpPr>
+          <p:cNvPr id="3" name="Notes Placeholder 2"/>
+          <p:cNvSpPr>
+            <a:spLocks noGrp="1"/>
+          </p:cNvSpPr>
+          <p:nvPr>
+            <p:ph type="body" idx="3" sz="quarter"/>
+          </p:nvPr>
+        </p:nvSpPr>
+        <p:spPr/>
+        <p:txBody>
+          <a:bodyPr/>
+          <a:lstStyle/>
+          <a:p>
+            <a:r>
+              <a:t>For keeping records: visitors per day for any trail and date range - the past (DWC total or the estimate, labelled), today, and the forecast with its range - next to this system's own counts (bookings, gate, halfway) and the day's safe limit. Red = above the safe limit. Copy as CSV, or GET /admin/records?format=csv for Excel. Officers only. (~30 s)</a:t>
             </a:r>
           </a:p>
         </p:txBody>
@@ -16579,6 +16650,336 @@
                 </a:solidFill>
               </a:rPr>
               <a:t>  daily totals no better than the calendar average (MAE ≈ 110 vs 108); segment-hour occupancy better (1.44 vs 1.65)</a:t>
+            </a:r>
+          </a:p>
+        </p:txBody>
+      </p:sp>
+    </p:spTree>
+  </p:cSld>
+  <p:clrMapOvr>
+    <a:masterClrMapping/>
+  </p:clrMapOvr>
+</p:sld>
+</file>
+
+<file path=ppt/slides/slide28.xml><?xml version="1.0" encoding="utf-8"?>
+<p:sld xmlns:a="http://schemas.openxmlformats.org/drawingml/2006/main" xmlns:p="http://schemas.openxmlformats.org/presentationml/2006/main" xmlns:r="http://schemas.openxmlformats.org/officeDocument/2006/relationships">
+  <p:cSld>
+    <p:spTree>
+      <p:nvGrpSpPr>
+        <p:cNvPr id="1" name=""/>
+        <p:cNvGrpSpPr/>
+        <p:nvPr/>
+      </p:nvGrpSpPr>
+      <p:grpSpPr/>
+      <p:sp>
+        <p:nvSpPr>
+          <p:cNvPr id="2" name="Rectangle 1"/>
+          <p:cNvSpPr/>
+          <p:nvPr/>
+        </p:nvSpPr>
+        <p:spPr>
+          <a:xfrm>
+            <a:off x="0" y="0"/>
+            <a:ext cx="164592" cy="6858000"/>
+          </a:xfrm>
+          <a:prstGeom prst="rect">
+            <a:avLst/>
+          </a:prstGeom>
+          <a:solidFill>
+            <a:srgbClr val="2F6B4F"/>
+          </a:solidFill>
+          <a:ln>
+            <a:noFill/>
+          </a:ln>
+        </p:spPr>
+        <p:style>
+          <a:lnRef idx="1">
+            <a:schemeClr val="accent1"/>
+          </a:lnRef>
+          <a:fillRef idx="3">
+            <a:schemeClr val="accent1"/>
+          </a:fillRef>
+          <a:effectRef idx="2">
+            <a:schemeClr val="accent1"/>
+          </a:effectRef>
+          <a:fontRef idx="minor">
+            <a:schemeClr val="lt1"/>
+          </a:fontRef>
+        </p:style>
+        <p:txBody>
+          <a:bodyPr rtlCol="0" anchor="ctr"/>
+          <a:lstStyle/>
+          <a:p>
+            <a:pPr algn="ctr"/>
+          </a:p>
+        </p:txBody>
+      </p:sp>
+      <p:sp>
+        <p:nvSpPr>
+          <p:cNvPr id="3" name="TextBox 2"/>
+          <p:cNvSpPr txBox="1"/>
+          <p:nvPr/>
+        </p:nvSpPr>
+        <p:spPr>
+          <a:xfrm>
+            <a:off x="502920" y="292608"/>
+            <a:ext cx="8229600" cy="320040"/>
+          </a:xfrm>
+          <a:prstGeom prst="rect">
+            <a:avLst/>
+          </a:prstGeom>
+          <a:noFill/>
+        </p:spPr>
+        <p:txBody>
+          <a:bodyPr wrap="square" anchor="t">
+            <a:spAutoFit/>
+          </a:bodyPr>
+          <a:lstStyle/>
+          <a:p>
+            <a:pPr algn="l"/>
+            <a:r>
+              <a:rPr sz="1200" b="1">
+                <a:solidFill>
+                  <a:srgbClr val="2F6B4F"/>
+                </a:solidFill>
+              </a:rPr>
+              <a:t>BACKUP</a:t>
+            </a:r>
+          </a:p>
+        </p:txBody>
+      </p:sp>
+      <p:sp>
+        <p:nvSpPr>
+          <p:cNvPr id="4" name="TextBox 3"/>
+          <p:cNvSpPr txBox="1"/>
+          <p:nvPr/>
+        </p:nvSpPr>
+        <p:spPr>
+          <a:xfrm>
+            <a:off x="502920" y="566928"/>
+            <a:ext cx="11247120" cy="731520"/>
+          </a:xfrm>
+          <a:prstGeom prst="rect">
+            <a:avLst/>
+          </a:prstGeom>
+          <a:noFill/>
+        </p:spPr>
+        <p:txBody>
+          <a:bodyPr wrap="square" anchor="t">
+            <a:spAutoFit/>
+          </a:bodyPr>
+          <a:lstStyle/>
+          <a:p>
+            <a:pPr algn="l"/>
+            <a:r>
+              <a:rPr sz="2800" b="1">
+                <a:solidFill>
+                  <a:srgbClr val="1F2A24"/>
+                </a:solidFill>
+              </a:rPr>
+              <a:t>Backup – Officer records: past, today and the week ahead</a:t>
+            </a:r>
+          </a:p>
+        </p:txBody>
+      </p:sp>
+      <p:sp>
+        <p:nvSpPr>
+          <p:cNvPr id="5" name="TextBox 4"/>
+          <p:cNvSpPr txBox="1"/>
+          <p:nvPr/>
+        </p:nvSpPr>
+        <p:spPr>
+          <a:xfrm>
+            <a:off x="8961120" y="6446520"/>
+            <a:ext cx="3017520" cy="274320"/>
+          </a:xfrm>
+          <a:prstGeom prst="rect">
+            <a:avLst/>
+          </a:prstGeom>
+          <a:noFill/>
+        </p:spPr>
+        <p:txBody>
+          <a:bodyPr wrap="square" anchor="t">
+            <a:spAutoFit/>
+          </a:bodyPr>
+          <a:lstStyle/>
+          <a:p>
+            <a:pPr algn="r"/>
+            <a:r>
+              <a:rPr sz="900" b="0">
+                <a:solidFill>
+                  <a:srgbClr val="6B7280"/>
+                </a:solidFill>
+              </a:rPr>
+              <a:t>Component 4 · IT23343948 · 28</a:t>
+            </a:r>
+          </a:p>
+        </p:txBody>
+      </p:sp>
+      <p:pic>
+        <p:nvPicPr>
+          <p:cNvPr id="6" name="Picture 5" descr="14_records.png"/>
+          <p:cNvPicPr>
+            <a:picLocks noChangeAspect="1"/>
+          </p:cNvPicPr>
+          <p:nvPr/>
+        </p:nvPicPr>
+        <p:blipFill>
+          <a:blip r:embed="rId3"/>
+          <a:stretch>
+            <a:fillRect/>
+          </a:stretch>
+        </p:blipFill>
+        <p:spPr>
+          <a:xfrm>
+            <a:off x="502920" y="1325880"/>
+            <a:ext cx="2319807" cy="5029200"/>
+          </a:xfrm>
+          <a:prstGeom prst="rect">
+            <a:avLst/>
+          </a:prstGeom>
+          <a:ln>
+            <a:solidFill>
+              <a:srgbClr val="C9D3CD"/>
+            </a:solidFill>
+          </a:ln>
+        </p:spPr>
+      </p:pic>
+      <p:sp>
+        <p:nvSpPr>
+          <p:cNvPr id="7" name="TextBox 6"/>
+          <p:cNvSpPr txBox="1"/>
+          <p:nvPr/>
+        </p:nvSpPr>
+        <p:spPr>
+          <a:xfrm>
+            <a:off x="3108960" y="1463040"/>
+            <a:ext cx="8778240" cy="4572000"/>
+          </a:xfrm>
+          <a:prstGeom prst="rect">
+            <a:avLst/>
+          </a:prstGeom>
+          <a:noFill/>
+        </p:spPr>
+        <p:txBody>
+          <a:bodyPr wrap="square">
+            <a:spAutoFit/>
+          </a:bodyPr>
+          <a:lstStyle/>
+          <a:p>
+            <a:pPr>
+              <a:spcAft>
+                <a:spcPts val="1200"/>
+              </a:spcAft>
+            </a:pPr>
+            <a:r>
+              <a:rPr sz="1500" b="1">
+                <a:solidFill>
+                  <a:srgbClr val="1F2A24"/>
+                </a:solidFill>
+              </a:rPr>
+              <a:t>•  Daily, per trail:</a:t>
+            </a:r>
+            <a:r>
+              <a:rPr sz="1500">
+                <a:solidFill>
+                  <a:srgbClr val="1F2A24"/>
+                </a:solidFill>
+              </a:rPr>
+              <a:t>  past · today · future, filter by trail and by date range (presets or any range)</a:t>
+            </a:r>
+          </a:p>
+          <a:p>
+            <a:pPr>
+              <a:spcAft>
+                <a:spcPts val="1200"/>
+              </a:spcAft>
+            </a:pPr>
+            <a:r>
+              <a:rPr sz="1500" b="1">
+                <a:solidFill>
+                  <a:srgbClr val="1F2A24"/>
+                </a:solidFill>
+              </a:rPr>
+              <a:t>•  Past:</a:t>
+            </a:r>
+            <a:r>
+              <a:rPr sz="1500">
+                <a:solidFill>
+                  <a:srgbClr val="1F2A24"/>
+                </a:solidFill>
+              </a:rPr>
+              <a:t>  DWC daily total when connected, otherwise the estimate simulated with the real weather (labelled)</a:t>
+            </a:r>
+          </a:p>
+          <a:p>
+            <a:pPr>
+              <a:spcAft>
+                <a:spcPts val="1200"/>
+              </a:spcAft>
+            </a:pPr>
+            <a:r>
+              <a:rPr sz="1500" b="1">
+                <a:solidFill>
+                  <a:srgbClr val="1F2A24"/>
+                </a:solidFill>
+              </a:rPr>
+              <a:t>•  Future:</a:t>
+            </a:r>
+            <a:r>
+              <a:rPr sz="1500">
+                <a:solidFill>
+                  <a:srgbClr val="1F2A24"/>
+                </a:solidFill>
+              </a:rPr>
+              <a:t>  planning-model forecast with its likely range (P10–P90)</a:t>
+            </a:r>
+          </a:p>
+          <a:p>
+            <a:pPr>
+              <a:spcAft>
+                <a:spcPts val="1200"/>
+              </a:spcAft>
+            </a:pPr>
+            <a:r>
+              <a:rPr sz="1500" b="1">
+                <a:solidFill>
+                  <a:srgbClr val="1F2A24"/>
+                </a:solidFill>
+              </a:rPr>
+              <a:t>•  Own records:</a:t>
+            </a:r>
+            <a:r>
+              <a:rPr sz="1500">
+                <a:solidFill>
+                  <a:srgbClr val="1F2A24"/>
+                </a:solidFill>
+              </a:rPr>
+              <a:t>  booked, checked in at the gate, walk-ins, halfway counts, the day's safe limit</a:t>
+            </a:r>
+          </a:p>
+          <a:p>
+            <a:pPr>
+              <a:spcAft>
+                <a:spcPts val="1200"/>
+              </a:spcAft>
+            </a:pPr>
+            <a:r>
+              <a:rPr sz="1500" b="1">
+                <a:solidFill>
+                  <a:srgbClr val="1F2A24"/>
+                </a:solidFill>
+              </a:rPr>
+              <a:t>•  Keep:</a:t>
+            </a:r>
+            <a:r>
+              <a:rPr sz="1500">
+                <a:solidFill>
+                  <a:srgbClr val="1F2A24"/>
+                </a:solidFill>
+              </a:rPr>
+              <a:t>  copy as CSV in the app, or /admin/records?format=csv (Excel); works offline from the last copy</a:t>
             </a:r>
           </a:p>
         </p:txBody>

--- a/research/component_4/docs/slides/PP1_Component4.pptx
+++ b/research/component_4/docs/slides/PP1_Component4.pptx
@@ -7,32 +7,36 @@
   <p:sldIdLst>
     <p:sldId id="256" r:id="rId7"/>
     <p:sldId id="257" r:id="rId9"/>
+    <p:sldId id="281" r:id="rId33"/>
     <p:sldId id="258" r:id="rId10"/>
     <p:sldId id="259" r:id="rId11"/>
-    <p:sldId id="260" r:id="rId12"/>
     <p:sldId id="261" r:id="rId13"/>
     <p:sldId id="262" r:id="rId14"/>
     <p:sldId id="263" r:id="rId15"/>
-    <p:sldId id="264" r:id="rId16"/>
+    <p:sldId id="282" r:id="rId34"/>
+    <p:sldId id="283" r:id="rId35"/>
     <p:sldId id="265" r:id="rId17"/>
     <p:sldId id="266" r:id="rId18"/>
-    <p:sldId id="267" r:id="rId19"/>
-    <p:sldId id="268" r:id="rId20"/>
     <p:sldId id="269" r:id="rId21"/>
     <p:sldId id="270" r:id="rId22"/>
+    <p:sldId id="272" r:id="rId24"/>
+    <p:sldId id="284" r:id="rId36"/>
     <p:sldId id="271" r:id="rId23"/>
-    <p:sldId id="272" r:id="rId24"/>
-    <p:sldId id="273" r:id="rId25"/>
-    <p:sldId id="274" r:id="rId26"/>
-    <p:sldId id="275" r:id="rId27"/>
     <p:sldId id="276" r:id="rId28"/>
     <p:sldId id="277" r:id="rId29"/>
     <p:sldId id="278" r:id="rId30"/>
     <p:sldId id="279" r:id="rId31"/>
     <p:sldId id="280" r:id="rId32"/>
-    <p:sldId id="281" r:id="rId33"/>
-    <p:sldId id="282" r:id="rId34"/>
-    <p:sldId id="283" r:id="rId35"/>
+    <p:sldId id="285" r:id="rId37"/>
+    <p:sldId id="260" r:id="rId12"/>
+    <p:sldId id="264" r:id="rId16"/>
+    <p:sldId id="267" r:id="rId19"/>
+    <p:sldId id="268" r:id="rId20"/>
+    <p:sldId id="273" r:id="rId25"/>
+    <p:sldId id="274" r:id="rId26"/>
+    <p:sldId id="275" r:id="rId27"/>
+    <p:sldId id="286" r:id="rId38"/>
+    <p:sldId id="287" r:id="rId39"/>
   </p:sldIdLst>
   <p:sldSz cx="12191695" cy="6858000" type="screen4x3"/>
   <p:notesSz cx="6858000" cy="9144000"/>
@@ -879,7 +883,7 @@
           <a:lstStyle/>
           <a:p>
             <a:r>
-              <a:t>Proposal objective O3. Same ST-GNN core pretrained on METR-LA (207 sensors) then PEMS-BAY (325), target = congestion. Then three ways to use it at each park, 3 seeds, paired tests over 365 test days. Answer: only at Horton Plains, only with 30-90 days of counts (−5 % and −12 % vs scratch, p &lt; 0.001). Not at Adam's Peak - a night pilgrimage with a summit queue looks nothing like road traffic. Zero-shot fails everywhere. With a full year the pretrained start slightly hurts (negative transfer). Honest, publishable answer to the gap. Next: freeze layers / gradual unfreezing and PeMS04/08. (~75 s)</a:t>
+              <a:t>Proposal objective O3. Same ST-GNN core pretrained on METR-LA (207 sensors) then PEMS-BAY (325), target = congestion. Then three ways to use it at each park, 3 seeds, paired tests over 365 test days. Answer: only at Horton Plains, only with 30-90 days of counts (−5 % and −12 % vs scratch, p &lt; 0.001). Not at Adam's Peak - a night pilgrimage with a summit queue looks nothing like road traffic. Zero-shot fails everywhere. With a full year the pretrained start slightly hurts (negative transfer). Honest, publishable answer to the gap. Freezing the core (domain adaptation) was added: it helps only Horton at 365 days. Next: the same test where SENSORS are scarce (only gate counts), PeMS04/08, and one adversarial method. (~60 s)</a:t>
             </a:r>
           </a:p>
         </p:txBody>
@@ -1439,7 +1443,7 @@
           <a:lstStyle/>
           <a:p>
             <a:r>
-              <a:t>Numbered exactly as in the proposal (section 5). Two are partial and say why: FR4 needs the data contract agreed with Module 3, NFR1 is measured on a laptop and in the Dart engine but not yet on a real phone. Extensions beyond the proposal are listed separately. Requirements are still provisional until the surveys come back - say this before you are asked. (~45 s)</a:t>
+              <a:t>Numbered exactly as in the proposal (section 5). Two are partial and say why: FR4 needs the data contract agreed with Module 3, NFR1 is measured on a laptop and in the Dart engine but not yet on a real phone. FR6-FR13 were added during the build; every requirement is traced to its code, test and result in docs/requirements.md. Requirements are still provisional until the surveys come back - say this before you are asked. (~45 s)</a:t>
             </a:r>
           </a:p>
         </p:txBody>
@@ -1789,7 +1793,7 @@
           <a:lstStyle/>
           <a:p>
             <a:r>
-              <a:t>Backup slides follow: limitations, planning model.</a:t>
+              <a:t>Section 1.3 of the proposal, split into five claims an examiner can check. This is the honest map of where the evidence stands today: C5 (forecast to capacity beats a static quota) and C4 (works with no sensor record) are shown; C1 (the graph adds value) and C3 (bottlenecks) are only partly shown; C2 (traffic pretraining) has a mostly negative but clear answer. The next phase tests each claim in the gap's own setting, and the December counts validate the target. (~60 s)</a:t>
             </a:r>
           </a:p>
         </p:txBody>
@@ -1859,7 +1863,7 @@
           <a:lstStyle/>
           <a:p>
             <a:r>
-              <a:t>Use if asked about the synthetic data or validity.</a:t>
+              <a:t>The gap says 'no historical sensor record'. A real park only knows who passes the gate (bookings, check-ins, walk-ins). So the model is trained on the calibrated simulation of every segment, but as input it sees only the gate counts - or nothing at all. Result: interior error is almost the same as with a counter on every segment, at both parks, and far better than the historical average. But the graph and the gate counts add nothing here, and the reason matters: in the default simulator a day's crowd is fully set by calendar + weather. So I built a realistic world (S1) with tour-bus bursts, busy spells, shifted peaks, incidents and forecast weather; that run is going now. (~60 s)</a:t>
             </a:r>
           </a:p>
         </p:txBody>
@@ -1929,7 +1933,77 @@
           <a:lstStyle/>
           <a:p>
             <a:r>
-              <a:t>For keeping records: visitors per day for any trail and date range - the past (DWC total or the estimate, labelled), today, and the forecast with its range - next to this system's own counts (bookings, gate, halfway) and the day's safe limit. Red = above the safe limit. Copy as CSV, or GET /admin/records?format=csv for Excel. Officers only. (~30 s)</a:t>
+              <a:t>This is the proposal's promise: replace the static quota with a forecast-driven capacity. Every rule is tuned to admit exactly as many visitors as the static quota, so only WHO gets in on WHICH day changes. Feeding the ST-GNN forecast into Cifuentes cuts over-capacity time by 27 % at Horton and 24 % at Adam's Peak. At Adam's Peak it is significant against static, weather-only and a historical-average forecast. At Horton the historical average does as well, and per-day tests are not significant: most days change little. Lesson: no daily number stops crowding on most days, because crowding is about WHEN people walk - so the forecast also drives the slot tickets and gate advice. (~75 s)</a:t>
+            </a:r>
+          </a:p>
+        </p:txBody>
+      </p:sp>
+      <p:sp>
+        <p:nvSpPr>
+          <p:cNvPr id="4" name="Slide Number Placeholder 3"/>
+          <p:cNvSpPr>
+            <a:spLocks noGrp="1"/>
+          </p:cNvSpPr>
+          <p:nvPr>
+            <p:ph type="sldNum" idx="5" sz="quarter"/>
+          </p:nvPr>
+        </p:nvSpPr>
+        <p:spPr/>
+      </p:sp>
+    </p:spTree>
+  </p:cSld>
+  <p:clrMapOvr>
+    <a:masterClrMapping/>
+  </p:clrMapOvr>
+</p:notes>
+</file>
+
+<file path=ppt/notesSlides/notesSlide29.xml><?xml version="1.0" encoding="utf-8"?>
+<p:notes xmlns:a="http://schemas.openxmlformats.org/drawingml/2006/main" xmlns:p="http://schemas.openxmlformats.org/presentationml/2006/main" xmlns:r="http://schemas.openxmlformats.org/officeDocument/2006/relationships">
+  <p:cSld>
+    <p:spTree>
+      <p:nvGrpSpPr>
+        <p:cNvPr id="1" name=""/>
+        <p:cNvGrpSpPr/>
+        <p:nvPr/>
+      </p:nvGrpSpPr>
+      <p:grpSpPr>
+        <a:xfrm>
+          <a:off x="0" y="0"/>
+          <a:ext cx="0" cy="0"/>
+          <a:chOff x="0" y="0"/>
+          <a:chExt cx="0" cy="0"/>
+        </a:xfrm>
+      </p:grpSpPr>
+      <p:sp>
+        <p:nvSpPr>
+          <p:cNvPr id="2" name="Slide Image Placeholder 1"/>
+          <p:cNvSpPr>
+            <a:spLocks noGrp="1"/>
+          </p:cNvSpPr>
+          <p:nvPr>
+            <p:ph type="sldImg" idx="2"/>
+          </p:nvPr>
+        </p:nvSpPr>
+        <p:spPr/>
+      </p:sp>
+      <p:sp>
+        <p:nvSpPr>
+          <p:cNvPr id="3" name="Notes Placeholder 2"/>
+          <p:cNvSpPr>
+            <a:spLocks noGrp="1"/>
+          </p:cNvSpPr>
+          <p:nvPr>
+            <p:ph type="body" idx="3" sz="quarter"/>
+          </p:nvPr>
+        </p:nvSpPr>
+        <p:spPr/>
+        <p:txBody>
+          <a:bodyPr/>
+          <a:lstStyle/>
+          <a:p>
+            <a:r>
+              <a:t>Left: the officer's daily quota for a busy Sunday - with the crowd forecast 261 for the World's End loop, weather only 347, the same-all-year number 287 - and why: Baker's Falls is expected over capacity 08-11. Choosing a rule re-plans the tickets. Second: gate advice on a crowded morning - hold entries to the loop or send the next groups to Kirigalpotta / Thotupola. Third: a ranger counts walkers with no signal; counts sync later. Fourth: the officer's forecast check - counts next to the forecast. These counts are the park's first sensor record and feed field validation. Gate and count screens use demo data. (~60 s)</a:t>
             </a:r>
           </a:p>
         </p:txBody>
@@ -2024,6 +2098,216 @@
 </p:notes>
 </file>
 
+<file path=ppt/notesSlides/notesSlide30.xml><?xml version="1.0" encoding="utf-8"?>
+<p:notes xmlns:a="http://schemas.openxmlformats.org/drawingml/2006/main" xmlns:p="http://schemas.openxmlformats.org/presentationml/2006/main" xmlns:r="http://schemas.openxmlformats.org/officeDocument/2006/relationships">
+  <p:cSld>
+    <p:spTree>
+      <p:nvGrpSpPr>
+        <p:cNvPr id="1" name=""/>
+        <p:cNvGrpSpPr/>
+        <p:nvPr/>
+      </p:nvGrpSpPr>
+      <p:grpSpPr>
+        <a:xfrm>
+          <a:off x="0" y="0"/>
+          <a:ext cx="0" cy="0"/>
+          <a:chOff x="0" y="0"/>
+          <a:chExt cx="0" cy="0"/>
+        </a:xfrm>
+      </p:grpSpPr>
+      <p:sp>
+        <p:nvSpPr>
+          <p:cNvPr id="2" name="Slide Image Placeholder 1"/>
+          <p:cNvSpPr>
+            <a:spLocks noGrp="1"/>
+          </p:cNvSpPr>
+          <p:nvPr>
+            <p:ph type="sldImg" idx="2"/>
+          </p:nvPr>
+        </p:nvSpPr>
+        <p:spPr/>
+      </p:sp>
+      <p:sp>
+        <p:nvSpPr>
+          <p:cNvPr id="3" name="Notes Placeholder 2"/>
+          <p:cNvSpPr>
+            <a:spLocks noGrp="1"/>
+          </p:cNvSpPr>
+          <p:nvPr>
+            <p:ph type="body" idx="3" sz="quarter"/>
+          </p:nvPr>
+        </p:nvSpPr>
+        <p:spPr/>
+        <p:txBody>
+          <a:bodyPr/>
+          <a:lstStyle/>
+          <a:p>
+            <a:r>
+              <a:t>Backup slides follow: study sites, one forecast day, RQ2-RQ4, RQ8, visitor and Adam's Peak screens, limitations, records.</a:t>
+            </a:r>
+          </a:p>
+        </p:txBody>
+      </p:sp>
+      <p:sp>
+        <p:nvSpPr>
+          <p:cNvPr id="4" name="Slide Number Placeholder 3"/>
+          <p:cNvSpPr>
+            <a:spLocks noGrp="1"/>
+          </p:cNvSpPr>
+          <p:nvPr>
+            <p:ph type="sldNum" idx="5" sz="quarter"/>
+          </p:nvPr>
+        </p:nvSpPr>
+        <p:spPr/>
+      </p:sp>
+    </p:spTree>
+  </p:cSld>
+  <p:clrMapOvr>
+    <a:masterClrMapping/>
+  </p:clrMapOvr>
+</p:notes>
+</file>
+
+<file path=ppt/notesSlides/notesSlide31.xml><?xml version="1.0" encoding="utf-8"?>
+<p:notes xmlns:a="http://schemas.openxmlformats.org/drawingml/2006/main" xmlns:p="http://schemas.openxmlformats.org/presentationml/2006/main" xmlns:r="http://schemas.openxmlformats.org/officeDocument/2006/relationships">
+  <p:cSld>
+    <p:spTree>
+      <p:nvGrpSpPr>
+        <p:cNvPr id="1" name=""/>
+        <p:cNvGrpSpPr/>
+        <p:nvPr/>
+      </p:nvGrpSpPr>
+      <p:grpSpPr>
+        <a:xfrm>
+          <a:off x="0" y="0"/>
+          <a:ext cx="0" cy="0"/>
+          <a:chOff x="0" y="0"/>
+          <a:chExt cx="0" cy="0"/>
+        </a:xfrm>
+      </p:grpSpPr>
+      <p:sp>
+        <p:nvSpPr>
+          <p:cNvPr id="2" name="Slide Image Placeholder 1"/>
+          <p:cNvSpPr>
+            <a:spLocks noGrp="1"/>
+          </p:cNvSpPr>
+          <p:nvPr>
+            <p:ph type="sldImg" idx="2"/>
+          </p:nvPr>
+        </p:nvSpPr>
+        <p:spPr/>
+      </p:sp>
+      <p:sp>
+        <p:nvSpPr>
+          <p:cNvPr id="3" name="Notes Placeholder 2"/>
+          <p:cNvSpPr>
+            <a:spLocks noGrp="1"/>
+          </p:cNvSpPr>
+          <p:nvPr>
+            <p:ph type="body" idx="3" sz="quarter"/>
+          </p:nvPr>
+        </p:nvSpPr>
+        <p:spPr/>
+        <p:txBody>
+          <a:bodyPr/>
+          <a:lstStyle/>
+          <a:p>
+            <a:r>
+              <a:t>Use if asked about the synthetic data or validity.</a:t>
+            </a:r>
+          </a:p>
+        </p:txBody>
+      </p:sp>
+      <p:sp>
+        <p:nvSpPr>
+          <p:cNvPr id="4" name="Slide Number Placeholder 3"/>
+          <p:cNvSpPr>
+            <a:spLocks noGrp="1"/>
+          </p:cNvSpPr>
+          <p:nvPr>
+            <p:ph type="sldNum" idx="5" sz="quarter"/>
+          </p:nvPr>
+        </p:nvSpPr>
+        <p:spPr/>
+      </p:sp>
+    </p:spTree>
+  </p:cSld>
+  <p:clrMapOvr>
+    <a:masterClrMapping/>
+  </p:clrMapOvr>
+</p:notes>
+</file>
+
+<file path=ppt/notesSlides/notesSlide32.xml><?xml version="1.0" encoding="utf-8"?>
+<p:notes xmlns:a="http://schemas.openxmlformats.org/drawingml/2006/main" xmlns:p="http://schemas.openxmlformats.org/presentationml/2006/main" xmlns:r="http://schemas.openxmlformats.org/officeDocument/2006/relationships">
+  <p:cSld>
+    <p:spTree>
+      <p:nvGrpSpPr>
+        <p:cNvPr id="1" name=""/>
+        <p:cNvGrpSpPr/>
+        <p:nvPr/>
+      </p:nvGrpSpPr>
+      <p:grpSpPr>
+        <a:xfrm>
+          <a:off x="0" y="0"/>
+          <a:ext cx="0" cy="0"/>
+          <a:chOff x="0" y="0"/>
+          <a:chExt cx="0" cy="0"/>
+        </a:xfrm>
+      </p:grpSpPr>
+      <p:sp>
+        <p:nvSpPr>
+          <p:cNvPr id="2" name="Slide Image Placeholder 1"/>
+          <p:cNvSpPr>
+            <a:spLocks noGrp="1"/>
+          </p:cNvSpPr>
+          <p:nvPr>
+            <p:ph type="sldImg" idx="2"/>
+          </p:nvPr>
+        </p:nvSpPr>
+        <p:spPr/>
+      </p:sp>
+      <p:sp>
+        <p:nvSpPr>
+          <p:cNvPr id="3" name="Notes Placeholder 2"/>
+          <p:cNvSpPr>
+            <a:spLocks noGrp="1"/>
+          </p:cNvSpPr>
+          <p:nvPr>
+            <p:ph type="body" idx="3" sz="quarter"/>
+          </p:nvPr>
+        </p:nvSpPr>
+        <p:spPr/>
+        <p:txBody>
+          <a:bodyPr/>
+          <a:lstStyle/>
+          <a:p>
+            <a:r>
+              <a:t>For keeping records: visitors per day for any trail and date range - the past (DWC total or the estimate, labelled), today, and the forecast with its range - next to this system's own counts (bookings, gate, halfway) and the day's safe limit. Red = above the safe limit. Copy as CSV, or GET /admin/records?format=csv for Excel. Officers only. (~30 s)</a:t>
+            </a:r>
+          </a:p>
+        </p:txBody>
+      </p:sp>
+      <p:sp>
+        <p:nvSpPr>
+          <p:cNvPr id="4" name="Slide Number Placeholder 3"/>
+          <p:cNvSpPr>
+            <a:spLocks noGrp="1"/>
+          </p:cNvSpPr>
+          <p:nvPr>
+            <p:ph type="sldNum" idx="5" sz="quarter"/>
+          </p:nvPr>
+        </p:nvSpPr>
+        <p:spPr/>
+      </p:sp>
+    </p:spTree>
+  </p:cSld>
+  <p:clrMapOvr>
+    <a:masterClrMapping/>
+  </p:clrMapOvr>
+</p:notes>
+</file>
+
 <file path=ppt/notesSlides/notesSlide4.xml><?xml version="1.0" encoding="utf-8"?>
 <p:notes xmlns:a="http://schemas.openxmlformats.org/drawingml/2006/main" xmlns:p="http://schemas.openxmlformats.org/presentationml/2006/main" xmlns:r="http://schemas.openxmlformats.org/officeDocument/2006/relationships">
   <p:cSld>
@@ -2349,7 +2633,7 @@
           <a:lstStyle/>
           <a:p>
             <a:r>
-              <a:t>Hatched bars are the deployment case: segments with no counts. At Horton Plains the ST-GNN is best there (2.48 vs LSTM 2.59 vs historical average 4.20, p &lt; 0.001). With counts on every segment the networks tie at both parks (3 seeds; p = 0.12 and p = 0.09) - the earlier 'LSTM wins at Adam's Peak' was seed noise. An ST-GNN with an LSTM cell was tried and was worse, so it was dropped. At Adam's Peak on unseen segments the ST-GNN is worse vs the LSTM (p &lt; 0.001) overall: it is best on the two blocks of ordinary trail but loses on the block with the summit queue, which forms from the capacity of the final steps, not from what neighbouring segments look like. Next: give the model the queue state. (~75 s)</a:t>
+              <a:t>Hatched bars are the deployment case: segments with no counts. At Horton Plains the ST-GNN is best there (2.54 vs LSTM 2.59 vs historical average 4.20, p &lt; 0.001). With counts on every segment the networks tie at both parks (3 seeds; p = 0.12 and p = 0.09) - the earlier 'LSTM wins at Adam's Peak' was seed noise. An ST-GNN with an LSTM cell was tried and was worse, so it was dropped. At Adam's Peak on unseen segments the ST-GNN is worse vs the LSTM (p &lt; 0.001) overall: it is best on the two blocks of ordinary trail but loses on the block with the summit queue, which forms from the capacity of the final steps, not from what neighbouring segments look like. Then the honest part (RQ1b): scored as bottleneck detection (is an over-capacity segment-hour flagged?), the ST-GNN ties with counts and is slightly WORSE on unseen segments - it smooths peaks from its neighbours. That is why the app shows a calibrated chance of crowding, and a peak-aware loss is next. (~75 s)</a:t>
             </a:r>
           </a:p>
         </p:txBody>
@@ -5798,43 +6082,9 @@
           </a:p>
         </p:txBody>
       </p:sp>
-      <p:sp>
-        <p:nvSpPr>
-          <p:cNvPr id="5" name="TextBox 4"/>
-          <p:cNvSpPr txBox="1"/>
-          <p:nvPr/>
-        </p:nvSpPr>
-        <p:spPr>
-          <a:xfrm>
-            <a:off x="8961120" y="6446520"/>
-            <a:ext cx="3017520" cy="274320"/>
-          </a:xfrm>
-          <a:prstGeom prst="rect">
-            <a:avLst/>
-          </a:prstGeom>
-          <a:noFill/>
-        </p:spPr>
-        <p:txBody>
-          <a:bodyPr wrap="square" anchor="t">
-            <a:spAutoFit/>
-          </a:bodyPr>
-          <a:lstStyle/>
-          <a:p>
-            <a:pPr algn="r"/>
-            <a:r>
-              <a:rPr sz="900" b="0">
-                <a:solidFill>
-                  <a:srgbClr val="6B7280"/>
-                </a:solidFill>
-              </a:rPr>
-              <a:t>Component 4 · IT23343948 · 10</a:t>
-            </a:r>
-          </a:p>
-        </p:txBody>
-      </p:sp>
       <p:pic>
         <p:nvPicPr>
-          <p:cNvPr id="6" name="Picture 5" descr="control_horton.png"/>
+          <p:cNvPr id="5" name="Picture 4" descr="control_horton.png"/>
           <p:cNvPicPr>
             <a:picLocks noChangeAspect="1"/>
           </p:cNvPicPr>
@@ -5858,7 +6108,7 @@
       </p:pic>
       <p:sp>
         <p:nvSpPr>
-          <p:cNvPr id="7" name="TextBox 6"/>
+          <p:cNvPr id="6" name="TextBox 5"/>
           <p:cNvSpPr txBox="1"/>
           <p:nvPr/>
         </p:nvSpPr>
@@ -5967,6 +6217,40 @@
                 </a:solidFill>
               </a:rPr>
               <a:t>  over-capacity time −73 % (quota) vs −99.6 % (slot tickets)</a:t>
+            </a:r>
+          </a:p>
+        </p:txBody>
+      </p:sp>
+      <p:sp>
+        <p:nvSpPr>
+          <p:cNvPr id="7" name="TextBox 6"/>
+          <p:cNvSpPr txBox="1"/>
+          <p:nvPr/>
+        </p:nvSpPr>
+        <p:spPr>
+          <a:xfrm>
+            <a:off x="8961120" y="6446520"/>
+            <a:ext cx="3017520" cy="274320"/>
+          </a:xfrm>
+          <a:prstGeom prst="rect">
+            <a:avLst/>
+          </a:prstGeom>
+          <a:noFill/>
+        </p:spPr>
+        <p:txBody>
+          <a:bodyPr wrap="square" anchor="t">
+            <a:spAutoFit/>
+          </a:bodyPr>
+          <a:lstStyle/>
+          <a:p>
+            <a:pPr algn="r"/>
+            <a:r>
+              <a:rPr sz="900" b="0">
+                <a:solidFill>
+                  <a:srgbClr val="6B7280"/>
+                </a:solidFill>
+              </a:rPr>
+              <a:t>Component 4 · IT23343948 · 11</a:t>
             </a:r>
           </a:p>
         </p:txBody>
@@ -6100,43 +6384,9 @@
           </a:p>
         </p:txBody>
       </p:sp>
-      <p:sp>
-        <p:nvSpPr>
-          <p:cNvPr id="5" name="TextBox 4"/>
-          <p:cNvSpPr txBox="1"/>
-          <p:nvPr/>
-        </p:nvSpPr>
-        <p:spPr>
-          <a:xfrm>
-            <a:off x="8961120" y="6446520"/>
-            <a:ext cx="3017520" cy="274320"/>
-          </a:xfrm>
-          <a:prstGeom prst="rect">
-            <a:avLst/>
-          </a:prstGeom>
-          <a:noFill/>
-        </p:spPr>
-        <p:txBody>
-          <a:bodyPr wrap="square" anchor="t">
-            <a:spAutoFit/>
-          </a:bodyPr>
-          <a:lstStyle/>
-          <a:p>
-            <a:pPr algn="r"/>
-            <a:r>
-              <a:rPr sz="900" b="0">
-                <a:solidFill>
-                  <a:srgbClr val="6B7280"/>
-                </a:solidFill>
-              </a:rPr>
-              <a:t>Component 4 · IT23343948 · 11</a:t>
-            </a:r>
-          </a:p>
-        </p:txBody>
-      </p:sp>
       <p:pic>
         <p:nvPicPr>
-          <p:cNvPr id="6" name="Picture 5" descr="control_ap.png"/>
+          <p:cNvPr id="5" name="Picture 4" descr="control_ap.png"/>
           <p:cNvPicPr>
             <a:picLocks noChangeAspect="1"/>
           </p:cNvPicPr>
@@ -6160,7 +6410,7 @@
       </p:pic>
       <p:sp>
         <p:nvSpPr>
-          <p:cNvPr id="7" name="TextBox 6"/>
+          <p:cNvPr id="6" name="TextBox 5"/>
           <p:cNvSpPr txBox="1"/>
           <p:nvPr/>
         </p:nvSpPr>
@@ -6269,6 +6519,40 @@
                 </a:solidFill>
               </a:rPr>
               <a:t>  start times −22 % waiting; both together move all waiting off the final steps and cut it by 28 %</a:t>
+            </a:r>
+          </a:p>
+        </p:txBody>
+      </p:sp>
+      <p:sp>
+        <p:nvSpPr>
+          <p:cNvPr id="7" name="TextBox 6"/>
+          <p:cNvSpPr txBox="1"/>
+          <p:nvPr/>
+        </p:nvSpPr>
+        <p:spPr>
+          <a:xfrm>
+            <a:off x="8961120" y="6446520"/>
+            <a:ext cx="3017520" cy="274320"/>
+          </a:xfrm>
+          <a:prstGeom prst="rect">
+            <a:avLst/>
+          </a:prstGeom>
+          <a:noFill/>
+        </p:spPr>
+        <p:txBody>
+          <a:bodyPr wrap="square" anchor="t">
+            <a:spAutoFit/>
+          </a:bodyPr>
+          <a:lstStyle/>
+          <a:p>
+            <a:pPr algn="r"/>
+            <a:r>
+              <a:rPr sz="900" b="0">
+                <a:solidFill>
+                  <a:srgbClr val="6B7280"/>
+                </a:solidFill>
+              </a:rPr>
+              <a:t>Component 4 · IT23343948 · 12</a:t>
             </a:r>
           </a:p>
         </p:txBody>
@@ -6402,43 +6686,9 @@
           </a:p>
         </p:txBody>
       </p:sp>
-      <p:sp>
-        <p:nvSpPr>
-          <p:cNvPr id="5" name="TextBox 4"/>
-          <p:cNvSpPr txBox="1"/>
-          <p:nvPr/>
-        </p:nvSpPr>
-        <p:spPr>
-          <a:xfrm>
-            <a:off x="8961120" y="6446520"/>
-            <a:ext cx="3017520" cy="274320"/>
-          </a:xfrm>
-          <a:prstGeom prst="rect">
-            <a:avLst/>
-          </a:prstGeom>
-          <a:noFill/>
-        </p:spPr>
-        <p:txBody>
-          <a:bodyPr wrap="square" anchor="t">
-            <a:spAutoFit/>
-          </a:bodyPr>
-          <a:lstStyle/>
-          <a:p>
-            <a:pPr algn="r"/>
-            <a:r>
-              <a:rPr sz="900" b="0">
-                <a:solidFill>
-                  <a:srgbClr val="6B7280"/>
-                </a:solidFill>
-              </a:rPr>
-              <a:t>Component 4 · IT23343948 · 12</a:t>
-            </a:r>
-          </a:p>
-        </p:txBody>
-      </p:sp>
       <p:pic>
         <p:nvPicPr>
-          <p:cNvPr id="6" name="Picture 5" descr="rq3.png"/>
+          <p:cNvPr id="5" name="Picture 4" descr="rq3.png"/>
           <p:cNvPicPr>
             <a:picLocks noChangeAspect="1"/>
           </p:cNvPicPr>
@@ -6462,7 +6712,7 @@
       </p:pic>
       <p:sp>
         <p:nvSpPr>
-          <p:cNvPr id="7" name="Rounded Rectangle 6"/>
+          <p:cNvPr id="6" name="Rounded Rectangle 5"/>
           <p:cNvSpPr/>
           <p:nvPr/>
         </p:nvSpPr>
@@ -6570,7 +6820,7 @@
       </p:sp>
       <p:sp>
         <p:nvSpPr>
-          <p:cNvPr id="8" name="TextBox 7"/>
+          <p:cNvPr id="7" name="TextBox 6"/>
           <p:cNvSpPr txBox="1"/>
           <p:nvPr/>
         </p:nvSpPr>
@@ -6604,7 +6854,7 @@
       </p:sp>
       <p:sp>
         <p:nvSpPr>
-          <p:cNvPr id="9" name="TextBox 8"/>
+          <p:cNvPr id="8" name="TextBox 7"/>
           <p:cNvSpPr txBox="1"/>
           <p:nvPr/>
         </p:nvSpPr>
@@ -6632,6 +6882,40 @@
                 </a:solidFill>
               </a:rPr>
               <a:t>Over 100 % is possible: 'perfect knowledge' means the true number of climbers, not the exact time each group starts; the cautious P90 advice also covers that uncertainty.</a:t>
+            </a:r>
+          </a:p>
+        </p:txBody>
+      </p:sp>
+      <p:sp>
+        <p:nvSpPr>
+          <p:cNvPr id="9" name="TextBox 8"/>
+          <p:cNvSpPr txBox="1"/>
+          <p:nvPr/>
+        </p:nvSpPr>
+        <p:spPr>
+          <a:xfrm>
+            <a:off x="8961120" y="6446520"/>
+            <a:ext cx="3017520" cy="274320"/>
+          </a:xfrm>
+          <a:prstGeom prst="rect">
+            <a:avLst/>
+          </a:prstGeom>
+          <a:noFill/>
+        </p:spPr>
+        <p:txBody>
+          <a:bodyPr wrap="square" anchor="t">
+            <a:spAutoFit/>
+          </a:bodyPr>
+          <a:lstStyle/>
+          <a:p>
+            <a:pPr algn="r"/>
+            <a:r>
+              <a:rPr sz="900" b="0">
+                <a:solidFill>
+                  <a:srgbClr val="6B7280"/>
+                </a:solidFill>
+              </a:rPr>
+              <a:t>Component 4 · IT23343948 · Backup B3</a:t>
             </a:r>
           </a:p>
         </p:txBody>
@@ -6765,43 +7049,9 @@
           </a:p>
         </p:txBody>
       </p:sp>
-      <p:sp>
-        <p:nvSpPr>
-          <p:cNvPr id="5" name="TextBox 4"/>
-          <p:cNvSpPr txBox="1"/>
-          <p:nvPr/>
-        </p:nvSpPr>
-        <p:spPr>
-          <a:xfrm>
-            <a:off x="8961120" y="6446520"/>
-            <a:ext cx="3017520" cy="274320"/>
-          </a:xfrm>
-          <a:prstGeom prst="rect">
-            <a:avLst/>
-          </a:prstGeom>
-          <a:noFill/>
-        </p:spPr>
-        <p:txBody>
-          <a:bodyPr wrap="square" anchor="t">
-            <a:spAutoFit/>
-          </a:bodyPr>
-          <a:lstStyle/>
-          <a:p>
-            <a:pPr algn="r"/>
-            <a:r>
-              <a:rPr sz="900" b="0">
-                <a:solidFill>
-                  <a:srgbClr val="6B7280"/>
-                </a:solidFill>
-              </a:rPr>
-              <a:t>Component 4 · IT23343948 · 13</a:t>
-            </a:r>
-          </a:p>
-        </p:txBody>
-      </p:sp>
       <p:pic>
         <p:nvPicPr>
-          <p:cNvPr id="6" name="Picture 5" descr="rq2.png"/>
+          <p:cNvPr id="5" name="Picture 4" descr="rq2.png"/>
           <p:cNvPicPr>
             <a:picLocks noChangeAspect="1"/>
           </p:cNvPicPr>
@@ -6825,7 +7075,7 @@
       </p:pic>
       <p:pic>
         <p:nvPicPr>
-          <p:cNvPr id="7" name="Picture 6" descr="rq4.png"/>
+          <p:cNvPr id="6" name="Picture 5" descr="rq4.png"/>
           <p:cNvPicPr>
             <a:picLocks noChangeAspect="1"/>
           </p:cNvPicPr>
@@ -6849,7 +7099,7 @@
       </p:pic>
       <p:sp>
         <p:nvSpPr>
-          <p:cNvPr id="8" name="TextBox 7"/>
+          <p:cNvPr id="7" name="TextBox 6"/>
           <p:cNvSpPr txBox="1"/>
           <p:nvPr/>
         </p:nvSpPr>
@@ -6935,6 +7185,40 @@
                 </a:solidFill>
               </a:rPr>
               <a:t>  final-steps flow – waiting changes 26-fold between 15 and 35 people/min</a:t>
+            </a:r>
+          </a:p>
+        </p:txBody>
+      </p:sp>
+      <p:sp>
+        <p:nvSpPr>
+          <p:cNvPr id="8" name="TextBox 7"/>
+          <p:cNvSpPr txBox="1"/>
+          <p:nvPr/>
+        </p:nvSpPr>
+        <p:spPr>
+          <a:xfrm>
+            <a:off x="8961120" y="6446520"/>
+            <a:ext cx="3017520" cy="274320"/>
+          </a:xfrm>
+          <a:prstGeom prst="rect">
+            <a:avLst/>
+          </a:prstGeom>
+          <a:noFill/>
+        </p:spPr>
+        <p:txBody>
+          <a:bodyPr wrap="square" anchor="t">
+            <a:spAutoFit/>
+          </a:bodyPr>
+          <a:lstStyle/>
+          <a:p>
+            <a:pPr algn="r"/>
+            <a:r>
+              <a:rPr sz="900" b="0">
+                <a:solidFill>
+                  <a:srgbClr val="6B7280"/>
+                </a:solidFill>
+              </a:rPr>
+              <a:t>Component 4 · IT23343948 · Backup B4</a:t>
             </a:r>
           </a:p>
         </p:txBody>
@@ -7068,43 +7352,9 @@
           </a:p>
         </p:txBody>
       </p:sp>
-      <p:sp>
-        <p:nvSpPr>
-          <p:cNvPr id="5" name="TextBox 4"/>
-          <p:cNvSpPr txBox="1"/>
-          <p:nvPr/>
-        </p:nvSpPr>
-        <p:spPr>
-          <a:xfrm>
-            <a:off x="8961120" y="6446520"/>
-            <a:ext cx="3017520" cy="274320"/>
-          </a:xfrm>
-          <a:prstGeom prst="rect">
-            <a:avLst/>
-          </a:prstGeom>
-          <a:noFill/>
-        </p:spPr>
-        <p:txBody>
-          <a:bodyPr wrap="square" anchor="t">
-            <a:spAutoFit/>
-          </a:bodyPr>
-          <a:lstStyle/>
-          <a:p>
-            <a:pPr algn="r"/>
-            <a:r>
-              <a:rPr sz="900" b="0">
-                <a:solidFill>
-                  <a:srgbClr val="6B7280"/>
-                </a:solidFill>
-              </a:rPr>
-              <a:t>Component 4 · IT23343948 · 14</a:t>
-            </a:r>
-          </a:p>
-        </p:txBody>
-      </p:sp>
       <p:pic>
         <p:nvPicPr>
-          <p:cNvPr id="6" name="Picture 5" descr="rq5.png"/>
+          <p:cNvPr id="5" name="Picture 4" descr="rq5.png"/>
           <p:cNvPicPr>
             <a:picLocks noChangeAspect="1"/>
           </p:cNvPicPr>
@@ -7128,7 +7378,7 @@
       </p:pic>
       <p:sp>
         <p:nvSpPr>
-          <p:cNvPr id="7" name="TextBox 6"/>
+          <p:cNvPr id="6" name="TextBox 5"/>
           <p:cNvSpPr txBox="1"/>
           <p:nvPr/>
         </p:nvSpPr>
@@ -7251,6 +7501,29 @@
                   <a:srgbClr val="1F2A24"/>
                 </a:solidFill>
               </a:rPr>
+              <a:t>•  Frozen core:</a:t>
+            </a:r>
+            <a:r>
+              <a:rPr sz="1300">
+                <a:solidFill>
+                  <a:srgbClr val="1F2A24"/>
+                </a:solidFill>
+              </a:rPr>
+              <a:t>  keeping the traffic GCN + GRU fixed helps only Horton at 365 days (1.65 vs 1.69); worst at Adam's Peak</a:t>
+            </a:r>
+          </a:p>
+          <a:p>
+            <a:pPr>
+              <a:spcAft>
+                <a:spcPts val="900"/>
+              </a:spcAft>
+            </a:pPr>
+            <a:r>
+              <a:rPr sz="1300" b="1">
+                <a:solidFill>
+                  <a:srgbClr val="1F2A24"/>
+                </a:solidFill>
+              </a:rPr>
               <a:t>•  So:</a:t>
             </a:r>
             <a:r>
@@ -7266,7 +7539,7 @@
       </p:sp>
       <p:sp>
         <p:nvSpPr>
-          <p:cNvPr id="8" name="TextBox 7"/>
+          <p:cNvPr id="7" name="TextBox 6"/>
           <p:cNvSpPr txBox="1"/>
           <p:nvPr/>
         </p:nvSpPr>
@@ -7294,6 +7567,40 @@
                 </a:solidFill>
               </a:rPr>
               <a:t>METR-LA → PEMS-BAY pretraining · 3 seeds · paired t-tests over 365 test days, Holm-corrected</a:t>
+            </a:r>
+          </a:p>
+        </p:txBody>
+      </p:sp>
+      <p:sp>
+        <p:nvSpPr>
+          <p:cNvPr id="8" name="TextBox 7"/>
+          <p:cNvSpPr txBox="1"/>
+          <p:nvPr/>
+        </p:nvSpPr>
+        <p:spPr>
+          <a:xfrm>
+            <a:off x="8961120" y="6446520"/>
+            <a:ext cx="3017520" cy="274320"/>
+          </a:xfrm>
+          <a:prstGeom prst="rect">
+            <a:avLst/>
+          </a:prstGeom>
+          <a:noFill/>
+        </p:spPr>
+        <p:txBody>
+          <a:bodyPr wrap="square" anchor="t">
+            <a:spAutoFit/>
+          </a:bodyPr>
+          <a:lstStyle/>
+          <a:p>
+            <a:pPr algn="r"/>
+            <a:r>
+              <a:rPr sz="900" b="0">
+                <a:solidFill>
+                  <a:srgbClr val="6B7280"/>
+                </a:solidFill>
+              </a:rPr>
+              <a:t>Component 4 · IT23343948 · 13</a:t>
             </a:r>
           </a:p>
         </p:txBody>
@@ -7427,43 +7734,9 @@
           </a:p>
         </p:txBody>
       </p:sp>
-      <p:sp>
-        <p:nvSpPr>
-          <p:cNvPr id="5" name="TextBox 4"/>
-          <p:cNvSpPr txBox="1"/>
-          <p:nvPr/>
-        </p:nvSpPr>
-        <p:spPr>
-          <a:xfrm>
-            <a:off x="8961120" y="6446520"/>
-            <a:ext cx="3017520" cy="274320"/>
-          </a:xfrm>
-          <a:prstGeom prst="rect">
-            <a:avLst/>
-          </a:prstGeom>
-          <a:noFill/>
-        </p:spPr>
-        <p:txBody>
-          <a:bodyPr wrap="square" anchor="t">
-            <a:spAutoFit/>
-          </a:bodyPr>
-          <a:lstStyle/>
-          <a:p>
-            <a:pPr algn="r"/>
-            <a:r>
-              <a:rPr sz="900" b="0">
-                <a:solidFill>
-                  <a:srgbClr val="6B7280"/>
-                </a:solidFill>
-              </a:rPr>
-              <a:t>Component 4 · IT23343948 · 15</a:t>
-            </a:r>
-          </a:p>
-        </p:txBody>
-      </p:sp>
       <p:pic>
         <p:nvPicPr>
-          <p:cNvPr id="6" name="Picture 5" descr="10_on_device.png"/>
+          <p:cNvPr id="5" name="Picture 4" descr="10_on_device.png"/>
           <p:cNvPicPr>
             <a:picLocks noChangeAspect="1"/>
           </p:cNvPicPr>
@@ -7492,7 +7765,7 @@
       </p:pic>
       <p:sp>
         <p:nvSpPr>
-          <p:cNvPr id="7" name="Rounded Rectangle 6"/>
+          <p:cNvPr id="6" name="Rounded Rectangle 5"/>
           <p:cNvSpPr/>
           <p:nvPr/>
         </p:nvSpPr>
@@ -7567,7 +7840,7 @@
       </p:sp>
       <p:sp>
         <p:nvSpPr>
-          <p:cNvPr id="8" name="Rounded Rectangle 7"/>
+          <p:cNvPr id="7" name="Rounded Rectangle 6"/>
           <p:cNvSpPr/>
           <p:nvPr/>
         </p:nvSpPr>
@@ -7642,7 +7915,7 @@
       </p:sp>
       <p:cxnSp>
         <p:nvCxnSpPr>
-          <p:cNvPr id="9" name="Connector 8"/>
+          <p:cNvPr id="8" name="Connector 7"/>
           <p:cNvCxnSpPr/>
           <p:nvPr/>
         </p:nvCxnSpPr>
@@ -7678,7 +7951,7 @@
       </p:cxnSp>
       <p:sp>
         <p:nvSpPr>
-          <p:cNvPr id="10" name="Rounded Rectangle 9"/>
+          <p:cNvPr id="9" name="Rounded Rectangle 8"/>
           <p:cNvSpPr/>
           <p:nvPr/>
         </p:nvSpPr>
@@ -7753,7 +8026,7 @@
       </p:sp>
       <p:cxnSp>
         <p:nvCxnSpPr>
-          <p:cNvPr id="11" name="Connector 10"/>
+          <p:cNvPr id="10" name="Connector 9"/>
           <p:cNvCxnSpPr/>
           <p:nvPr/>
         </p:nvCxnSpPr>
@@ -7789,7 +8062,7 @@
       </p:cxnSp>
       <p:graphicFrame>
         <p:nvGraphicFramePr>
-          <p:cNvPr id="12" name="Table 11"/>
+          <p:cNvPr id="11" name="Table 10"/>
           <p:cNvGraphicFramePr>
             <a:graphicFrameLocks noGrp="1"/>
           </p:cNvGraphicFramePr>
@@ -8206,7 +8479,7 @@
       </p:graphicFrame>
       <p:sp>
         <p:nvSpPr>
-          <p:cNvPr id="13" name="TextBox 12"/>
+          <p:cNvPr id="12" name="TextBox 11"/>
           <p:cNvSpPr txBox="1"/>
           <p:nvPr/>
         </p:nvSpPr>
@@ -8234,6 +8507,40 @@
                 </a:solidFill>
               </a:rPr>
               <a:t>Dart forward pass ≈ 140–210 ms in the test runner (unoptimised); real-phone timing is the next step.</a:t>
+            </a:r>
+          </a:p>
+        </p:txBody>
+      </p:sp>
+      <p:sp>
+        <p:nvSpPr>
+          <p:cNvPr id="13" name="TextBox 12"/>
+          <p:cNvSpPr txBox="1"/>
+          <p:nvPr/>
+        </p:nvSpPr>
+        <p:spPr>
+          <a:xfrm>
+            <a:off x="8961120" y="6446520"/>
+            <a:ext cx="3017520" cy="274320"/>
+          </a:xfrm>
+          <a:prstGeom prst="rect">
+            <a:avLst/>
+          </a:prstGeom>
+          <a:noFill/>
+        </p:spPr>
+        <p:txBody>
+          <a:bodyPr wrap="square" anchor="t">
+            <a:spAutoFit/>
+          </a:bodyPr>
+          <a:lstStyle/>
+          <a:p>
+            <a:pPr algn="r"/>
+            <a:r>
+              <a:rPr sz="900" b="0">
+                <a:solidFill>
+                  <a:srgbClr val="6B7280"/>
+                </a:solidFill>
+              </a:rPr>
+              <a:t>Component 4 · IT23343948 · 14</a:t>
             </a:r>
           </a:p>
         </p:txBody>
@@ -8367,43 +8674,9 @@
           </a:p>
         </p:txBody>
       </p:sp>
-      <p:sp>
-        <p:nvSpPr>
-          <p:cNvPr id="5" name="TextBox 4"/>
-          <p:cNvSpPr txBox="1"/>
-          <p:nvPr/>
-        </p:nvSpPr>
-        <p:spPr>
-          <a:xfrm>
-            <a:off x="8961120" y="6446520"/>
-            <a:ext cx="3017520" cy="274320"/>
-          </a:xfrm>
-          <a:prstGeom prst="rect">
-            <a:avLst/>
-          </a:prstGeom>
-          <a:noFill/>
-        </p:spPr>
-        <p:txBody>
-          <a:bodyPr wrap="square" anchor="t">
-            <a:spAutoFit/>
-          </a:bodyPr>
-          <a:lstStyle/>
-          <a:p>
-            <a:pPr algn="r"/>
-            <a:r>
-              <a:rPr sz="900" b="0">
-                <a:solidFill>
-                  <a:srgbClr val="6B7280"/>
-                </a:solidFill>
-              </a:rPr>
-              <a:t>Component 4 · IT23343948 · 16</a:t>
-            </a:r>
-          </a:p>
-        </p:txBody>
-      </p:sp>
       <p:graphicFrame>
         <p:nvGraphicFramePr>
-          <p:cNvPr id="6" name="Table 5"/>
+          <p:cNvPr id="5" name="Table 4"/>
           <p:cNvGraphicFramePr>
             <a:graphicFrameLocks noGrp="1"/>
           </p:cNvGraphicFramePr>
@@ -8690,7 +8963,7 @@
       </p:graphicFrame>
       <p:sp>
         <p:nvSpPr>
-          <p:cNvPr id="7" name="TextBox 6"/>
+          <p:cNvPr id="6" name="TextBox 5"/>
           <p:cNvSpPr txBox="1"/>
           <p:nvPr/>
         </p:nvSpPr>
@@ -8828,7 +9101,7 @@
       </p:sp>
       <p:sp>
         <p:nvSpPr>
-          <p:cNvPr id="8" name="Rounded Rectangle 7"/>
+          <p:cNvPr id="7" name="Rounded Rectangle 6"/>
           <p:cNvSpPr/>
           <p:nvPr/>
         </p:nvSpPr>
@@ -8908,6 +9181,40 @@
                 </a:solidFill>
               </a:rPr>
               <a:t>→ the December counts turn the simulated results into that claim</a:t>
+            </a:r>
+          </a:p>
+        </p:txBody>
+      </p:sp>
+      <p:sp>
+        <p:nvSpPr>
+          <p:cNvPr id="8" name="TextBox 7"/>
+          <p:cNvSpPr txBox="1"/>
+          <p:nvPr/>
+        </p:nvSpPr>
+        <p:spPr>
+          <a:xfrm>
+            <a:off x="8961120" y="6446520"/>
+            <a:ext cx="3017520" cy="274320"/>
+          </a:xfrm>
+          <a:prstGeom prst="rect">
+            <a:avLst/>
+          </a:prstGeom>
+          <a:noFill/>
+        </p:spPr>
+        <p:txBody>
+          <a:bodyPr wrap="square" anchor="t">
+            <a:spAutoFit/>
+          </a:bodyPr>
+          <a:lstStyle/>
+          <a:p>
+            <a:pPr algn="r"/>
+            <a:r>
+              <a:rPr sz="900" b="0">
+                <a:solidFill>
+                  <a:srgbClr val="6B7280"/>
+                </a:solidFill>
+              </a:rPr>
+              <a:t>Component 4 · IT23343948 · 17</a:t>
             </a:r>
           </a:p>
         </p:txBody>
@@ -9041,43 +9348,9 @@
           </a:p>
         </p:txBody>
       </p:sp>
-      <p:sp>
-        <p:nvSpPr>
-          <p:cNvPr id="5" name="TextBox 4"/>
-          <p:cNvSpPr txBox="1"/>
-          <p:nvPr/>
-        </p:nvSpPr>
-        <p:spPr>
-          <a:xfrm>
-            <a:off x="8961120" y="6446520"/>
-            <a:ext cx="3017520" cy="274320"/>
-          </a:xfrm>
-          <a:prstGeom prst="rect">
-            <a:avLst/>
-          </a:prstGeom>
-          <a:noFill/>
-        </p:spPr>
-        <p:txBody>
-          <a:bodyPr wrap="square" anchor="t">
-            <a:spAutoFit/>
-          </a:bodyPr>
-          <a:lstStyle/>
-          <a:p>
-            <a:pPr algn="r"/>
-            <a:r>
-              <a:rPr sz="900" b="0">
-                <a:solidFill>
-                  <a:srgbClr val="6B7280"/>
-                </a:solidFill>
-              </a:rPr>
-              <a:t>Component 4 · IT23343948 · 17</a:t>
-            </a:r>
-          </a:p>
-        </p:txBody>
-      </p:sp>
       <p:pic>
         <p:nvPicPr>
-          <p:cNvPr id="6" name="Picture 5" descr="11_bottleneck_map.png"/>
+          <p:cNvPr id="5" name="Picture 4" descr="11_bottleneck_map.png"/>
           <p:cNvPicPr>
             <a:picLocks noChangeAspect="1"/>
           </p:cNvPicPr>
@@ -9106,7 +9379,7 @@
       </p:pic>
       <p:sp>
         <p:nvSpPr>
-          <p:cNvPr id="7" name="TextBox 6"/>
+          <p:cNvPr id="6" name="TextBox 5"/>
           <p:cNvSpPr txBox="1"/>
           <p:nvPr/>
         </p:nvSpPr>
@@ -9151,7 +9424,7 @@
       </p:sp>
       <p:pic>
         <p:nvPicPr>
-          <p:cNvPr id="8" name="Picture 7" descr="12_safe_numbers.png"/>
+          <p:cNvPr id="7" name="Picture 6" descr="12_safe_numbers.png"/>
           <p:cNvPicPr>
             <a:picLocks noChangeAspect="1"/>
           </p:cNvPicPr>
@@ -9180,7 +9453,7 @@
       </p:pic>
       <p:sp>
         <p:nvSpPr>
-          <p:cNvPr id="9" name="TextBox 8"/>
+          <p:cNvPr id="8" name="TextBox 7"/>
           <p:cNvSpPr txBox="1"/>
           <p:nvPr/>
         </p:nvSpPr>
@@ -9225,7 +9498,7 @@
       </p:sp>
       <p:sp>
         <p:nvSpPr>
-          <p:cNvPr id="10" name="TextBox 9"/>
+          <p:cNvPr id="9" name="TextBox 8"/>
           <p:cNvSpPr txBox="1"/>
           <p:nvPr/>
         </p:nvSpPr>
@@ -9357,6 +9630,40 @@
                 </a:solidFill>
               </a:rPr>
               <a:t>  officers (first tab), rangers, hikers (Crowding tab) · whole app works offline</a:t>
+            </a:r>
+          </a:p>
+        </p:txBody>
+      </p:sp>
+      <p:sp>
+        <p:nvSpPr>
+          <p:cNvPr id="10" name="TextBox 9"/>
+          <p:cNvSpPr txBox="1"/>
+          <p:nvPr/>
+        </p:nvSpPr>
+        <p:spPr>
+          <a:xfrm>
+            <a:off x="8961120" y="6446520"/>
+            <a:ext cx="3017520" cy="274320"/>
+          </a:xfrm>
+          <a:prstGeom prst="rect">
+            <a:avLst/>
+          </a:prstGeom>
+          <a:noFill/>
+        </p:spPr>
+        <p:txBody>
+          <a:bodyPr wrap="square" anchor="t">
+            <a:spAutoFit/>
+          </a:bodyPr>
+          <a:lstStyle/>
+          <a:p>
+            <a:pPr algn="r"/>
+            <a:r>
+              <a:rPr sz="900" b="0">
+                <a:solidFill>
+                  <a:srgbClr val="6B7280"/>
+                </a:solidFill>
+              </a:rPr>
+              <a:t>Component 4 · IT23343948 · 15</a:t>
             </a:r>
           </a:p>
         </p:txBody>
@@ -9490,43 +9797,9 @@
           </a:p>
         </p:txBody>
       </p:sp>
-      <p:sp>
-        <p:nvSpPr>
-          <p:cNvPr id="5" name="TextBox 4"/>
-          <p:cNvSpPr txBox="1"/>
-          <p:nvPr/>
-        </p:nvSpPr>
-        <p:spPr>
-          <a:xfrm>
-            <a:off x="8961120" y="6446520"/>
-            <a:ext cx="3017520" cy="274320"/>
-          </a:xfrm>
-          <a:prstGeom prst="rect">
-            <a:avLst/>
-          </a:prstGeom>
-          <a:noFill/>
-        </p:spPr>
-        <p:txBody>
-          <a:bodyPr wrap="square" anchor="t">
-            <a:spAutoFit/>
-          </a:bodyPr>
-          <a:lstStyle/>
-          <a:p>
-            <a:pPr algn="r"/>
-            <a:r>
-              <a:rPr sz="900" b="0">
-                <a:solidFill>
-                  <a:srgbClr val="6B7280"/>
-                </a:solidFill>
-              </a:rPr>
-              <a:t>Component 4 · IT23343948 · 18</a:t>
-            </a:r>
-          </a:p>
-        </p:txBody>
-      </p:sp>
       <p:pic>
         <p:nvPicPr>
-          <p:cNvPr id="6" name="Picture 5" descr="rq8.png"/>
+          <p:cNvPr id="5" name="Picture 4" descr="rq8.png"/>
           <p:cNvPicPr>
             <a:picLocks noChangeAspect="1"/>
           </p:cNvPicPr>
@@ -9550,7 +9823,7 @@
       </p:pic>
       <p:pic>
         <p:nvPicPr>
-          <p:cNvPr id="7" name="Picture 6" descr="13_your_walk.png"/>
+          <p:cNvPr id="6" name="Picture 5" descr="13_your_walk.png"/>
           <p:cNvPicPr>
             <a:picLocks noChangeAspect="1"/>
           </p:cNvPicPr>
@@ -9579,7 +9852,7 @@
       </p:pic>
       <p:sp>
         <p:nvSpPr>
-          <p:cNvPr id="8" name="TextBox 7"/>
+          <p:cNvPr id="7" name="TextBox 6"/>
           <p:cNvSpPr txBox="1"/>
           <p:nvPr/>
         </p:nvSpPr>
@@ -9624,7 +9897,7 @@
       </p:sp>
       <p:sp>
         <p:nvSpPr>
-          <p:cNvPr id="9" name="TextBox 8"/>
+          <p:cNvPr id="8" name="TextBox 7"/>
           <p:cNvSpPr txBox="1"/>
           <p:nvPr/>
         </p:nvSpPr>
@@ -9716,7 +9989,7 @@
       </p:sp>
       <p:sp>
         <p:nvSpPr>
-          <p:cNvPr id="10" name="TextBox 9"/>
+          <p:cNvPr id="9" name="TextBox 8"/>
           <p:cNvSpPr txBox="1"/>
           <p:nvPr/>
         </p:nvSpPr>
@@ -9744,6 +10017,40 @@
                 </a:solidFill>
               </a:rPr>
               <a:t>2025 test year, simulation · p &lt; 0.001 for every policy vs no control (Wilcoxon over days)</a:t>
+            </a:r>
+          </a:p>
+        </p:txBody>
+      </p:sp>
+      <p:sp>
+        <p:nvSpPr>
+          <p:cNvPr id="10" name="TextBox 9"/>
+          <p:cNvSpPr txBox="1"/>
+          <p:nvPr/>
+        </p:nvSpPr>
+        <p:spPr>
+          <a:xfrm>
+            <a:off x="8961120" y="6446520"/>
+            <a:ext cx="3017520" cy="274320"/>
+          </a:xfrm>
+          <a:prstGeom prst="rect">
+            <a:avLst/>
+          </a:prstGeom>
+          <a:noFill/>
+        </p:spPr>
+        <p:txBody>
+          <a:bodyPr wrap="square" anchor="t">
+            <a:spAutoFit/>
+          </a:bodyPr>
+          <a:lstStyle/>
+          <a:p>
+            <a:pPr algn="r"/>
+            <a:r>
+              <a:rPr sz="900" b="0">
+                <a:solidFill>
+                  <a:srgbClr val="6B7280"/>
+                </a:solidFill>
+              </a:rPr>
+              <a:t>Component 4 · IT23343948 · Backup B5</a:t>
             </a:r>
           </a:p>
         </p:txBody>
@@ -9877,43 +10184,9 @@
           </a:p>
         </p:txBody>
       </p:sp>
-      <p:sp>
-        <p:nvSpPr>
-          <p:cNvPr id="5" name="TextBox 4"/>
-          <p:cNvSpPr txBox="1"/>
-          <p:nvPr/>
-        </p:nvSpPr>
-        <p:spPr>
-          <a:xfrm>
-            <a:off x="8961120" y="6446520"/>
-            <a:ext cx="3017520" cy="274320"/>
-          </a:xfrm>
-          <a:prstGeom prst="rect">
-            <a:avLst/>
-          </a:prstGeom>
-          <a:noFill/>
-        </p:spPr>
-        <p:txBody>
-          <a:bodyPr wrap="square" anchor="t">
-            <a:spAutoFit/>
-          </a:bodyPr>
-          <a:lstStyle/>
-          <a:p>
-            <a:pPr algn="r"/>
-            <a:r>
-              <a:rPr sz="900" b="0">
-                <a:solidFill>
-                  <a:srgbClr val="6B7280"/>
-                </a:solidFill>
-              </a:rPr>
-              <a:t>Component 4 · IT23343948 · 19</a:t>
-            </a:r>
-          </a:p>
-        </p:txBody>
-      </p:sp>
       <p:pic>
         <p:nvPicPr>
-          <p:cNvPr id="6" name="Picture 5" descr="01_destinations.png"/>
+          <p:cNvPr id="5" name="Picture 4" descr="01_destinations.png"/>
           <p:cNvPicPr>
             <a:picLocks noChangeAspect="1"/>
           </p:cNvPicPr>
@@ -9942,7 +10215,7 @@
       </p:pic>
       <p:sp>
         <p:nvSpPr>
-          <p:cNvPr id="7" name="TextBox 6"/>
+          <p:cNvPr id="6" name="TextBox 5"/>
           <p:cNvSpPr txBox="1"/>
           <p:nvPr/>
         </p:nvSpPr>
@@ -9987,7 +10260,7 @@
       </p:sp>
       <p:pic>
         <p:nvPicPr>
-          <p:cNvPr id="8" name="Picture 7" descr="02_overview_adams_peak.png"/>
+          <p:cNvPr id="7" name="Picture 6" descr="02_overview_adams_peak.png"/>
           <p:cNvPicPr>
             <a:picLocks noChangeAspect="1"/>
           </p:cNvPicPr>
@@ -10016,7 +10289,7 @@
       </p:pic>
       <p:sp>
         <p:nvSpPr>
-          <p:cNvPr id="9" name="TextBox 8"/>
+          <p:cNvPr id="8" name="TextBox 7"/>
           <p:cNvSpPr txBox="1"/>
           <p:nvPr/>
         </p:nvSpPr>
@@ -10061,7 +10334,7 @@
       </p:sp>
       <p:pic>
         <p:nvPicPr>
-          <p:cNvPr id="10" name="Picture 9" descr="03_calendar_horton.png"/>
+          <p:cNvPr id="9" name="Picture 8" descr="03_calendar_horton.png"/>
           <p:cNvPicPr>
             <a:picLocks noChangeAspect="1"/>
           </p:cNvPicPr>
@@ -10090,7 +10363,7 @@
       </p:pic>
       <p:sp>
         <p:nvSpPr>
-          <p:cNvPr id="11" name="TextBox 10"/>
+          <p:cNvPr id="10" name="TextBox 9"/>
           <p:cNvSpPr txBox="1"/>
           <p:nvPr/>
         </p:nvSpPr>
@@ -10124,7 +10397,7 @@
       </p:sp>
       <p:pic>
         <p:nvPicPr>
-          <p:cNvPr id="12" name="Picture 11" descr="04_day_horton.png"/>
+          <p:cNvPr id="11" name="Picture 10" descr="04_day_horton.png"/>
           <p:cNvPicPr>
             <a:picLocks noChangeAspect="1"/>
           </p:cNvPicPr>
@@ -10153,7 +10426,7 @@
       </p:pic>
       <p:sp>
         <p:nvSpPr>
-          <p:cNvPr id="13" name="TextBox 12"/>
+          <p:cNvPr id="12" name="TextBox 11"/>
           <p:cNvSpPr txBox="1"/>
           <p:nvPr/>
         </p:nvSpPr>
@@ -10198,7 +10471,7 @@
       </p:sp>
       <p:sp>
         <p:nvSpPr>
-          <p:cNvPr id="14" name="TextBox 13"/>
+          <p:cNvPr id="13" name="TextBox 12"/>
           <p:cNvSpPr txBox="1"/>
           <p:nvPr/>
         </p:nvSpPr>
@@ -10330,6 +10603,40 @@
                 </a:solidFill>
               </a:rPr>
               <a:t>  OpenStreetMap trails, starts, checkpoints</a:t>
+            </a:r>
+          </a:p>
+        </p:txBody>
+      </p:sp>
+      <p:sp>
+        <p:nvSpPr>
+          <p:cNvPr id="14" name="TextBox 13"/>
+          <p:cNvSpPr txBox="1"/>
+          <p:nvPr/>
+        </p:nvSpPr>
+        <p:spPr>
+          <a:xfrm>
+            <a:off x="8961120" y="6446520"/>
+            <a:ext cx="3017520" cy="274320"/>
+          </a:xfrm>
+          <a:prstGeom prst="rect">
+            <a:avLst/>
+          </a:prstGeom>
+          <a:noFill/>
+        </p:spPr>
+        <p:txBody>
+          <a:bodyPr wrap="square" anchor="t">
+            <a:spAutoFit/>
+          </a:bodyPr>
+          <a:lstStyle/>
+          <a:p>
+            <a:pPr algn="r"/>
+            <a:r>
+              <a:rPr sz="900" b="0">
+                <a:solidFill>
+                  <a:srgbClr val="6B7280"/>
+                </a:solidFill>
+              </a:rPr>
+              <a:t>Component 4 · IT23343948 · Backup B6</a:t>
             </a:r>
           </a:p>
         </p:txBody>
@@ -10471,40 +10778,6 @@
         </p:nvSpPr>
         <p:spPr>
           <a:xfrm>
-            <a:off x="8961120" y="6446520"/>
-            <a:ext cx="3017520" cy="274320"/>
-          </a:xfrm>
-          <a:prstGeom prst="rect">
-            <a:avLst/>
-          </a:prstGeom>
-          <a:noFill/>
-        </p:spPr>
-        <p:txBody>
-          <a:bodyPr wrap="square" anchor="t">
-            <a:spAutoFit/>
-          </a:bodyPr>
-          <a:lstStyle/>
-          <a:p>
-            <a:pPr algn="r"/>
-            <a:r>
-              <a:rPr sz="900" b="0">
-                <a:solidFill>
-                  <a:srgbClr val="6B7280"/>
-                </a:solidFill>
-              </a:rPr>
-              <a:t>Component 4 · IT23343948 · 2</a:t>
-            </a:r>
-          </a:p>
-        </p:txBody>
-      </p:sp>
-      <p:sp>
-        <p:nvSpPr>
-          <p:cNvPr id="6" name="TextBox 5"/>
-          <p:cNvSpPr txBox="1"/>
-          <p:nvPr/>
-        </p:nvSpPr>
-        <p:spPr>
-          <a:xfrm>
             <a:off x="548640" y="1463040"/>
             <a:ext cx="6949440" cy="4572000"/>
           </a:xfrm>
@@ -10614,7 +10887,7 @@
       </p:sp>
       <p:sp>
         <p:nvSpPr>
-          <p:cNvPr id="7" name="Rounded Rectangle 6"/>
+          <p:cNvPr id="6" name="Rounded Rectangle 5"/>
           <p:cNvSpPr/>
           <p:nvPr/>
         </p:nvSpPr>
@@ -10683,6 +10956,40 @@
                 </a:solidFill>
               </a:rPr>
               <a:t>Can a Spatio-Temporal GNN, using only the trail graph, terrain, weather and calendar, forecast segment-level crowding and drive crowd control that replaces a static quota?</a:t>
+            </a:r>
+          </a:p>
+        </p:txBody>
+      </p:sp>
+      <p:sp>
+        <p:nvSpPr>
+          <p:cNvPr id="7" name="TextBox 6"/>
+          <p:cNvSpPr txBox="1"/>
+          <p:nvPr/>
+        </p:nvSpPr>
+        <p:spPr>
+          <a:xfrm>
+            <a:off x="8961120" y="6446520"/>
+            <a:ext cx="3017520" cy="274320"/>
+          </a:xfrm>
+          <a:prstGeom prst="rect">
+            <a:avLst/>
+          </a:prstGeom>
+          <a:noFill/>
+        </p:spPr>
+        <p:txBody>
+          <a:bodyPr wrap="square" anchor="t">
+            <a:spAutoFit/>
+          </a:bodyPr>
+          <a:lstStyle/>
+          <a:p>
+            <a:pPr algn="r"/>
+            <a:r>
+              <a:rPr sz="900" b="0">
+                <a:solidFill>
+                  <a:srgbClr val="6B7280"/>
+                </a:solidFill>
+              </a:rPr>
+              <a:t>Component 4 · IT23343948 · 2</a:t>
             </a:r>
           </a:p>
         </p:txBody>
@@ -10816,43 +11123,9 @@
           </a:p>
         </p:txBody>
       </p:sp>
-      <p:sp>
-        <p:nvSpPr>
-          <p:cNvPr id="5" name="TextBox 4"/>
-          <p:cNvSpPr txBox="1"/>
-          <p:nvPr/>
-        </p:nvSpPr>
-        <p:spPr>
-          <a:xfrm>
-            <a:off x="8961120" y="6446520"/>
-            <a:ext cx="3017520" cy="274320"/>
-          </a:xfrm>
-          <a:prstGeom prst="rect">
-            <a:avLst/>
-          </a:prstGeom>
-          <a:noFill/>
-        </p:spPr>
-        <p:txBody>
-          <a:bodyPr wrap="square" anchor="t">
-            <a:spAutoFit/>
-          </a:bodyPr>
-          <a:lstStyle/>
-          <a:p>
-            <a:pPr algn="r"/>
-            <a:r>
-              <a:rPr sz="900" b="0">
-                <a:solidFill>
-                  <a:srgbClr val="6B7280"/>
-                </a:solidFill>
-              </a:rPr>
-              <a:t>Component 4 · IT23343948 · 20</a:t>
-            </a:r>
-          </a:p>
-        </p:txBody>
-      </p:sp>
       <p:pic>
         <p:nvPicPr>
-          <p:cNvPr id="6" name="Picture 5" descr="05_start_times.png"/>
+          <p:cNvPr id="5" name="Picture 4" descr="05_start_times.png"/>
           <p:cNvPicPr>
             <a:picLocks noChangeAspect="1"/>
           </p:cNvPicPr>
@@ -10881,7 +11154,7 @@
       </p:pic>
       <p:sp>
         <p:nvSpPr>
-          <p:cNvPr id="7" name="TextBox 6"/>
+          <p:cNvPr id="6" name="TextBox 5"/>
           <p:cNvSpPr txBox="1"/>
           <p:nvPr/>
         </p:nvSpPr>
@@ -10926,7 +11199,7 @@
       </p:sp>
       <p:pic>
         <p:nvPicPr>
-          <p:cNvPr id="8" name="Picture 7" descr="06_halfway_hold.png"/>
+          <p:cNvPr id="7" name="Picture 6" descr="06_halfway_hold.png"/>
           <p:cNvPicPr>
             <a:picLocks noChangeAspect="1"/>
           </p:cNvPicPr>
@@ -10955,7 +11228,7 @@
       </p:pic>
       <p:sp>
         <p:nvSpPr>
-          <p:cNvPr id="9" name="TextBox 8"/>
+          <p:cNvPr id="8" name="TextBox 7"/>
           <p:cNvSpPr txBox="1"/>
           <p:nvPr/>
         </p:nvSpPr>
@@ -11000,7 +11273,7 @@
       </p:sp>
       <p:pic>
         <p:nvPicPr>
-          <p:cNvPr id="10" name="Picture 9" descr="08_officer_season.png"/>
+          <p:cNvPr id="9" name="Picture 8" descr="08_officer_season.png"/>
           <p:cNvPicPr>
             <a:picLocks noChangeAspect="1"/>
           </p:cNvPicPr>
@@ -11029,7 +11302,7 @@
       </p:pic>
       <p:sp>
         <p:nvSpPr>
-          <p:cNvPr id="11" name="TextBox 10"/>
+          <p:cNvPr id="10" name="TextBox 9"/>
           <p:cNvSpPr txBox="1"/>
           <p:nvPr/>
         </p:nvSpPr>
@@ -11074,7 +11347,7 @@
       </p:sp>
       <p:pic>
         <p:nvPicPr>
-          <p:cNvPr id="12" name="Picture 11" descr="09_night_plan.png"/>
+          <p:cNvPr id="11" name="Picture 10" descr="09_night_plan.png"/>
           <p:cNvPicPr>
             <a:picLocks noChangeAspect="1"/>
           </p:cNvPicPr>
@@ -11103,7 +11376,7 @@
       </p:pic>
       <p:sp>
         <p:nvSpPr>
-          <p:cNvPr id="13" name="TextBox 12"/>
+          <p:cNvPr id="12" name="TextBox 11"/>
           <p:cNvSpPr txBox="1"/>
           <p:nvPr/>
         </p:nvSpPr>
@@ -11148,7 +11421,7 @@
       </p:sp>
       <p:sp>
         <p:nvSpPr>
-          <p:cNvPr id="14" name="TextBox 13"/>
+          <p:cNvPr id="13" name="TextBox 12"/>
           <p:cNvSpPr txBox="1"/>
           <p:nvPr/>
         </p:nvSpPr>
@@ -11234,6 +11507,40 @@
                 </a:solidFill>
               </a:rPr>
               <a:t>  65 Python tests · 24 Flutter tests · analyzer clean</a:t>
+            </a:r>
+          </a:p>
+        </p:txBody>
+      </p:sp>
+      <p:sp>
+        <p:nvSpPr>
+          <p:cNvPr id="14" name="TextBox 13"/>
+          <p:cNvSpPr txBox="1"/>
+          <p:nvPr/>
+        </p:nvSpPr>
+        <p:spPr>
+          <a:xfrm>
+            <a:off x="8961120" y="6446520"/>
+            <a:ext cx="3017520" cy="274320"/>
+          </a:xfrm>
+          <a:prstGeom prst="rect">
+            <a:avLst/>
+          </a:prstGeom>
+          <a:noFill/>
+        </p:spPr>
+        <p:txBody>
+          <a:bodyPr wrap="square" anchor="t">
+            <a:spAutoFit/>
+          </a:bodyPr>
+          <a:lstStyle/>
+          <a:p>
+            <a:pPr algn="r"/>
+            <a:r>
+              <a:rPr sz="900" b="0">
+                <a:solidFill>
+                  <a:srgbClr val="6B7280"/>
+                </a:solidFill>
+              </a:rPr>
+              <a:t>Component 4 · IT23343948 · Backup B7</a:t>
             </a:r>
           </a:p>
         </p:txBody>
@@ -11367,43 +11674,9 @@
           </a:p>
         </p:txBody>
       </p:sp>
-      <p:sp>
-        <p:nvSpPr>
-          <p:cNvPr id="5" name="TextBox 4"/>
-          <p:cNvSpPr txBox="1"/>
-          <p:nvPr/>
-        </p:nvSpPr>
-        <p:spPr>
-          <a:xfrm>
-            <a:off x="8961120" y="6446520"/>
-            <a:ext cx="3017520" cy="274320"/>
-          </a:xfrm>
-          <a:prstGeom prst="rect">
-            <a:avLst/>
-          </a:prstGeom>
-          <a:noFill/>
-        </p:spPr>
-        <p:txBody>
-          <a:bodyPr wrap="square" anchor="t">
-            <a:spAutoFit/>
-          </a:bodyPr>
-          <a:lstStyle/>
-          <a:p>
-            <a:pPr algn="r"/>
-            <a:r>
-              <a:rPr sz="900" b="0">
-                <a:solidFill>
-                  <a:srgbClr val="6B7280"/>
-                </a:solidFill>
-              </a:rPr>
-              <a:t>Component 4 · IT23343948 · 21</a:t>
-            </a:r>
-          </a:p>
-        </p:txBody>
-      </p:sp>
       <p:graphicFrame>
         <p:nvGraphicFramePr>
-          <p:cNvPr id="6" name="Table 5"/>
+          <p:cNvPr id="5" name="Table 4"/>
           <p:cNvGraphicFramePr>
             <a:graphicFrameLocks noGrp="1"/>
           </p:cNvGraphicFramePr>
@@ -12383,7 +12656,7 @@
                             <a:srgbClr val="1F2A24"/>
                           </a:solidFill>
                         </a:rPr>
-                        <a:t>Ext.</a:t>
+                        <a:t>FR6–9</a:t>
                       </a:r>
                     </a:p>
                   </a:txBody>
@@ -12404,7 +12677,7 @@
                             <a:srgbClr val="1F2A24"/>
                           </a:solidFill>
                         </a:rPr>
-                        <a:t>Slot tickets (Horton) · start times + halfway holds (Adam's Peak)</a:t>
+                        <a:t>Slot tickets · officer quota rule · gate advice · ranger spot counts</a:t>
                       </a:r>
                     </a:p>
                   </a:txBody>
@@ -12446,7 +12719,7 @@
                             <a:srgbClr val="1F2A24"/>
                           </a:solidFill>
                         </a:rPr>
-                        <a:t>−99.6 % overcrowding; final steps cleared</a:t>
+                        <a:t>−99.6 % (tickets); RQ9; offline counts</a:t>
                       </a:r>
                     </a:p>
                   </a:txBody>
@@ -12469,7 +12742,7 @@
                             <a:srgbClr val="1F2A24"/>
                           </a:solidFill>
                         </a:rPr>
-                        <a:t>Ext.</a:t>
+                        <a:t>FR10–13</a:t>
                       </a:r>
                     </a:p>
                   </a:txBody>
@@ -12490,7 +12763,7 @@
                             <a:srgbClr val="1F2A24"/>
                           </a:solidFill>
                         </a:rPr>
-                        <a:t>90-day planning outlook, staff roles, Sinhala / Tamil</a:t>
+                        <a:t>Chance of crowding · 90-day outlook · Adam's Peak advice · records</a:t>
                       </a:r>
                     </a:p>
                   </a:txBody>
@@ -12532,7 +12805,7 @@
                             <a:srgbClr val="1F2A24"/>
                           </a:solidFill>
                         </a:rPr>
-                        <a:t>P10–P90; ranger / officer / admin</a:t>
+                        <a:t>calibrated; P10–P90; −22 % waiting</a:t>
                       </a:r>
                     </a:p>
                   </a:txBody>
@@ -12549,7 +12822,7 @@
       </p:graphicFrame>
       <p:sp>
         <p:nvSpPr>
-          <p:cNvPr id="7" name="TextBox 6"/>
+          <p:cNvPr id="6" name="TextBox 5"/>
           <p:cNvSpPr txBox="1"/>
           <p:nvPr/>
         </p:nvSpPr>
@@ -12577,6 +12850,40 @@
                 </a:solidFill>
               </a:rPr>
               <a:t>Requirements are provisional until the stakeholder surveys return (DWC, rangers, operators, hikers).</a:t>
+            </a:r>
+          </a:p>
+        </p:txBody>
+      </p:sp>
+      <p:sp>
+        <p:nvSpPr>
+          <p:cNvPr id="7" name="TextBox 6"/>
+          <p:cNvSpPr txBox="1"/>
+          <p:nvPr/>
+        </p:nvSpPr>
+        <p:spPr>
+          <a:xfrm>
+            <a:off x="8961120" y="6446520"/>
+            <a:ext cx="3017520" cy="274320"/>
+          </a:xfrm>
+          <a:prstGeom prst="rect">
+            <a:avLst/>
+          </a:prstGeom>
+          <a:noFill/>
+        </p:spPr>
+        <p:txBody>
+          <a:bodyPr wrap="square" anchor="t">
+            <a:spAutoFit/>
+          </a:bodyPr>
+          <a:lstStyle/>
+          <a:p>
+            <a:pPr algn="r"/>
+            <a:r>
+              <a:rPr sz="900" b="0">
+                <a:solidFill>
+                  <a:srgbClr val="6B7280"/>
+                </a:solidFill>
+              </a:rPr>
+              <a:t>Component 4 · IT23343948 · 18</a:t>
             </a:r>
           </a:p>
         </p:txBody>
@@ -12710,43 +13017,9 @@
           </a:p>
         </p:txBody>
       </p:sp>
-      <p:sp>
-        <p:nvSpPr>
-          <p:cNvPr id="5" name="TextBox 4"/>
-          <p:cNvSpPr txBox="1"/>
-          <p:nvPr/>
-        </p:nvSpPr>
-        <p:spPr>
-          <a:xfrm>
-            <a:off x="8961120" y="6446520"/>
-            <a:ext cx="3017520" cy="274320"/>
-          </a:xfrm>
-          <a:prstGeom prst="rect">
-            <a:avLst/>
-          </a:prstGeom>
-          <a:noFill/>
-        </p:spPr>
-        <p:txBody>
-          <a:bodyPr wrap="square" anchor="t">
-            <a:spAutoFit/>
-          </a:bodyPr>
-          <a:lstStyle/>
-          <a:p>
-            <a:pPr algn="r"/>
-            <a:r>
-              <a:rPr sz="900" b="0">
-                <a:solidFill>
-                  <a:srgbClr val="6B7280"/>
-                </a:solidFill>
-              </a:rPr>
-              <a:t>Component 4 · IT23343948 · 22</a:t>
-            </a:r>
-          </a:p>
-        </p:txBody>
-      </p:sp>
       <p:graphicFrame>
         <p:nvGraphicFramePr>
-          <p:cNvPr id="6" name="Table 5"/>
+          <p:cNvPr id="5" name="Table 4"/>
           <p:cNvGraphicFramePr>
             <a:graphicFrameLocks noGrp="1"/>
           </p:cNvGraphicFramePr>
@@ -12929,7 +13202,7 @@
                             <a:srgbClr val="1F2A24"/>
                           </a:solidFill>
                         </a:rPr>
-                        <a:t>Assumptions listed; RQ4 sensitivity; agreement criteria fixed and tool built; counts Dec (Horton) + 23 Dec (Adam's Peak)</a:t>
+                        <a:t>Assumptions listed; S1 realistic world; criteria fixed, counting tool in the app; counts Dec (Horton) + 23 Dec (Adam's Peak)</a:t>
                       </a:r>
                     </a:p>
                   </a:txBody>
@@ -12973,7 +13246,7 @@
                             <a:srgbClr val="1F2A24"/>
                           </a:solidFill>
                         </a:rPr>
-                        <a:t>ST-GNN not better than the LSTM</a:t>
+                        <a:t>Graph adds little over an LSTM</a:t>
                       </a:r>
                     </a:p>
                   </a:txBody>
@@ -12994,7 +13267,7 @@
                             <a:srgbClr val="1F2A24"/>
                           </a:solidFill>
                         </a:rPr>
-                        <a:t>Medium</a:t>
+                        <a:t>High</a:t>
                       </a:r>
                     </a:p>
                   </a:txBody>
@@ -13015,7 +13288,7 @@
                             <a:srgbClr val="1F2A24"/>
                           </a:solidFill>
                         </a:rPr>
-                        <a:t>Reported either way: better on segments without counts, tie elsewhere (3 seeds); periodic inputs + tuning next</a:t>
+                        <a:t>Reported either way (RQ1, RQ1b, RQ10); tested in the gap's own setting on the realistic world (running)</a:t>
                       </a:r>
                     </a:p>
                   </a:txBody>
@@ -13531,7 +13804,7 @@
                             <a:srgbClr val="1F2A24"/>
                           </a:solidFill>
                         </a:rPr>
-                        <a:t>Happened at Adam's Peak (RQ5) – reported as a finding; layer freezing and PeMS04/08 next</a:t>
+                        <a:t>Happened at Adam's Peak (RQ5) – reported as a finding; frozen core tested; sparse-sensor test + PeMS04/08 next</a:t>
                       </a:r>
                     </a:p>
                   </a:txBody>
@@ -13617,7 +13890,7 @@
                             <a:srgbClr val="1F2A24"/>
                           </a:solidFill>
                         </a:rPr>
-                        <a:t>Versioned JSON already served; agree a JSON Schema + contract tests with the Module 3 owner in Nov</a:t>
+                        <a:t>JSON Schema + contract tests done, feed inside the offline pack; Module 3 owner sign-off in Nov</a:t>
                       </a:r>
                     </a:p>
                   </a:txBody>
@@ -13632,6 +13905,40 @@
           </a:graphicData>
         </a:graphic>
       </p:graphicFrame>
+      <p:sp>
+        <p:nvSpPr>
+          <p:cNvPr id="6" name="TextBox 5"/>
+          <p:cNvSpPr txBox="1"/>
+          <p:nvPr/>
+        </p:nvSpPr>
+        <p:spPr>
+          <a:xfrm>
+            <a:off x="8961120" y="6446520"/>
+            <a:ext cx="3017520" cy="274320"/>
+          </a:xfrm>
+          <a:prstGeom prst="rect">
+            <a:avLst/>
+          </a:prstGeom>
+          <a:noFill/>
+        </p:spPr>
+        <p:txBody>
+          <a:bodyPr wrap="square" anchor="t">
+            <a:spAutoFit/>
+          </a:bodyPr>
+          <a:lstStyle/>
+          <a:p>
+            <a:pPr algn="r"/>
+            <a:r>
+              <a:rPr sz="900" b="0">
+                <a:solidFill>
+                  <a:srgbClr val="6B7280"/>
+                </a:solidFill>
+              </a:rPr>
+              <a:t>Component 4 · IT23343948 · 19</a:t>
+            </a:r>
+          </a:p>
+        </p:txBody>
+      </p:sp>
     </p:spTree>
   </p:cSld>
   <p:clrMapOvr>
@@ -13761,43 +14068,9 @@
           </a:p>
         </p:txBody>
       </p:sp>
-      <p:sp>
-        <p:nvSpPr>
-          <p:cNvPr id="5" name="TextBox 4"/>
-          <p:cNvSpPr txBox="1"/>
-          <p:nvPr/>
-        </p:nvSpPr>
-        <p:spPr>
-          <a:xfrm>
-            <a:off x="8961120" y="6446520"/>
-            <a:ext cx="3017520" cy="274320"/>
-          </a:xfrm>
-          <a:prstGeom prst="rect">
-            <a:avLst/>
-          </a:prstGeom>
-          <a:noFill/>
-        </p:spPr>
-        <p:txBody>
-          <a:bodyPr wrap="square" anchor="t">
-            <a:spAutoFit/>
-          </a:bodyPr>
-          <a:lstStyle/>
-          <a:p>
-            <a:pPr algn="r"/>
-            <a:r>
-              <a:rPr sz="900" b="0">
-                <a:solidFill>
-                  <a:srgbClr val="6B7280"/>
-                </a:solidFill>
-              </a:rPr>
-              <a:t>Component 4 · IT23343948 · 23</a:t>
-            </a:r>
-          </a:p>
-        </p:txBody>
-      </p:sp>
       <p:graphicFrame>
         <p:nvGraphicFramePr>
-          <p:cNvPr id="6" name="Table 5"/>
+          <p:cNvPr id="5" name="Table 4"/>
           <p:cNvGraphicFramePr>
             <a:graphicFrameLocks noGrp="1"/>
           </p:cNvGraphicFramePr>
@@ -14043,7 +14316,7 @@
       </p:graphicFrame>
       <p:sp>
         <p:nvSpPr>
-          <p:cNvPr id="7" name="TextBox 6"/>
+          <p:cNvPr id="6" name="TextBox 5"/>
           <p:cNvSpPr txBox="1"/>
           <p:nvPr/>
         </p:nvSpPr>
@@ -14151,7 +14424,64 @@
                   <a:srgbClr val="1F2A24"/>
                 </a:solidFill>
               </a:rPr>
-              <a:t>  open data, CPU-only, offline-capable app</a:t>
+              <a:t>  open data, CPU-only, no sensors to buy; one small server per park (cost per park: W11)</a:t>
+            </a:r>
+          </a:p>
+          <a:p>
+            <a:pPr>
+              <a:spcAft>
+                <a:spcPts val="1200"/>
+              </a:spcAft>
+            </a:pPr>
+            <a:r>
+              <a:rPr sz="1500" b="1">
+                <a:solidFill>
+                  <a:srgbClr val="1F2A24"/>
+                </a:solidFill>
+              </a:rPr>
+              <a:t>•  Evidence next:</a:t>
+            </a:r>
+            <a:r>
+              <a:rPr sz="1500">
+                <a:solidFill>
+                  <a:srgbClr val="1F2A24"/>
+                </a:solidFill>
+              </a:rPr>
+              <a:t>  letters of interest from a tour operator and DWC / Sri Pada Trust</a:t>
+            </a:r>
+          </a:p>
+        </p:txBody>
+      </p:sp>
+      <p:sp>
+        <p:nvSpPr>
+          <p:cNvPr id="7" name="TextBox 6"/>
+          <p:cNvSpPr txBox="1"/>
+          <p:nvPr/>
+        </p:nvSpPr>
+        <p:spPr>
+          <a:xfrm>
+            <a:off x="8961120" y="6446520"/>
+            <a:ext cx="3017520" cy="274320"/>
+          </a:xfrm>
+          <a:prstGeom prst="rect">
+            <a:avLst/>
+          </a:prstGeom>
+          <a:noFill/>
+        </p:spPr>
+        <p:txBody>
+          <a:bodyPr wrap="square" anchor="t">
+            <a:spAutoFit/>
+          </a:bodyPr>
+          <a:lstStyle/>
+          <a:p>
+            <a:pPr algn="r"/>
+            <a:r>
+              <a:rPr sz="900" b="0">
+                <a:solidFill>
+                  <a:srgbClr val="6B7280"/>
+                </a:solidFill>
+              </a:rPr>
+              <a:t>Component 4 · IT23343948 · 20</a:t>
             </a:r>
           </a:p>
         </p:txBody>
@@ -14285,43 +14615,9 @@
           </a:p>
         </p:txBody>
       </p:sp>
-      <p:sp>
-        <p:nvSpPr>
-          <p:cNvPr id="5" name="TextBox 4"/>
-          <p:cNvSpPr txBox="1"/>
-          <p:nvPr/>
-        </p:nvSpPr>
-        <p:spPr>
-          <a:xfrm>
-            <a:off x="8961120" y="6446520"/>
-            <a:ext cx="3017520" cy="274320"/>
-          </a:xfrm>
-          <a:prstGeom prst="rect">
-            <a:avLst/>
-          </a:prstGeom>
-          <a:noFill/>
-        </p:spPr>
-        <p:txBody>
-          <a:bodyPr wrap="square" anchor="t">
-            <a:spAutoFit/>
-          </a:bodyPr>
-          <a:lstStyle/>
-          <a:p>
-            <a:pPr algn="r"/>
-            <a:r>
-              <a:rPr sz="900" b="0">
-                <a:solidFill>
-                  <a:srgbClr val="6B7280"/>
-                </a:solidFill>
-              </a:rPr>
-              <a:t>Component 4 · IT23343948 · 24</a:t>
-            </a:r>
-          </a:p>
-        </p:txBody>
-      </p:sp>
       <p:graphicFrame>
         <p:nvGraphicFramePr>
-          <p:cNvPr id="6" name="Table 5"/>
+          <p:cNvPr id="5" name="Table 4"/>
           <p:cNvGraphicFramePr>
             <a:graphicFrameLocks noGrp="1"/>
           </p:cNvGraphicFramePr>
@@ -14590,7 +14886,7 @@
                             <a:srgbClr val="1F2A24"/>
                           </a:solidFill>
                         </a:rPr>
-                        <a:t>2 parks; CHIRPS / NASA POWER next</a:t>
+                        <a:t>2 parks; NASA POWER checked, CHIRPS next</a:t>
                       </a:r>
                     </a:p>
                   </a:txBody>
@@ -14913,7 +15209,7 @@
                             <a:srgbClr val="1F2A24"/>
                           </a:solidFill>
                         </a:rPr>
-                        <a:t>Done (fine-tuning)</a:t>
+                        <a:t>Done (fine-tune, frozen)</a:t>
                       </a:r>
                     </a:p>
                   </a:txBody>
@@ -14934,7 +15230,7 @@
                             <a:srgbClr val="1F2A24"/>
                           </a:solidFill>
                         </a:rPr>
-                        <a:t>layer freezing next</a:t>
+                        <a:t>sparse-sensor test, PeMS04/08 next</a:t>
                       </a:r>
                     </a:p>
                   </a:txBody>
@@ -15278,7 +15574,7 @@
                             <a:srgbClr val="1F2A24"/>
                           </a:solidFill>
                         </a:rPr>
-                        <a:t>JSON Schema + /module3/feed; M3 sign-off</a:t>
+                        <a:t>Schema, /module3/feed, offline pack</a:t>
                       </a:r>
                     </a:p>
                   </a:txBody>
@@ -15364,7 +15660,7 @@
                             <a:srgbClr val="1F2A24"/>
                           </a:solidFill>
                         </a:rPr>
-                        <a:t>65 + 24 automated tests</a:t>
+                        <a:t>101 + 34 tests, lint, CI</a:t>
                       </a:r>
                     </a:p>
                   </a:txBody>
@@ -15465,6 +15761,40 @@
           </a:graphicData>
         </a:graphic>
       </p:graphicFrame>
+      <p:sp>
+        <p:nvSpPr>
+          <p:cNvPr id="6" name="TextBox 5"/>
+          <p:cNvSpPr txBox="1"/>
+          <p:nvPr/>
+        </p:nvSpPr>
+        <p:spPr>
+          <a:xfrm>
+            <a:off x="8961120" y="6446520"/>
+            <a:ext cx="3017520" cy="274320"/>
+          </a:xfrm>
+          <a:prstGeom prst="rect">
+            <a:avLst/>
+          </a:prstGeom>
+          <a:noFill/>
+        </p:spPr>
+        <p:txBody>
+          <a:bodyPr wrap="square" anchor="t">
+            <a:spAutoFit/>
+          </a:bodyPr>
+          <a:lstStyle/>
+          <a:p>
+            <a:pPr algn="r"/>
+            <a:r>
+              <a:rPr sz="900" b="0">
+                <a:solidFill>
+                  <a:srgbClr val="6B7280"/>
+                </a:solidFill>
+              </a:rPr>
+              <a:t>Component 4 · IT23343948 · 21</a:t>
+            </a:r>
+          </a:p>
+        </p:txBody>
+      </p:sp>
     </p:spTree>
   </p:cSld>
   <p:clrMapOvr>
@@ -15594,43 +15924,9 @@
           </a:p>
         </p:txBody>
       </p:sp>
-      <p:sp>
-        <p:nvSpPr>
-          <p:cNvPr id="5" name="TextBox 4"/>
-          <p:cNvSpPr txBox="1"/>
-          <p:nvPr/>
-        </p:nvSpPr>
-        <p:spPr>
-          <a:xfrm>
-            <a:off x="8961120" y="6446520"/>
-            <a:ext cx="3017520" cy="274320"/>
-          </a:xfrm>
-          <a:prstGeom prst="rect">
-            <a:avLst/>
-          </a:prstGeom>
-          <a:noFill/>
-        </p:spPr>
-        <p:txBody>
-          <a:bodyPr wrap="square" anchor="t">
-            <a:spAutoFit/>
-          </a:bodyPr>
-          <a:lstStyle/>
-          <a:p>
-            <a:pPr algn="r"/>
-            <a:r>
-              <a:rPr sz="900" b="0">
-                <a:solidFill>
-                  <a:srgbClr val="6B7280"/>
-                </a:solidFill>
-              </a:rPr>
-              <a:t>Component 4 · IT23343948 · 25</a:t>
-            </a:r>
-          </a:p>
-        </p:txBody>
-      </p:sp>
       <p:graphicFrame>
         <p:nvGraphicFramePr>
-          <p:cNvPr id="6" name="Table 5"/>
+          <p:cNvPr id="5" name="Table 4"/>
           <p:cNvGraphicFramePr>
             <a:graphicFrameLocks noGrp="1"/>
           </p:cNvGraphicFramePr>
@@ -15638,7 +15934,7 @@
         </p:nvGraphicFramePr>
         <p:xfrm>
           <a:off x="548640" y="1371600"/>
-          <a:ext cx="11064240" cy="3968496"/>
+          <a:ext cx="11064240" cy="3401568"/>
         </p:xfrm>
         <a:graphic>
           <a:graphicData uri="http://schemas.openxmlformats.org/drawingml/2006/table">
@@ -15749,7 +16045,7 @@
                             <a:srgbClr val="1F2A24"/>
                           </a:solidFill>
                         </a:rPr>
-                        <a:t>Beat the LSTM where it matters: daily / weekly periodic inputs, tuning; real-phone timing; CI</a:t>
+                        <a:t>Finish gate-only tests on the realistic world (S2); live forecast from gate counts only; send DWC data request + surveys</a:t>
                       </a:r>
                     </a:p>
                   </a:txBody>
@@ -15770,7 +16066,7 @@
                             <a:srgbClr val="1F2A24"/>
                           </a:solidFill>
                         </a:rPr>
-                        <a:t>paired tests reported; NFR1 on a phone</a:t>
+                        <a:t>RQ10 on S1; requests sent</a:t>
                       </a:r>
                     </a:p>
                   </a:txBody>
@@ -15793,7 +16089,7 @@
                             <a:srgbClr val="1F2A24"/>
                           </a:solidFill>
                         </a:rPr>
-                        <a:t>by 1 Nov</a:t>
+                        <a:t>9 – 22 Nov</a:t>
                       </a:r>
                     </a:p>
                   </a:txBody>
@@ -15814,7 +16110,7 @@
                             <a:srgbClr val="1F2A24"/>
                           </a:solidFill>
                         </a:rPr>
-                        <a:t>Send the stakeholder surveys (DWC, rangers, operators, hikers); book 2–3 interviews</a:t>
+                        <a:t>Pretraining where sensors are scarce; PeMS04/08; one adversarial / gradual-unfreezing method; real-phone timing</a:t>
                       </a:r>
                     </a:p>
                   </a:txBody>
@@ -15835,7 +16131,7 @@
                             <a:srgbClr val="1F2A24"/>
                           </a:solidFill>
                         </a:rPr>
-                        <a:t>responses mapped to FR / NFR</a:t>
+                        <a:t>RQ5 extended; NFR1 on a phone</a:t>
                       </a:r>
                     </a:p>
                   </a:txBody>
@@ -15858,7 +16154,7 @@
                             <a:srgbClr val="1F2A24"/>
                           </a:solidFill>
                         </a:rPr>
-                        <a:t>9 – 22 Nov</a:t>
+                        <a:t>23 Nov – 6 Dec</a:t>
                       </a:r>
                     </a:p>
                   </a:txBody>
@@ -15879,7 +16175,7 @@
                             <a:srgbClr val="1F2A24"/>
                           </a:solidFill>
                         </a:rPr>
-                        <a:t>Domain adaptation beyond fine-tuning (layer freezing, PeMS04/08); feature ablation; lead time</a:t>
+                        <a:t>Peak-aware loss / periodic inputs where RQ1b shows misses; robustness of conclusions; Module 3 sign-off; CHIRPS</a:t>
                       </a:r>
                     </a:p>
                   </a:txBody>
@@ -15900,7 +16196,7 @@
                             <a:srgbClr val="1F2A24"/>
                           </a:solidFill>
                         </a:rPr>
-                        <a:t>RQ5 and RQ1b tables</a:t>
+                        <a:t>paired tests; robustness table</a:t>
                       </a:r>
                     </a:p>
                   </a:txBody>
@@ -15923,7 +16219,7 @@
                             <a:srgbClr val="1F2A24"/>
                           </a:solidFill>
                         </a:rPr>
-                        <a:t>23 Nov – 6 Dec</a:t>
+                        <a:t>7 – 24 Dec</a:t>
                       </a:r>
                     </a:p>
                   </a:txBody>
@@ -15944,7 +16240,7 @@
                             <a:srgbClr val="1F2A24"/>
                           </a:solidFill>
                         </a:rPr>
-                        <a:t>Module 3 owner adopts the feed (schema ready, FR4); CHIRPS / NASA POWER (O1)</a:t>
+                        <a:t>Field counts: Horton Plains 2–3 days; Adam's Peak 23 Dec (Unduvap Poya)</a:t>
                       </a:r>
                     </a:p>
                   </a:txBody>
@@ -15965,7 +16261,7 @@
                             <a:srgbClr val="1F2A24"/>
                           </a:solidFill>
                         </a:rPr>
-                        <a:t>Module 3 owner signs off</a:t>
+                        <a:t>RQ7 report (A1–A3)</a:t>
                       </a:r>
                     </a:p>
                   </a:txBody>
@@ -15988,7 +16284,7 @@
                             <a:srgbClr val="1F2A24"/>
                           </a:solidFill>
                         </a:rPr>
-                        <a:t>7 – 24 Dec</a:t>
+                        <a:t>28 Dec – 10 Jan</a:t>
                       </a:r>
                     </a:p>
                   </a:txBody>
@@ -16009,7 +16305,7 @@
                             <a:srgbClr val="1F2A24"/>
                           </a:solidFill>
                         </a:rPr>
-                        <a:t>Field counts: Horton Plains 2–3 days; Adam's Peak 23 Dec (Unduvap Poya)</a:t>
+                        <a:t>Recalibrate the simulator; re-run RQ1–RQ10; survey summary</a:t>
                       </a:r>
                     </a:p>
                   </a:txBody>
@@ -16030,78 +16326,13 @@
                             <a:srgbClr val="1F2A24"/>
                           </a:solidFill>
                         </a:rPr>
-                        <a:t>RQ7 report (A1–A3)</a:t>
+                        <a:t>results for PP2</a:t>
                       </a:r>
                     </a:p>
                   </a:txBody>
                   <a:tcPr marL="54864" marR="54864" marT="27432" marB="27432">
                     <a:solidFill>
                       <a:srgbClr val="FFFFFF"/>
-                    </a:solidFill>
-                  </a:tcPr>
-                </a:tc>
-              </a:tr>
-              <a:tr h="566928">
-                <a:tc>
-                  <a:txBody>
-                    <a:bodyPr/>
-                    <a:lstStyle/>
-                    <a:p>
-                      <a:r>
-                        <a:rPr sz="1300" b="0">
-                          <a:solidFill>
-                            <a:srgbClr val="1F2A24"/>
-                          </a:solidFill>
-                        </a:rPr>
-                        <a:t>28 Dec – 10 Jan</a:t>
-                      </a:r>
-                    </a:p>
-                  </a:txBody>
-                  <a:tcPr marL="54864" marR="54864" marT="27432" marB="27432">
-                    <a:solidFill>
-                      <a:srgbClr val="F4F7F5"/>
-                    </a:solidFill>
-                  </a:tcPr>
-                </a:tc>
-                <a:tc>
-                  <a:txBody>
-                    <a:bodyPr/>
-                    <a:lstStyle/>
-                    <a:p>
-                      <a:r>
-                        <a:rPr sz="1300" b="0">
-                          <a:solidFill>
-                            <a:srgbClr val="1F2A24"/>
-                          </a:solidFill>
-                        </a:rPr>
-                        <a:t>Recalibrate the simulator; re-run RQ1–RQ5; survey summary</a:t>
-                      </a:r>
-                    </a:p>
-                  </a:txBody>
-                  <a:tcPr marL="54864" marR="54864" marT="27432" marB="27432">
-                    <a:solidFill>
-                      <a:srgbClr val="F4F7F5"/>
-                    </a:solidFill>
-                  </a:tcPr>
-                </a:tc>
-                <a:tc>
-                  <a:txBody>
-                    <a:bodyPr/>
-                    <a:lstStyle/>
-                    <a:p>
-                      <a:r>
-                        <a:rPr sz="1300" b="0">
-                          <a:solidFill>
-                            <a:srgbClr val="1F2A24"/>
-                          </a:solidFill>
-                        </a:rPr>
-                        <a:t>results for PP2</a:t>
-                      </a:r>
-                    </a:p>
-                  </a:txBody>
-                  <a:tcPr marL="54864" marR="54864" marT="27432" marB="27432">
-                    <a:solidFill>
-                      <a:srgbClr val="F4F7F5"/>
                     </a:solidFill>
                   </a:tcPr>
                 </a:tc>
@@ -16112,7 +16343,7 @@
       </p:graphicFrame>
       <p:sp>
         <p:nvSpPr>
-          <p:cNvPr id="7" name="TextBox 6"/>
+          <p:cNvPr id="6" name="TextBox 5"/>
           <p:cNvSpPr txBox="1"/>
           <p:nvPr/>
         </p:nvSpPr>
@@ -16140,6 +16371,40 @@
                 </a:solidFill>
               </a:rPr>
               <a:t>Frozen until these are done: new screens, new parks, new booking features.</a:t>
+            </a:r>
+          </a:p>
+        </p:txBody>
+      </p:sp>
+      <p:sp>
+        <p:nvSpPr>
+          <p:cNvPr id="7" name="TextBox 6"/>
+          <p:cNvSpPr txBox="1"/>
+          <p:nvPr/>
+        </p:nvSpPr>
+        <p:spPr>
+          <a:xfrm>
+            <a:off x="8961120" y="6446520"/>
+            <a:ext cx="3017520" cy="274320"/>
+          </a:xfrm>
+          <a:prstGeom prst="rect">
+            <a:avLst/>
+          </a:prstGeom>
+          <a:noFill/>
+        </p:spPr>
+        <p:txBody>
+          <a:bodyPr wrap="square" anchor="t">
+            <a:spAutoFit/>
+          </a:bodyPr>
+          <a:lstStyle/>
+          <a:p>
+            <a:pPr algn="r"/>
+            <a:r>
+              <a:rPr sz="900" b="0">
+                <a:solidFill>
+                  <a:srgbClr val="6B7280"/>
+                </a:solidFill>
+              </a:rPr>
+              <a:t>Component 4 · IT23343948 · 22</a:t>
             </a:r>
           </a:p>
         </p:txBody>
@@ -16171,13 +16436,13 @@
         <p:spPr>
           <a:xfrm>
             <a:off x="0" y="0"/>
-            <a:ext cx="12191695" cy="6858000"/>
+            <a:ext cx="164592" cy="6858000"/>
           </a:xfrm>
           <a:prstGeom prst="rect">
             <a:avLst/>
           </a:prstGeom>
           <a:solidFill>
-            <a:srgbClr val="1F2A24"/>
+            <a:srgbClr val="2F6B4F"/>
           </a:solidFill>
           <a:ln>
             <a:noFill/>
@@ -16213,8 +16478,8 @@
         </p:nvSpPr>
         <p:spPr>
           <a:xfrm>
-            <a:off x="731520" y="2194560"/>
-            <a:ext cx="10058400" cy="1097280"/>
+            <a:off x="502920" y="292608"/>
+            <a:ext cx="8229600" cy="320040"/>
           </a:xfrm>
           <a:prstGeom prst="rect">
             <a:avLst/>
@@ -16229,12 +16494,12 @@
           <a:p>
             <a:pPr algn="l"/>
             <a:r>
-              <a:rPr sz="4800" b="1">
-                <a:solidFill>
-                  <a:srgbClr val="FFFFFF"/>
-                </a:solidFill>
-              </a:rPr>
-              <a:t>Thank you</a:t>
+              <a:rPr sz="1200" b="1">
+                <a:solidFill>
+                  <a:srgbClr val="2F6B4F"/>
+                </a:solidFill>
+              </a:rPr>
+              <a:t>PROVEN GAP</a:t>
             </a:r>
           </a:p>
         </p:txBody>
@@ -16247,8 +16512,8 @@
         </p:nvSpPr>
         <p:spPr>
           <a:xfrm>
-            <a:off x="731520" y="3200400"/>
-            <a:ext cx="10058400" cy="731520"/>
+            <a:off x="502920" y="566928"/>
+            <a:ext cx="11247120" cy="731520"/>
           </a:xfrm>
           <a:prstGeom prst="rect">
             <a:avLst/>
@@ -16263,26 +16528,508 @@
           <a:p>
             <a:pPr algn="l"/>
             <a:r>
-              <a:rPr sz="2600" b="0">
-                <a:solidFill>
-                  <a:srgbClr val="E0A100"/>
-                </a:solidFill>
-              </a:rPr>
-              <a:t>Questions?</a:t>
-            </a:r>
-          </a:p>
-        </p:txBody>
-      </p:sp>
-      <p:sp>
-        <p:nvSpPr>
-          <p:cNvPr id="5" name="TextBox 4"/>
+              <a:rPr sz="2800" b="1">
+                <a:solidFill>
+                  <a:srgbClr val="1F2A24"/>
+                </a:solidFill>
+              </a:rPr>
+              <a:t>The research gap, claim by claim</a:t>
+            </a:r>
+          </a:p>
+        </p:txBody>
+      </p:sp>
+      <p:graphicFrame>
+        <p:nvGraphicFramePr>
+          <p:cNvPr id="5" name="Table 4"/>
+          <p:cNvGraphicFramePr>
+            <a:graphicFrameLocks noGrp="1"/>
+          </p:cNvGraphicFramePr>
+          <p:nvPr/>
+        </p:nvGraphicFramePr>
+        <p:xfrm>
+          <a:off x="548640" y="1371600"/>
+          <a:ext cx="11064240" cy="3968496"/>
+        </p:xfrm>
+        <a:graphic>
+          <a:graphicData uri="http://schemas.openxmlformats.org/drawingml/2006/table">
+            <a:tbl>
+              <a:tblPr firstRow="1" bandRow="1">
+                <a:tableStyleId>{5C22544A-7EE6-4342-B048-85BDC9FD1C3A}</a:tableStyleId>
+              </a:tblPr>
+              <a:tblGrid>
+                <a:gridCol w="3291840"/>
+                <a:gridCol w="6035040"/>
+                <a:gridCol w="1737360"/>
+              </a:tblGrid>
+              <a:tr h="566928">
+                <a:tc>
+                  <a:txBody>
+                    <a:bodyPr/>
+                    <a:lstStyle/>
+                    <a:p>
+                      <a:r>
+                        <a:rPr sz="1200" b="1">
+                          <a:solidFill>
+                            <a:srgbClr val="FFFFFF"/>
+                          </a:solidFill>
+                        </a:rPr>
+                        <a:t>Claim (proposal 1.3)</a:t>
+                      </a:r>
+                    </a:p>
+                  </a:txBody>
+                  <a:tcPr marL="54864" marR="54864" marT="27432" marB="27432">
+                    <a:solidFill>
+                      <a:srgbClr val="2F6B4F"/>
+                    </a:solidFill>
+                  </a:tcPr>
+                </a:tc>
+                <a:tc>
+                  <a:txBody>
+                    <a:bodyPr/>
+                    <a:lstStyle/>
+                    <a:p>
+                      <a:r>
+                        <a:rPr sz="1200" b="1">
+                          <a:solidFill>
+                            <a:srgbClr val="FFFFFF"/>
+                          </a:solidFill>
+                        </a:rPr>
+                        <a:t>Evidence today (simulation, 2025 test year, 3 seeds)</a:t>
+                      </a:r>
+                    </a:p>
+                  </a:txBody>
+                  <a:tcPr marL="54864" marR="54864" marT="27432" marB="27432">
+                    <a:solidFill>
+                      <a:srgbClr val="2F6B4F"/>
+                    </a:solidFill>
+                  </a:tcPr>
+                </a:tc>
+                <a:tc>
+                  <a:txBody>
+                    <a:bodyPr/>
+                    <a:lstStyle/>
+                    <a:p>
+                      <a:r>
+                        <a:rPr sz="1200" b="1">
+                          <a:solidFill>
+                            <a:srgbClr val="FFFFFF"/>
+                          </a:solidFill>
+                        </a:rPr>
+                        <a:t>Status</a:t>
+                      </a:r>
+                    </a:p>
+                  </a:txBody>
+                  <a:tcPr marL="54864" marR="54864" marT="27432" marB="27432">
+                    <a:solidFill>
+                      <a:srgbClr val="2F6B4F"/>
+                    </a:solidFill>
+                  </a:tcPr>
+                </a:tc>
+              </a:tr>
+              <a:tr h="566928">
+                <a:tc>
+                  <a:txBody>
+                    <a:bodyPr/>
+                    <a:lstStyle/>
+                    <a:p>
+                      <a:r>
+                        <a:rPr sz="1200" b="0">
+                          <a:solidFill>
+                            <a:srgbClr val="1F2A24"/>
+                          </a:solidFill>
+                        </a:rPr>
+                        <a:t>C1  Graph learning adds value on a trail</a:t>
+                      </a:r>
+                    </a:p>
+                  </a:txBody>
+                  <a:tcPr marL="54864" marR="54864" marT="27432" marB="27432">
+                    <a:solidFill>
+                      <a:srgbClr val="FFFFFF"/>
+                    </a:solidFill>
+                  </a:tcPr>
+                </a:tc>
+                <a:tc>
+                  <a:txBody>
+                    <a:bodyPr/>
+                    <a:lstStyle/>
+                    <a:p>
+                      <a:r>
+                        <a:rPr sz="1200" b="0">
+                          <a:solidFill>
+                            <a:srgbClr val="1F2A24"/>
+                          </a:solidFill>
+                        </a:rPr>
+                        <a:t>Unseen segments, Horton: ST-GNN 2.54 vs LSTM 2.59 MAE (p &lt; 0.001), ~2 %; tie with counts; worse at the summit queue</a:t>
+                      </a:r>
+                    </a:p>
+                  </a:txBody>
+                  <a:tcPr marL="54864" marR="54864" marT="27432" marB="27432">
+                    <a:solidFill>
+                      <a:srgbClr val="FFFFFF"/>
+                    </a:solidFill>
+                  </a:tcPr>
+                </a:tc>
+                <a:tc>
+                  <a:txBody>
+                    <a:bodyPr/>
+                    <a:lstStyle/>
+                    <a:p>
+                      <a:r>
+                        <a:rPr sz="1200" b="0">
+                          <a:solidFill>
+                            <a:srgbClr val="1F2A24"/>
+                          </a:solidFill>
+                        </a:rPr>
+                        <a:t>Partly</a:t>
+                      </a:r>
+                    </a:p>
+                  </a:txBody>
+                  <a:tcPr marL="54864" marR="54864" marT="27432" marB="27432">
+                    <a:solidFill>
+                      <a:srgbClr val="FFFFFF"/>
+                    </a:solidFill>
+                  </a:tcPr>
+                </a:tc>
+              </a:tr>
+              <a:tr h="566928">
+                <a:tc>
+                  <a:txBody>
+                    <a:bodyPr/>
+                    <a:lstStyle/>
+                    <a:p>
+                      <a:r>
+                        <a:rPr sz="1200" b="0">
+                          <a:solidFill>
+                            <a:srgbClr val="1F2A24"/>
+                          </a:solidFill>
+                        </a:rPr>
+                        <a:t>C2  Traffic pretraining + domain adaptation</a:t>
+                      </a:r>
+                    </a:p>
+                  </a:txBody>
+                  <a:tcPr marL="54864" marR="54864" marT="27432" marB="27432">
+                    <a:solidFill>
+                      <a:srgbClr val="F4F7F5"/>
+                    </a:solidFill>
+                  </a:tcPr>
+                </a:tc>
+                <a:tc>
+                  <a:txBody>
+                    <a:bodyPr/>
+                    <a:lstStyle/>
+                    <a:p>
+                      <a:r>
+                        <a:rPr sz="1200" b="0">
+                          <a:solidFill>
+                            <a:srgbClr val="1F2A24"/>
+                          </a:solidFill>
+                        </a:rPr>
+                        <a:t>Helps Horton with 30–90 days (−5 / −12 %); frozen core +2 % at 365 d; no help at Adam's Peak</a:t>
+                      </a:r>
+                    </a:p>
+                  </a:txBody>
+                  <a:tcPr marL="54864" marR="54864" marT="27432" marB="27432">
+                    <a:solidFill>
+                      <a:srgbClr val="F4F7F5"/>
+                    </a:solidFill>
+                  </a:tcPr>
+                </a:tc>
+                <a:tc>
+                  <a:txBody>
+                    <a:bodyPr/>
+                    <a:lstStyle/>
+                    <a:p>
+                      <a:r>
+                        <a:rPr sz="1200" b="0">
+                          <a:solidFill>
+                            <a:srgbClr val="1F2A24"/>
+                          </a:solidFill>
+                        </a:rPr>
+                        <a:t>Partly (clear answer)</a:t>
+                      </a:r>
+                    </a:p>
+                  </a:txBody>
+                  <a:tcPr marL="54864" marR="54864" marT="27432" marB="27432">
+                    <a:solidFill>
+                      <a:srgbClr val="F4F7F5"/>
+                    </a:solidFill>
+                  </a:tcPr>
+                </a:tc>
+              </a:tr>
+              <a:tr h="566928">
+                <a:tc>
+                  <a:txBody>
+                    <a:bodyPr/>
+                    <a:lstStyle/>
+                    <a:p>
+                      <a:r>
+                        <a:rPr sz="1200" b="0">
+                          <a:solidFill>
+                            <a:srgbClr val="1F2A24"/>
+                          </a:solidFill>
+                        </a:rPr>
+                        <a:t>C3  Defensible bottleneck forecast</a:t>
+                      </a:r>
+                    </a:p>
+                  </a:txBody>
+                  <a:tcPr marL="54864" marR="54864" marT="27432" marB="27432">
+                    <a:solidFill>
+                      <a:srgbClr val="FFFFFF"/>
+                    </a:solidFill>
+                  </a:tcPr>
+                </a:tc>
+                <a:tc>
+                  <a:txBody>
+                    <a:bodyPr/>
+                    <a:lstStyle/>
+                    <a:p>
+                      <a:r>
+                        <a:rPr sz="1200" b="0">
+                          <a:solidFill>
+                            <a:srgbClr val="1F2A24"/>
+                          </a:solidFill>
+                        </a:rPr>
+                        <a:t>Over-capacity F1 0.80 / 0.85 with counts; ≤ 0.56 on unseen segments – peaks smoothed</a:t>
+                      </a:r>
+                    </a:p>
+                  </a:txBody>
+                  <a:tcPr marL="54864" marR="54864" marT="27432" marB="27432">
+                    <a:solidFill>
+                      <a:srgbClr val="FFFFFF"/>
+                    </a:solidFill>
+                  </a:tcPr>
+                </a:tc>
+                <a:tc>
+                  <a:txBody>
+                    <a:bodyPr/>
+                    <a:lstStyle/>
+                    <a:p>
+                      <a:r>
+                        <a:rPr sz="1200" b="0">
+                          <a:solidFill>
+                            <a:srgbClr val="1F2A24"/>
+                          </a:solidFill>
+                        </a:rPr>
+                        <a:t>Shown with counts</a:t>
+                      </a:r>
+                    </a:p>
+                  </a:txBody>
+                  <a:tcPr marL="54864" marR="54864" marT="27432" marB="27432">
+                    <a:solidFill>
+                      <a:srgbClr val="FFFFFF"/>
+                    </a:solidFill>
+                  </a:tcPr>
+                </a:tc>
+              </a:tr>
+              <a:tr h="566928">
+                <a:tc>
+                  <a:txBody>
+                    <a:bodyPr/>
+                    <a:lstStyle/>
+                    <a:p>
+                      <a:r>
+                        <a:rPr sz="1200" b="0">
+                          <a:solidFill>
+                            <a:srgbClr val="1F2A24"/>
+                          </a:solidFill>
+                        </a:rPr>
+                        <a:t>C4  Tiny graph, no sensor record</a:t>
+                      </a:r>
+                    </a:p>
+                  </a:txBody>
+                  <a:tcPr marL="54864" marR="54864" marT="27432" marB="27432">
+                    <a:solidFill>
+                      <a:srgbClr val="F4F7F5"/>
+                    </a:solidFill>
+                  </a:tcPr>
+                </a:tc>
+                <a:tc>
+                  <a:txBody>
+                    <a:bodyPr/>
+                    <a:lstStyle/>
+                    <a:p>
+                      <a:r>
+                        <a:rPr sz="1200" b="0">
+                          <a:solidFill>
+                            <a:srgbClr val="1F2A24"/>
+                          </a:solidFill>
+                        </a:rPr>
+                        <a:t>Gate counts only: interior MAE 1.45 (all counted 1.42), F1 unchanged</a:t>
+                      </a:r>
+                    </a:p>
+                  </a:txBody>
+                  <a:tcPr marL="54864" marR="54864" marT="27432" marB="27432">
+                    <a:solidFill>
+                      <a:srgbClr val="F4F7F5"/>
+                    </a:solidFill>
+                  </a:tcPr>
+                </a:tc>
+                <a:tc>
+                  <a:txBody>
+                    <a:bodyPr/>
+                    <a:lstStyle/>
+                    <a:p>
+                      <a:r>
+                        <a:rPr sz="1200" b="0">
+                          <a:solidFill>
+                            <a:srgbClr val="1F2A24"/>
+                          </a:solidFill>
+                        </a:rPr>
+                        <a:t>Shown (feasible)</a:t>
+                      </a:r>
+                    </a:p>
+                  </a:txBody>
+                  <a:tcPr marL="54864" marR="54864" marT="27432" marB="27432">
+                    <a:solidFill>
+                      <a:srgbClr val="F4F7F5"/>
+                    </a:solidFill>
+                  </a:tcPr>
+                </a:tc>
+              </a:tr>
+              <a:tr h="566928">
+                <a:tc>
+                  <a:txBody>
+                    <a:bodyPr/>
+                    <a:lstStyle/>
+                    <a:p>
+                      <a:r>
+                        <a:rPr sz="1200" b="0">
+                          <a:solidFill>
+                            <a:srgbClr val="1F2A24"/>
+                          </a:solidFill>
+                        </a:rPr>
+                        <a:t>C5  Forecast → capacity beats a static quota</a:t>
+                      </a:r>
+                    </a:p>
+                  </a:txBody>
+                  <a:tcPr marL="54864" marR="54864" marT="27432" marB="27432">
+                    <a:solidFill>
+                      <a:srgbClr val="FFFFFF"/>
+                    </a:solidFill>
+                  </a:tcPr>
+                </a:tc>
+                <a:tc>
+                  <a:txBody>
+                    <a:bodyPr/>
+                    <a:lstStyle/>
+                    <a:p>
+                      <a:r>
+                        <a:rPr sz="1200" b="0">
+                          <a:solidFill>
+                            <a:srgbClr val="1F2A24"/>
+                          </a:solidFill>
+                        </a:rPr>
+                        <a:t>At equal visitors: −27 % (Horton), −24 % (Adam's Peak, p &lt; 0.001) over-capacity time</a:t>
+                      </a:r>
+                    </a:p>
+                  </a:txBody>
+                  <a:tcPr marL="54864" marR="54864" marT="27432" marB="27432">
+                    <a:solidFill>
+                      <a:srgbClr val="FFFFFF"/>
+                    </a:solidFill>
+                  </a:tcPr>
+                </a:tc>
+                <a:tc>
+                  <a:txBody>
+                    <a:bodyPr/>
+                    <a:lstStyle/>
+                    <a:p>
+                      <a:r>
+                        <a:rPr sz="1200" b="0">
+                          <a:solidFill>
+                            <a:srgbClr val="1F2A24"/>
+                          </a:solidFill>
+                        </a:rPr>
+                        <a:t>Shown</a:t>
+                      </a:r>
+                    </a:p>
+                  </a:txBody>
+                  <a:tcPr marL="54864" marR="54864" marT="27432" marB="27432">
+                    <a:solidFill>
+                      <a:srgbClr val="FFFFFF"/>
+                    </a:solidFill>
+                  </a:tcPr>
+                </a:tc>
+              </a:tr>
+              <a:tr h="566928">
+                <a:tc>
+                  <a:txBody>
+                    <a:bodyPr/>
+                    <a:lstStyle/>
+                    <a:p>
+                      <a:r>
+                        <a:rPr sz="1200" b="0">
+                          <a:solidFill>
+                            <a:srgbClr val="1F2A24"/>
+                          </a:solidFill>
+                        </a:rPr>
+                        <a:t>Main objective: field-validated pilot trail</a:t>
+                      </a:r>
+                    </a:p>
+                  </a:txBody>
+                  <a:tcPr marL="54864" marR="54864" marT="27432" marB="27432">
+                    <a:solidFill>
+                      <a:srgbClr val="F4F7F5"/>
+                    </a:solidFill>
+                  </a:tcPr>
+                </a:tc>
+                <a:tc>
+                  <a:txBody>
+                    <a:bodyPr/>
+                    <a:lstStyle/>
+                    <a:p>
+                      <a:r>
+                        <a:rPr sz="1200" b="0">
+                          <a:solidFill>
+                            <a:srgbClr val="1F2A24"/>
+                          </a:solidFill>
+                        </a:rPr>
+                        <a:t>Criteria A1–A3 fixed 20 Oct; counting tool in the app</a:t>
+                      </a:r>
+                    </a:p>
+                  </a:txBody>
+                  <a:tcPr marL="54864" marR="54864" marT="27432" marB="27432">
+                    <a:solidFill>
+                      <a:srgbClr val="F4F7F5"/>
+                    </a:solidFill>
+                  </a:tcPr>
+                </a:tc>
+                <a:tc>
+                  <a:txBody>
+                    <a:bodyPr/>
+                    <a:lstStyle/>
+                    <a:p>
+                      <a:r>
+                        <a:rPr sz="1200" b="0">
+                          <a:solidFill>
+                            <a:srgbClr val="1F2A24"/>
+                          </a:solidFill>
+                        </a:rPr>
+                        <a:t>December</a:t>
+                      </a:r>
+                    </a:p>
+                  </a:txBody>
+                  <a:tcPr marL="54864" marR="54864" marT="27432" marB="27432">
+                    <a:solidFill>
+                      <a:srgbClr val="F4F7F5"/>
+                    </a:solidFill>
+                  </a:tcPr>
+                </a:tc>
+              </a:tr>
+            </a:tbl>
+          </a:graphicData>
+        </a:graphic>
+      </p:graphicFrame>
+      <p:sp>
+        <p:nvSpPr>
+          <p:cNvPr id="6" name="TextBox 5"/>
           <p:cNvSpPr txBox="1"/>
           <p:nvPr/>
         </p:nvSpPr>
         <p:spPr>
           <a:xfrm>
-            <a:off x="731520" y="5120640"/>
-            <a:ext cx="10058400" cy="457200"/>
+            <a:off x="548640" y="5669280"/>
+            <a:ext cx="11064240" cy="548640"/>
           </a:xfrm>
           <a:prstGeom prst="rect">
             <a:avLst/>
@@ -16297,12 +17044,46 @@
           <a:p>
             <a:pPr algn="l"/>
             <a:r>
-              <a:rPr sz="1600" b="0">
-                <a:solidFill>
-                  <a:srgbClr val="CFE3D7"/>
-                </a:solidFill>
-              </a:rPr>
-              <a:t>Weerasekera J.V. · IT23343948 · Component 4</a:t>
+              <a:rPr sz="1300" b="1">
+                <a:solidFill>
+                  <a:srgbClr val="8A4B2A"/>
+                </a:solidFill>
+              </a:rPr>
+              <a:t>Core result chapters = C1–C5 + field validation.  Booking, Adam's Peak advice and the 90-day planner show the system works end to end.</a:t>
+            </a:r>
+          </a:p>
+        </p:txBody>
+      </p:sp>
+      <p:sp>
+        <p:nvSpPr>
+          <p:cNvPr id="7" name="TextBox 6"/>
+          <p:cNvSpPr txBox="1"/>
+          <p:nvPr/>
+        </p:nvSpPr>
+        <p:spPr>
+          <a:xfrm>
+            <a:off x="8961120" y="6446520"/>
+            <a:ext cx="3017520" cy="274320"/>
+          </a:xfrm>
+          <a:prstGeom prst="rect">
+            <a:avLst/>
+          </a:prstGeom>
+          <a:noFill/>
+        </p:spPr>
+        <p:txBody>
+          <a:bodyPr wrap="square" anchor="t">
+            <a:spAutoFit/>
+          </a:bodyPr>
+          <a:lstStyle/>
+          <a:p>
+            <a:pPr algn="r"/>
+            <a:r>
+              <a:rPr sz="900" b="0">
+                <a:solidFill>
+                  <a:srgbClr val="6B7280"/>
+                </a:solidFill>
+              </a:rPr>
+              <a:t>Component 4 · IT23343948 · 3</a:t>
             </a:r>
           </a:p>
         </p:txBody>
@@ -16397,7 +17178,7 @@
                   <a:srgbClr val="2F6B4F"/>
                 </a:solidFill>
               </a:rPr>
-              <a:t>BACKUP</a:t>
+              <a:t>PROOF OF CONCEPT – THE GAP'S CONDITION</a:t>
             </a:r>
           </a:p>
         </p:txBody>
@@ -16431,14 +17212,176 @@
                   <a:srgbClr val="1F2A24"/>
                 </a:solidFill>
               </a:rPr>
-              <a:t>Backup – Limitations (stated before you are asked)</a:t>
-            </a:r>
-          </a:p>
-        </p:txBody>
-      </p:sp>
-      <p:sp>
-        <p:nvSpPr>
-          <p:cNvPr id="5" name="TextBox 4"/>
+              <a:t>RQ10 – No sensor record: forecasting from gate counts only</a:t>
+            </a:r>
+          </a:p>
+        </p:txBody>
+      </p:sp>
+      <p:pic>
+        <p:nvPicPr>
+          <p:cNvPr id="5" name="Picture 4" descr="rq10.png"/>
+          <p:cNvPicPr>
+            <a:picLocks noChangeAspect="1"/>
+          </p:cNvPicPr>
+          <p:nvPr/>
+        </p:nvPicPr>
+        <p:blipFill>
+          <a:blip r:embed="rId3"/>
+          <a:stretch>
+            <a:fillRect/>
+          </a:stretch>
+        </p:blipFill>
+        <p:spPr>
+          <a:xfrm>
+            <a:off x="411480" y="1325880"/>
+            <a:ext cx="7680960" cy="2560320"/>
+          </a:xfrm>
+          <a:prstGeom prst="rect">
+            <a:avLst/>
+          </a:prstGeom>
+        </p:spPr>
+      </p:pic>
+      <p:sp>
+        <p:nvSpPr>
+          <p:cNvPr id="6" name="TextBox 5"/>
+          <p:cNvSpPr txBox="1"/>
+          <p:nvPr/>
+        </p:nvSpPr>
+        <p:spPr>
+          <a:xfrm>
+            <a:off x="8229600" y="1417320"/>
+            <a:ext cx="3749039" cy="4846320"/>
+          </a:xfrm>
+          <a:prstGeom prst="rect">
+            <a:avLst/>
+          </a:prstGeom>
+          <a:noFill/>
+        </p:spPr>
+        <p:txBody>
+          <a:bodyPr wrap="square">
+            <a:spAutoFit/>
+          </a:bodyPr>
+          <a:lstStyle/>
+          <a:p>
+            <a:pPr>
+              <a:spcAft>
+                <a:spcPts val="900"/>
+              </a:spcAft>
+            </a:pPr>
+            <a:r>
+              <a:rPr sz="1300" b="1">
+                <a:solidFill>
+                  <a:srgbClr val="1F2A24"/>
+                </a:solidFill>
+              </a:rPr>
+              <a:t>•  Horton, gate only:</a:t>
+            </a:r>
+            <a:r>
+              <a:rPr sz="1300">
+                <a:solidFill>
+                  <a:srgbClr val="1F2A24"/>
+                </a:solidFill>
+              </a:rPr>
+              <a:t>  ST-GNN 1.45 · LSTM 1.44 · historical average 1.63  (all segments counted: 1.42)</a:t>
+            </a:r>
+          </a:p>
+          <a:p>
+            <a:pPr>
+              <a:spcAft>
+                <a:spcPts val="900"/>
+              </a:spcAft>
+            </a:pPr>
+            <a:r>
+              <a:rPr sz="1300" b="1">
+                <a:solidFill>
+                  <a:srgbClr val="1F2A24"/>
+                </a:solidFill>
+              </a:rPr>
+              <a:t>•  Adam's Peak, gate only:</a:t>
+            </a:r>
+            <a:r>
+              <a:rPr sz="1300">
+                <a:solidFill>
+                  <a:srgbClr val="1F2A24"/>
+                </a:solidFill>
+              </a:rPr>
+              <a:t>  ST-GNN 4.00 · LSTM 3.87 · historical average 11.28</a:t>
+            </a:r>
+          </a:p>
+          <a:p>
+            <a:pPr>
+              <a:spcAft>
+                <a:spcPts val="900"/>
+              </a:spcAft>
+            </a:pPr>
+            <a:r>
+              <a:rPr sz="1300" b="1">
+                <a:solidFill>
+                  <a:srgbClr val="1F2A24"/>
+                </a:solidFill>
+              </a:rPr>
+              <a:t>•  Deployable:</a:t>
+            </a:r>
+            <a:r>
+              <a:rPr sz="1300">
+                <a:solidFill>
+                  <a:srgbClr val="1F2A24"/>
+                </a:solidFill>
+              </a:rPr>
+              <a:t>  no counters inside the trail are needed</a:t>
+            </a:r>
+          </a:p>
+          <a:p>
+            <a:pPr>
+              <a:spcAft>
+                <a:spcPts val="900"/>
+              </a:spcAft>
+            </a:pPr>
+            <a:r>
+              <a:rPr sz="1300" b="1">
+                <a:solidFill>
+                  <a:srgbClr val="1F2A24"/>
+                </a:solidFill>
+              </a:rPr>
+              <a:t>•  But:</a:t>
+            </a:r>
+            <a:r>
+              <a:rPr sz="1300">
+                <a:solidFill>
+                  <a:srgbClr val="1F2A24"/>
+                </a:solidFill>
+              </a:rPr>
+              <a:t>  graph and gate counts add ≤ 3 % – the simulated crowd has nothing unpredictable to detect</a:t>
+            </a:r>
+          </a:p>
+          <a:p>
+            <a:pPr>
+              <a:spcAft>
+                <a:spcPts val="900"/>
+              </a:spcAft>
+            </a:pPr>
+            <a:r>
+              <a:rPr sz="1300" b="1">
+                <a:solidFill>
+                  <a:srgbClr val="1F2A24"/>
+                </a:solidFill>
+              </a:rPr>
+              <a:t>•  Fix:</a:t>
+            </a:r>
+            <a:r>
+              <a:rPr sz="1300">
+                <a:solidFill>
+                  <a:srgbClr val="1F2A24"/>
+                </a:solidFill>
+              </a:rPr>
+              <a:t>  realistic world S1 (bursts, spells, incidents, forecast weather) – re-run in progress</a:t>
+            </a:r>
+          </a:p>
+        </p:txBody>
+      </p:sp>
+      <p:sp>
+        <p:nvSpPr>
+          <p:cNvPr id="7" name="TextBox 6"/>
           <p:cNvSpPr txBox="1"/>
           <p:nvPr/>
         </p:nvSpPr>
@@ -16465,191 +17408,7 @@
                   <a:srgbClr val="6B7280"/>
                 </a:solidFill>
               </a:rPr>
-              <a:t>Component 4 · IT23343948 · 27</a:t>
-            </a:r>
-          </a:p>
-        </p:txBody>
-      </p:sp>
-      <p:sp>
-        <p:nvSpPr>
-          <p:cNvPr id="6" name="TextBox 5"/>
-          <p:cNvSpPr txBox="1"/>
-          <p:nvPr/>
-        </p:nvSpPr>
-        <p:spPr>
-          <a:xfrm>
-            <a:off x="548640" y="1463040"/>
-            <a:ext cx="11155680" cy="4846320"/>
-          </a:xfrm>
-          <a:prstGeom prst="rect">
-            <a:avLst/>
-          </a:prstGeom>
-          <a:noFill/>
-        </p:spPr>
-        <p:txBody>
-          <a:bodyPr wrap="square">
-            <a:spAutoFit/>
-          </a:bodyPr>
-          <a:lstStyle/>
-          <a:p>
-            <a:pPr>
-              <a:spcAft>
-                <a:spcPts val="1000"/>
-              </a:spcAft>
-            </a:pPr>
-            <a:r>
-              <a:rPr sz="1500" b="1">
-                <a:solidFill>
-                  <a:srgbClr val="1F2A24"/>
-                </a:solidFill>
-              </a:rPr>
-              <a:t>•  Synthetic target:</a:t>
-            </a:r>
-            <a:r>
-              <a:rPr sz="1500">
-                <a:solidFill>
-                  <a:srgbClr val="1F2A24"/>
-                </a:solidFill>
-              </a:rPr>
-              <a:t>  all results test the method on a simulator, not the real parks; every assumption is in docs/assumptions*.md with what would replace it</a:t>
-            </a:r>
-          </a:p>
-          <a:p>
-            <a:pPr>
-              <a:spcAft>
-                <a:spcPts val="1000"/>
-              </a:spcAft>
-            </a:pPr>
-            <a:r>
-              <a:rPr sz="1500" b="1">
-                <a:solidFill>
-                  <a:srgbClr val="1F2A24"/>
-                </a:solidFill>
-              </a:rPr>
-              <a:t>•  Same simulator:</a:t>
-            </a:r>
-            <a:r>
-              <a:rPr sz="1500">
-                <a:solidFill>
-                  <a:srgbClr val="1F2A24"/>
-                </a:solidFill>
-              </a:rPr>
-              <a:t>  the control results (RQ3, RQ4) use the simulator that made the data</a:t>
-            </a:r>
-          </a:p>
-          <a:p>
-            <a:pPr>
-              <a:spcAft>
-                <a:spcPts val="1000"/>
-              </a:spcAft>
-            </a:pPr>
-            <a:r>
-              <a:rPr sz="1500" b="1">
-                <a:solidFill>
-                  <a:srgbClr val="1F2A24"/>
-                </a:solidFill>
-              </a:rPr>
-              <a:t>•  Seeds:</a:t>
-            </a:r>
-            <a:r>
-              <a:rPr sz="1500">
-                <a:solidFill>
-                  <a:srgbClr val="1F2A24"/>
-                </a:solidFill>
-              </a:rPr>
-              <a:t>  RQ1 and RQ5 use three seeds; park-to-park transfer (RQ2) and Horton spatial CV use one</a:t>
-            </a:r>
-          </a:p>
-          <a:p>
-            <a:pPr>
-              <a:spcAft>
-                <a:spcPts val="1000"/>
-              </a:spcAft>
-            </a:pPr>
-            <a:r>
-              <a:rPr sz="1500" b="1">
-                <a:solidFill>
-                  <a:srgbClr val="1F2A24"/>
-                </a:solidFill>
-              </a:rPr>
-              <a:t>•  Advice model:</a:t>
-            </a:r>
-            <a:r>
-              <a:rPr sz="1500">
-                <a:solidFill>
-                  <a:srgbClr val="1F2A24"/>
-                </a:solidFill>
-              </a:rPr>
-              <a:t>  RQ3 / RQ4 were run before crowd-dependent climb times and evening starts were added</a:t>
-            </a:r>
-          </a:p>
-          <a:p>
-            <a:pPr>
-              <a:spcAft>
-                <a:spcPts val="1000"/>
-              </a:spcAft>
-            </a:pPr>
-            <a:r>
-              <a:rPr sz="1500" b="1">
-                <a:solidFill>
-                  <a:srgbClr val="1F2A24"/>
-                </a:solidFill>
-              </a:rPr>
-              <a:t>•  Weather:</a:t>
-            </a:r>
-            <a:r>
-              <a:rPr sz="1500">
-                <a:solidFill>
-                  <a:srgbClr val="1F2A24"/>
-                </a:solidFill>
-              </a:rPr>
-              <a:t>  the day-ahead test uses observed weather (a perfect forecast) – an upper bound</a:t>
-            </a:r>
-          </a:p>
-          <a:p>
-            <a:pPr>
-              <a:spcAft>
-                <a:spcPts val="1000"/>
-              </a:spcAft>
-            </a:pPr>
-            <a:r>
-              <a:rPr sz="1500" b="1">
-                <a:solidFill>
-                  <a:srgbClr val="1F2A24"/>
-                </a:solidFill>
-              </a:rPr>
-              <a:t>•  OSM gaps:</a:t>
-            </a:r>
-            <a:r>
-              <a:rPr sz="1500">
-                <a:solidFill>
-                  <a:srgbClr val="1F2A24"/>
-                </a:solidFill>
-              </a:rPr>
-              <a:t>  the last ~350 m to the Adam's Peak summit is an approximate link; minor routes not mapped</a:t>
-            </a:r>
-          </a:p>
-          <a:p>
-            <a:pPr>
-              <a:spcAft>
-                <a:spcPts val="1000"/>
-              </a:spcAft>
-            </a:pPr>
-            <a:r>
-              <a:rPr sz="1500" b="1">
-                <a:solidFill>
-                  <a:srgbClr val="1F2A24"/>
-                </a:solidFill>
-              </a:rPr>
-              <a:t>•  Planning model:</a:t>
-            </a:r>
-            <a:r>
-              <a:rPr sz="1500">
-                <a:solidFill>
-                  <a:srgbClr val="1F2A24"/>
-                </a:solidFill>
-              </a:rPr>
-              <a:t>  daily totals no better than the calendar average (MAE ≈ 110 vs 108); segment-hour occupancy better (1.44 vs 1.65)</a:t>
+              <a:t>Component 4 · IT23343948 · 9</a:t>
             </a:r>
           </a:p>
         </p:txBody>
@@ -16744,7 +17503,7 @@
                   <a:srgbClr val="2F6B4F"/>
                 </a:solidFill>
               </a:rPr>
-              <a:t>BACKUP</a:t>
+              <a:t>PROOF OF CONCEPT – CLAIM C5</a:t>
             </a:r>
           </a:p>
         </p:txBody>
@@ -16778,48 +17537,14 @@
                   <a:srgbClr val="1F2A24"/>
                 </a:solidFill>
               </a:rPr>
-              <a:t>Backup – Officer records: past, today and the week ahead</a:t>
-            </a:r>
-          </a:p>
-        </p:txBody>
-      </p:sp>
-      <p:sp>
-        <p:nvSpPr>
-          <p:cNvPr id="5" name="TextBox 4"/>
-          <p:cNvSpPr txBox="1"/>
-          <p:nvPr/>
-        </p:nvSpPr>
-        <p:spPr>
-          <a:xfrm>
-            <a:off x="8961120" y="6446520"/>
-            <a:ext cx="3017520" cy="274320"/>
-          </a:xfrm>
-          <a:prstGeom prst="rect">
-            <a:avLst/>
-          </a:prstGeom>
-          <a:noFill/>
-        </p:spPr>
-        <p:txBody>
-          <a:bodyPr wrap="square" anchor="t">
-            <a:spAutoFit/>
-          </a:bodyPr>
-          <a:lstStyle/>
-          <a:p>
-            <a:pPr algn="r"/>
-            <a:r>
-              <a:rPr sz="900" b="0">
-                <a:solidFill>
-                  <a:srgbClr val="6B7280"/>
-                </a:solidFill>
-              </a:rPr>
-              <a:t>Component 4 · IT23343948 · 28</a:t>
+              <a:t>RQ9 – Does the forecast make the daily quota better than a static one?</a:t>
             </a:r>
           </a:p>
         </p:txBody>
       </p:sp>
       <p:pic>
         <p:nvPicPr>
-          <p:cNvPr id="6" name="Picture 5" descr="14_records.png"/>
+          <p:cNvPr id="5" name="Picture 4" descr="rq9.png"/>
           <p:cNvPicPr>
             <a:picLocks noChangeAspect="1"/>
           </p:cNvPicPr>
@@ -16833,13 +17558,338 @@
         </p:blipFill>
         <p:spPr>
           <a:xfrm>
-            <a:off x="502920" y="1325880"/>
-            <a:ext cx="2319807" cy="5029200"/>
+            <a:off x="411480" y="1325880"/>
+            <a:ext cx="7680960" cy="2633472"/>
           </a:xfrm>
           <a:prstGeom prst="rect">
             <a:avLst/>
           </a:prstGeom>
+        </p:spPr>
+      </p:pic>
+      <p:sp>
+        <p:nvSpPr>
+          <p:cNvPr id="6" name="TextBox 5"/>
+          <p:cNvSpPr txBox="1"/>
+          <p:nvPr/>
+        </p:nvSpPr>
+        <p:spPr>
+          <a:xfrm>
+            <a:off x="8229600" y="1417320"/>
+            <a:ext cx="3749039" cy="4846320"/>
+          </a:xfrm>
+          <a:prstGeom prst="rect">
+            <a:avLst/>
+          </a:prstGeom>
+          <a:noFill/>
+        </p:spPr>
+        <p:txBody>
+          <a:bodyPr wrap="square">
+            <a:spAutoFit/>
+          </a:bodyPr>
+          <a:lstStyle/>
+          <a:p>
+            <a:pPr>
+              <a:spcAft>
+                <a:spcPts val="900"/>
+              </a:spcAft>
+            </a:pPr>
+            <a:r>
+              <a:rPr sz="1300" b="1">
+                <a:solidFill>
+                  <a:srgbClr val="1F2A24"/>
+                </a:solidFill>
+              </a:rPr>
+              <a:t>•  Static → ST-GNN quota:</a:t>
+            </a:r>
+            <a:r>
+              <a:rPr sz="1300">
+                <a:solidFill>
+                  <a:srgbClr val="1F2A24"/>
+                </a:solidFill>
+              </a:rPr>
+              <a:t>  −27 % Horton, −24 % Adam's Peak, same number of visitors</a:t>
+            </a:r>
+          </a:p>
+          <a:p>
+            <a:pPr>
+              <a:spcAft>
+                <a:spcPts val="900"/>
+              </a:spcAft>
+            </a:pPr>
+            <a:r>
+              <a:rPr sz="1300" b="1">
+                <a:solidFill>
+                  <a:srgbClr val="1F2A24"/>
+                </a:solidFill>
+              </a:rPr>
+              <a:t>•  Share of a perfect forecast's gain:</a:t>
+            </a:r>
+            <a:r>
+              <a:rPr sz="1300">
+                <a:solidFill>
+                  <a:srgbClr val="1F2A24"/>
+                </a:solidFill>
+              </a:rPr>
+              <a:t>  93 % / 76 %</a:t>
+            </a:r>
+          </a:p>
+          <a:p>
+            <a:pPr>
+              <a:spcAft>
+                <a:spcPts val="900"/>
+              </a:spcAft>
+            </a:pPr>
+            <a:r>
+              <a:rPr sz="1300" b="1">
+                <a:solidFill>
+                  <a:srgbClr val="1F2A24"/>
+                </a:solidFill>
+              </a:rPr>
+              <a:t>•  Significant:</a:t>
+            </a:r>
+            <a:r>
+              <a:rPr sz="1300">
+                <a:solidFill>
+                  <a:srgbClr val="1F2A24"/>
+                </a:solidFill>
+              </a:rPr>
+              <a:t>  Adam's Peak vs static, weather-only and HA (Wilcoxon over days); Horton not per day</a:t>
+            </a:r>
+          </a:p>
+          <a:p>
+            <a:pPr>
+              <a:spcAft>
+                <a:spcPts val="900"/>
+              </a:spcAft>
+            </a:pPr>
+            <a:r>
+              <a:rPr sz="1300" b="1">
+                <a:solidFill>
+                  <a:srgbClr val="1F2A24"/>
+                </a:solidFill>
+              </a:rPr>
+              <a:t>•  In the product:</a:t>
+            </a:r>
+            <a:r>
+              <a:rPr sz="1300">
+                <a:solidFill>
+                  <a:srgbClr val="1F2A24"/>
+                </a:solidFill>
+              </a:rPr>
+              <a:t>  the ticket plan uses the forecast quota by default; officers can choose or override</a:t>
+            </a:r>
+          </a:p>
+          <a:p>
+            <a:pPr>
+              <a:spcAft>
+                <a:spcPts val="900"/>
+              </a:spcAft>
+            </a:pPr>
+            <a:r>
+              <a:rPr sz="1300" b="1">
+                <a:solidFill>
+                  <a:srgbClr val="1F2A24"/>
+                </a:solidFill>
+              </a:rPr>
+              <a:t>•  Lesson:</a:t>
+            </a:r>
+            <a:r>
+              <a:rPr sz="1300">
+                <a:solidFill>
+                  <a:srgbClr val="1F2A24"/>
+                </a:solidFill>
+              </a:rPr>
+              <a:t>  timing beats totals – slot tickets cut 99.6 %</a:t>
+            </a:r>
+          </a:p>
+        </p:txBody>
+      </p:sp>
+      <p:sp>
+        <p:nvSpPr>
+          <p:cNvPr id="7" name="TextBox 6"/>
+          <p:cNvSpPr txBox="1"/>
+          <p:nvPr/>
+        </p:nvSpPr>
+        <p:spPr>
+          <a:xfrm>
+            <a:off x="8961120" y="6446520"/>
+            <a:ext cx="3017520" cy="274320"/>
+          </a:xfrm>
+          <a:prstGeom prst="rect">
+            <a:avLst/>
+          </a:prstGeom>
+          <a:noFill/>
+        </p:spPr>
+        <p:txBody>
+          <a:bodyPr wrap="square" anchor="t">
+            <a:spAutoFit/>
+          </a:bodyPr>
+          <a:lstStyle/>
+          <a:p>
+            <a:pPr algn="r"/>
+            <a:r>
+              <a:rPr sz="900" b="0">
+                <a:solidFill>
+                  <a:srgbClr val="6B7280"/>
+                </a:solidFill>
+              </a:rPr>
+              <a:t>Component 4 · IT23343948 · 10</a:t>
+            </a:r>
+          </a:p>
+        </p:txBody>
+      </p:sp>
+    </p:spTree>
+  </p:cSld>
+  <p:clrMapOvr>
+    <a:masterClrMapping/>
+  </p:clrMapOvr>
+</p:sld>
+</file>
+
+<file path=ppt/slides/slide29.xml><?xml version="1.0" encoding="utf-8"?>
+<p:sld xmlns:a="http://schemas.openxmlformats.org/drawingml/2006/main" xmlns:p="http://schemas.openxmlformats.org/presentationml/2006/main" xmlns:r="http://schemas.openxmlformats.org/officeDocument/2006/relationships">
+  <p:cSld>
+    <p:spTree>
+      <p:nvGrpSpPr>
+        <p:cNvPr id="1" name=""/>
+        <p:cNvGrpSpPr/>
+        <p:nvPr/>
+      </p:nvGrpSpPr>
+      <p:grpSpPr/>
+      <p:sp>
+        <p:nvSpPr>
+          <p:cNvPr id="2" name="Rectangle 1"/>
+          <p:cNvSpPr/>
+          <p:nvPr/>
+        </p:nvSpPr>
+        <p:spPr>
+          <a:xfrm>
+            <a:off x="0" y="0"/>
+            <a:ext cx="164592" cy="6858000"/>
+          </a:xfrm>
+          <a:prstGeom prst="rect">
+            <a:avLst/>
+          </a:prstGeom>
+          <a:solidFill>
+            <a:srgbClr val="2F6B4F"/>
+          </a:solidFill>
           <a:ln>
+            <a:noFill/>
+          </a:ln>
+        </p:spPr>
+        <p:style>
+          <a:lnRef idx="1">
+            <a:schemeClr val="accent1"/>
+          </a:lnRef>
+          <a:fillRef idx="3">
+            <a:schemeClr val="accent1"/>
+          </a:fillRef>
+          <a:effectRef idx="2">
+            <a:schemeClr val="accent1"/>
+          </a:effectRef>
+          <a:fontRef idx="minor">
+            <a:schemeClr val="lt1"/>
+          </a:fontRef>
+        </p:style>
+        <p:txBody>
+          <a:bodyPr rtlCol="0" anchor="ctr"/>
+          <a:lstStyle/>
+          <a:p>
+            <a:pPr algn="ctr"/>
+          </a:p>
+        </p:txBody>
+      </p:sp>
+      <p:sp>
+        <p:nvSpPr>
+          <p:cNvPr id="3" name="TextBox 2"/>
+          <p:cNvSpPr txBox="1"/>
+          <p:nvPr/>
+        </p:nvSpPr>
+        <p:spPr>
+          <a:xfrm>
+            <a:off x="502920" y="292608"/>
+            <a:ext cx="8229600" cy="320040"/>
+          </a:xfrm>
+          <a:prstGeom prst="rect">
+            <a:avLst/>
+          </a:prstGeom>
+          <a:noFill/>
+        </p:spPr>
+        <p:txBody>
+          <a:bodyPr wrap="square" anchor="t">
+            <a:spAutoFit/>
+          </a:bodyPr>
+          <a:lstStyle/>
+          <a:p>
+            <a:pPr algn="l"/>
+            <a:r>
+              <a:rPr sz="1200" b="1">
+                <a:solidFill>
+                  <a:srgbClr val="2F6B4F"/>
+                </a:solidFill>
+              </a:rPr>
+              <a:t>PROOF OF CONCEPT – THE PROBLEM, SOLVED IN THE PRODUCT</a:t>
+            </a:r>
+          </a:p>
+        </p:txBody>
+      </p:sp>
+      <p:sp>
+        <p:nvSpPr>
+          <p:cNvPr id="4" name="TextBox 3"/>
+          <p:cNvSpPr txBox="1"/>
+          <p:nvPr/>
+        </p:nvSpPr>
+        <p:spPr>
+          <a:xfrm>
+            <a:off x="502920" y="566928"/>
+            <a:ext cx="11247120" cy="731520"/>
+          </a:xfrm>
+          <a:prstGeom prst="rect">
+            <a:avLst/>
+          </a:prstGeom>
+          <a:noFill/>
+        </p:spPr>
+        <p:txBody>
+          <a:bodyPr wrap="square" anchor="t">
+            <a:spAutoFit/>
+          </a:bodyPr>
+          <a:lstStyle/>
+          <a:p>
+            <a:pPr algn="l"/>
+            <a:r>
+              <a:rPr sz="2800" b="1">
+                <a:solidFill>
+                  <a:srgbClr val="1F2A24"/>
+                </a:solidFill>
+              </a:rPr>
+              <a:t>Working prototype – officers and rangers act on the forecast</a:t>
+            </a:r>
+          </a:p>
+        </p:txBody>
+      </p:sp>
+      <p:pic>
+        <p:nvPicPr>
+          <p:cNvPr id="5" name="Picture 4" descr="15_daily_quota_cropped.png"/>
+          <p:cNvPicPr>
+            <a:picLocks noChangeAspect="1"/>
+          </p:cNvPicPr>
+          <p:nvPr/>
+        </p:nvPicPr>
+        <p:blipFill>
+          <a:blip r:embed="rId3"/>
+          <a:stretch>
+            <a:fillRect/>
+          </a:stretch>
+        </p:blipFill>
+        <p:spPr>
+          <a:xfrm>
+            <a:off x="502920" y="1325880"/>
+            <a:ext cx="1920240" cy="3430047"/>
+          </a:xfrm>
+          <a:prstGeom prst="rect">
+            <a:avLst/>
+          </a:prstGeom>
+          <a:ln w="12700">
             <a:solidFill>
               <a:srgbClr val="C9D3CD"/>
             </a:solidFill>
@@ -16848,14 +17898,281 @@
       </p:pic>
       <p:sp>
         <p:nvSpPr>
-          <p:cNvPr id="7" name="TextBox 6"/>
+          <p:cNvPr id="6" name="TextBox 5"/>
           <p:cNvSpPr txBox="1"/>
           <p:nvPr/>
         </p:nvSpPr>
         <p:spPr>
           <a:xfrm>
-            <a:off x="3108960" y="1463040"/>
-            <a:ext cx="8778240" cy="4572000"/>
+            <a:off x="457200" y="5532120"/>
+            <a:ext cx="2057400" cy="822960"/>
+          </a:xfrm>
+          <a:prstGeom prst="rect">
+            <a:avLst/>
+          </a:prstGeom>
+          <a:noFill/>
+        </p:spPr>
+        <p:txBody>
+          <a:bodyPr wrap="square" anchor="t">
+            <a:spAutoFit/>
+          </a:bodyPr>
+          <a:lstStyle/>
+          <a:p>
+            <a:pPr algn="ctr"/>
+            <a:r>
+              <a:rPr sz="1100" b="0">
+                <a:solidFill>
+                  <a:srgbClr val="1F2A24"/>
+                </a:solidFill>
+              </a:rPr>
+              <a:t>Officer: daily quota –</a:t>
+            </a:r>
+          </a:p>
+          <a:p>
+            <a:pPr algn="ctr"/>
+            <a:r>
+              <a:rPr sz="1100" b="0">
+                <a:solidFill>
+                  <a:srgbClr val="1F2A24"/>
+                </a:solidFill>
+              </a:rPr>
+              <a:t>forecast vs weather vs static</a:t>
+            </a:r>
+          </a:p>
+        </p:txBody>
+      </p:sp>
+      <p:pic>
+        <p:nvPicPr>
+          <p:cNvPr id="7" name="Picture 6" descr="16_gate_advice.png"/>
+          <p:cNvPicPr>
+            <a:picLocks noChangeAspect="1"/>
+          </p:cNvPicPr>
+          <p:nvPr/>
+        </p:nvPicPr>
+        <p:blipFill>
+          <a:blip r:embed="rId4"/>
+          <a:stretch>
+            <a:fillRect/>
+          </a:stretch>
+        </p:blipFill>
+        <p:spPr>
+          <a:xfrm>
+            <a:off x="2606040" y="1325880"/>
+            <a:ext cx="1920240" cy="4162963"/>
+          </a:xfrm>
+          <a:prstGeom prst="rect">
+            <a:avLst/>
+          </a:prstGeom>
+          <a:ln w="12700">
+            <a:solidFill>
+              <a:srgbClr val="C9D3CD"/>
+            </a:solidFill>
+          </a:ln>
+        </p:spPr>
+      </p:pic>
+      <p:sp>
+        <p:nvSpPr>
+          <p:cNvPr id="8" name="TextBox 7"/>
+          <p:cNvSpPr txBox="1"/>
+          <p:nvPr/>
+        </p:nvSpPr>
+        <p:spPr>
+          <a:xfrm>
+            <a:off x="2560320" y="5532120"/>
+            <a:ext cx="2057400" cy="822960"/>
+          </a:xfrm>
+          <a:prstGeom prst="rect">
+            <a:avLst/>
+          </a:prstGeom>
+          <a:noFill/>
+        </p:spPr>
+        <p:txBody>
+          <a:bodyPr wrap="square" anchor="t">
+            <a:spAutoFit/>
+          </a:bodyPr>
+          <a:lstStyle/>
+          <a:p>
+            <a:pPr algn="ctr"/>
+            <a:r>
+              <a:rPr sz="1100" b="0">
+                <a:solidFill>
+                  <a:srgbClr val="1F2A24"/>
+                </a:solidFill>
+              </a:rPr>
+              <a:t>Gate: hold or redirect</a:t>
+            </a:r>
+          </a:p>
+          <a:p>
+            <a:pPr algn="ctr"/>
+            <a:r>
+              <a:rPr sz="1100" b="0">
+                <a:solidFill>
+                  <a:srgbClr val="1F2A24"/>
+                </a:solidFill>
+              </a:rPr>
+              <a:t>in the next 2 h (demo)</a:t>
+            </a:r>
+          </a:p>
+        </p:txBody>
+      </p:sp>
+      <p:pic>
+        <p:nvPicPr>
+          <p:cNvPr id="9" name="Picture 8" descr="17_spot_count.png"/>
+          <p:cNvPicPr>
+            <a:picLocks noChangeAspect="1"/>
+          </p:cNvPicPr>
+          <p:nvPr/>
+        </p:nvPicPr>
+        <p:blipFill>
+          <a:blip r:embed="rId5"/>
+          <a:stretch>
+            <a:fillRect/>
+          </a:stretch>
+        </p:blipFill>
+        <p:spPr>
+          <a:xfrm>
+            <a:off x="4709160" y="1325880"/>
+            <a:ext cx="1920240" cy="4162963"/>
+          </a:xfrm>
+          <a:prstGeom prst="rect">
+            <a:avLst/>
+          </a:prstGeom>
+          <a:ln w="12700">
+            <a:solidFill>
+              <a:srgbClr val="C9D3CD"/>
+            </a:solidFill>
+          </a:ln>
+        </p:spPr>
+      </p:pic>
+      <p:sp>
+        <p:nvSpPr>
+          <p:cNvPr id="10" name="TextBox 9"/>
+          <p:cNvSpPr txBox="1"/>
+          <p:nvPr/>
+        </p:nvSpPr>
+        <p:spPr>
+          <a:xfrm>
+            <a:off x="4663440" y="5532120"/>
+            <a:ext cx="2057400" cy="822960"/>
+          </a:xfrm>
+          <a:prstGeom prst="rect">
+            <a:avLst/>
+          </a:prstGeom>
+          <a:noFill/>
+        </p:spPr>
+        <p:txBody>
+          <a:bodyPr wrap="square" anchor="t">
+            <a:spAutoFit/>
+          </a:bodyPr>
+          <a:lstStyle/>
+          <a:p>
+            <a:pPr algn="ctr"/>
+            <a:r>
+              <a:rPr sz="1100" b="0">
+                <a:solidFill>
+                  <a:srgbClr val="1F2A24"/>
+                </a:solidFill>
+              </a:rPr>
+              <a:t>Ranger: count walkers,</a:t>
+            </a:r>
+          </a:p>
+          <a:p>
+            <a:pPr algn="ctr"/>
+            <a:r>
+              <a:rPr sz="1100" b="0">
+                <a:solidFill>
+                  <a:srgbClr val="1F2A24"/>
+                </a:solidFill>
+              </a:rPr>
+              <a:t>works offline</a:t>
+            </a:r>
+          </a:p>
+        </p:txBody>
+      </p:sp>
+      <p:pic>
+        <p:nvPicPr>
+          <p:cNvPr id="11" name="Picture 10" descr="18_forecast_check.png"/>
+          <p:cNvPicPr>
+            <a:picLocks noChangeAspect="1"/>
+          </p:cNvPicPr>
+          <p:nvPr/>
+        </p:nvPicPr>
+        <p:blipFill>
+          <a:blip r:embed="rId6"/>
+          <a:stretch>
+            <a:fillRect/>
+          </a:stretch>
+        </p:blipFill>
+        <p:spPr>
+          <a:xfrm>
+            <a:off x="6812280" y="1325880"/>
+            <a:ext cx="1920240" cy="4162963"/>
+          </a:xfrm>
+          <a:prstGeom prst="rect">
+            <a:avLst/>
+          </a:prstGeom>
+          <a:ln w="12700">
+            <a:solidFill>
+              <a:srgbClr val="C9D3CD"/>
+            </a:solidFill>
+          </a:ln>
+        </p:spPr>
+      </p:pic>
+      <p:sp>
+        <p:nvSpPr>
+          <p:cNvPr id="12" name="TextBox 11"/>
+          <p:cNvSpPr txBox="1"/>
+          <p:nvPr/>
+        </p:nvSpPr>
+        <p:spPr>
+          <a:xfrm>
+            <a:off x="6766560" y="5532120"/>
+            <a:ext cx="2057400" cy="822960"/>
+          </a:xfrm>
+          <a:prstGeom prst="rect">
+            <a:avLst/>
+          </a:prstGeom>
+          <a:noFill/>
+        </p:spPr>
+        <p:txBody>
+          <a:bodyPr wrap="square" anchor="t">
+            <a:spAutoFit/>
+          </a:bodyPr>
+          <a:lstStyle/>
+          <a:p>
+            <a:pPr algn="ctr"/>
+            <a:r>
+              <a:rPr sz="1100" b="0">
+                <a:solidFill>
+                  <a:srgbClr val="1F2A24"/>
+                </a:solidFill>
+              </a:rPr>
+              <a:t>Officer: counts vs forecast</a:t>
+            </a:r>
+          </a:p>
+          <a:p>
+            <a:pPr algn="ctr"/>
+            <a:r>
+              <a:rPr sz="1100" b="0">
+                <a:solidFill>
+                  <a:srgbClr val="1F2A24"/>
+                </a:solidFill>
+              </a:rPr>
+              <a:t>(demo counts)</a:t>
+            </a:r>
+          </a:p>
+        </p:txBody>
+      </p:sp>
+      <p:sp>
+        <p:nvSpPr>
+          <p:cNvPr id="13" name="TextBox 12"/>
+          <p:cNvSpPr txBox="1"/>
+          <p:nvPr/>
+        </p:nvSpPr>
+        <p:spPr>
+          <a:xfrm>
+            <a:off x="8961120" y="1463040"/>
+            <a:ext cx="3017520" cy="4572000"/>
           </a:xfrm>
           <a:prstGeom prst="rect">
             <a:avLst/>
@@ -16870,116 +18187,127 @@
           <a:p>
             <a:pPr>
               <a:spcAft>
-                <a:spcPts val="1200"/>
+                <a:spcPts val="1000"/>
               </a:spcAft>
             </a:pPr>
             <a:r>
-              <a:rPr sz="1500" b="1">
-                <a:solidFill>
-                  <a:srgbClr val="1F2A24"/>
-                </a:solidFill>
-              </a:rPr>
-              <a:t>•  Daily, per trail:</a:t>
-            </a:r>
-            <a:r>
-              <a:rPr sz="1500">
-                <a:solidFill>
-                  <a:srgbClr val="1F2A24"/>
-                </a:solidFill>
-              </a:rPr>
-              <a:t>  past · today · future, filter by trail and by date range (presets or any range)</a:t>
+              <a:rPr sz="1300" b="1">
+                <a:solidFill>
+                  <a:srgbClr val="1F2A24"/>
+                </a:solidFill>
+              </a:rPr>
+              <a:t>•  Static vs dynamic:</a:t>
+            </a:r>
+            <a:r>
+              <a:rPr sz="1300">
+                <a:solidFill>
+                  <a:srgbClr val="1F2A24"/>
+                </a:solidFill>
+              </a:rPr>
+              <a:t>  the same day, side by side, with the limiting section and its hours</a:t>
             </a:r>
           </a:p>
           <a:p>
             <a:pPr>
               <a:spcAft>
-                <a:spcPts val="1200"/>
+                <a:spcPts val="1000"/>
               </a:spcAft>
             </a:pPr>
             <a:r>
-              <a:rPr sz="1500" b="1">
-                <a:solidFill>
-                  <a:srgbClr val="1F2A24"/>
-                </a:solidFill>
-              </a:rPr>
-              <a:t>•  Past:</a:t>
-            </a:r>
-            <a:r>
-              <a:rPr sz="1500">
-                <a:solidFill>
-                  <a:srgbClr val="1F2A24"/>
-                </a:solidFill>
-              </a:rPr>
-              <a:t>  DWC daily total when connected, otherwise the estimate simulated with the real weather (labelled)</a:t>
+              <a:rPr sz="1300" b="1">
+                <a:solidFill>
+                  <a:srgbClr val="1F2A24"/>
+                </a:solidFill>
+              </a:rPr>
+              <a:t>•  Officer decides:</a:t>
+            </a:r>
+            <a:r>
+              <a:rPr sz="1300">
+                <a:solidFill>
+                  <a:srgbClr val="1F2A24"/>
+                </a:solidFill>
+              </a:rPr>
+              <a:t>  forecast (default), weather only, same all year, or own number – audited</a:t>
             </a:r>
           </a:p>
           <a:p>
             <a:pPr>
               <a:spcAft>
-                <a:spcPts val="1200"/>
+                <a:spcPts val="1000"/>
               </a:spcAft>
             </a:pPr>
             <a:r>
-              <a:rPr sz="1500" b="1">
-                <a:solidFill>
-                  <a:srgbClr val="1F2A24"/>
-                </a:solidFill>
-              </a:rPr>
-              <a:t>•  Future:</a:t>
-            </a:r>
-            <a:r>
-              <a:rPr sz="1500">
-                <a:solidFill>
-                  <a:srgbClr val="1F2A24"/>
-                </a:solidFill>
-              </a:rPr>
-              <a:t>  planning-model forecast with its likely range (P10–P90)</a:t>
+              <a:rPr sz="1300" b="1">
+                <a:solidFill>
+                  <a:srgbClr val="1F2A24"/>
+                </a:solidFill>
+              </a:rPr>
+              <a:t>•  No trail sensors:</a:t>
+            </a:r>
+            <a:r>
+              <a:rPr sz="1300">
+                <a:solidFill>
+                  <a:srgbClr val="1F2A24"/>
+                </a:solidFill>
+              </a:rPr>
+              <a:t>  gate counts + spot counts only</a:t>
             </a:r>
           </a:p>
           <a:p>
             <a:pPr>
               <a:spcAft>
-                <a:spcPts val="1200"/>
+                <a:spcPts val="1000"/>
               </a:spcAft>
             </a:pPr>
             <a:r>
-              <a:rPr sz="1500" b="1">
-                <a:solidFill>
-                  <a:srgbClr val="1F2A24"/>
-                </a:solidFill>
-              </a:rPr>
-              <a:t>•  Own records:</a:t>
-            </a:r>
-            <a:r>
-              <a:rPr sz="1500">
-                <a:solidFill>
-                  <a:srgbClr val="1F2A24"/>
-                </a:solidFill>
-              </a:rPr>
-              <a:t>  booked, checked in at the gate, walk-ins, halfway counts, the day's safe limit</a:t>
-            </a:r>
-          </a:p>
-          <a:p>
-            <a:pPr>
-              <a:spcAft>
-                <a:spcPts val="1200"/>
-              </a:spcAft>
-            </a:pPr>
-            <a:r>
-              <a:rPr sz="1500" b="1">
-                <a:solidFill>
-                  <a:srgbClr val="1F2A24"/>
-                </a:solidFill>
-              </a:rPr>
-              <a:t>•  Keep:</a:t>
-            </a:r>
-            <a:r>
-              <a:rPr sz="1500">
-                <a:solidFill>
-                  <a:srgbClr val="1F2A24"/>
-                </a:solidFill>
-              </a:rPr>
-              <a:t>  copy as CSV in the app, or /admin/records?format=csv (Excel); works offline from the last copy</a:t>
+              <a:rPr sz="1300" b="1">
+                <a:solidFill>
+                  <a:srgbClr val="1F2A24"/>
+                </a:solidFill>
+              </a:rPr>
+              <a:t>•  Basis shown:</a:t>
+            </a:r>
+            <a:r>
+              <a:rPr sz="1300">
+                <a:solidFill>
+                  <a:srgbClr val="1F2A24"/>
+                </a:solidFill>
+              </a:rPr>
+              <a:t>  every number says what it is based on (FR5)</a:t>
+            </a:r>
+          </a:p>
+        </p:txBody>
+      </p:sp>
+      <p:sp>
+        <p:nvSpPr>
+          <p:cNvPr id="14" name="TextBox 13"/>
+          <p:cNvSpPr txBox="1"/>
+          <p:nvPr/>
+        </p:nvSpPr>
+        <p:spPr>
+          <a:xfrm>
+            <a:off x="8961120" y="6446520"/>
+            <a:ext cx="3017520" cy="274320"/>
+          </a:xfrm>
+          <a:prstGeom prst="rect">
+            <a:avLst/>
+          </a:prstGeom>
+          <a:noFill/>
+        </p:spPr>
+        <p:txBody>
+          <a:bodyPr wrap="square" anchor="t">
+            <a:spAutoFit/>
+          </a:bodyPr>
+          <a:lstStyle/>
+          <a:p>
+            <a:pPr algn="r"/>
+            <a:r>
+              <a:rPr sz="900" b="0">
+                <a:solidFill>
+                  <a:srgbClr val="6B7280"/>
+                </a:solidFill>
+              </a:rPr>
+              <a:t>Component 4 · IT23343948 · 16</a:t>
             </a:r>
           </a:p>
         </p:txBody>
@@ -17113,43 +18441,9 @@
           </a:p>
         </p:txBody>
       </p:sp>
-      <p:sp>
-        <p:nvSpPr>
-          <p:cNvPr id="5" name="TextBox 4"/>
-          <p:cNvSpPr txBox="1"/>
-          <p:nvPr/>
-        </p:nvSpPr>
-        <p:spPr>
-          <a:xfrm>
-            <a:off x="8961120" y="6446520"/>
-            <a:ext cx="3017520" cy="274320"/>
-          </a:xfrm>
-          <a:prstGeom prst="rect">
-            <a:avLst/>
-          </a:prstGeom>
-          <a:noFill/>
-        </p:spPr>
-        <p:txBody>
-          <a:bodyPr wrap="square" anchor="t">
-            <a:spAutoFit/>
-          </a:bodyPr>
-          <a:lstStyle/>
-          <a:p>
-            <a:pPr algn="r"/>
-            <a:r>
-              <a:rPr sz="900" b="0">
-                <a:solidFill>
-                  <a:srgbClr val="6B7280"/>
-                </a:solidFill>
-              </a:rPr>
-              <a:t>Component 4 · IT23343948 · 3</a:t>
-            </a:r>
-          </a:p>
-        </p:txBody>
-      </p:sp>
       <p:graphicFrame>
         <p:nvGraphicFramePr>
-          <p:cNvPr id="6" name="Table 5"/>
+          <p:cNvPr id="5" name="Table 4"/>
           <p:cNvGraphicFramePr>
             <a:graphicFrameLocks noGrp="1"/>
           </p:cNvGraphicFramePr>
@@ -17289,7 +18583,7 @@
                             <a:srgbClr val="1F2A24"/>
                           </a:solidFill>
                         </a:rPr>
-                        <a:t>Done – CHIRPS / NASA POWER next</a:t>
+                        <a:t>Done – NASA POWER checked, CHIRPS next</a:t>
                       </a:r>
                     </a:p>
                   </a:txBody>
@@ -17398,7 +18692,7 @@
                             <a:srgbClr val="1F2A24"/>
                           </a:solidFill>
                         </a:rPr>
-                        <a:t>METR-LA → PEMS-BAY pretraining, fine-tuned on both parks (RQ5)</a:t>
+                        <a:t>METR-LA → PEMS-BAY; fine-tuning and frozen core on both parks (RQ5)</a:t>
                       </a:r>
                     </a:p>
                   </a:txBody>
@@ -17528,7 +18822,7 @@
                             <a:srgbClr val="1F2A24"/>
                           </a:solidFill>
                         </a:rPr>
-                        <a:t>Daily safe limit per trail: rain, wet ground, crowding, trail condition</a:t>
+                        <a:t>Forecast enters RCC (FCcrowd); drives the ticket quota; beats a static quota (RQ9)</a:t>
                       </a:r>
                     </a:p>
                   </a:txBody>
@@ -17631,7 +18925,7 @@
       </p:graphicFrame>
       <p:sp>
         <p:nvSpPr>
-          <p:cNvPr id="7" name="Rounded Rectangle 6"/>
+          <p:cNvPr id="6" name="Rounded Rectangle 5"/>
           <p:cNvSpPr/>
           <p:nvPr/>
         </p:nvSpPr>
@@ -17695,7 +18989,7 @@
       </p:sp>
       <p:sp>
         <p:nvSpPr>
-          <p:cNvPr id="8" name="Rounded Rectangle 7"/>
+          <p:cNvPr id="7" name="Rounded Rectangle 6"/>
           <p:cNvSpPr/>
           <p:nvPr/>
         </p:nvSpPr>
@@ -17759,7 +19053,7 @@
       </p:sp>
       <p:sp>
         <p:nvSpPr>
-          <p:cNvPr id="9" name="Rounded Rectangle 8"/>
+          <p:cNvPr id="8" name="Rounded Rectangle 7"/>
           <p:cNvSpPr/>
           <p:nvPr/>
         </p:nvSpPr>
@@ -17817,6 +19111,903 @@
                 </a:solidFill>
               </a:rPr>
               <a:t>One pipeline, two kinds of site: ticketed park and no-ticket pilgrimage</a:t>
+            </a:r>
+          </a:p>
+        </p:txBody>
+      </p:sp>
+      <p:sp>
+        <p:nvSpPr>
+          <p:cNvPr id="9" name="TextBox 8"/>
+          <p:cNvSpPr txBox="1"/>
+          <p:nvPr/>
+        </p:nvSpPr>
+        <p:spPr>
+          <a:xfrm>
+            <a:off x="8961120" y="6446520"/>
+            <a:ext cx="3017520" cy="274320"/>
+          </a:xfrm>
+          <a:prstGeom prst="rect">
+            <a:avLst/>
+          </a:prstGeom>
+          <a:noFill/>
+        </p:spPr>
+        <p:txBody>
+          <a:bodyPr wrap="square" anchor="t">
+            <a:spAutoFit/>
+          </a:bodyPr>
+          <a:lstStyle/>
+          <a:p>
+            <a:pPr algn="r"/>
+            <a:r>
+              <a:rPr sz="900" b="0">
+                <a:solidFill>
+                  <a:srgbClr val="6B7280"/>
+                </a:solidFill>
+              </a:rPr>
+              <a:t>Component 4 · IT23343948 · 4</a:t>
+            </a:r>
+          </a:p>
+        </p:txBody>
+      </p:sp>
+    </p:spTree>
+  </p:cSld>
+  <p:clrMapOvr>
+    <a:masterClrMapping/>
+  </p:clrMapOvr>
+</p:sld>
+</file>
+
+<file path=ppt/slides/slide30.xml><?xml version="1.0" encoding="utf-8"?>
+<p:sld xmlns:a="http://schemas.openxmlformats.org/drawingml/2006/main" xmlns:p="http://schemas.openxmlformats.org/presentationml/2006/main" xmlns:r="http://schemas.openxmlformats.org/officeDocument/2006/relationships">
+  <p:cSld>
+    <p:spTree>
+      <p:nvGrpSpPr>
+        <p:cNvPr id="1" name=""/>
+        <p:cNvGrpSpPr/>
+        <p:nvPr/>
+      </p:nvGrpSpPr>
+      <p:grpSpPr/>
+      <p:sp>
+        <p:nvSpPr>
+          <p:cNvPr id="2" name="Rectangle 1"/>
+          <p:cNvSpPr/>
+          <p:nvPr/>
+        </p:nvSpPr>
+        <p:spPr>
+          <a:xfrm>
+            <a:off x="0" y="0"/>
+            <a:ext cx="12191695" cy="6858000"/>
+          </a:xfrm>
+          <a:prstGeom prst="rect">
+            <a:avLst/>
+          </a:prstGeom>
+          <a:solidFill>
+            <a:srgbClr val="1F2A24"/>
+          </a:solidFill>
+          <a:ln>
+            <a:noFill/>
+          </a:ln>
+        </p:spPr>
+        <p:style>
+          <a:lnRef idx="1">
+            <a:schemeClr val="accent1"/>
+          </a:lnRef>
+          <a:fillRef idx="3">
+            <a:schemeClr val="accent1"/>
+          </a:fillRef>
+          <a:effectRef idx="2">
+            <a:schemeClr val="accent1"/>
+          </a:effectRef>
+          <a:fontRef idx="minor">
+            <a:schemeClr val="lt1"/>
+          </a:fontRef>
+        </p:style>
+        <p:txBody>
+          <a:bodyPr rtlCol="0" anchor="ctr"/>
+          <a:lstStyle/>
+          <a:p>
+            <a:pPr algn="ctr"/>
+          </a:p>
+        </p:txBody>
+      </p:sp>
+      <p:sp>
+        <p:nvSpPr>
+          <p:cNvPr id="3" name="TextBox 2"/>
+          <p:cNvSpPr txBox="1"/>
+          <p:nvPr/>
+        </p:nvSpPr>
+        <p:spPr>
+          <a:xfrm>
+            <a:off x="731520" y="2194560"/>
+            <a:ext cx="10058400" cy="1097280"/>
+          </a:xfrm>
+          <a:prstGeom prst="rect">
+            <a:avLst/>
+          </a:prstGeom>
+          <a:noFill/>
+        </p:spPr>
+        <p:txBody>
+          <a:bodyPr wrap="square" anchor="t">
+            <a:spAutoFit/>
+          </a:bodyPr>
+          <a:lstStyle/>
+          <a:p>
+            <a:pPr algn="l"/>
+            <a:r>
+              <a:rPr sz="4800" b="1">
+                <a:solidFill>
+                  <a:srgbClr val="FFFFFF"/>
+                </a:solidFill>
+              </a:rPr>
+              <a:t>Thank you</a:t>
+            </a:r>
+          </a:p>
+        </p:txBody>
+      </p:sp>
+      <p:sp>
+        <p:nvSpPr>
+          <p:cNvPr id="4" name="TextBox 3"/>
+          <p:cNvSpPr txBox="1"/>
+          <p:nvPr/>
+        </p:nvSpPr>
+        <p:spPr>
+          <a:xfrm>
+            <a:off x="731520" y="3200400"/>
+            <a:ext cx="10058400" cy="731520"/>
+          </a:xfrm>
+          <a:prstGeom prst="rect">
+            <a:avLst/>
+          </a:prstGeom>
+          <a:noFill/>
+        </p:spPr>
+        <p:txBody>
+          <a:bodyPr wrap="square" anchor="t">
+            <a:spAutoFit/>
+          </a:bodyPr>
+          <a:lstStyle/>
+          <a:p>
+            <a:pPr algn="l"/>
+            <a:r>
+              <a:rPr sz="2600" b="0">
+                <a:solidFill>
+                  <a:srgbClr val="E0A100"/>
+                </a:solidFill>
+              </a:rPr>
+              <a:t>Questions?</a:t>
+            </a:r>
+          </a:p>
+        </p:txBody>
+      </p:sp>
+      <p:sp>
+        <p:nvSpPr>
+          <p:cNvPr id="5" name="TextBox 4"/>
+          <p:cNvSpPr txBox="1"/>
+          <p:nvPr/>
+        </p:nvSpPr>
+        <p:spPr>
+          <a:xfrm>
+            <a:off x="731520" y="5120640"/>
+            <a:ext cx="10058400" cy="457200"/>
+          </a:xfrm>
+          <a:prstGeom prst="rect">
+            <a:avLst/>
+          </a:prstGeom>
+          <a:noFill/>
+        </p:spPr>
+        <p:txBody>
+          <a:bodyPr wrap="square" anchor="t">
+            <a:spAutoFit/>
+          </a:bodyPr>
+          <a:lstStyle/>
+          <a:p>
+            <a:pPr algn="l"/>
+            <a:r>
+              <a:rPr sz="1600" b="0">
+                <a:solidFill>
+                  <a:srgbClr val="CFE3D7"/>
+                </a:solidFill>
+              </a:rPr>
+              <a:t>Weerasekera J.V. · IT23343948 · Component 4</a:t>
+            </a:r>
+          </a:p>
+        </p:txBody>
+      </p:sp>
+    </p:spTree>
+  </p:cSld>
+  <p:clrMapOvr>
+    <a:masterClrMapping/>
+  </p:clrMapOvr>
+</p:sld>
+</file>
+
+<file path=ppt/slides/slide31.xml><?xml version="1.0" encoding="utf-8"?>
+<p:sld xmlns:a="http://schemas.openxmlformats.org/drawingml/2006/main" xmlns:p="http://schemas.openxmlformats.org/presentationml/2006/main" xmlns:r="http://schemas.openxmlformats.org/officeDocument/2006/relationships">
+  <p:cSld>
+    <p:spTree>
+      <p:nvGrpSpPr>
+        <p:cNvPr id="1" name=""/>
+        <p:cNvGrpSpPr/>
+        <p:nvPr/>
+      </p:nvGrpSpPr>
+      <p:grpSpPr/>
+      <p:sp>
+        <p:nvSpPr>
+          <p:cNvPr id="2" name="Rectangle 1"/>
+          <p:cNvSpPr/>
+          <p:nvPr/>
+        </p:nvSpPr>
+        <p:spPr>
+          <a:xfrm>
+            <a:off x="0" y="0"/>
+            <a:ext cx="164592" cy="6858000"/>
+          </a:xfrm>
+          <a:prstGeom prst="rect">
+            <a:avLst/>
+          </a:prstGeom>
+          <a:solidFill>
+            <a:srgbClr val="2F6B4F"/>
+          </a:solidFill>
+          <a:ln>
+            <a:noFill/>
+          </a:ln>
+        </p:spPr>
+        <p:style>
+          <a:lnRef idx="1">
+            <a:schemeClr val="accent1"/>
+          </a:lnRef>
+          <a:fillRef idx="3">
+            <a:schemeClr val="accent1"/>
+          </a:fillRef>
+          <a:effectRef idx="2">
+            <a:schemeClr val="accent1"/>
+          </a:effectRef>
+          <a:fontRef idx="minor">
+            <a:schemeClr val="lt1"/>
+          </a:fontRef>
+        </p:style>
+        <p:txBody>
+          <a:bodyPr rtlCol="0" anchor="ctr"/>
+          <a:lstStyle/>
+          <a:p>
+            <a:pPr algn="ctr"/>
+          </a:p>
+        </p:txBody>
+      </p:sp>
+      <p:sp>
+        <p:nvSpPr>
+          <p:cNvPr id="3" name="TextBox 2"/>
+          <p:cNvSpPr txBox="1"/>
+          <p:nvPr/>
+        </p:nvSpPr>
+        <p:spPr>
+          <a:xfrm>
+            <a:off x="502920" y="292608"/>
+            <a:ext cx="8229600" cy="320040"/>
+          </a:xfrm>
+          <a:prstGeom prst="rect">
+            <a:avLst/>
+          </a:prstGeom>
+          <a:noFill/>
+        </p:spPr>
+        <p:txBody>
+          <a:bodyPr wrap="square" anchor="t">
+            <a:spAutoFit/>
+          </a:bodyPr>
+          <a:lstStyle/>
+          <a:p>
+            <a:pPr algn="l"/>
+            <a:r>
+              <a:rPr sz="1200" b="1">
+                <a:solidFill>
+                  <a:srgbClr val="2F6B4F"/>
+                </a:solidFill>
+              </a:rPr>
+              <a:t>BACKUP</a:t>
+            </a:r>
+          </a:p>
+        </p:txBody>
+      </p:sp>
+      <p:sp>
+        <p:nvSpPr>
+          <p:cNvPr id="4" name="TextBox 3"/>
+          <p:cNvSpPr txBox="1"/>
+          <p:nvPr/>
+        </p:nvSpPr>
+        <p:spPr>
+          <a:xfrm>
+            <a:off x="502920" y="566928"/>
+            <a:ext cx="11247120" cy="731520"/>
+          </a:xfrm>
+          <a:prstGeom prst="rect">
+            <a:avLst/>
+          </a:prstGeom>
+          <a:noFill/>
+        </p:spPr>
+        <p:txBody>
+          <a:bodyPr wrap="square" anchor="t">
+            <a:spAutoFit/>
+          </a:bodyPr>
+          <a:lstStyle/>
+          <a:p>
+            <a:pPr algn="l"/>
+            <a:r>
+              <a:rPr sz="2800" b="1">
+                <a:solidFill>
+                  <a:srgbClr val="1F2A24"/>
+                </a:solidFill>
+              </a:rPr>
+              <a:t>Backup – Limitations (stated before you are asked)</a:t>
+            </a:r>
+          </a:p>
+        </p:txBody>
+      </p:sp>
+      <p:sp>
+        <p:nvSpPr>
+          <p:cNvPr id="5" name="TextBox 4"/>
+          <p:cNvSpPr txBox="1"/>
+          <p:nvPr/>
+        </p:nvSpPr>
+        <p:spPr>
+          <a:xfrm>
+            <a:off x="548640" y="1463040"/>
+            <a:ext cx="11155680" cy="4846320"/>
+          </a:xfrm>
+          <a:prstGeom prst="rect">
+            <a:avLst/>
+          </a:prstGeom>
+          <a:noFill/>
+        </p:spPr>
+        <p:txBody>
+          <a:bodyPr wrap="square">
+            <a:spAutoFit/>
+          </a:bodyPr>
+          <a:lstStyle/>
+          <a:p>
+            <a:pPr>
+              <a:spcAft>
+                <a:spcPts val="1000"/>
+              </a:spcAft>
+            </a:pPr>
+            <a:r>
+              <a:rPr sz="1500" b="1">
+                <a:solidFill>
+                  <a:srgbClr val="1F2A24"/>
+                </a:solidFill>
+              </a:rPr>
+              <a:t>•  Synthetic target:</a:t>
+            </a:r>
+            <a:r>
+              <a:rPr sz="1500">
+                <a:solidFill>
+                  <a:srgbClr val="1F2A24"/>
+                </a:solidFill>
+              </a:rPr>
+              <a:t>  all results test the method on a simulator, not the real parks; every assumption is in docs/assumptions*.md with what would replace it</a:t>
+            </a:r>
+          </a:p>
+          <a:p>
+            <a:pPr>
+              <a:spcAft>
+                <a:spcPts val="1000"/>
+              </a:spcAft>
+            </a:pPr>
+            <a:r>
+              <a:rPr sz="1500" b="1">
+                <a:solidFill>
+                  <a:srgbClr val="1F2A24"/>
+                </a:solidFill>
+              </a:rPr>
+              <a:t>•  Same simulator:</a:t>
+            </a:r>
+            <a:r>
+              <a:rPr sz="1500">
+                <a:solidFill>
+                  <a:srgbClr val="1F2A24"/>
+                </a:solidFill>
+              </a:rPr>
+              <a:t>  the control results (RQ3, RQ4) use the simulator that made the data</a:t>
+            </a:r>
+          </a:p>
+          <a:p>
+            <a:pPr>
+              <a:spcAft>
+                <a:spcPts val="1000"/>
+              </a:spcAft>
+            </a:pPr>
+            <a:r>
+              <a:rPr sz="1500" b="1">
+                <a:solidFill>
+                  <a:srgbClr val="1F2A24"/>
+                </a:solidFill>
+              </a:rPr>
+              <a:t>•  Seeds:</a:t>
+            </a:r>
+            <a:r>
+              <a:rPr sz="1500">
+                <a:solidFill>
+                  <a:srgbClr val="1F2A24"/>
+                </a:solidFill>
+              </a:rPr>
+              <a:t>  every result uses three seeds except park-to-park transfer (RQ2)</a:t>
+            </a:r>
+          </a:p>
+          <a:p>
+            <a:pPr>
+              <a:spcAft>
+                <a:spcPts val="1000"/>
+              </a:spcAft>
+            </a:pPr>
+            <a:r>
+              <a:rPr sz="1500" b="1">
+                <a:solidFill>
+                  <a:srgbClr val="1F2A24"/>
+                </a:solidFill>
+              </a:rPr>
+              <a:t>•  Advice model:</a:t>
+            </a:r>
+            <a:r>
+              <a:rPr sz="1500">
+                <a:solidFill>
+                  <a:srgbClr val="1F2A24"/>
+                </a:solidFill>
+              </a:rPr>
+              <a:t>  RQ3 / RQ4 were run before crowd-dependent climb times and evening starts were added</a:t>
+            </a:r>
+          </a:p>
+          <a:p>
+            <a:pPr>
+              <a:spcAft>
+                <a:spcPts val="1000"/>
+              </a:spcAft>
+            </a:pPr>
+            <a:r>
+              <a:rPr sz="1500" b="1">
+                <a:solidFill>
+                  <a:srgbClr val="1F2A24"/>
+                </a:solidFill>
+              </a:rPr>
+              <a:t>•  Weather:</a:t>
+            </a:r>
+            <a:r>
+              <a:rPr sz="1500">
+                <a:solidFill>
+                  <a:srgbClr val="1F2A24"/>
+                </a:solidFill>
+              </a:rPr>
+              <a:t>  the main benchmark uses observed weather (an upper bound); the S1 world uses a noisy forecast</a:t>
+            </a:r>
+          </a:p>
+          <a:p>
+            <a:pPr>
+              <a:spcAft>
+                <a:spcPts val="1000"/>
+              </a:spcAft>
+            </a:pPr>
+            <a:r>
+              <a:rPr sz="1500" b="1">
+                <a:solidFill>
+                  <a:srgbClr val="1F2A24"/>
+                </a:solidFill>
+              </a:rPr>
+              <a:t>•  Graph value:</a:t>
+            </a:r>
+            <a:r>
+              <a:rPr sz="1500">
+                <a:solidFill>
+                  <a:srgbClr val="1F2A24"/>
+                </a:solidFill>
+              </a:rPr>
+              <a:t>  in the default simulator the calendar explains crowds, so sensors and the graph add little (RQ10)</a:t>
+            </a:r>
+          </a:p>
+          <a:p>
+            <a:pPr>
+              <a:spcAft>
+                <a:spcPts val="1000"/>
+              </a:spcAft>
+            </a:pPr>
+            <a:r>
+              <a:rPr sz="1500" b="1">
+                <a:solidFill>
+                  <a:srgbClr val="1F2A24"/>
+                </a:solidFill>
+              </a:rPr>
+              <a:t>•  OSM gaps:</a:t>
+            </a:r>
+            <a:r>
+              <a:rPr sz="1500">
+                <a:solidFill>
+                  <a:srgbClr val="1F2A24"/>
+                </a:solidFill>
+              </a:rPr>
+              <a:t>  the last ~350 m to the Adam's Peak summit is an approximate link; minor routes not mapped</a:t>
+            </a:r>
+          </a:p>
+          <a:p>
+            <a:pPr>
+              <a:spcAft>
+                <a:spcPts val="1000"/>
+              </a:spcAft>
+            </a:pPr>
+            <a:r>
+              <a:rPr sz="1500" b="1">
+                <a:solidFill>
+                  <a:srgbClr val="1F2A24"/>
+                </a:solidFill>
+              </a:rPr>
+              <a:t>•  Planning model:</a:t>
+            </a:r>
+            <a:r>
+              <a:rPr sz="1500">
+                <a:solidFill>
+                  <a:srgbClr val="1F2A24"/>
+                </a:solidFill>
+              </a:rPr>
+              <a:t>  daily totals no better than the calendar average (MAE ≈ 110 vs 108); segment-hour occupancy better (1.44 vs 1.65)</a:t>
+            </a:r>
+          </a:p>
+        </p:txBody>
+      </p:sp>
+      <p:sp>
+        <p:nvSpPr>
+          <p:cNvPr id="6" name="TextBox 5"/>
+          <p:cNvSpPr txBox="1"/>
+          <p:nvPr/>
+        </p:nvSpPr>
+        <p:spPr>
+          <a:xfrm>
+            <a:off x="8961120" y="6446520"/>
+            <a:ext cx="3017520" cy="274320"/>
+          </a:xfrm>
+          <a:prstGeom prst="rect">
+            <a:avLst/>
+          </a:prstGeom>
+          <a:noFill/>
+        </p:spPr>
+        <p:txBody>
+          <a:bodyPr wrap="square" anchor="t">
+            <a:spAutoFit/>
+          </a:bodyPr>
+          <a:lstStyle/>
+          <a:p>
+            <a:pPr algn="r"/>
+            <a:r>
+              <a:rPr sz="900" b="0">
+                <a:solidFill>
+                  <a:srgbClr val="6B7280"/>
+                </a:solidFill>
+              </a:rPr>
+              <a:t>Component 4 · IT23343948 · Backup B8</a:t>
+            </a:r>
+          </a:p>
+        </p:txBody>
+      </p:sp>
+    </p:spTree>
+  </p:cSld>
+  <p:clrMapOvr>
+    <a:masterClrMapping/>
+  </p:clrMapOvr>
+</p:sld>
+</file>
+
+<file path=ppt/slides/slide32.xml><?xml version="1.0" encoding="utf-8"?>
+<p:sld xmlns:a="http://schemas.openxmlformats.org/drawingml/2006/main" xmlns:p="http://schemas.openxmlformats.org/presentationml/2006/main" xmlns:r="http://schemas.openxmlformats.org/officeDocument/2006/relationships">
+  <p:cSld>
+    <p:spTree>
+      <p:nvGrpSpPr>
+        <p:cNvPr id="1" name=""/>
+        <p:cNvGrpSpPr/>
+        <p:nvPr/>
+      </p:nvGrpSpPr>
+      <p:grpSpPr/>
+      <p:sp>
+        <p:nvSpPr>
+          <p:cNvPr id="2" name="Rectangle 1"/>
+          <p:cNvSpPr/>
+          <p:nvPr/>
+        </p:nvSpPr>
+        <p:spPr>
+          <a:xfrm>
+            <a:off x="0" y="0"/>
+            <a:ext cx="164592" cy="6858000"/>
+          </a:xfrm>
+          <a:prstGeom prst="rect">
+            <a:avLst/>
+          </a:prstGeom>
+          <a:solidFill>
+            <a:srgbClr val="2F6B4F"/>
+          </a:solidFill>
+          <a:ln>
+            <a:noFill/>
+          </a:ln>
+        </p:spPr>
+        <p:style>
+          <a:lnRef idx="1">
+            <a:schemeClr val="accent1"/>
+          </a:lnRef>
+          <a:fillRef idx="3">
+            <a:schemeClr val="accent1"/>
+          </a:fillRef>
+          <a:effectRef idx="2">
+            <a:schemeClr val="accent1"/>
+          </a:effectRef>
+          <a:fontRef idx="minor">
+            <a:schemeClr val="lt1"/>
+          </a:fontRef>
+        </p:style>
+        <p:txBody>
+          <a:bodyPr rtlCol="0" anchor="ctr"/>
+          <a:lstStyle/>
+          <a:p>
+            <a:pPr algn="ctr"/>
+          </a:p>
+        </p:txBody>
+      </p:sp>
+      <p:sp>
+        <p:nvSpPr>
+          <p:cNvPr id="3" name="TextBox 2"/>
+          <p:cNvSpPr txBox="1"/>
+          <p:nvPr/>
+        </p:nvSpPr>
+        <p:spPr>
+          <a:xfrm>
+            <a:off x="502920" y="292608"/>
+            <a:ext cx="8229600" cy="320040"/>
+          </a:xfrm>
+          <a:prstGeom prst="rect">
+            <a:avLst/>
+          </a:prstGeom>
+          <a:noFill/>
+        </p:spPr>
+        <p:txBody>
+          <a:bodyPr wrap="square" anchor="t">
+            <a:spAutoFit/>
+          </a:bodyPr>
+          <a:lstStyle/>
+          <a:p>
+            <a:pPr algn="l"/>
+            <a:r>
+              <a:rPr sz="1200" b="1">
+                <a:solidFill>
+                  <a:srgbClr val="2F6B4F"/>
+                </a:solidFill>
+              </a:rPr>
+              <a:t>BACKUP</a:t>
+            </a:r>
+          </a:p>
+        </p:txBody>
+      </p:sp>
+      <p:sp>
+        <p:nvSpPr>
+          <p:cNvPr id="4" name="TextBox 3"/>
+          <p:cNvSpPr txBox="1"/>
+          <p:nvPr/>
+        </p:nvSpPr>
+        <p:spPr>
+          <a:xfrm>
+            <a:off x="502920" y="566928"/>
+            <a:ext cx="11247120" cy="731520"/>
+          </a:xfrm>
+          <a:prstGeom prst="rect">
+            <a:avLst/>
+          </a:prstGeom>
+          <a:noFill/>
+        </p:spPr>
+        <p:txBody>
+          <a:bodyPr wrap="square" anchor="t">
+            <a:spAutoFit/>
+          </a:bodyPr>
+          <a:lstStyle/>
+          <a:p>
+            <a:pPr algn="l"/>
+            <a:r>
+              <a:rPr sz="2800" b="1">
+                <a:solidFill>
+                  <a:srgbClr val="1F2A24"/>
+                </a:solidFill>
+              </a:rPr>
+              <a:t>Backup – Officer records: past, today and the week ahead</a:t>
+            </a:r>
+          </a:p>
+        </p:txBody>
+      </p:sp>
+      <p:pic>
+        <p:nvPicPr>
+          <p:cNvPr id="5" name="Picture 4" descr="14_records.png"/>
+          <p:cNvPicPr>
+            <a:picLocks noChangeAspect="1"/>
+          </p:cNvPicPr>
+          <p:nvPr/>
+        </p:nvPicPr>
+        <p:blipFill>
+          <a:blip r:embed="rId3"/>
+          <a:stretch>
+            <a:fillRect/>
+          </a:stretch>
+        </p:blipFill>
+        <p:spPr>
+          <a:xfrm>
+            <a:off x="502920" y="1325880"/>
+            <a:ext cx="2319807" cy="5029200"/>
+          </a:xfrm>
+          <a:prstGeom prst="rect">
+            <a:avLst/>
+          </a:prstGeom>
+          <a:ln>
+            <a:solidFill>
+              <a:srgbClr val="C9D3CD"/>
+            </a:solidFill>
+          </a:ln>
+        </p:spPr>
+      </p:pic>
+      <p:sp>
+        <p:nvSpPr>
+          <p:cNvPr id="6" name="TextBox 5"/>
+          <p:cNvSpPr txBox="1"/>
+          <p:nvPr/>
+        </p:nvSpPr>
+        <p:spPr>
+          <a:xfrm>
+            <a:off x="3108960" y="1463040"/>
+            <a:ext cx="8778240" cy="4572000"/>
+          </a:xfrm>
+          <a:prstGeom prst="rect">
+            <a:avLst/>
+          </a:prstGeom>
+          <a:noFill/>
+        </p:spPr>
+        <p:txBody>
+          <a:bodyPr wrap="square">
+            <a:spAutoFit/>
+          </a:bodyPr>
+          <a:lstStyle/>
+          <a:p>
+            <a:pPr>
+              <a:spcAft>
+                <a:spcPts val="1200"/>
+              </a:spcAft>
+            </a:pPr>
+            <a:r>
+              <a:rPr sz="1500" b="1">
+                <a:solidFill>
+                  <a:srgbClr val="1F2A24"/>
+                </a:solidFill>
+              </a:rPr>
+              <a:t>•  Daily, per trail:</a:t>
+            </a:r>
+            <a:r>
+              <a:rPr sz="1500">
+                <a:solidFill>
+                  <a:srgbClr val="1F2A24"/>
+                </a:solidFill>
+              </a:rPr>
+              <a:t>  past · today · future, filter by trail and by date range (presets or any range)</a:t>
+            </a:r>
+          </a:p>
+          <a:p>
+            <a:pPr>
+              <a:spcAft>
+                <a:spcPts val="1200"/>
+              </a:spcAft>
+            </a:pPr>
+            <a:r>
+              <a:rPr sz="1500" b="1">
+                <a:solidFill>
+                  <a:srgbClr val="1F2A24"/>
+                </a:solidFill>
+              </a:rPr>
+              <a:t>•  Past:</a:t>
+            </a:r>
+            <a:r>
+              <a:rPr sz="1500">
+                <a:solidFill>
+                  <a:srgbClr val="1F2A24"/>
+                </a:solidFill>
+              </a:rPr>
+              <a:t>  DWC daily total when connected, otherwise the estimate simulated with the real weather (labelled)</a:t>
+            </a:r>
+          </a:p>
+          <a:p>
+            <a:pPr>
+              <a:spcAft>
+                <a:spcPts val="1200"/>
+              </a:spcAft>
+            </a:pPr>
+            <a:r>
+              <a:rPr sz="1500" b="1">
+                <a:solidFill>
+                  <a:srgbClr val="1F2A24"/>
+                </a:solidFill>
+              </a:rPr>
+              <a:t>•  Future:</a:t>
+            </a:r>
+            <a:r>
+              <a:rPr sz="1500">
+                <a:solidFill>
+                  <a:srgbClr val="1F2A24"/>
+                </a:solidFill>
+              </a:rPr>
+              <a:t>  planning-model forecast with its likely range (P10–P90)</a:t>
+            </a:r>
+          </a:p>
+          <a:p>
+            <a:pPr>
+              <a:spcAft>
+                <a:spcPts val="1200"/>
+              </a:spcAft>
+            </a:pPr>
+            <a:r>
+              <a:rPr sz="1500" b="1">
+                <a:solidFill>
+                  <a:srgbClr val="1F2A24"/>
+                </a:solidFill>
+              </a:rPr>
+              <a:t>•  Own records:</a:t>
+            </a:r>
+            <a:r>
+              <a:rPr sz="1500">
+                <a:solidFill>
+                  <a:srgbClr val="1F2A24"/>
+                </a:solidFill>
+              </a:rPr>
+              <a:t>  booked, checked in at the gate, walk-ins, halfway counts, the day's safe limit</a:t>
+            </a:r>
+          </a:p>
+          <a:p>
+            <a:pPr>
+              <a:spcAft>
+                <a:spcPts val="1200"/>
+              </a:spcAft>
+            </a:pPr>
+            <a:r>
+              <a:rPr sz="1500" b="1">
+                <a:solidFill>
+                  <a:srgbClr val="1F2A24"/>
+                </a:solidFill>
+              </a:rPr>
+              <a:t>•  Keep:</a:t>
+            </a:r>
+            <a:r>
+              <a:rPr sz="1500">
+                <a:solidFill>
+                  <a:srgbClr val="1F2A24"/>
+                </a:solidFill>
+              </a:rPr>
+              <a:t>  copy as CSV in the app, or /admin/records?format=csv (Excel); works offline from the last copy</a:t>
+            </a:r>
+          </a:p>
+        </p:txBody>
+      </p:sp>
+      <p:sp>
+        <p:nvSpPr>
+          <p:cNvPr id="7" name="TextBox 6"/>
+          <p:cNvSpPr txBox="1"/>
+          <p:nvPr/>
+        </p:nvSpPr>
+        <p:spPr>
+          <a:xfrm>
+            <a:off x="8961120" y="6446520"/>
+            <a:ext cx="3017520" cy="274320"/>
+          </a:xfrm>
+          <a:prstGeom prst="rect">
+            <a:avLst/>
+          </a:prstGeom>
+          <a:noFill/>
+        </p:spPr>
+        <p:txBody>
+          <a:bodyPr wrap="square" anchor="t">
+            <a:spAutoFit/>
+          </a:bodyPr>
+          <a:lstStyle/>
+          <a:p>
+            <a:pPr algn="r"/>
+            <a:r>
+              <a:rPr sz="900" b="0">
+                <a:solidFill>
+                  <a:srgbClr val="6B7280"/>
+                </a:solidFill>
+              </a:rPr>
+              <a:t>Component 4 · IT23343948 · Backup B9</a:t>
             </a:r>
           </a:p>
         </p:txBody>
@@ -17952,41 +20143,7 @@
       </p:sp>
       <p:sp>
         <p:nvSpPr>
-          <p:cNvPr id="5" name="TextBox 4"/>
-          <p:cNvSpPr txBox="1"/>
-          <p:nvPr/>
-        </p:nvSpPr>
-        <p:spPr>
-          <a:xfrm>
-            <a:off x="8961120" y="6446520"/>
-            <a:ext cx="3017520" cy="274320"/>
-          </a:xfrm>
-          <a:prstGeom prst="rect">
-            <a:avLst/>
-          </a:prstGeom>
-          <a:noFill/>
-        </p:spPr>
-        <p:txBody>
-          <a:bodyPr wrap="square" anchor="t">
-            <a:spAutoFit/>
-          </a:bodyPr>
-          <a:lstStyle/>
-          <a:p>
-            <a:pPr algn="r"/>
-            <a:r>
-              <a:rPr sz="900" b="0">
-                <a:solidFill>
-                  <a:srgbClr val="6B7280"/>
-                </a:solidFill>
-              </a:rPr>
-              <a:t>Component 4 · IT23343948 · 4</a:t>
-            </a:r>
-          </a:p>
-        </p:txBody>
-      </p:sp>
-      <p:sp>
-        <p:nvSpPr>
-          <p:cNvPr id="6" name="Rounded Rectangle 5"/>
+          <p:cNvPr id="5" name="Rounded Rectangle 4"/>
           <p:cNvSpPr/>
           <p:nvPr/>
         </p:nvSpPr>
@@ -18061,7 +20218,7 @@
       </p:sp>
       <p:sp>
         <p:nvSpPr>
-          <p:cNvPr id="7" name="Rounded Rectangle 6"/>
+          <p:cNvPr id="6" name="Rounded Rectangle 5"/>
           <p:cNvSpPr/>
           <p:nvPr/>
         </p:nvSpPr>
@@ -18136,7 +20293,7 @@
       </p:sp>
       <p:cxnSp>
         <p:nvCxnSpPr>
-          <p:cNvPr id="8" name="Connector 7"/>
+          <p:cNvPr id="7" name="Connector 6"/>
           <p:cNvCxnSpPr/>
           <p:nvPr/>
         </p:nvCxnSpPr>
@@ -18172,7 +20329,7 @@
       </p:cxnSp>
       <p:sp>
         <p:nvSpPr>
-          <p:cNvPr id="9" name="Rounded Rectangle 8"/>
+          <p:cNvPr id="8" name="Rounded Rectangle 7"/>
           <p:cNvSpPr/>
           <p:nvPr/>
         </p:nvSpPr>
@@ -18247,7 +20404,7 @@
       </p:sp>
       <p:cxnSp>
         <p:nvCxnSpPr>
-          <p:cNvPr id="10" name="Connector 9"/>
+          <p:cNvPr id="9" name="Connector 8"/>
           <p:cNvCxnSpPr/>
           <p:nvPr/>
         </p:nvCxnSpPr>
@@ -18283,7 +20440,7 @@
       </p:cxnSp>
       <p:sp>
         <p:nvSpPr>
-          <p:cNvPr id="11" name="Rounded Rectangle 10"/>
+          <p:cNvPr id="10" name="Rounded Rectangle 9"/>
           <p:cNvSpPr/>
           <p:nvPr/>
         </p:nvSpPr>
@@ -18358,7 +20515,7 @@
       </p:sp>
       <p:cxnSp>
         <p:nvCxnSpPr>
-          <p:cNvPr id="12" name="Connector 11"/>
+          <p:cNvPr id="11" name="Connector 10"/>
           <p:cNvCxnSpPr/>
           <p:nvPr/>
         </p:nvCxnSpPr>
@@ -18394,7 +20551,7 @@
       </p:cxnSp>
       <p:sp>
         <p:nvSpPr>
-          <p:cNvPr id="13" name="Rounded Rectangle 12"/>
+          <p:cNvPr id="12" name="Rounded Rectangle 11"/>
           <p:cNvSpPr/>
           <p:nvPr/>
         </p:nvSpPr>
@@ -18469,7 +20626,7 @@
       </p:sp>
       <p:cxnSp>
         <p:nvCxnSpPr>
-          <p:cNvPr id="14" name="Connector 13"/>
+          <p:cNvPr id="13" name="Connector 12"/>
           <p:cNvCxnSpPr/>
           <p:nvPr/>
         </p:nvCxnSpPr>
@@ -18505,7 +20662,7 @@
       </p:cxnSp>
       <p:sp>
         <p:nvSpPr>
-          <p:cNvPr id="15" name="Rounded Rectangle 14"/>
+          <p:cNvPr id="14" name="Rounded Rectangle 13"/>
           <p:cNvSpPr/>
           <p:nvPr/>
         </p:nvSpPr>
@@ -18580,7 +20737,7 @@
       </p:sp>
       <p:cxnSp>
         <p:nvCxnSpPr>
-          <p:cNvPr id="16" name="Connector 15"/>
+          <p:cNvPr id="15" name="Connector 14"/>
           <p:cNvCxnSpPr/>
           <p:nvPr/>
         </p:nvCxnSpPr>
@@ -18616,7 +20773,7 @@
       </p:cxnSp>
       <p:sp>
         <p:nvSpPr>
-          <p:cNvPr id="17" name="TextBox 16"/>
+          <p:cNvPr id="16" name="TextBox 15"/>
           <p:cNvSpPr txBox="1"/>
           <p:nvPr/>
         </p:nvSpPr>
@@ -18725,6 +20882,40 @@
                 </a:solidFill>
               </a:rPr>
               <a:t>  visitors / pilgrims (plan, book, start times), rangers (gate, halfway counts), officers (season plan, closures), admin (audit)</a:t>
+            </a:r>
+          </a:p>
+        </p:txBody>
+      </p:sp>
+      <p:sp>
+        <p:nvSpPr>
+          <p:cNvPr id="17" name="TextBox 16"/>
+          <p:cNvSpPr txBox="1"/>
+          <p:nvPr/>
+        </p:nvSpPr>
+        <p:spPr>
+          <a:xfrm>
+            <a:off x="8961120" y="6446520"/>
+            <a:ext cx="3017520" cy="274320"/>
+          </a:xfrm>
+          <a:prstGeom prst="rect">
+            <a:avLst/>
+          </a:prstGeom>
+          <a:noFill/>
+        </p:spPr>
+        <p:txBody>
+          <a:bodyPr wrap="square" anchor="t">
+            <a:spAutoFit/>
+          </a:bodyPr>
+          <a:lstStyle/>
+          <a:p>
+            <a:pPr algn="r"/>
+            <a:r>
+              <a:rPr sz="900" b="0">
+                <a:solidFill>
+                  <a:srgbClr val="6B7280"/>
+                </a:solidFill>
+              </a:rPr>
+              <a:t>Component 4 · IT23343948 · 5</a:t>
             </a:r>
           </a:p>
         </p:txBody>
@@ -18858,43 +21049,9 @@
           </a:p>
         </p:txBody>
       </p:sp>
-      <p:sp>
-        <p:nvSpPr>
-          <p:cNvPr id="5" name="TextBox 4"/>
-          <p:cNvSpPr txBox="1"/>
-          <p:nvPr/>
-        </p:nvSpPr>
-        <p:spPr>
-          <a:xfrm>
-            <a:off x="8961120" y="6446520"/>
-            <a:ext cx="3017520" cy="274320"/>
-          </a:xfrm>
-          <a:prstGeom prst="rect">
-            <a:avLst/>
-          </a:prstGeom>
-          <a:noFill/>
-        </p:spPr>
-        <p:txBody>
-          <a:bodyPr wrap="square" anchor="t">
-            <a:spAutoFit/>
-          </a:bodyPr>
-          <a:lstStyle/>
-          <a:p>
-            <a:pPr algn="r"/>
-            <a:r>
-              <a:rPr sz="900" b="0">
-                <a:solidFill>
-                  <a:srgbClr val="6B7280"/>
-                </a:solidFill>
-              </a:rPr>
-              <a:t>Component 4 · IT23343948 · 5</a:t>
-            </a:r>
-          </a:p>
-        </p:txBody>
-      </p:sp>
       <p:pic>
         <p:nvPicPr>
-          <p:cNvPr id="6" name="Picture 5" descr="map_horton_plains.png"/>
+          <p:cNvPr id="5" name="Picture 4" descr="map_horton_plains.png"/>
           <p:cNvPicPr>
             <a:picLocks noChangeAspect="1"/>
           </p:cNvPicPr>
@@ -18918,7 +21075,7 @@
       </p:pic>
       <p:pic>
         <p:nvPicPr>
-          <p:cNvPr id="7" name="Picture 6" descr="map_adams_peak.png"/>
+          <p:cNvPr id="6" name="Picture 5" descr="map_adams_peak.png"/>
           <p:cNvPicPr>
             <a:picLocks noChangeAspect="1"/>
           </p:cNvPicPr>
@@ -18942,7 +21099,7 @@
       </p:pic>
       <p:sp>
         <p:nvSpPr>
-          <p:cNvPr id="8" name="TextBox 7"/>
+          <p:cNvPr id="7" name="TextBox 6"/>
           <p:cNvSpPr txBox="1"/>
           <p:nvPr/>
         </p:nvSpPr>
@@ -19080,7 +21237,7 @@
       </p:sp>
       <p:sp>
         <p:nvSpPr>
-          <p:cNvPr id="9" name="TextBox 8"/>
+          <p:cNvPr id="8" name="TextBox 7"/>
           <p:cNvSpPr txBox="1"/>
           <p:nvPr/>
         </p:nvSpPr>
@@ -19108,6 +21265,40 @@
                 </a:solidFill>
               </a:rPr>
               <a:t>▲ viewpoint   ★ summit   ■ halfway checkpoint   ○ start</a:t>
+            </a:r>
+          </a:p>
+        </p:txBody>
+      </p:sp>
+      <p:sp>
+        <p:nvSpPr>
+          <p:cNvPr id="9" name="TextBox 8"/>
+          <p:cNvSpPr txBox="1"/>
+          <p:nvPr/>
+        </p:nvSpPr>
+        <p:spPr>
+          <a:xfrm>
+            <a:off x="8961120" y="6446520"/>
+            <a:ext cx="3017520" cy="274320"/>
+          </a:xfrm>
+          <a:prstGeom prst="rect">
+            <a:avLst/>
+          </a:prstGeom>
+          <a:noFill/>
+        </p:spPr>
+        <p:txBody>
+          <a:bodyPr wrap="square" anchor="t">
+            <a:spAutoFit/>
+          </a:bodyPr>
+          <a:lstStyle/>
+          <a:p>
+            <a:pPr algn="r"/>
+            <a:r>
+              <a:rPr sz="900" b="0">
+                <a:solidFill>
+                  <a:srgbClr val="6B7280"/>
+                </a:solidFill>
+              </a:rPr>
+              <a:t>Component 4 · IT23343948 · Backup B1</a:t>
             </a:r>
           </a:p>
         </p:txBody>
@@ -19243,41 +21434,7 @@
       </p:sp>
       <p:sp>
         <p:nvSpPr>
-          <p:cNvPr id="5" name="TextBox 4"/>
-          <p:cNvSpPr txBox="1"/>
-          <p:nvPr/>
-        </p:nvSpPr>
-        <p:spPr>
-          <a:xfrm>
-            <a:off x="8961120" y="6446520"/>
-            <a:ext cx="3017520" cy="274320"/>
-          </a:xfrm>
-          <a:prstGeom prst="rect">
-            <a:avLst/>
-          </a:prstGeom>
-          <a:noFill/>
-        </p:spPr>
-        <p:txBody>
-          <a:bodyPr wrap="square" anchor="t">
-            <a:spAutoFit/>
-          </a:bodyPr>
-          <a:lstStyle/>
-          <a:p>
-            <a:pPr algn="r"/>
-            <a:r>
-              <a:rPr sz="900" b="0">
-                <a:solidFill>
-                  <a:srgbClr val="6B7280"/>
-                </a:solidFill>
-              </a:rPr>
-              <a:t>Component 4 · IT23343948 · 6</a:t>
-            </a:r>
-          </a:p>
-        </p:txBody>
-      </p:sp>
-      <p:sp>
-        <p:nvSpPr>
-          <p:cNvPr id="6" name="Rounded Rectangle 5"/>
+          <p:cNvPr id="5" name="Rounded Rectangle 4"/>
           <p:cNvSpPr/>
           <p:nvPr/>
         </p:nvSpPr>
@@ -19352,7 +21509,7 @@
       </p:sp>
       <p:sp>
         <p:nvSpPr>
-          <p:cNvPr id="7" name="Rounded Rectangle 6"/>
+          <p:cNvPr id="6" name="Rounded Rectangle 5"/>
           <p:cNvSpPr/>
           <p:nvPr/>
         </p:nvSpPr>
@@ -19427,7 +21584,7 @@
       </p:sp>
       <p:cxnSp>
         <p:nvCxnSpPr>
-          <p:cNvPr id="8" name="Connector 7"/>
+          <p:cNvPr id="7" name="Connector 6"/>
           <p:cNvCxnSpPr/>
           <p:nvPr/>
         </p:nvCxnSpPr>
@@ -19463,7 +21620,7 @@
       </p:cxnSp>
       <p:sp>
         <p:nvSpPr>
-          <p:cNvPr id="9" name="Rounded Rectangle 8"/>
+          <p:cNvPr id="8" name="Rounded Rectangle 7"/>
           <p:cNvSpPr/>
           <p:nvPr/>
         </p:nvSpPr>
@@ -19527,7 +21684,7 @@
       </p:sp>
       <p:cxnSp>
         <p:nvCxnSpPr>
-          <p:cNvPr id="10" name="Connector 9"/>
+          <p:cNvPr id="9" name="Connector 8"/>
           <p:cNvCxnSpPr/>
           <p:nvPr/>
         </p:nvCxnSpPr>
@@ -19563,7 +21720,7 @@
       </p:cxnSp>
       <p:sp>
         <p:nvSpPr>
-          <p:cNvPr id="11" name="Rounded Rectangle 10"/>
+          <p:cNvPr id="10" name="Rounded Rectangle 9"/>
           <p:cNvSpPr/>
           <p:nvPr/>
         </p:nvSpPr>
@@ -19627,7 +21784,7 @@
       </p:sp>
       <p:cxnSp>
         <p:nvCxnSpPr>
-          <p:cNvPr id="12" name="Connector 11"/>
+          <p:cNvPr id="11" name="Connector 10"/>
           <p:cNvCxnSpPr/>
           <p:nvPr/>
         </p:nvCxnSpPr>
@@ -19663,7 +21820,7 @@
       </p:cxnSp>
       <p:sp>
         <p:nvSpPr>
-          <p:cNvPr id="13" name="Rounded Rectangle 12"/>
+          <p:cNvPr id="12" name="Rounded Rectangle 11"/>
           <p:cNvSpPr/>
           <p:nvPr/>
         </p:nvSpPr>
@@ -19738,7 +21895,7 @@
       </p:sp>
       <p:cxnSp>
         <p:nvCxnSpPr>
-          <p:cNvPr id="14" name="Connector 13"/>
+          <p:cNvPr id="13" name="Connector 12"/>
           <p:cNvCxnSpPr/>
           <p:nvPr/>
         </p:nvCxnSpPr>
@@ -19774,7 +21931,7 @@
       </p:cxnSp>
       <p:sp>
         <p:nvSpPr>
-          <p:cNvPr id="15" name="Rounded Rectangle 14"/>
+          <p:cNvPr id="14" name="Rounded Rectangle 13"/>
           <p:cNvSpPr/>
           <p:nvPr/>
         </p:nvSpPr>
@@ -19849,7 +22006,7 @@
       </p:sp>
       <p:cxnSp>
         <p:nvCxnSpPr>
-          <p:cNvPr id="16" name="Connector 15"/>
+          <p:cNvPr id="15" name="Connector 14"/>
           <p:cNvCxnSpPr/>
           <p:nvPr/>
         </p:nvCxnSpPr>
@@ -19885,7 +22042,7 @@
       </p:cxnSp>
       <p:graphicFrame>
         <p:nvGraphicFramePr>
-          <p:cNvPr id="17" name="Table 16"/>
+          <p:cNvPr id="16" name="Table 15"/>
           <p:cNvGraphicFramePr>
             <a:graphicFrameLocks noGrp="1"/>
           </p:cNvGraphicFramePr>
@@ -20497,7 +22654,7 @@
       </p:graphicFrame>
       <p:sp>
         <p:nvSpPr>
-          <p:cNvPr id="18" name="TextBox 17"/>
+          <p:cNvPr id="17" name="TextBox 16"/>
           <p:cNvSpPr txBox="1"/>
           <p:nvPr/>
         </p:nvSpPr>
@@ -20583,6 +22740,40 @@
                 </a:solidFill>
               </a:rPr>
               <a:t>  masked L1, early stopping on the 2024 year</a:t>
+            </a:r>
+          </a:p>
+        </p:txBody>
+      </p:sp>
+      <p:sp>
+        <p:nvSpPr>
+          <p:cNvPr id="18" name="TextBox 17"/>
+          <p:cNvSpPr txBox="1"/>
+          <p:nvPr/>
+        </p:nvSpPr>
+        <p:spPr>
+          <a:xfrm>
+            <a:off x="8961120" y="6446520"/>
+            <a:ext cx="3017520" cy="274320"/>
+          </a:xfrm>
+          <a:prstGeom prst="rect">
+            <a:avLst/>
+          </a:prstGeom>
+          <a:noFill/>
+        </p:spPr>
+        <p:txBody>
+          <a:bodyPr wrap="square" anchor="t">
+            <a:spAutoFit/>
+          </a:bodyPr>
+          <a:lstStyle/>
+          <a:p>
+            <a:pPr algn="r"/>
+            <a:r>
+              <a:rPr sz="900" b="0">
+                <a:solidFill>
+                  <a:srgbClr val="6B7280"/>
+                </a:solidFill>
+              </a:rPr>
+              <a:t>Component 4 · IT23343948 · 6</a:t>
             </a:r>
           </a:p>
         </p:txBody>
@@ -20724,6 +22915,259 @@
         </p:nvSpPr>
         <p:spPr>
           <a:xfrm>
+            <a:off x="548640" y="1417320"/>
+            <a:ext cx="11155680" cy="4937760"/>
+          </a:xfrm>
+          <a:prstGeom prst="rect">
+            <a:avLst/>
+          </a:prstGeom>
+          <a:noFill/>
+        </p:spPr>
+        <p:txBody>
+          <a:bodyPr wrap="square">
+            <a:spAutoFit/>
+          </a:bodyPr>
+          <a:lstStyle/>
+          <a:p>
+            <a:pPr>
+              <a:spcAft>
+                <a:spcPts val="700"/>
+              </a:spcAft>
+            </a:pPr>
+            <a:r>
+              <a:rPr sz="1500" b="1">
+                <a:solidFill>
+                  <a:srgbClr val="1F2A24"/>
+                </a:solidFill>
+              </a:rPr>
+              <a:t>•  No leakage:</a:t>
+            </a:r>
+            <a:r>
+              <a:rPr sz="1500">
+                <a:solidFill>
+                  <a:srgbClr val="1F2A24"/>
+                </a:solidFill>
+              </a:rPr>
+              <a:t>  train 2022–23 · validate 2024 · test 2025; scalers fitted on training data only</a:t>
+            </a:r>
+          </a:p>
+          <a:p>
+            <a:pPr>
+              <a:spcAft>
+                <a:spcPts val="700"/>
+              </a:spcAft>
+            </a:pPr>
+            <a:r>
+              <a:rPr sz="1500" b="1">
+                <a:solidFill>
+                  <a:srgbClr val="1F2A24"/>
+                </a:solidFill>
+              </a:rPr>
+              <a:t>•  Spatial block CV:</a:t>
+            </a:r>
+            <a:r>
+              <a:rPr sz="1500">
+                <a:solidFill>
+                  <a:srgbClr val="1F2A24"/>
+                </a:solidFill>
+              </a:rPr>
+              <a:t>  4 contiguous blocks of segments held out – no history and no training loss there</a:t>
+            </a:r>
+          </a:p>
+          <a:p>
+            <a:pPr>
+              <a:spcAft>
+                <a:spcPts val="700"/>
+              </a:spcAft>
+            </a:pPr>
+            <a:r>
+              <a:rPr sz="1500" b="1">
+                <a:solidFill>
+                  <a:srgbClr val="1F2A24"/>
+                </a:solidFill>
+              </a:rPr>
+              <a:t>•  Fair statistics:</a:t>
+            </a:r>
+            <a:r>
+              <a:rPr sz="1500">
+                <a:solidFill>
+                  <a:srgbClr val="1F2A24"/>
+                </a:solidFill>
+              </a:rPr>
+              <a:t>  paired t-test + Wilcoxon over forecast days (not hours), Holm-corrected, effect size d_z</a:t>
+            </a:r>
+          </a:p>
+          <a:p>
+            <a:pPr>
+              <a:spcAft>
+                <a:spcPts val="700"/>
+              </a:spcAft>
+            </a:pPr>
+            <a:r>
+              <a:rPr sz="1500" b="1">
+                <a:solidFill>
+                  <a:srgbClr val="1F2A24"/>
+                </a:solidFill>
+              </a:rPr>
+              <a:t>•  Clean ablation:</a:t>
+            </a:r>
+            <a:r>
+              <a:rPr sz="1500">
+                <a:solidFill>
+                  <a:srgbClr val="1F2A24"/>
+                </a:solidFill>
+              </a:rPr>
+              <a:t>  the same network with the graph removed (GRU-no-graph) isolates what the graph adds</a:t>
+            </a:r>
+          </a:p>
+          <a:p>
+            <a:pPr>
+              <a:spcAft>
+                <a:spcPts val="700"/>
+              </a:spcAft>
+            </a:pPr>
+            <a:r>
+              <a:rPr sz="1500" b="1">
+                <a:solidFill>
+                  <a:srgbClr val="1F2A24"/>
+                </a:solidFill>
+              </a:rPr>
+              <a:t>•  Decision-focused:</a:t>
+            </a:r>
+            <a:r>
+              <a:rPr sz="1500">
+                <a:solidFill>
+                  <a:srgbClr val="1F2A24"/>
+                </a:solidFill>
+              </a:rPr>
+              <a:t>  forecasts also judged by the waiting / overcrowding they prevent (RQ3)</a:t>
+            </a:r>
+          </a:p>
+          <a:p>
+            <a:pPr>
+              <a:spcAft>
+                <a:spcPts val="700"/>
+              </a:spcAft>
+            </a:pPr>
+            <a:r>
+              <a:rPr sz="1500" b="1">
+                <a:solidFill>
+                  <a:srgbClr val="1F2A24"/>
+                </a:solidFill>
+              </a:rPr>
+              <a:t>•  Pre-registered:</a:t>
+            </a:r>
+            <a:r>
+              <a:rPr sz="1500">
+                <a:solidFill>
+                  <a:srgbClr val="1F2A24"/>
+                </a:solidFill>
+              </a:rPr>
+              <a:t>  field agreement criteria (A1–A3) fixed on 20 Oct, before any counts are taken</a:t>
+            </a:r>
+          </a:p>
+          <a:p>
+            <a:pPr>
+              <a:spcAft>
+                <a:spcPts val="700"/>
+              </a:spcAft>
+            </a:pPr>
+            <a:r>
+              <a:rPr sz="1500" b="1">
+                <a:solidFill>
+                  <a:srgbClr val="1F2A24"/>
+                </a:solidFill>
+              </a:rPr>
+              <a:t>•  Bottleneck events:</a:t>
+            </a:r>
+            <a:r>
+              <a:rPr sz="1500">
+                <a:solidFill>
+                  <a:srgbClr val="1F2A24"/>
+                </a:solidFill>
+              </a:rPr>
+              <a:t>  over-capacity segment-hours scored with precision / recall / F1 (RQ1b), not only MAE</a:t>
+            </a:r>
+          </a:p>
+          <a:p>
+            <a:pPr>
+              <a:spcAft>
+                <a:spcPts val="700"/>
+              </a:spcAft>
+            </a:pPr>
+            <a:r>
+              <a:rPr sz="1500" b="1">
+                <a:solidFill>
+                  <a:srgbClr val="1F2A24"/>
+                </a:solidFill>
+              </a:rPr>
+              <a:t>•  Reproducible:</a:t>
+            </a:r>
+            <a:r>
+              <a:rPr sz="1500">
+                <a:solidFill>
+                  <a:srgbClr val="1F2A24"/>
+                </a:solidFill>
+              </a:rPr>
+              <a:t>  seeds logged; every run = results/&lt;time&gt;_&lt;tag&gt;/ with config + git hash</a:t>
+            </a:r>
+          </a:p>
+          <a:p>
+            <a:pPr>
+              <a:spcAft>
+                <a:spcPts val="700"/>
+              </a:spcAft>
+            </a:pPr>
+            <a:r>
+              <a:rPr sz="1500" b="1">
+                <a:solidFill>
+                  <a:srgbClr val="1F2A24"/>
+                </a:solidFill>
+              </a:rPr>
+              <a:t>•  Quality:</a:t>
+            </a:r>
+            <a:r>
+              <a:rPr sz="1500">
+                <a:solidFill>
+                  <a:srgbClr val="1F2A24"/>
+                </a:solidFill>
+              </a:rPr>
+              <a:t>  101 Python + 34 Flutter tests, ruff lint, GitHub Actions CI; model + data card; requirements traced to tests</a:t>
+            </a:r>
+          </a:p>
+          <a:p>
+            <a:pPr>
+              <a:spcAft>
+                <a:spcPts val="700"/>
+              </a:spcAft>
+            </a:pPr>
+            <a:r>
+              <a:rPr sz="1500" b="1">
+                <a:solidFill>
+                  <a:srgbClr val="1F2A24"/>
+                </a:solidFill>
+              </a:rPr>
+              <a:t>•  Secure &amp; ethical:</a:t>
+            </a:r>
+            <a:r>
+              <a:rPr sz="1500">
+                <a:solidFill>
+                  <a:srgbClr val="1F2A24"/>
+                </a:solidFill>
+              </a:rPr>
+              <a:t>  roles checked on the server, hashed passwords, lockout, audit log; no personal visitor data</a:t>
+            </a:r>
+          </a:p>
+        </p:txBody>
+      </p:sp>
+      <p:sp>
+        <p:nvSpPr>
+          <p:cNvPr id="6" name="TextBox 5"/>
+          <p:cNvSpPr txBox="1"/>
+          <p:nvPr/>
+        </p:nvSpPr>
+        <p:spPr>
+          <a:xfrm>
             <a:off x="8961120" y="6446520"/>
             <a:ext cx="3017520" cy="274320"/>
           </a:xfrm>
@@ -20746,213 +23190,6 @@
                 </a:solidFill>
               </a:rPr>
               <a:t>Component 4 · IT23343948 · 7</a:t>
-            </a:r>
-          </a:p>
-        </p:txBody>
-      </p:sp>
-      <p:sp>
-        <p:nvSpPr>
-          <p:cNvPr id="6" name="TextBox 5"/>
-          <p:cNvSpPr txBox="1"/>
-          <p:nvPr/>
-        </p:nvSpPr>
-        <p:spPr>
-          <a:xfrm>
-            <a:off x="548640" y="1463040"/>
-            <a:ext cx="11155680" cy="4846320"/>
-          </a:xfrm>
-          <a:prstGeom prst="rect">
-            <a:avLst/>
-          </a:prstGeom>
-          <a:noFill/>
-        </p:spPr>
-        <p:txBody>
-          <a:bodyPr wrap="square">
-            <a:spAutoFit/>
-          </a:bodyPr>
-          <a:lstStyle/>
-          <a:p>
-            <a:pPr>
-              <a:spcAft>
-                <a:spcPts val="900"/>
-              </a:spcAft>
-            </a:pPr>
-            <a:r>
-              <a:rPr sz="1600" b="1">
-                <a:solidFill>
-                  <a:srgbClr val="1F2A24"/>
-                </a:solidFill>
-              </a:rPr>
-              <a:t>•  No leakage:</a:t>
-            </a:r>
-            <a:r>
-              <a:rPr sz="1600">
-                <a:solidFill>
-                  <a:srgbClr val="1F2A24"/>
-                </a:solidFill>
-              </a:rPr>
-              <a:t>  train 2022–23 · validate 2024 · test 2025; scalers fitted on training data only</a:t>
-            </a:r>
-          </a:p>
-          <a:p>
-            <a:pPr>
-              <a:spcAft>
-                <a:spcPts val="900"/>
-              </a:spcAft>
-            </a:pPr>
-            <a:r>
-              <a:rPr sz="1600" b="1">
-                <a:solidFill>
-                  <a:srgbClr val="1F2A24"/>
-                </a:solidFill>
-              </a:rPr>
-              <a:t>•  Spatial block CV:</a:t>
-            </a:r>
-            <a:r>
-              <a:rPr sz="1600">
-                <a:solidFill>
-                  <a:srgbClr val="1F2A24"/>
-                </a:solidFill>
-              </a:rPr>
-              <a:t>  4 contiguous blocks of segments held out – no history and no training loss there</a:t>
-            </a:r>
-          </a:p>
-          <a:p>
-            <a:pPr>
-              <a:spcAft>
-                <a:spcPts val="900"/>
-              </a:spcAft>
-            </a:pPr>
-            <a:r>
-              <a:rPr sz="1600" b="1">
-                <a:solidFill>
-                  <a:srgbClr val="1F2A24"/>
-                </a:solidFill>
-              </a:rPr>
-              <a:t>•  Fair statistics:</a:t>
-            </a:r>
-            <a:r>
-              <a:rPr sz="1600">
-                <a:solidFill>
-                  <a:srgbClr val="1F2A24"/>
-                </a:solidFill>
-              </a:rPr>
-              <a:t>  paired t-test + Wilcoxon over forecast days (not hours), Holm-corrected, effect size d_z</a:t>
-            </a:r>
-          </a:p>
-          <a:p>
-            <a:pPr>
-              <a:spcAft>
-                <a:spcPts val="900"/>
-              </a:spcAft>
-            </a:pPr>
-            <a:r>
-              <a:rPr sz="1600" b="1">
-                <a:solidFill>
-                  <a:srgbClr val="1F2A24"/>
-                </a:solidFill>
-              </a:rPr>
-              <a:t>•  Clean ablation:</a:t>
-            </a:r>
-            <a:r>
-              <a:rPr sz="1600">
-                <a:solidFill>
-                  <a:srgbClr val="1F2A24"/>
-                </a:solidFill>
-              </a:rPr>
-              <a:t>  the same network with the graph removed (GRU-no-graph) isolates what the graph adds</a:t>
-            </a:r>
-          </a:p>
-          <a:p>
-            <a:pPr>
-              <a:spcAft>
-                <a:spcPts val="900"/>
-              </a:spcAft>
-            </a:pPr>
-            <a:r>
-              <a:rPr sz="1600" b="1">
-                <a:solidFill>
-                  <a:srgbClr val="1F2A24"/>
-                </a:solidFill>
-              </a:rPr>
-              <a:t>•  Decision-focused:</a:t>
-            </a:r>
-            <a:r>
-              <a:rPr sz="1600">
-                <a:solidFill>
-                  <a:srgbClr val="1F2A24"/>
-                </a:solidFill>
-              </a:rPr>
-              <a:t>  forecasts also judged by the waiting / overcrowding they prevent (RQ3)</a:t>
-            </a:r>
-          </a:p>
-          <a:p>
-            <a:pPr>
-              <a:spcAft>
-                <a:spcPts val="900"/>
-              </a:spcAft>
-            </a:pPr>
-            <a:r>
-              <a:rPr sz="1600" b="1">
-                <a:solidFill>
-                  <a:srgbClr val="1F2A24"/>
-                </a:solidFill>
-              </a:rPr>
-              <a:t>•  Pre-registered:</a:t>
-            </a:r>
-            <a:r>
-              <a:rPr sz="1600">
-                <a:solidFill>
-                  <a:srgbClr val="1F2A24"/>
-                </a:solidFill>
-              </a:rPr>
-              <a:t>  field agreement criteria (A1–A3) fixed on 20 Oct, before any counts are taken</a:t>
-            </a:r>
-          </a:p>
-          <a:p>
-            <a:pPr>
-              <a:spcAft>
-                <a:spcPts val="900"/>
-              </a:spcAft>
-            </a:pPr>
-            <a:r>
-              <a:rPr sz="1600" b="1">
-                <a:solidFill>
-                  <a:srgbClr val="1F2A24"/>
-                </a:solidFill>
-              </a:rPr>
-              <a:t>•  Reproducible:</a:t>
-            </a:r>
-            <a:r>
-              <a:rPr sz="1600">
-                <a:solidFill>
-                  <a:srgbClr val="1F2A24"/>
-                </a:solidFill>
-              </a:rPr>
-              <a:t>  seeds logged; every run = results/&lt;time&gt;_&lt;tag&gt;/ with config + git hash; 65 Python + 24 Flutter tests</a:t>
-            </a:r>
-          </a:p>
-          <a:p>
-            <a:pPr>
-              <a:spcAft>
-                <a:spcPts val="900"/>
-              </a:spcAft>
-            </a:pPr>
-            <a:r>
-              <a:rPr sz="1600" b="1">
-                <a:solidFill>
-                  <a:srgbClr val="1F2A24"/>
-                </a:solidFill>
-              </a:rPr>
-              <a:t>•  Secure &amp; ethical:</a:t>
-            </a:r>
-            <a:r>
-              <a:rPr sz="1600">
-                <a:solidFill>
-                  <a:srgbClr val="1F2A24"/>
-                </a:solidFill>
-              </a:rPr>
-              <a:t>  roles checked on the server, hashed passwords, lockout, audit log; no personal visitor data</a:t>
             </a:r>
           </a:p>
         </p:txBody>
@@ -21081,48 +23318,14 @@
                   <a:srgbClr val="1F2A24"/>
                 </a:solidFill>
               </a:rPr>
-              <a:t>RQ1 – Does the graph help?  On ordinary trail without counts, yes</a:t>
-            </a:r>
-          </a:p>
-        </p:txBody>
-      </p:sp>
-      <p:sp>
-        <p:nvSpPr>
-          <p:cNvPr id="5" name="TextBox 4"/>
-          <p:cNvSpPr txBox="1"/>
-          <p:nvPr/>
-        </p:nvSpPr>
-        <p:spPr>
-          <a:xfrm>
-            <a:off x="8961120" y="6446520"/>
-            <a:ext cx="3017520" cy="274320"/>
-          </a:xfrm>
-          <a:prstGeom prst="rect">
-            <a:avLst/>
-          </a:prstGeom>
-          <a:noFill/>
-        </p:spPr>
-        <p:txBody>
-          <a:bodyPr wrap="square" anchor="t">
-            <a:spAutoFit/>
-          </a:bodyPr>
-          <a:lstStyle/>
-          <a:p>
-            <a:pPr algn="r"/>
-            <a:r>
-              <a:rPr sz="900" b="0">
-                <a:solidFill>
-                  <a:srgbClr val="6B7280"/>
-                </a:solidFill>
-              </a:rPr>
-              <a:t>Component 4 · IT23343948 · 8</a:t>
+              <a:t>RQ1 – The graph helps on unseen trail, not for bottleneck calls</a:t>
             </a:r>
           </a:p>
         </p:txBody>
       </p:sp>
       <p:pic>
         <p:nvPicPr>
-          <p:cNvPr id="6" name="Picture 5" descr="rq1.png"/>
+          <p:cNvPr id="5" name="Picture 4" descr="rq1.png"/>
           <p:cNvPicPr>
             <a:picLocks noChangeAspect="1"/>
           </p:cNvPicPr>
@@ -21146,14 +23349,14 @@
       </p:pic>
       <p:sp>
         <p:nvSpPr>
-          <p:cNvPr id="7" name="TextBox 6"/>
+          <p:cNvPr id="6" name="TextBox 5"/>
           <p:cNvSpPr txBox="1"/>
           <p:nvPr/>
         </p:nvSpPr>
         <p:spPr>
           <a:xfrm>
-            <a:off x="548640" y="5120640"/>
-            <a:ext cx="11155680" cy="1280160"/>
+            <a:off x="548640" y="5029200"/>
+            <a:ext cx="11155680" cy="1371600"/>
           </a:xfrm>
           <a:prstGeom prst="rect">
             <a:avLst/>
@@ -21168,11 +23371,11 @@
           <a:p>
             <a:pPr>
               <a:spcAft>
-                <a:spcPts val="300"/>
+                <a:spcPts val="200"/>
               </a:spcAft>
             </a:pPr>
             <a:r>
-              <a:rPr sz="1300" b="1">
+              <a:rPr sz="1200" b="1">
                 <a:solidFill>
                   <a:srgbClr val="1F2A24"/>
                 </a:solidFill>
@@ -21180,22 +23383,22 @@
               <a:t>•  Horton, unseen segments:</a:t>
             </a:r>
             <a:r>
-              <a:rPr sz="1300">
-                <a:solidFill>
-                  <a:srgbClr val="1F2A24"/>
-                </a:solidFill>
-              </a:rPr>
-              <a:t>  ST-GNN 2.48 · LSTM 2.59 · GRU without graph 2.69 · historical average 4.20  (vs LSTM p &lt; 0.001)</a:t>
+              <a:rPr sz="1200">
+                <a:solidFill>
+                  <a:srgbClr val="1F2A24"/>
+                </a:solidFill>
+              </a:rPr>
+              <a:t>  ST-GNN 2.54 · LSTM 2.59 · GRU without graph 2.61 · historical average 4.20  (vs LSTM p &lt; 0.001)</a:t>
             </a:r>
           </a:p>
           <a:p>
             <a:pPr>
               <a:spcAft>
-                <a:spcPts val="300"/>
+                <a:spcPts val="200"/>
               </a:spcAft>
             </a:pPr>
             <a:r>
-              <a:rPr sz="1300" b="1">
+              <a:rPr sz="1200" b="1">
                 <a:solidFill>
                   <a:srgbClr val="1F2A24"/>
                 </a:solidFill>
@@ -21203,7 +23406,7 @@
               <a:t>•  Adam's Peak, unseen segments (3 seeds):</a:t>
             </a:r>
             <a:r>
-              <a:rPr sz="1300">
+              <a:rPr sz="1200">
                 <a:solidFill>
                   <a:srgbClr val="1F2A24"/>
                 </a:solidFill>
@@ -21214,11 +23417,11 @@
           <a:p>
             <a:pPr>
               <a:spcAft>
-                <a:spcPts val="300"/>
+                <a:spcPts val="200"/>
               </a:spcAft>
             </a:pPr>
             <a:r>
-              <a:rPr sz="1300" b="1">
+              <a:rPr sz="1200" b="1">
                 <a:solidFill>
                   <a:srgbClr val="1F2A24"/>
                 </a:solidFill>
@@ -21226,12 +23429,69 @@
               <a:t>•  Every segment counted (3 seeds):</a:t>
             </a:r>
             <a:r>
-              <a:rPr sz="1300">
+              <a:rPr sz="1200">
                 <a:solidFill>
                   <a:srgbClr val="1F2A24"/>
                 </a:solidFill>
               </a:rPr>
               <a:t>  tie with the LSTM – Horton 1.42 vs 1.42 (p = 0.12), Adam's Peak 3.80 vs 3.83 (p = 0.09)</a:t>
+            </a:r>
+          </a:p>
+          <a:p>
+            <a:pPr>
+              <a:spcAft>
+                <a:spcPts val="200"/>
+              </a:spcAft>
+            </a:pPr>
+            <a:r>
+              <a:rPr sz="1200" b="1">
+                <a:solidFill>
+                  <a:srgbClr val="1F2A24"/>
+                </a:solidFill>
+              </a:rPr>
+              <a:t>•  Bottleneck detection (RQ1b):</a:t>
+            </a:r>
+            <a:r>
+              <a:rPr sz="1200">
+                <a:solidFill>
+                  <a:srgbClr val="1F2A24"/>
+                </a:solidFill>
+              </a:rPr>
+              <a:t>  over-capacity F1 0.80 / 0.85 with counts (all tie); on unseen segments ST-GNN 0.29 vs LSTM 0.32 (Horton) – it smooths peaks → calibrated chance of crowding, peak-aware loss next</a:t>
+            </a:r>
+          </a:p>
+        </p:txBody>
+      </p:sp>
+      <p:sp>
+        <p:nvSpPr>
+          <p:cNvPr id="7" name="TextBox 6"/>
+          <p:cNvSpPr txBox="1"/>
+          <p:nvPr/>
+        </p:nvSpPr>
+        <p:spPr>
+          <a:xfrm>
+            <a:off x="8961120" y="6446520"/>
+            <a:ext cx="3017520" cy="274320"/>
+          </a:xfrm>
+          <a:prstGeom prst="rect">
+            <a:avLst/>
+          </a:prstGeom>
+          <a:noFill/>
+        </p:spPr>
+        <p:txBody>
+          <a:bodyPr wrap="square" anchor="t">
+            <a:spAutoFit/>
+          </a:bodyPr>
+          <a:lstStyle/>
+          <a:p>
+            <a:pPr algn="r"/>
+            <a:r>
+              <a:rPr sz="900" b="0">
+                <a:solidFill>
+                  <a:srgbClr val="6B7280"/>
+                </a:solidFill>
+              </a:rPr>
+              <a:t>Component 4 · IT23343948 · 8</a:t>
             </a:r>
           </a:p>
         </p:txBody>
@@ -21365,43 +23625,9 @@
           </a:p>
         </p:txBody>
       </p:sp>
-      <p:sp>
-        <p:nvSpPr>
-          <p:cNvPr id="5" name="TextBox 4"/>
-          <p:cNvSpPr txBox="1"/>
-          <p:nvPr/>
-        </p:nvSpPr>
-        <p:spPr>
-          <a:xfrm>
-            <a:off x="8961120" y="6446520"/>
-            <a:ext cx="3017520" cy="274320"/>
-          </a:xfrm>
-          <a:prstGeom prst="rect">
-            <a:avLst/>
-          </a:prstGeom>
-          <a:noFill/>
-        </p:spPr>
-        <p:txBody>
-          <a:bodyPr wrap="square" anchor="t">
-            <a:spAutoFit/>
-          </a:bodyPr>
-          <a:lstStyle/>
-          <a:p>
-            <a:pPr algn="r"/>
-            <a:r>
-              <a:rPr sz="900" b="0">
-                <a:solidFill>
-                  <a:srgbClr val="6B7280"/>
-                </a:solidFill>
-              </a:rPr>
-              <a:t>Component 4 · IT23343948 · 9</a:t>
-            </a:r>
-          </a:p>
-        </p:txBody>
-      </p:sp>
       <p:pic>
         <p:nvPicPr>
-          <p:cNvPr id="6" name="Picture 5" descr="example_day.png"/>
+          <p:cNvPr id="5" name="Picture 4" descr="example_day.png"/>
           <p:cNvPicPr>
             <a:picLocks noChangeAspect="1"/>
           </p:cNvPicPr>
@@ -21425,7 +23651,7 @@
       </p:pic>
       <p:sp>
         <p:nvSpPr>
-          <p:cNvPr id="7" name="TextBox 6"/>
+          <p:cNvPr id="6" name="TextBox 5"/>
           <p:cNvSpPr txBox="1"/>
           <p:nvPr/>
         </p:nvSpPr>
@@ -21534,6 +23760,40 @@
                 </a:solidFill>
               </a:rPr>
               <a:t>  yesterday's counts, tomorrow's weather forecast and the calendar – no sensors on the trail</a:t>
+            </a:r>
+          </a:p>
+        </p:txBody>
+      </p:sp>
+      <p:sp>
+        <p:nvSpPr>
+          <p:cNvPr id="7" name="TextBox 6"/>
+          <p:cNvSpPr txBox="1"/>
+          <p:nvPr/>
+        </p:nvSpPr>
+        <p:spPr>
+          <a:xfrm>
+            <a:off x="8961120" y="6446520"/>
+            <a:ext cx="3017520" cy="274320"/>
+          </a:xfrm>
+          <a:prstGeom prst="rect">
+            <a:avLst/>
+          </a:prstGeom>
+          <a:noFill/>
+        </p:spPr>
+        <p:txBody>
+          <a:bodyPr wrap="square" anchor="t">
+            <a:spAutoFit/>
+          </a:bodyPr>
+          <a:lstStyle/>
+          <a:p>
+            <a:pPr algn="r"/>
+            <a:r>
+              <a:rPr sz="900" b="0">
+                <a:solidFill>
+                  <a:srgbClr val="6B7280"/>
+                </a:solidFill>
+              </a:rPr>
+              <a:t>Component 4 · IT23343948 · Backup B2</a:t>
             </a:r>
           </a:p>
         </p:txBody>

--- a/research/component_4/docs/slides/PP1_Component4.pptx
+++ b/research/component_4/docs/slides/PP1_Component4.pptx
@@ -673,7 +673,7 @@
           <a:lstStyle/>
           <a:p>
             <a:r>
-              <a:t>Turning pilgrims away is not acceptable. The danger is the queue on the steep final steps. Two measures: recommended start times per route (spread so the advice does not create a new peak – we found naive advice made queues 22 % worse), and officers at halfway rest stops who count passers and hold groups. Start times alone: −22 %. Both: no waiting on the final steps and −28 % waiting overall. (~60 s)</a:t>
+              <a:t>Turning pilgrims away is not acceptable. The danger is the queue on the steep final steps. Two measures: recommended start times per route (spread so the advice does not create a new peak – we found naive advice made queues 22 % worse), and officers at halfway rest stops who count passers and hold groups. Start times alone: −42 %. Both: no waiting on the final steps and −44 % waiting overall. (~60 s)</a:t>
             </a:r>
           </a:p>
         </p:txBody>
@@ -743,7 +743,7 @@
           <a:lstStyle/>
           <a:p>
             <a:r>
-              <a:t>Same 132 nights, advice computed before each night from different forecasts. The median forecast gets only 18 % of what perfect knowledge would, because it is too low on exactly the rare peak nights. Planning on the busy case (P90) gets all of it. Bootstrap 95 % interval of P90 vs P50 advice: -34,178 to -2,107 person-hours. This is why the officer console plans halfway checks on the busy case. (~60 s)</a:t>
+              <a:t>Same 132 nights, advice computed before each night from different forecasts. The median forecast gets only 16 % of what perfect knowledge would, because it is too low on exactly the rare peak nights. Planning on the busy case (P90) gets all of it. Bootstrap 95 % interval of P90 vs P50 advice: -48,951 to -3,120 person-hours. This is why the officer console plans halfway checks on the busy case. (~60 s)</a:t>
             </a:r>
           </a:p>
         </p:txBody>
@@ -6518,7 +6518,7 @@
                   <a:srgbClr val="1F2A24"/>
                 </a:solidFill>
               </a:rPr>
-              <a:t>  start times −22 % waiting; both together move all waiting off the final steps and cut it by 28 %</a:t>
+              <a:t>  start times −42 % waiting; both together move all waiting off the final steps and cut it by 44 %</a:t>
             </a:r>
           </a:p>
         </p:txBody>
@@ -6769,7 +6769,7 @@
                   <a:srgbClr val="FFFFFF"/>
                 </a:solidFill>
               </a:rPr>
-              <a:t>18 % of the possible benefit</a:t>
+              <a:t>16 % of the possible benefit</a:t>
             </a:r>
           </a:p>
           <a:p>
@@ -6802,7 +6802,7 @@
                   <a:srgbClr val="FFFFFF"/>
                 </a:solidFill>
               </a:rPr>
-              <a:t>117 % of it,</a:t>
+              <a:t>115 % of it,</a:t>
             </a:r>
           </a:p>
           <a:p>
@@ -6813,7 +6813,7 @@
                   <a:srgbClr val="FFFFFF"/>
                 </a:solidFill>
               </a:rPr>
-              <a:t>moving 6.4 % of pilgrims</a:t>
+              <a:t>moving 3.8 % of pilgrims</a:t>
             </a:r>
           </a:p>
         </p:txBody>
@@ -12805,7 +12805,7 @@
                             <a:srgbClr val="1F2A24"/>
                           </a:solidFill>
                         </a:rPr>
-                        <a:t>calibrated; P10–P90; −22 % waiting</a:t>
+                        <a:t>calibrated; P10–P90; −42 % waiting</a:t>
                       </a:r>
                     </a:p>
                   </a:txBody>
